--- a/9_Modeling & Simulation.pptx
+++ b/9_Modeling & Simulation.pptx
@@ -5,7 +5,7 @@
     <p:sldMasterId id="2147483648" r:id="rId1"/>
   </p:sldMasterIdLst>
   <p:notesMasterIdLst>
-    <p:notesMasterId r:id="rId34"/>
+    <p:notesMasterId r:id="rId18"/>
   </p:notesMasterIdLst>
   <p:sldIdLst>
     <p:sldId id="256" r:id="rId2"/>
@@ -24,22 +24,6 @@
     <p:sldId id="923" r:id="rId15"/>
     <p:sldId id="924" r:id="rId16"/>
     <p:sldId id="925" r:id="rId17"/>
-    <p:sldId id="913" r:id="rId18"/>
-    <p:sldId id="921" r:id="rId19"/>
-    <p:sldId id="270" r:id="rId20"/>
-    <p:sldId id="304" r:id="rId21"/>
-    <p:sldId id="926" r:id="rId22"/>
-    <p:sldId id="928" r:id="rId23"/>
-    <p:sldId id="931" r:id="rId24"/>
-    <p:sldId id="929" r:id="rId25"/>
-    <p:sldId id="305" r:id="rId26"/>
-    <p:sldId id="306" r:id="rId27"/>
-    <p:sldId id="388" r:id="rId28"/>
-    <p:sldId id="308" r:id="rId29"/>
-    <p:sldId id="311" r:id="rId30"/>
-    <p:sldId id="309" r:id="rId31"/>
-    <p:sldId id="310" r:id="rId32"/>
-    <p:sldId id="930" r:id="rId33"/>
   </p:sldIdLst>
   <p:sldSz cx="12192000" cy="6858000"/>
   <p:notesSz cx="6858000" cy="9144000"/>
@@ -228,7 +212,7 @@
           <a:p>
             <a:fld id="{AC6D2F86-9062-4B78-99E4-F1BEEF85F138}" type="datetimeFigureOut">
               <a:rPr lang="ko-KR" altLang="en-US" smtClean="0"/>
-              <a:t>2026-04-01</a:t>
+              <a:t>2026-04-29</a:t>
             </a:fld>
             <a:endParaRPr lang="ko-KR" altLang="en-US"/>
           </a:p>
@@ -495,1072 +479,6 @@
 </p:notesMaster>
 </file>
 
-<file path=ppt/notesSlides/notesSlide1.xml><?xml version="1.0" encoding="utf-8"?>
-<p:notes xmlns:a="http://schemas.openxmlformats.org/drawingml/2006/main" xmlns:r="http://schemas.openxmlformats.org/officeDocument/2006/relationships" xmlns:p="http://schemas.openxmlformats.org/presentationml/2006/main">
-  <p:cSld>
-    <p:spTree>
-      <p:nvGrpSpPr>
-        <p:cNvPr id="1" name=""/>
-        <p:cNvGrpSpPr/>
-        <p:nvPr/>
-      </p:nvGrpSpPr>
-      <p:grpSpPr>
-        <a:xfrm>
-          <a:off x="0" y="0"/>
-          <a:ext cx="0" cy="0"/>
-          <a:chOff x="0" y="0"/>
-          <a:chExt cx="0" cy="0"/>
-        </a:xfrm>
-      </p:grpSpPr>
-      <p:sp>
-        <p:nvSpPr>
-          <p:cNvPr id="2" name="슬라이드 이미지 개체 틀 1"/>
-          <p:cNvSpPr>
-            <a:spLocks noGrp="1" noRot="1" noChangeAspect="1"/>
-          </p:cNvSpPr>
-          <p:nvPr>
-            <p:ph type="sldImg"/>
-          </p:nvPr>
-        </p:nvSpPr>
-        <p:spPr/>
-      </p:sp>
-      <p:sp>
-        <p:nvSpPr>
-          <p:cNvPr id="3" name="슬라이드 노트 개체 틀 2"/>
-          <p:cNvSpPr>
-            <a:spLocks noGrp="1"/>
-          </p:cNvSpPr>
-          <p:nvPr>
-            <p:ph type="body" idx="1"/>
-          </p:nvPr>
-        </p:nvSpPr>
-        <p:spPr/>
-        <p:txBody>
-          <a:bodyPr/>
-          <a:lstStyle/>
-          <a:p>
-            <a:endParaRPr lang="ko-KR" altLang="en-US" dirty="0"/>
-          </a:p>
-        </p:txBody>
-      </p:sp>
-      <p:sp>
-        <p:nvSpPr>
-          <p:cNvPr id="4" name="슬라이드 번호 개체 틀 3"/>
-          <p:cNvSpPr>
-            <a:spLocks noGrp="1"/>
-          </p:cNvSpPr>
-          <p:nvPr>
-            <p:ph type="sldNum" sz="quarter" idx="10"/>
-          </p:nvPr>
-        </p:nvSpPr>
-        <p:spPr/>
-        <p:txBody>
-          <a:bodyPr/>
-          <a:lstStyle/>
-          <a:p>
-            <a:pPr rtl="0"/>
-            <a:fld id="{5FB91549-43BF-425A-AF25-75262019208C}" type="slidenum">
-              <a:rPr lang="en-US" altLang="ko-KR" smtClean="0"/>
-              <a:t>19</a:t>
-            </a:fld>
-            <a:endParaRPr lang="ko-KR" altLang="en-US" dirty="0"/>
-          </a:p>
-        </p:txBody>
-      </p:sp>
-    </p:spTree>
-    <p:extLst>
-      <p:ext uri="{BB962C8B-B14F-4D97-AF65-F5344CB8AC3E}">
-        <p14:creationId xmlns:p14="http://schemas.microsoft.com/office/powerpoint/2010/main" val="1911418281"/>
-      </p:ext>
-    </p:extLst>
-  </p:cSld>
-  <p:clrMapOvr>
-    <a:masterClrMapping/>
-  </p:clrMapOvr>
-</p:notes>
-</file>
-
-<file path=ppt/notesSlides/notesSlide10.xml><?xml version="1.0" encoding="utf-8"?>
-<p:notes xmlns:a="http://schemas.openxmlformats.org/drawingml/2006/main" xmlns:r="http://schemas.openxmlformats.org/officeDocument/2006/relationships" xmlns:p="http://schemas.openxmlformats.org/presentationml/2006/main">
-  <p:cSld>
-    <p:spTree>
-      <p:nvGrpSpPr>
-        <p:cNvPr id="1" name="">
-          <a:extLst>
-            <a:ext uri="{FF2B5EF4-FFF2-40B4-BE49-F238E27FC236}">
-              <a16:creationId xmlns:a16="http://schemas.microsoft.com/office/drawing/2014/main" id="{3932FD5E-B683-05F5-2A8F-95FE369808B2}"/>
-            </a:ext>
-          </a:extLst>
-        </p:cNvPr>
-        <p:cNvGrpSpPr/>
-        <p:nvPr/>
-      </p:nvGrpSpPr>
-      <p:grpSpPr>
-        <a:xfrm>
-          <a:off x="0" y="0"/>
-          <a:ext cx="0" cy="0"/>
-          <a:chOff x="0" y="0"/>
-          <a:chExt cx="0" cy="0"/>
-        </a:xfrm>
-      </p:grpSpPr>
-      <p:sp>
-        <p:nvSpPr>
-          <p:cNvPr id="2" name="슬라이드 이미지 개체 틀 1">
-            <a:extLst>
-              <a:ext uri="{FF2B5EF4-FFF2-40B4-BE49-F238E27FC236}">
-                <a16:creationId xmlns:a16="http://schemas.microsoft.com/office/drawing/2014/main" id="{1F914573-C36D-346C-F5A7-A95CE5ED020F}"/>
-              </a:ext>
-            </a:extLst>
-          </p:cNvPr>
-          <p:cNvSpPr>
-            <a:spLocks noGrp="1" noRot="1" noChangeAspect="1"/>
-          </p:cNvSpPr>
-          <p:nvPr>
-            <p:ph type="sldImg"/>
-          </p:nvPr>
-        </p:nvSpPr>
-        <p:spPr/>
-      </p:sp>
-      <p:sp>
-        <p:nvSpPr>
-          <p:cNvPr id="3" name="슬라이드 노트 개체 틀 2">
-            <a:extLst>
-              <a:ext uri="{FF2B5EF4-FFF2-40B4-BE49-F238E27FC236}">
-                <a16:creationId xmlns:a16="http://schemas.microsoft.com/office/drawing/2014/main" id="{75B6A3A6-E1B1-4542-BD9E-843AF4A37863}"/>
-              </a:ext>
-            </a:extLst>
-          </p:cNvPr>
-          <p:cNvSpPr>
-            <a:spLocks noGrp="1"/>
-          </p:cNvSpPr>
-          <p:nvPr>
-            <p:ph type="body" idx="1"/>
-          </p:nvPr>
-        </p:nvSpPr>
-        <p:spPr/>
-        <p:txBody>
-          <a:bodyPr/>
-          <a:lstStyle/>
-          <a:p>
-            <a:endParaRPr lang="ko-KR" altLang="en-US" dirty="0"/>
-          </a:p>
-        </p:txBody>
-      </p:sp>
-      <p:sp>
-        <p:nvSpPr>
-          <p:cNvPr id="4" name="슬라이드 번호 개체 틀 3">
-            <a:extLst>
-              <a:ext uri="{FF2B5EF4-FFF2-40B4-BE49-F238E27FC236}">
-                <a16:creationId xmlns:a16="http://schemas.microsoft.com/office/drawing/2014/main" id="{E63E6ECA-8F6F-B8DE-C544-C72743D3729C}"/>
-              </a:ext>
-            </a:extLst>
-          </p:cNvPr>
-          <p:cNvSpPr>
-            <a:spLocks noGrp="1"/>
-          </p:cNvSpPr>
-          <p:nvPr>
-            <p:ph type="sldNum" sz="quarter" idx="10"/>
-          </p:nvPr>
-        </p:nvSpPr>
-        <p:spPr/>
-        <p:txBody>
-          <a:bodyPr/>
-          <a:lstStyle/>
-          <a:p>
-            <a:pPr rtl="0"/>
-            <a:fld id="{5FB91549-43BF-425A-AF25-75262019208C}" type="slidenum">
-              <a:rPr lang="en-US" altLang="ko-KR" smtClean="0"/>
-              <a:t>31</a:t>
-            </a:fld>
-            <a:endParaRPr lang="ko-KR" altLang="en-US" dirty="0"/>
-          </a:p>
-        </p:txBody>
-      </p:sp>
-    </p:spTree>
-    <p:extLst>
-      <p:ext uri="{BB962C8B-B14F-4D97-AF65-F5344CB8AC3E}">
-        <p14:creationId xmlns:p14="http://schemas.microsoft.com/office/powerpoint/2010/main" val="215676295"/>
-      </p:ext>
-    </p:extLst>
-  </p:cSld>
-  <p:clrMapOvr>
-    <a:masterClrMapping/>
-  </p:clrMapOvr>
-</p:notes>
-</file>
-
-<file path=ppt/notesSlides/notesSlide2.xml><?xml version="1.0" encoding="utf-8"?>
-<p:notes xmlns:a="http://schemas.openxmlformats.org/drawingml/2006/main" xmlns:r="http://schemas.openxmlformats.org/officeDocument/2006/relationships" xmlns:p="http://schemas.openxmlformats.org/presentationml/2006/main">
-  <p:cSld>
-    <p:spTree>
-      <p:nvGrpSpPr>
-        <p:cNvPr id="1" name="">
-          <a:extLst>
-            <a:ext uri="{FF2B5EF4-FFF2-40B4-BE49-F238E27FC236}">
-              <a16:creationId xmlns:a16="http://schemas.microsoft.com/office/drawing/2014/main" id="{018265BF-EF79-CC36-C989-051C8DC7E685}"/>
-            </a:ext>
-          </a:extLst>
-        </p:cNvPr>
-        <p:cNvGrpSpPr/>
-        <p:nvPr/>
-      </p:nvGrpSpPr>
-      <p:grpSpPr>
-        <a:xfrm>
-          <a:off x="0" y="0"/>
-          <a:ext cx="0" cy="0"/>
-          <a:chOff x="0" y="0"/>
-          <a:chExt cx="0" cy="0"/>
-        </a:xfrm>
-      </p:grpSpPr>
-      <p:sp>
-        <p:nvSpPr>
-          <p:cNvPr id="2" name="슬라이드 이미지 개체 틀 1">
-            <a:extLst>
-              <a:ext uri="{FF2B5EF4-FFF2-40B4-BE49-F238E27FC236}">
-                <a16:creationId xmlns:a16="http://schemas.microsoft.com/office/drawing/2014/main" id="{E716F047-73FD-800B-F721-545CE080EC57}"/>
-              </a:ext>
-            </a:extLst>
-          </p:cNvPr>
-          <p:cNvSpPr>
-            <a:spLocks noGrp="1" noRot="1" noChangeAspect="1"/>
-          </p:cNvSpPr>
-          <p:nvPr>
-            <p:ph type="sldImg"/>
-          </p:nvPr>
-        </p:nvSpPr>
-        <p:spPr/>
-      </p:sp>
-      <p:sp>
-        <p:nvSpPr>
-          <p:cNvPr id="3" name="슬라이드 노트 개체 틀 2">
-            <a:extLst>
-              <a:ext uri="{FF2B5EF4-FFF2-40B4-BE49-F238E27FC236}">
-                <a16:creationId xmlns:a16="http://schemas.microsoft.com/office/drawing/2014/main" id="{6C413728-6C63-B747-2816-22F2177655FB}"/>
-              </a:ext>
-            </a:extLst>
-          </p:cNvPr>
-          <p:cNvSpPr>
-            <a:spLocks noGrp="1"/>
-          </p:cNvSpPr>
-          <p:nvPr>
-            <p:ph type="body" idx="1"/>
-          </p:nvPr>
-        </p:nvSpPr>
-        <p:spPr/>
-        <p:txBody>
-          <a:bodyPr/>
-          <a:lstStyle/>
-          <a:p>
-            <a:endParaRPr lang="ko-KR" altLang="en-US" dirty="0"/>
-          </a:p>
-        </p:txBody>
-      </p:sp>
-      <p:sp>
-        <p:nvSpPr>
-          <p:cNvPr id="4" name="슬라이드 번호 개체 틀 3">
-            <a:extLst>
-              <a:ext uri="{FF2B5EF4-FFF2-40B4-BE49-F238E27FC236}">
-                <a16:creationId xmlns:a16="http://schemas.microsoft.com/office/drawing/2014/main" id="{B8EC60E5-66BB-0D7D-7C4A-47B8F229DBD4}"/>
-              </a:ext>
-            </a:extLst>
-          </p:cNvPr>
-          <p:cNvSpPr>
-            <a:spLocks noGrp="1"/>
-          </p:cNvSpPr>
-          <p:nvPr>
-            <p:ph type="sldNum" sz="quarter" idx="10"/>
-          </p:nvPr>
-        </p:nvSpPr>
-        <p:spPr/>
-        <p:txBody>
-          <a:bodyPr/>
-          <a:lstStyle/>
-          <a:p>
-            <a:pPr rtl="0"/>
-            <a:fld id="{5FB91549-43BF-425A-AF25-75262019208C}" type="slidenum">
-              <a:rPr lang="en-US" altLang="ko-KR" smtClean="0"/>
-              <a:t>20</a:t>
-            </a:fld>
-            <a:endParaRPr lang="ko-KR" altLang="en-US" dirty="0"/>
-          </a:p>
-        </p:txBody>
-      </p:sp>
-    </p:spTree>
-    <p:extLst>
-      <p:ext uri="{BB962C8B-B14F-4D97-AF65-F5344CB8AC3E}">
-        <p14:creationId xmlns:p14="http://schemas.microsoft.com/office/powerpoint/2010/main" val="2811323326"/>
-      </p:ext>
-    </p:extLst>
-  </p:cSld>
-  <p:clrMapOvr>
-    <a:masterClrMapping/>
-  </p:clrMapOvr>
-</p:notes>
-</file>
-
-<file path=ppt/notesSlides/notesSlide3.xml><?xml version="1.0" encoding="utf-8"?>
-<p:notes xmlns:a="http://schemas.openxmlformats.org/drawingml/2006/main" xmlns:r="http://schemas.openxmlformats.org/officeDocument/2006/relationships" xmlns:p="http://schemas.openxmlformats.org/presentationml/2006/main">
-  <p:cSld>
-    <p:spTree>
-      <p:nvGrpSpPr>
-        <p:cNvPr id="1" name="">
-          <a:extLst>
-            <a:ext uri="{FF2B5EF4-FFF2-40B4-BE49-F238E27FC236}">
-              <a16:creationId xmlns:a16="http://schemas.microsoft.com/office/drawing/2014/main" id="{FE56E148-616A-C8F8-0665-CF3534AB5838}"/>
-            </a:ext>
-          </a:extLst>
-        </p:cNvPr>
-        <p:cNvGrpSpPr/>
-        <p:nvPr/>
-      </p:nvGrpSpPr>
-      <p:grpSpPr>
-        <a:xfrm>
-          <a:off x="0" y="0"/>
-          <a:ext cx="0" cy="0"/>
-          <a:chOff x="0" y="0"/>
-          <a:chExt cx="0" cy="0"/>
-        </a:xfrm>
-      </p:grpSpPr>
-      <p:sp>
-        <p:nvSpPr>
-          <p:cNvPr id="2" name="슬라이드 이미지 개체 틀 1">
-            <a:extLst>
-              <a:ext uri="{FF2B5EF4-FFF2-40B4-BE49-F238E27FC236}">
-                <a16:creationId xmlns:a16="http://schemas.microsoft.com/office/drawing/2014/main" id="{B8C7D98D-5DFF-EAF8-3916-334791F2ABB4}"/>
-              </a:ext>
-            </a:extLst>
-          </p:cNvPr>
-          <p:cNvSpPr>
-            <a:spLocks noGrp="1" noRot="1" noChangeAspect="1"/>
-          </p:cNvSpPr>
-          <p:nvPr>
-            <p:ph type="sldImg"/>
-          </p:nvPr>
-        </p:nvSpPr>
-        <p:spPr/>
-      </p:sp>
-      <p:sp>
-        <p:nvSpPr>
-          <p:cNvPr id="3" name="슬라이드 노트 개체 틀 2">
-            <a:extLst>
-              <a:ext uri="{FF2B5EF4-FFF2-40B4-BE49-F238E27FC236}">
-                <a16:creationId xmlns:a16="http://schemas.microsoft.com/office/drawing/2014/main" id="{B0A1D918-71F7-C808-4AB8-4D3BF7ED099B}"/>
-              </a:ext>
-            </a:extLst>
-          </p:cNvPr>
-          <p:cNvSpPr>
-            <a:spLocks noGrp="1"/>
-          </p:cNvSpPr>
-          <p:nvPr>
-            <p:ph type="body" idx="1"/>
-          </p:nvPr>
-        </p:nvSpPr>
-        <p:spPr/>
-        <p:txBody>
-          <a:bodyPr/>
-          <a:lstStyle/>
-          <a:p>
-            <a:endParaRPr lang="ko-KR" altLang="en-US" dirty="0"/>
-          </a:p>
-        </p:txBody>
-      </p:sp>
-      <p:sp>
-        <p:nvSpPr>
-          <p:cNvPr id="4" name="슬라이드 번호 개체 틀 3">
-            <a:extLst>
-              <a:ext uri="{FF2B5EF4-FFF2-40B4-BE49-F238E27FC236}">
-                <a16:creationId xmlns:a16="http://schemas.microsoft.com/office/drawing/2014/main" id="{605909C6-DE8F-8A31-18E4-9F4E00FDED42}"/>
-              </a:ext>
-            </a:extLst>
-          </p:cNvPr>
-          <p:cNvSpPr>
-            <a:spLocks noGrp="1"/>
-          </p:cNvSpPr>
-          <p:nvPr>
-            <p:ph type="sldNum" sz="quarter" idx="10"/>
-          </p:nvPr>
-        </p:nvSpPr>
-        <p:spPr/>
-        <p:txBody>
-          <a:bodyPr/>
-          <a:lstStyle/>
-          <a:p>
-            <a:pPr rtl="0"/>
-            <a:fld id="{5FB91549-43BF-425A-AF25-75262019208C}" type="slidenum">
-              <a:rPr lang="en-US" altLang="ko-KR" smtClean="0"/>
-              <a:t>21</a:t>
-            </a:fld>
-            <a:endParaRPr lang="ko-KR" altLang="en-US" dirty="0"/>
-          </a:p>
-        </p:txBody>
-      </p:sp>
-    </p:spTree>
-    <p:extLst>
-      <p:ext uri="{BB962C8B-B14F-4D97-AF65-F5344CB8AC3E}">
-        <p14:creationId xmlns:p14="http://schemas.microsoft.com/office/powerpoint/2010/main" val="1585968143"/>
-      </p:ext>
-    </p:extLst>
-  </p:cSld>
-  <p:clrMapOvr>
-    <a:masterClrMapping/>
-  </p:clrMapOvr>
-</p:notes>
-</file>
-
-<file path=ppt/notesSlides/notesSlide4.xml><?xml version="1.0" encoding="utf-8"?>
-<p:notes xmlns:a="http://schemas.openxmlformats.org/drawingml/2006/main" xmlns:r="http://schemas.openxmlformats.org/officeDocument/2006/relationships" xmlns:p="http://schemas.openxmlformats.org/presentationml/2006/main">
-  <p:cSld>
-    <p:spTree>
-      <p:nvGrpSpPr>
-        <p:cNvPr id="1" name="">
-          <a:extLst>
-            <a:ext uri="{FF2B5EF4-FFF2-40B4-BE49-F238E27FC236}">
-              <a16:creationId xmlns:a16="http://schemas.microsoft.com/office/drawing/2014/main" id="{FECC5718-97E2-4EE3-B2B0-5BF44FFD79FC}"/>
-            </a:ext>
-          </a:extLst>
-        </p:cNvPr>
-        <p:cNvGrpSpPr/>
-        <p:nvPr/>
-      </p:nvGrpSpPr>
-      <p:grpSpPr>
-        <a:xfrm>
-          <a:off x="0" y="0"/>
-          <a:ext cx="0" cy="0"/>
-          <a:chOff x="0" y="0"/>
-          <a:chExt cx="0" cy="0"/>
-        </a:xfrm>
-      </p:grpSpPr>
-      <p:sp>
-        <p:nvSpPr>
-          <p:cNvPr id="2" name="슬라이드 이미지 개체 틀 1">
-            <a:extLst>
-              <a:ext uri="{FF2B5EF4-FFF2-40B4-BE49-F238E27FC236}">
-                <a16:creationId xmlns:a16="http://schemas.microsoft.com/office/drawing/2014/main" id="{C825BA55-8A37-BE29-1862-CCD6FD55EB4A}"/>
-              </a:ext>
-            </a:extLst>
-          </p:cNvPr>
-          <p:cNvSpPr>
-            <a:spLocks noGrp="1" noRot="1" noChangeAspect="1"/>
-          </p:cNvSpPr>
-          <p:nvPr>
-            <p:ph type="sldImg"/>
-          </p:nvPr>
-        </p:nvSpPr>
-        <p:spPr/>
-      </p:sp>
-      <p:sp>
-        <p:nvSpPr>
-          <p:cNvPr id="3" name="슬라이드 노트 개체 틀 2">
-            <a:extLst>
-              <a:ext uri="{FF2B5EF4-FFF2-40B4-BE49-F238E27FC236}">
-                <a16:creationId xmlns:a16="http://schemas.microsoft.com/office/drawing/2014/main" id="{60069EB1-1FDA-6159-5278-6A2FF1B494D8}"/>
-              </a:ext>
-            </a:extLst>
-          </p:cNvPr>
-          <p:cNvSpPr>
-            <a:spLocks noGrp="1"/>
-          </p:cNvSpPr>
-          <p:nvPr>
-            <p:ph type="body" idx="1"/>
-          </p:nvPr>
-        </p:nvSpPr>
-        <p:spPr/>
-        <p:txBody>
-          <a:bodyPr/>
-          <a:lstStyle/>
-          <a:p>
-            <a:endParaRPr lang="ko-KR" altLang="en-US" dirty="0"/>
-          </a:p>
-        </p:txBody>
-      </p:sp>
-      <p:sp>
-        <p:nvSpPr>
-          <p:cNvPr id="4" name="슬라이드 번호 개체 틀 3">
-            <a:extLst>
-              <a:ext uri="{FF2B5EF4-FFF2-40B4-BE49-F238E27FC236}">
-                <a16:creationId xmlns:a16="http://schemas.microsoft.com/office/drawing/2014/main" id="{5AA074A0-496E-A478-ECC5-5F154B307139}"/>
-              </a:ext>
-            </a:extLst>
-          </p:cNvPr>
-          <p:cNvSpPr>
-            <a:spLocks noGrp="1"/>
-          </p:cNvSpPr>
-          <p:nvPr>
-            <p:ph type="sldNum" sz="quarter" idx="10"/>
-          </p:nvPr>
-        </p:nvSpPr>
-        <p:spPr/>
-        <p:txBody>
-          <a:bodyPr/>
-          <a:lstStyle/>
-          <a:p>
-            <a:pPr rtl="0"/>
-            <a:fld id="{5FB91549-43BF-425A-AF25-75262019208C}" type="slidenum">
-              <a:rPr lang="en-US" altLang="ko-KR" smtClean="0"/>
-              <a:t>25</a:t>
-            </a:fld>
-            <a:endParaRPr lang="ko-KR" altLang="en-US" dirty="0"/>
-          </a:p>
-        </p:txBody>
-      </p:sp>
-    </p:spTree>
-    <p:extLst>
-      <p:ext uri="{BB962C8B-B14F-4D97-AF65-F5344CB8AC3E}">
-        <p14:creationId xmlns:p14="http://schemas.microsoft.com/office/powerpoint/2010/main" val="2833979755"/>
-      </p:ext>
-    </p:extLst>
-  </p:cSld>
-  <p:clrMapOvr>
-    <a:masterClrMapping/>
-  </p:clrMapOvr>
-</p:notes>
-</file>
-
-<file path=ppt/notesSlides/notesSlide5.xml><?xml version="1.0" encoding="utf-8"?>
-<p:notes xmlns:a="http://schemas.openxmlformats.org/drawingml/2006/main" xmlns:r="http://schemas.openxmlformats.org/officeDocument/2006/relationships" xmlns:p="http://schemas.openxmlformats.org/presentationml/2006/main">
-  <p:cSld>
-    <p:spTree>
-      <p:nvGrpSpPr>
-        <p:cNvPr id="1" name="">
-          <a:extLst>
-            <a:ext uri="{FF2B5EF4-FFF2-40B4-BE49-F238E27FC236}">
-              <a16:creationId xmlns:a16="http://schemas.microsoft.com/office/drawing/2014/main" id="{018265BF-EF79-CC36-C989-051C8DC7E685}"/>
-            </a:ext>
-          </a:extLst>
-        </p:cNvPr>
-        <p:cNvGrpSpPr/>
-        <p:nvPr/>
-      </p:nvGrpSpPr>
-      <p:grpSpPr>
-        <a:xfrm>
-          <a:off x="0" y="0"/>
-          <a:ext cx="0" cy="0"/>
-          <a:chOff x="0" y="0"/>
-          <a:chExt cx="0" cy="0"/>
-        </a:xfrm>
-      </p:grpSpPr>
-      <p:sp>
-        <p:nvSpPr>
-          <p:cNvPr id="2" name="슬라이드 이미지 개체 틀 1">
-            <a:extLst>
-              <a:ext uri="{FF2B5EF4-FFF2-40B4-BE49-F238E27FC236}">
-                <a16:creationId xmlns:a16="http://schemas.microsoft.com/office/drawing/2014/main" id="{E716F047-73FD-800B-F721-545CE080EC57}"/>
-              </a:ext>
-            </a:extLst>
-          </p:cNvPr>
-          <p:cNvSpPr>
-            <a:spLocks noGrp="1" noRot="1" noChangeAspect="1"/>
-          </p:cNvSpPr>
-          <p:nvPr>
-            <p:ph type="sldImg"/>
-          </p:nvPr>
-        </p:nvSpPr>
-        <p:spPr/>
-      </p:sp>
-      <p:sp>
-        <p:nvSpPr>
-          <p:cNvPr id="3" name="슬라이드 노트 개체 틀 2">
-            <a:extLst>
-              <a:ext uri="{FF2B5EF4-FFF2-40B4-BE49-F238E27FC236}">
-                <a16:creationId xmlns:a16="http://schemas.microsoft.com/office/drawing/2014/main" id="{6C413728-6C63-B747-2816-22F2177655FB}"/>
-              </a:ext>
-            </a:extLst>
-          </p:cNvPr>
-          <p:cNvSpPr>
-            <a:spLocks noGrp="1"/>
-          </p:cNvSpPr>
-          <p:nvPr>
-            <p:ph type="body" idx="1"/>
-          </p:nvPr>
-        </p:nvSpPr>
-        <p:spPr/>
-        <p:txBody>
-          <a:bodyPr/>
-          <a:lstStyle/>
-          <a:p>
-            <a:endParaRPr lang="ko-KR" altLang="en-US" dirty="0"/>
-          </a:p>
-        </p:txBody>
-      </p:sp>
-      <p:sp>
-        <p:nvSpPr>
-          <p:cNvPr id="4" name="슬라이드 번호 개체 틀 3">
-            <a:extLst>
-              <a:ext uri="{FF2B5EF4-FFF2-40B4-BE49-F238E27FC236}">
-                <a16:creationId xmlns:a16="http://schemas.microsoft.com/office/drawing/2014/main" id="{B8EC60E5-66BB-0D7D-7C4A-47B8F229DBD4}"/>
-              </a:ext>
-            </a:extLst>
-          </p:cNvPr>
-          <p:cNvSpPr>
-            <a:spLocks noGrp="1"/>
-          </p:cNvSpPr>
-          <p:nvPr>
-            <p:ph type="sldNum" sz="quarter" idx="10"/>
-          </p:nvPr>
-        </p:nvSpPr>
-        <p:spPr/>
-        <p:txBody>
-          <a:bodyPr/>
-          <a:lstStyle/>
-          <a:p>
-            <a:pPr rtl="0"/>
-            <a:fld id="{5FB91549-43BF-425A-AF25-75262019208C}" type="slidenum">
-              <a:rPr lang="en-US" altLang="ko-KR" smtClean="0"/>
-              <a:t>26</a:t>
-            </a:fld>
-            <a:endParaRPr lang="ko-KR" altLang="en-US" dirty="0"/>
-          </a:p>
-        </p:txBody>
-      </p:sp>
-    </p:spTree>
-    <p:extLst>
-      <p:ext uri="{BB962C8B-B14F-4D97-AF65-F5344CB8AC3E}">
-        <p14:creationId xmlns:p14="http://schemas.microsoft.com/office/powerpoint/2010/main" val="2811323326"/>
-      </p:ext>
-    </p:extLst>
-  </p:cSld>
-  <p:clrMapOvr>
-    <a:masterClrMapping/>
-  </p:clrMapOvr>
-</p:notes>
-</file>
-
-<file path=ppt/notesSlides/notesSlide6.xml><?xml version="1.0" encoding="utf-8"?>
-<p:notes xmlns:a="http://schemas.openxmlformats.org/drawingml/2006/main" xmlns:r="http://schemas.openxmlformats.org/officeDocument/2006/relationships" xmlns:p="http://schemas.openxmlformats.org/presentationml/2006/main">
-  <p:cSld>
-    <p:spTree>
-      <p:nvGrpSpPr>
-        <p:cNvPr id="1" name="">
-          <a:extLst>
-            <a:ext uri="{FF2B5EF4-FFF2-40B4-BE49-F238E27FC236}">
-              <a16:creationId xmlns:a16="http://schemas.microsoft.com/office/drawing/2014/main" id="{9E6E1B4F-B913-2BE9-9359-92236640D2AB}"/>
-            </a:ext>
-          </a:extLst>
-        </p:cNvPr>
-        <p:cNvGrpSpPr/>
-        <p:nvPr/>
-      </p:nvGrpSpPr>
-      <p:grpSpPr>
-        <a:xfrm>
-          <a:off x="0" y="0"/>
-          <a:ext cx="0" cy="0"/>
-          <a:chOff x="0" y="0"/>
-          <a:chExt cx="0" cy="0"/>
-        </a:xfrm>
-      </p:grpSpPr>
-      <p:sp>
-        <p:nvSpPr>
-          <p:cNvPr id="2" name="슬라이드 이미지 개체 틀 1">
-            <a:extLst>
-              <a:ext uri="{FF2B5EF4-FFF2-40B4-BE49-F238E27FC236}">
-                <a16:creationId xmlns:a16="http://schemas.microsoft.com/office/drawing/2014/main" id="{9D04812E-3253-4341-DC46-78222B0B4D16}"/>
-              </a:ext>
-            </a:extLst>
-          </p:cNvPr>
-          <p:cNvSpPr>
-            <a:spLocks noGrp="1" noRot="1" noChangeAspect="1"/>
-          </p:cNvSpPr>
-          <p:nvPr>
-            <p:ph type="sldImg"/>
-          </p:nvPr>
-        </p:nvSpPr>
-        <p:spPr/>
-      </p:sp>
-      <p:sp>
-        <p:nvSpPr>
-          <p:cNvPr id="3" name="슬라이드 노트 개체 틀 2">
-            <a:extLst>
-              <a:ext uri="{FF2B5EF4-FFF2-40B4-BE49-F238E27FC236}">
-                <a16:creationId xmlns:a16="http://schemas.microsoft.com/office/drawing/2014/main" id="{86AE9E0F-6313-3502-1A05-E35F3B8F3620}"/>
-              </a:ext>
-            </a:extLst>
-          </p:cNvPr>
-          <p:cNvSpPr>
-            <a:spLocks noGrp="1"/>
-          </p:cNvSpPr>
-          <p:nvPr>
-            <p:ph type="body" idx="1"/>
-          </p:nvPr>
-        </p:nvSpPr>
-        <p:spPr/>
-        <p:txBody>
-          <a:bodyPr/>
-          <a:lstStyle/>
-          <a:p>
-            <a:endParaRPr lang="ko-KR" altLang="en-US" dirty="0"/>
-          </a:p>
-        </p:txBody>
-      </p:sp>
-      <p:sp>
-        <p:nvSpPr>
-          <p:cNvPr id="4" name="슬라이드 번호 개체 틀 3">
-            <a:extLst>
-              <a:ext uri="{FF2B5EF4-FFF2-40B4-BE49-F238E27FC236}">
-                <a16:creationId xmlns:a16="http://schemas.microsoft.com/office/drawing/2014/main" id="{0D54258E-45FA-3A7A-F9D1-024A700EB7C6}"/>
-              </a:ext>
-            </a:extLst>
-          </p:cNvPr>
-          <p:cNvSpPr>
-            <a:spLocks noGrp="1"/>
-          </p:cNvSpPr>
-          <p:nvPr>
-            <p:ph type="sldNum" sz="quarter" idx="10"/>
-          </p:nvPr>
-        </p:nvSpPr>
-        <p:spPr/>
-        <p:txBody>
-          <a:bodyPr/>
-          <a:lstStyle/>
-          <a:p>
-            <a:pPr rtl="0"/>
-            <a:fld id="{5FB91549-43BF-425A-AF25-75262019208C}" type="slidenum">
-              <a:rPr lang="en-US" altLang="ko-KR" smtClean="0"/>
-              <a:t>27</a:t>
-            </a:fld>
-            <a:endParaRPr lang="ko-KR" altLang="en-US" dirty="0"/>
-          </a:p>
-        </p:txBody>
-      </p:sp>
-    </p:spTree>
-    <p:extLst>
-      <p:ext uri="{BB962C8B-B14F-4D97-AF65-F5344CB8AC3E}">
-        <p14:creationId xmlns:p14="http://schemas.microsoft.com/office/powerpoint/2010/main" val="2960263439"/>
-      </p:ext>
-    </p:extLst>
-  </p:cSld>
-  <p:clrMapOvr>
-    <a:masterClrMapping/>
-  </p:clrMapOvr>
-</p:notes>
-</file>
-
-<file path=ppt/notesSlides/notesSlide7.xml><?xml version="1.0" encoding="utf-8"?>
-<p:notes xmlns:a="http://schemas.openxmlformats.org/drawingml/2006/main" xmlns:r="http://schemas.openxmlformats.org/officeDocument/2006/relationships" xmlns:p="http://schemas.openxmlformats.org/presentationml/2006/main">
-  <p:cSld>
-    <p:spTree>
-      <p:nvGrpSpPr>
-        <p:cNvPr id="1" name="">
-          <a:extLst>
-            <a:ext uri="{FF2B5EF4-FFF2-40B4-BE49-F238E27FC236}">
-              <a16:creationId xmlns:a16="http://schemas.microsoft.com/office/drawing/2014/main" id="{FC427E54-28B2-8C19-528B-8C781240BA4D}"/>
-            </a:ext>
-          </a:extLst>
-        </p:cNvPr>
-        <p:cNvGrpSpPr/>
-        <p:nvPr/>
-      </p:nvGrpSpPr>
-      <p:grpSpPr>
-        <a:xfrm>
-          <a:off x="0" y="0"/>
-          <a:ext cx="0" cy="0"/>
-          <a:chOff x="0" y="0"/>
-          <a:chExt cx="0" cy="0"/>
-        </a:xfrm>
-      </p:grpSpPr>
-      <p:sp>
-        <p:nvSpPr>
-          <p:cNvPr id="2" name="슬라이드 이미지 개체 틀 1">
-            <a:extLst>
-              <a:ext uri="{FF2B5EF4-FFF2-40B4-BE49-F238E27FC236}">
-                <a16:creationId xmlns:a16="http://schemas.microsoft.com/office/drawing/2014/main" id="{7E4D7B0C-202C-6E21-08C8-5AB3D9339807}"/>
-              </a:ext>
-            </a:extLst>
-          </p:cNvPr>
-          <p:cNvSpPr>
-            <a:spLocks noGrp="1" noRot="1" noChangeAspect="1"/>
-          </p:cNvSpPr>
-          <p:nvPr>
-            <p:ph type="sldImg"/>
-          </p:nvPr>
-        </p:nvSpPr>
-        <p:spPr/>
-      </p:sp>
-      <p:sp>
-        <p:nvSpPr>
-          <p:cNvPr id="3" name="슬라이드 노트 개체 틀 2">
-            <a:extLst>
-              <a:ext uri="{FF2B5EF4-FFF2-40B4-BE49-F238E27FC236}">
-                <a16:creationId xmlns:a16="http://schemas.microsoft.com/office/drawing/2014/main" id="{F888F541-3E50-4ACF-17EA-E0DC1F891A6A}"/>
-              </a:ext>
-            </a:extLst>
-          </p:cNvPr>
-          <p:cNvSpPr>
-            <a:spLocks noGrp="1"/>
-          </p:cNvSpPr>
-          <p:nvPr>
-            <p:ph type="body" idx="1"/>
-          </p:nvPr>
-        </p:nvSpPr>
-        <p:spPr/>
-        <p:txBody>
-          <a:bodyPr/>
-          <a:lstStyle/>
-          <a:p>
-            <a:endParaRPr lang="ko-KR" altLang="en-US" dirty="0"/>
-          </a:p>
-        </p:txBody>
-      </p:sp>
-      <p:sp>
-        <p:nvSpPr>
-          <p:cNvPr id="4" name="슬라이드 번호 개체 틀 3">
-            <a:extLst>
-              <a:ext uri="{FF2B5EF4-FFF2-40B4-BE49-F238E27FC236}">
-                <a16:creationId xmlns:a16="http://schemas.microsoft.com/office/drawing/2014/main" id="{45B0BA84-50CA-6F67-619A-3B549011D178}"/>
-              </a:ext>
-            </a:extLst>
-          </p:cNvPr>
-          <p:cNvSpPr>
-            <a:spLocks noGrp="1"/>
-          </p:cNvSpPr>
-          <p:nvPr>
-            <p:ph type="sldNum" sz="quarter" idx="10"/>
-          </p:nvPr>
-        </p:nvSpPr>
-        <p:spPr/>
-        <p:txBody>
-          <a:bodyPr/>
-          <a:lstStyle/>
-          <a:p>
-            <a:pPr rtl="0"/>
-            <a:fld id="{5FB91549-43BF-425A-AF25-75262019208C}" type="slidenum">
-              <a:rPr lang="en-US" altLang="ko-KR" smtClean="0"/>
-              <a:t>28</a:t>
-            </a:fld>
-            <a:endParaRPr lang="ko-KR" altLang="en-US" dirty="0"/>
-          </a:p>
-        </p:txBody>
-      </p:sp>
-    </p:spTree>
-    <p:extLst>
-      <p:ext uri="{BB962C8B-B14F-4D97-AF65-F5344CB8AC3E}">
-        <p14:creationId xmlns:p14="http://schemas.microsoft.com/office/powerpoint/2010/main" val="1878932704"/>
-      </p:ext>
-    </p:extLst>
-  </p:cSld>
-  <p:clrMapOvr>
-    <a:masterClrMapping/>
-  </p:clrMapOvr>
-</p:notes>
-</file>
-
-<file path=ppt/notesSlides/notesSlide8.xml><?xml version="1.0" encoding="utf-8"?>
-<p:notes xmlns:a="http://schemas.openxmlformats.org/drawingml/2006/main" xmlns:r="http://schemas.openxmlformats.org/officeDocument/2006/relationships" xmlns:p="http://schemas.openxmlformats.org/presentationml/2006/main">
-  <p:cSld>
-    <p:spTree>
-      <p:nvGrpSpPr>
-        <p:cNvPr id="1" name="">
-          <a:extLst>
-            <a:ext uri="{FF2B5EF4-FFF2-40B4-BE49-F238E27FC236}">
-              <a16:creationId xmlns:a16="http://schemas.microsoft.com/office/drawing/2014/main" id="{98661178-D3A3-BD01-999B-5CD0CBDA675B}"/>
-            </a:ext>
-          </a:extLst>
-        </p:cNvPr>
-        <p:cNvGrpSpPr/>
-        <p:nvPr/>
-      </p:nvGrpSpPr>
-      <p:grpSpPr>
-        <a:xfrm>
-          <a:off x="0" y="0"/>
-          <a:ext cx="0" cy="0"/>
-          <a:chOff x="0" y="0"/>
-          <a:chExt cx="0" cy="0"/>
-        </a:xfrm>
-      </p:grpSpPr>
-      <p:sp>
-        <p:nvSpPr>
-          <p:cNvPr id="2" name="슬라이드 이미지 개체 틀 1">
-            <a:extLst>
-              <a:ext uri="{FF2B5EF4-FFF2-40B4-BE49-F238E27FC236}">
-                <a16:creationId xmlns:a16="http://schemas.microsoft.com/office/drawing/2014/main" id="{894B66A9-55C3-DC1E-3535-AD5D96B3015C}"/>
-              </a:ext>
-            </a:extLst>
-          </p:cNvPr>
-          <p:cNvSpPr>
-            <a:spLocks noGrp="1" noRot="1" noChangeAspect="1"/>
-          </p:cNvSpPr>
-          <p:nvPr>
-            <p:ph type="sldImg"/>
-          </p:nvPr>
-        </p:nvSpPr>
-        <p:spPr/>
-      </p:sp>
-      <p:sp>
-        <p:nvSpPr>
-          <p:cNvPr id="3" name="슬라이드 노트 개체 틀 2">
-            <a:extLst>
-              <a:ext uri="{FF2B5EF4-FFF2-40B4-BE49-F238E27FC236}">
-                <a16:creationId xmlns:a16="http://schemas.microsoft.com/office/drawing/2014/main" id="{497FFF2B-2B71-B514-D49C-EF7B099DE9BF}"/>
-              </a:ext>
-            </a:extLst>
-          </p:cNvPr>
-          <p:cNvSpPr>
-            <a:spLocks noGrp="1"/>
-          </p:cNvSpPr>
-          <p:nvPr>
-            <p:ph type="body" idx="1"/>
-          </p:nvPr>
-        </p:nvSpPr>
-        <p:spPr/>
-        <p:txBody>
-          <a:bodyPr/>
-          <a:lstStyle/>
-          <a:p>
-            <a:endParaRPr lang="ko-KR" altLang="en-US" dirty="0"/>
-          </a:p>
-        </p:txBody>
-      </p:sp>
-      <p:sp>
-        <p:nvSpPr>
-          <p:cNvPr id="4" name="슬라이드 번호 개체 틀 3">
-            <a:extLst>
-              <a:ext uri="{FF2B5EF4-FFF2-40B4-BE49-F238E27FC236}">
-                <a16:creationId xmlns:a16="http://schemas.microsoft.com/office/drawing/2014/main" id="{108E91CB-DE8C-2792-9462-33EFA4D63E67}"/>
-              </a:ext>
-            </a:extLst>
-          </p:cNvPr>
-          <p:cNvSpPr>
-            <a:spLocks noGrp="1"/>
-          </p:cNvSpPr>
-          <p:nvPr>
-            <p:ph type="sldNum" sz="quarter" idx="10"/>
-          </p:nvPr>
-        </p:nvSpPr>
-        <p:spPr/>
-        <p:txBody>
-          <a:bodyPr/>
-          <a:lstStyle/>
-          <a:p>
-            <a:pPr rtl="0"/>
-            <a:fld id="{5FB91549-43BF-425A-AF25-75262019208C}" type="slidenum">
-              <a:rPr lang="en-US" altLang="ko-KR" smtClean="0"/>
-              <a:t>29</a:t>
-            </a:fld>
-            <a:endParaRPr lang="ko-KR" altLang="en-US" dirty="0"/>
-          </a:p>
-        </p:txBody>
-      </p:sp>
-    </p:spTree>
-    <p:extLst>
-      <p:ext uri="{BB962C8B-B14F-4D97-AF65-F5344CB8AC3E}">
-        <p14:creationId xmlns:p14="http://schemas.microsoft.com/office/powerpoint/2010/main" val="3953977907"/>
-      </p:ext>
-    </p:extLst>
-  </p:cSld>
-  <p:clrMapOvr>
-    <a:masterClrMapping/>
-  </p:clrMapOvr>
-</p:notes>
-</file>
-
-<file path=ppt/notesSlides/notesSlide9.xml><?xml version="1.0" encoding="utf-8"?>
-<p:notes xmlns:a="http://schemas.openxmlformats.org/drawingml/2006/main" xmlns:r="http://schemas.openxmlformats.org/officeDocument/2006/relationships" xmlns:p="http://schemas.openxmlformats.org/presentationml/2006/main">
-  <p:cSld>
-    <p:spTree>
-      <p:nvGrpSpPr>
-        <p:cNvPr id="1" name="">
-          <a:extLst>
-            <a:ext uri="{FF2B5EF4-FFF2-40B4-BE49-F238E27FC236}">
-              <a16:creationId xmlns:a16="http://schemas.microsoft.com/office/drawing/2014/main" id="{97800921-2A98-58A1-77F4-D8659C0BA353}"/>
-            </a:ext>
-          </a:extLst>
-        </p:cNvPr>
-        <p:cNvGrpSpPr/>
-        <p:nvPr/>
-      </p:nvGrpSpPr>
-      <p:grpSpPr>
-        <a:xfrm>
-          <a:off x="0" y="0"/>
-          <a:ext cx="0" cy="0"/>
-          <a:chOff x="0" y="0"/>
-          <a:chExt cx="0" cy="0"/>
-        </a:xfrm>
-      </p:grpSpPr>
-      <p:sp>
-        <p:nvSpPr>
-          <p:cNvPr id="2" name="슬라이드 이미지 개체 틀 1">
-            <a:extLst>
-              <a:ext uri="{FF2B5EF4-FFF2-40B4-BE49-F238E27FC236}">
-                <a16:creationId xmlns:a16="http://schemas.microsoft.com/office/drawing/2014/main" id="{748269F1-DD08-6BF5-8344-47DF8E22EB29}"/>
-              </a:ext>
-            </a:extLst>
-          </p:cNvPr>
-          <p:cNvSpPr>
-            <a:spLocks noGrp="1" noRot="1" noChangeAspect="1"/>
-          </p:cNvSpPr>
-          <p:nvPr>
-            <p:ph type="sldImg"/>
-          </p:nvPr>
-        </p:nvSpPr>
-        <p:spPr/>
-      </p:sp>
-      <p:sp>
-        <p:nvSpPr>
-          <p:cNvPr id="3" name="슬라이드 노트 개체 틀 2">
-            <a:extLst>
-              <a:ext uri="{FF2B5EF4-FFF2-40B4-BE49-F238E27FC236}">
-                <a16:creationId xmlns:a16="http://schemas.microsoft.com/office/drawing/2014/main" id="{3496A4B6-DC7D-FF48-46FC-7358B9C8159D}"/>
-              </a:ext>
-            </a:extLst>
-          </p:cNvPr>
-          <p:cNvSpPr>
-            <a:spLocks noGrp="1"/>
-          </p:cNvSpPr>
-          <p:nvPr>
-            <p:ph type="body" idx="1"/>
-          </p:nvPr>
-        </p:nvSpPr>
-        <p:spPr/>
-        <p:txBody>
-          <a:bodyPr/>
-          <a:lstStyle/>
-          <a:p>
-            <a:endParaRPr lang="ko-KR" altLang="en-US" dirty="0"/>
-          </a:p>
-        </p:txBody>
-      </p:sp>
-      <p:sp>
-        <p:nvSpPr>
-          <p:cNvPr id="4" name="슬라이드 번호 개체 틀 3">
-            <a:extLst>
-              <a:ext uri="{FF2B5EF4-FFF2-40B4-BE49-F238E27FC236}">
-                <a16:creationId xmlns:a16="http://schemas.microsoft.com/office/drawing/2014/main" id="{8F61E27B-EE8E-0361-5AEB-07842FCFA0C5}"/>
-              </a:ext>
-            </a:extLst>
-          </p:cNvPr>
-          <p:cNvSpPr>
-            <a:spLocks noGrp="1"/>
-          </p:cNvSpPr>
-          <p:nvPr>
-            <p:ph type="sldNum" sz="quarter" idx="10"/>
-          </p:nvPr>
-        </p:nvSpPr>
-        <p:spPr/>
-        <p:txBody>
-          <a:bodyPr/>
-          <a:lstStyle/>
-          <a:p>
-            <a:pPr rtl="0"/>
-            <a:fld id="{5FB91549-43BF-425A-AF25-75262019208C}" type="slidenum">
-              <a:rPr lang="en-US" altLang="ko-KR" smtClean="0"/>
-              <a:t>30</a:t>
-            </a:fld>
-            <a:endParaRPr lang="ko-KR" altLang="en-US" dirty="0"/>
-          </a:p>
-        </p:txBody>
-      </p:sp>
-    </p:spTree>
-    <p:extLst>
-      <p:ext uri="{BB962C8B-B14F-4D97-AF65-F5344CB8AC3E}">
-        <p14:creationId xmlns:p14="http://schemas.microsoft.com/office/powerpoint/2010/main" val="2303346903"/>
-      </p:ext>
-    </p:extLst>
-  </p:cSld>
-  <p:clrMapOvr>
-    <a:masterClrMapping/>
-  </p:clrMapOvr>
-</p:notes>
-</file>
-
 <file path=ppt/slideLayouts/slideLayout1.xml><?xml version="1.0" encoding="utf-8"?>
 <p:sldLayout xmlns:a="http://schemas.openxmlformats.org/drawingml/2006/main" xmlns:r="http://schemas.openxmlformats.org/officeDocument/2006/relationships" xmlns:p="http://schemas.openxmlformats.org/presentationml/2006/main" type="title" preserve="1">
   <p:cSld name="제목 슬라이드">
@@ -1740,7 +658,7 @@
           <a:p>
             <a:fld id="{48A87A34-81AB-432B-8DAE-1953F412C126}" type="datetimeFigureOut">
               <a:rPr lang="en-US" smtClean="0"/>
-              <a:t>4/1/2026</a:t>
+              <a:t>4/29/2026</a:t>
             </a:fld>
             <a:endParaRPr lang="en-US" dirty="0"/>
           </a:p>
@@ -2073,7 +991,7 @@
           <a:p>
             <a:fld id="{48A87A34-81AB-432B-8DAE-1953F412C126}" type="datetimeFigureOut">
               <a:rPr lang="en-US" smtClean="0"/>
-              <a:t>4/1/2026</a:t>
+              <a:t>4/29/2026</a:t>
             </a:fld>
             <a:endParaRPr lang="en-US" dirty="0"/>
           </a:p>
@@ -2316,7 +1234,7 @@
           <a:p>
             <a:fld id="{48A87A34-81AB-432B-8DAE-1953F412C126}" type="datetimeFigureOut">
               <a:rPr lang="en-US" smtClean="0"/>
-              <a:t>4/1/2026</a:t>
+              <a:t>4/29/2026</a:t>
             </a:fld>
             <a:endParaRPr lang="en-US" dirty="0"/>
           </a:p>
@@ -2626,7 +1544,7 @@
           <a:p>
             <a:fld id="{48A87A34-81AB-432B-8DAE-1953F412C126}" type="datetimeFigureOut">
               <a:rPr lang="en-US" smtClean="0"/>
-              <a:t>4/1/2026</a:t>
+              <a:t>4/29/2026</a:t>
             </a:fld>
             <a:endParaRPr lang="en-US" dirty="0"/>
           </a:p>
@@ -3105,7 +2023,7 @@
           <a:p>
             <a:fld id="{48A87A34-81AB-432B-8DAE-1953F412C126}" type="datetimeFigureOut">
               <a:rPr lang="en-US" smtClean="0"/>
-              <a:t>4/1/2026</a:t>
+              <a:t>4/29/2026</a:t>
             </a:fld>
             <a:endParaRPr lang="en-US" dirty="0"/>
           </a:p>
@@ -3718,7 +2636,7 @@
           <a:p>
             <a:fld id="{48A87A34-81AB-432B-8DAE-1953F412C126}" type="datetimeFigureOut">
               <a:rPr lang="en-US" smtClean="0"/>
-              <a:t>4/1/2026</a:t>
+              <a:t>4/29/2026</a:t>
             </a:fld>
             <a:endParaRPr lang="en-US" dirty="0"/>
           </a:p>
@@ -4607,7 +3525,7 @@
           <a:p>
             <a:fld id="{48A87A34-81AB-432B-8DAE-1953F412C126}" type="datetimeFigureOut">
               <a:rPr lang="en-US" smtClean="0"/>
-              <a:t>4/1/2026</a:t>
+              <a:t>4/29/2026</a:t>
             </a:fld>
             <a:endParaRPr lang="en-US" dirty="0"/>
           </a:p>
@@ -4849,7 +3767,7 @@
           <a:p>
             <a:fld id="{48A87A34-81AB-432B-8DAE-1953F412C126}" type="datetimeFigureOut">
               <a:rPr lang="en-US" smtClean="0"/>
-              <a:t>4/1/2026</a:t>
+              <a:t>4/29/2026</a:t>
             </a:fld>
             <a:endParaRPr lang="en-US" dirty="0"/>
           </a:p>
@@ -5100,7 +4018,7 @@
           <a:p>
             <a:fld id="{48A87A34-81AB-432B-8DAE-1953F412C126}" type="datetimeFigureOut">
               <a:rPr lang="en-US" smtClean="0"/>
-              <a:t>4/1/2026</a:t>
+              <a:t>4/29/2026</a:t>
             </a:fld>
             <a:endParaRPr lang="en-US" dirty="0"/>
           </a:p>
@@ -5388,7 +4306,7 @@
           <a:p>
             <a:fld id="{48A87A34-81AB-432B-8DAE-1953F412C126}" type="datetimeFigureOut">
               <a:rPr lang="en-US" smtClean="0"/>
-              <a:t>4/1/2026</a:t>
+              <a:t>4/29/2026</a:t>
             </a:fld>
             <a:endParaRPr lang="en-US" dirty="0"/>
           </a:p>
@@ -5673,7 +4591,7 @@
           <a:p>
             <a:fld id="{48A87A34-81AB-432B-8DAE-1953F412C126}" type="datetimeFigureOut">
               <a:rPr lang="en-US" smtClean="0"/>
-              <a:t>4/1/2026</a:t>
+              <a:t>4/29/2026</a:t>
             </a:fld>
             <a:endParaRPr lang="en-US" dirty="0"/>
           </a:p>
@@ -5995,7 +4913,7 @@
           <a:p>
             <a:fld id="{48A87A34-81AB-432B-8DAE-1953F412C126}" type="datetimeFigureOut">
               <a:rPr lang="en-US" smtClean="0"/>
-              <a:t>4/1/2026</a:t>
+              <a:t>4/29/2026</a:t>
             </a:fld>
             <a:endParaRPr lang="en-US" dirty="0"/>
           </a:p>
@@ -6368,7 +5286,7 @@
           <a:p>
             <a:fld id="{48A87A34-81AB-432B-8DAE-1953F412C126}" type="datetimeFigureOut">
               <a:rPr lang="en-US" smtClean="0"/>
-              <a:t>4/1/2026</a:t>
+              <a:t>4/29/2026</a:t>
             </a:fld>
             <a:endParaRPr lang="en-US" dirty="0"/>
           </a:p>
@@ -6887,7 +5805,7 @@
           <a:p>
             <a:fld id="{48A87A34-81AB-432B-8DAE-1953F412C126}" type="datetimeFigureOut">
               <a:rPr lang="en-US" smtClean="0"/>
-              <a:t>4/1/2026</a:t>
+              <a:t>4/29/2026</a:t>
             </a:fld>
             <a:endParaRPr lang="en-US" dirty="0"/>
           </a:p>
@@ -7061,7 +5979,7 @@
           <a:p>
             <a:fld id="{48A87A34-81AB-432B-8DAE-1953F412C126}" type="datetimeFigureOut">
               <a:rPr lang="en-US" smtClean="0"/>
-              <a:t>4/1/2026</a:t>
+              <a:t>4/29/2026</a:t>
             </a:fld>
             <a:endParaRPr lang="en-US" dirty="0"/>
           </a:p>
@@ -7205,7 +6123,7 @@
           <a:p>
             <a:fld id="{48A87A34-81AB-432B-8DAE-1953F412C126}" type="datetimeFigureOut">
               <a:rPr lang="en-US" smtClean="0"/>
-              <a:t>4/1/2026</a:t>
+              <a:t>4/29/2026</a:t>
             </a:fld>
             <a:endParaRPr lang="en-US" dirty="0"/>
           </a:p>
@@ -7503,7 +6421,7 @@
           <a:p>
             <a:fld id="{48A87A34-81AB-432B-8DAE-1953F412C126}" type="datetimeFigureOut">
               <a:rPr lang="en-US" smtClean="0"/>
-              <a:t>4/1/2026</a:t>
+              <a:t>4/29/2026</a:t>
             </a:fld>
             <a:endParaRPr lang="en-US" dirty="0"/>
           </a:p>
@@ -7834,7 +6752,7 @@
           <a:p>
             <a:fld id="{48A87A34-81AB-432B-8DAE-1953F412C126}" type="datetimeFigureOut">
               <a:rPr lang="en-US" smtClean="0"/>
-              <a:t>4/1/2026</a:t>
+              <a:t>4/29/2026</a:t>
             </a:fld>
             <a:endParaRPr lang="en-US" dirty="0"/>
           </a:p>
@@ -8096,7 +7014,7 @@
           <a:p>
             <a:fld id="{48A87A34-81AB-432B-8DAE-1953F412C126}" type="datetimeFigureOut">
               <a:rPr lang="en-US" smtClean="0"/>
-              <a:t>4/1/2026</a:t>
+              <a:t>4/29/2026</a:t>
             </a:fld>
             <a:endParaRPr lang="en-US" dirty="0"/>
           </a:p>
@@ -14300,1160 +13218,6 @@
 </p:sld>
 </file>
 
-<file path=ppt/slides/slide17.xml><?xml version="1.0" encoding="utf-8"?>
-<p:sld xmlns:a="http://schemas.openxmlformats.org/drawingml/2006/main" xmlns:r="http://schemas.openxmlformats.org/officeDocument/2006/relationships" xmlns:p="http://schemas.openxmlformats.org/presentationml/2006/main">
-  <p:cSld>
-    <p:spTree>
-      <p:nvGrpSpPr>
-        <p:cNvPr id="1" name="">
-          <a:extLst>
-            <a:ext uri="{FF2B5EF4-FFF2-40B4-BE49-F238E27FC236}">
-              <a16:creationId xmlns:a16="http://schemas.microsoft.com/office/drawing/2014/main" id="{0726C7F7-04AB-8B81-7F53-BF986F2A8804}"/>
-            </a:ext>
-          </a:extLst>
-        </p:cNvPr>
-        <p:cNvGrpSpPr/>
-        <p:nvPr/>
-      </p:nvGrpSpPr>
-      <p:grpSpPr>
-        <a:xfrm>
-          <a:off x="0" y="0"/>
-          <a:ext cx="0" cy="0"/>
-          <a:chOff x="0" y="0"/>
-          <a:chExt cx="0" cy="0"/>
-        </a:xfrm>
-      </p:grpSpPr>
-      <p:sp>
-        <p:nvSpPr>
-          <p:cNvPr id="9" name="제목 1">
-            <a:extLst>
-              <a:ext uri="{FF2B5EF4-FFF2-40B4-BE49-F238E27FC236}">
-                <a16:creationId xmlns:a16="http://schemas.microsoft.com/office/drawing/2014/main" id="{9DF299F6-063E-A5FA-8179-AB466B3B84FD}"/>
-              </a:ext>
-            </a:extLst>
-          </p:cNvPr>
-          <p:cNvSpPr>
-            <a:spLocks noGrp="1"/>
-          </p:cNvSpPr>
-          <p:nvPr>
-            <p:ph type="title"/>
-          </p:nvPr>
-        </p:nvSpPr>
-        <p:spPr>
-          <a:xfrm>
-            <a:off x="915383" y="139084"/>
-            <a:ext cx="10353762" cy="766439"/>
-          </a:xfrm>
-        </p:spPr>
-        <p:txBody>
-          <a:bodyPr/>
-          <a:lstStyle/>
-          <a:p>
-            <a:pPr algn="l"/>
-            <a:r>
-              <a:rPr lang="en-US" altLang="ko-KR" cap="none" dirty="0">
-                <a:latin typeface="ADLaM Display" panose="02010000000000000000" pitchFamily="2" charset="0"/>
-                <a:ea typeface="ADLaM Display" panose="02010000000000000000" pitchFamily="2" charset="0"/>
-                <a:cs typeface="ADLaM Display" panose="02010000000000000000" pitchFamily="2" charset="0"/>
-              </a:rPr>
-              <a:t>Hands-on </a:t>
-            </a:r>
-            <a:r>
-              <a:rPr lang="en-US" altLang="ko-KR" dirty="0" err="1">
-                <a:latin typeface="ADLaM Display" panose="02010000000000000000" pitchFamily="2" charset="0"/>
-                <a:ea typeface="ADLaM Display" panose="02010000000000000000" pitchFamily="2" charset="0"/>
-                <a:cs typeface="ADLaM Display" panose="02010000000000000000" pitchFamily="2" charset="0"/>
-                <a:hlinkClick r:id="rId2">
-                  <a:extLst>
-                    <a:ext uri="{A12FA001-AC4F-418D-AE19-62706E023703}">
-                      <ahyp:hlinkClr xmlns:ahyp="http://schemas.microsoft.com/office/drawing/2018/hyperlinkcolor" val="tx"/>
-                    </a:ext>
-                  </a:extLst>
-                </a:hlinkClick>
-              </a:rPr>
-              <a:t>Compound_interest</a:t>
-            </a:r>
-            <a:endParaRPr lang="ko-KR" altLang="en-US" dirty="0">
-              <a:latin typeface="ADLaM Display" panose="02010000000000000000" pitchFamily="2" charset="0"/>
-              <a:cs typeface="ADLaM Display" panose="02010000000000000000" pitchFamily="2" charset="0"/>
-            </a:endParaRPr>
-          </a:p>
-        </p:txBody>
-      </p:sp>
-      <p:sp>
-        <p:nvSpPr>
-          <p:cNvPr id="10" name="내용 개체 틀 2">
-            <a:extLst>
-              <a:ext uri="{FF2B5EF4-FFF2-40B4-BE49-F238E27FC236}">
-                <a16:creationId xmlns:a16="http://schemas.microsoft.com/office/drawing/2014/main" id="{E021F27D-1221-FB58-BDEC-9B34A7E0385B}"/>
-              </a:ext>
-            </a:extLst>
-          </p:cNvPr>
-          <p:cNvSpPr>
-            <a:spLocks noGrp="1"/>
-          </p:cNvSpPr>
-          <p:nvPr>
-            <p:ph idx="1"/>
-          </p:nvPr>
-        </p:nvSpPr>
-        <p:spPr>
-          <a:xfrm>
-            <a:off x="915383" y="1150966"/>
-            <a:ext cx="10758457" cy="1165514"/>
-          </a:xfrm>
-        </p:spPr>
-        <p:txBody>
-          <a:bodyPr>
-            <a:normAutofit fontScale="62500" lnSpcReduction="20000"/>
-          </a:bodyPr>
-          <a:lstStyle/>
-          <a:p>
-            <a:pPr>
-              <a:lnSpc>
-                <a:spcPct val="150000"/>
-              </a:lnSpc>
-              <a:buFont typeface="Wingdings" panose="05000000000000000000" pitchFamily="2" charset="2"/>
-              <a:buChar char="§"/>
-            </a:pPr>
-            <a:r>
-              <a:rPr lang="ko-KR" altLang="en-US" sz="2400" cap="none" dirty="0">
-                <a:latin typeface="맑은 고딕 Semilight" panose="020B0502040204020203" pitchFamily="50" charset="-127"/>
-                <a:ea typeface="맑은 고딕 Semilight" panose="020B0502040204020203" pitchFamily="50" charset="-127"/>
-                <a:cs typeface="맑은 고딕 Semilight" panose="020B0502040204020203" pitchFamily="50" charset="-127"/>
-              </a:rPr>
-              <a:t>아래</a:t>
-            </a:r>
-            <a:r>
-              <a:rPr lang="en-US" altLang="ko-KR" sz="2400" cap="none" dirty="0">
-                <a:latin typeface="맑은 고딕 Semilight" panose="020B0502040204020203" pitchFamily="50" charset="-127"/>
-                <a:ea typeface="맑은 고딕 Semilight" panose="020B0502040204020203" pitchFamily="50" charset="-127"/>
-                <a:cs typeface="맑은 고딕 Semilight" panose="020B0502040204020203" pitchFamily="50" charset="-127"/>
-              </a:rPr>
-              <a:t> </a:t>
-            </a:r>
-            <a:r>
-              <a:rPr lang="ko-KR" altLang="en-US" sz="2400" cap="none" dirty="0">
-                <a:latin typeface="맑은 고딕 Semilight" panose="020B0502040204020203" pitchFamily="50" charset="-127"/>
-                <a:ea typeface="맑은 고딕 Semilight" panose="020B0502040204020203" pitchFamily="50" charset="-127"/>
-                <a:cs typeface="맑은 고딕 Semilight" panose="020B0502040204020203" pitchFamily="50" charset="-127"/>
-              </a:rPr>
-              <a:t>그림은</a:t>
-            </a:r>
-            <a:r>
-              <a:rPr lang="en-US" altLang="ko-KR" sz="2400" cap="none" dirty="0">
-                <a:latin typeface="맑은 고딕 Semilight" panose="020B0502040204020203" pitchFamily="50" charset="-127"/>
-                <a:ea typeface="맑은 고딕 Semilight" panose="020B0502040204020203" pitchFamily="50" charset="-127"/>
-                <a:cs typeface="맑은 고딕 Semilight" panose="020B0502040204020203" pitchFamily="50" charset="-127"/>
-              </a:rPr>
-              <a:t> 1,000 US</a:t>
-            </a:r>
-            <a:r>
-              <a:rPr lang="ko-KR" altLang="en-US" sz="2400" cap="none" dirty="0">
-                <a:latin typeface="맑은 고딕 Semilight" panose="020B0502040204020203" pitchFamily="50" charset="-127"/>
-                <a:ea typeface="맑은 고딕 Semilight" panose="020B0502040204020203" pitchFamily="50" charset="-127"/>
-                <a:cs typeface="맑은 고딕 Semilight" panose="020B0502040204020203" pitchFamily="50" charset="-127"/>
-              </a:rPr>
-              <a:t> </a:t>
-            </a:r>
-            <a:r>
-              <a:rPr lang="en-US" altLang="ko-KR" sz="2400" cap="none" dirty="0">
-                <a:latin typeface="맑은 고딕 Semilight" panose="020B0502040204020203" pitchFamily="50" charset="-127"/>
-                <a:ea typeface="맑은 고딕 Semilight" panose="020B0502040204020203" pitchFamily="50" charset="-127"/>
-                <a:cs typeface="맑은 고딕 Semilight" panose="020B0502040204020203" pitchFamily="50" charset="-127"/>
-              </a:rPr>
-              <a:t>dollars</a:t>
-            </a:r>
-            <a:r>
-              <a:rPr lang="ko-KR" altLang="en-US" sz="2400" cap="none" dirty="0">
-                <a:latin typeface="맑은 고딕 Semilight" panose="020B0502040204020203" pitchFamily="50" charset="-127"/>
-                <a:ea typeface="맑은 고딕 Semilight" panose="020B0502040204020203" pitchFamily="50" charset="-127"/>
-                <a:cs typeface="맑은 고딕 Semilight" panose="020B0502040204020203" pitchFamily="50" charset="-127"/>
-              </a:rPr>
-              <a:t>를 은행에 복리이자</a:t>
-            </a:r>
-            <a:r>
-              <a:rPr lang="en-US" altLang="ko-KR" sz="2400" cap="none" dirty="0">
-                <a:latin typeface="맑은 고딕 Semilight" panose="020B0502040204020203" pitchFamily="50" charset="-127"/>
-                <a:ea typeface="맑은 고딕 Semilight" panose="020B0502040204020203" pitchFamily="50" charset="-127"/>
-                <a:cs typeface="맑은 고딕 Semilight" panose="020B0502040204020203" pitchFamily="50" charset="-127"/>
-              </a:rPr>
-              <a:t>(compound</a:t>
-            </a:r>
-            <a:r>
-              <a:rPr lang="ko-KR" altLang="en-US" sz="2400" cap="none" dirty="0">
-                <a:latin typeface="맑은 고딕 Semilight" panose="020B0502040204020203" pitchFamily="50" charset="-127"/>
-                <a:ea typeface="맑은 고딕 Semilight" panose="020B0502040204020203" pitchFamily="50" charset="-127"/>
-                <a:cs typeface="맑은 고딕 Semilight" panose="020B0502040204020203" pitchFamily="50" charset="-127"/>
-              </a:rPr>
-              <a:t> </a:t>
-            </a:r>
-            <a:r>
-              <a:rPr lang="en-US" altLang="ko-KR" sz="2400" cap="none" dirty="0">
-                <a:latin typeface="맑은 고딕 Semilight" panose="020B0502040204020203" pitchFamily="50" charset="-127"/>
-                <a:ea typeface="맑은 고딕 Semilight" panose="020B0502040204020203" pitchFamily="50" charset="-127"/>
-                <a:cs typeface="맑은 고딕 Semilight" panose="020B0502040204020203" pitchFamily="50" charset="-127"/>
-              </a:rPr>
-              <a:t>interest)</a:t>
-            </a:r>
-            <a:r>
-              <a:rPr lang="ko-KR" altLang="en-US" sz="2400" cap="none" dirty="0">
-                <a:latin typeface="맑은 고딕 Semilight" panose="020B0502040204020203" pitchFamily="50" charset="-127"/>
-                <a:ea typeface="맑은 고딕 Semilight" panose="020B0502040204020203" pitchFamily="50" charset="-127"/>
-                <a:cs typeface="맑은 고딕 Semilight" panose="020B0502040204020203" pitchFamily="50" charset="-127"/>
-              </a:rPr>
-              <a:t>로 </a:t>
-            </a:r>
-            <a:r>
-              <a:rPr lang="ko-KR" altLang="en-US" sz="2400" cap="none" dirty="0" err="1">
-                <a:latin typeface="맑은 고딕 Semilight" panose="020B0502040204020203" pitchFamily="50" charset="-127"/>
-                <a:ea typeface="맑은 고딕 Semilight" panose="020B0502040204020203" pitchFamily="50" charset="-127"/>
-                <a:cs typeface="맑은 고딕 Semilight" panose="020B0502040204020203" pitchFamily="50" charset="-127"/>
-              </a:rPr>
-              <a:t>월복리</a:t>
-            </a:r>
-            <a:r>
-              <a:rPr lang="en-US" altLang="ko-KR" sz="2400" cap="none" dirty="0">
-                <a:latin typeface="맑은 고딕 Semilight" panose="020B0502040204020203" pitchFamily="50" charset="-127"/>
-                <a:ea typeface="맑은 고딕 Semilight" panose="020B0502040204020203" pitchFamily="50" charset="-127"/>
-                <a:cs typeface="맑은 고딕 Semilight" panose="020B0502040204020203" pitchFamily="50" charset="-127"/>
-              </a:rPr>
-              <a:t>, 1</a:t>
-            </a:r>
-            <a:r>
-              <a:rPr lang="ko-KR" altLang="en-US" sz="2400" cap="none" dirty="0">
-                <a:latin typeface="맑은 고딕 Semilight" panose="020B0502040204020203" pitchFamily="50" charset="-127"/>
-                <a:ea typeface="맑은 고딕 Semilight" panose="020B0502040204020203" pitchFamily="50" charset="-127"/>
-                <a:cs typeface="맑은 고딕 Semilight" panose="020B0502040204020203" pitchFamily="50" charset="-127"/>
-              </a:rPr>
-              <a:t>분기복리</a:t>
-            </a:r>
-            <a:r>
-              <a:rPr lang="en-US" altLang="ko-KR" sz="2400" cap="none" dirty="0">
-                <a:latin typeface="맑은 고딕 Semilight" panose="020B0502040204020203" pitchFamily="50" charset="-127"/>
-                <a:ea typeface="맑은 고딕 Semilight" panose="020B0502040204020203" pitchFamily="50" charset="-127"/>
-                <a:cs typeface="맑은 고딕 Semilight" panose="020B0502040204020203" pitchFamily="50" charset="-127"/>
-              </a:rPr>
-              <a:t>, </a:t>
-            </a:r>
-            <a:r>
-              <a:rPr lang="ko-KR" altLang="en-US" sz="2400" cap="none" dirty="0">
-                <a:latin typeface="맑은 고딕 Semilight" panose="020B0502040204020203" pitchFamily="50" charset="-127"/>
-                <a:ea typeface="맑은 고딕 Semilight" panose="020B0502040204020203" pitchFamily="50" charset="-127"/>
-                <a:cs typeface="맑은 고딕 Semilight" panose="020B0502040204020203" pitchFamily="50" charset="-127"/>
-              </a:rPr>
-              <a:t>년 복리 그리고 시간을 무한히 나누어 복리이자를 한 경우의 그래프이다</a:t>
-            </a:r>
-            <a:r>
-              <a:rPr lang="en-US" altLang="ko-KR" sz="2400" cap="none" dirty="0">
-                <a:latin typeface="맑은 고딕 Semilight" panose="020B0502040204020203" pitchFamily="50" charset="-127"/>
-                <a:ea typeface="맑은 고딕 Semilight" panose="020B0502040204020203" pitchFamily="50" charset="-127"/>
-                <a:cs typeface="맑은 고딕 Semilight" panose="020B0502040204020203" pitchFamily="50" charset="-127"/>
-              </a:rPr>
-              <a:t>. </a:t>
-            </a:r>
-          </a:p>
-          <a:p>
-            <a:pPr>
-              <a:lnSpc>
-                <a:spcPct val="150000"/>
-              </a:lnSpc>
-              <a:buFont typeface="Wingdings" panose="05000000000000000000" pitchFamily="2" charset="2"/>
-              <a:buChar char="§"/>
-            </a:pPr>
-            <a:r>
-              <a:rPr lang="ko-KR" altLang="en-US" sz="2400" cap="none" dirty="0">
-                <a:latin typeface="맑은 고딕 Semilight" panose="020B0502040204020203" pitchFamily="50" charset="-127"/>
-                <a:ea typeface="맑은 고딕 Semilight" panose="020B0502040204020203" pitchFamily="50" charset="-127"/>
-                <a:cs typeface="맑은 고딕 Semilight" panose="020B0502040204020203" pitchFamily="50" charset="-127"/>
-              </a:rPr>
-              <a:t>미분방정식과 미래 가치 등을 계산하여 시각화를 재현하라 </a:t>
-            </a:r>
-          </a:p>
-        </p:txBody>
-      </p:sp>
-      <p:sp>
-        <p:nvSpPr>
-          <p:cNvPr id="2" name="슬라이드 번호 개체 틀 3">
-            <a:extLst>
-              <a:ext uri="{FF2B5EF4-FFF2-40B4-BE49-F238E27FC236}">
-                <a16:creationId xmlns:a16="http://schemas.microsoft.com/office/drawing/2014/main" id="{CD6B489B-CD30-D4B5-4A10-E9751D29FF3D}"/>
-              </a:ext>
-            </a:extLst>
-          </p:cNvPr>
-          <p:cNvSpPr>
-            <a:spLocks noGrp="1"/>
-          </p:cNvSpPr>
-          <p:nvPr>
-            <p:ph type="sldNum" sz="quarter" idx="12"/>
-          </p:nvPr>
-        </p:nvSpPr>
-        <p:spPr>
-          <a:xfrm>
-            <a:off x="10512862" y="6035582"/>
-            <a:ext cx="753349" cy="365030"/>
-          </a:xfrm>
-        </p:spPr>
-        <p:txBody>
-          <a:bodyPr/>
-          <a:lstStyle/>
-          <a:p>
-            <a:fld id="{D57F1E4F-1CFF-5643-939E-217C01CDF565}" type="slidenum">
-              <a:rPr lang="en-US" smtClean="0"/>
-              <a:pPr/>
-              <a:t>17</a:t>
-            </a:fld>
-            <a:endParaRPr lang="en-US" dirty="0"/>
-          </a:p>
-        </p:txBody>
-      </p:sp>
-      <p:pic>
-        <p:nvPicPr>
-          <p:cNvPr id="6" name="그래픽 5">
-            <a:extLst>
-              <a:ext uri="{FF2B5EF4-FFF2-40B4-BE49-F238E27FC236}">
-                <a16:creationId xmlns:a16="http://schemas.microsoft.com/office/drawing/2014/main" id="{6B180EC8-ACE7-C4A9-7A76-657288575BED}"/>
-              </a:ext>
-            </a:extLst>
-          </p:cNvPr>
-          <p:cNvPicPr>
-            <a:picLocks noChangeAspect="1"/>
-          </p:cNvPicPr>
-          <p:nvPr/>
-        </p:nvPicPr>
-        <p:blipFill>
-          <a:blip r:embed="rId3">
-            <a:extLst>
-              <a:ext uri="{96DAC541-7B7A-43D3-8B79-37D633B846F1}">
-                <asvg:svgBlip xmlns:asvg="http://schemas.microsoft.com/office/drawing/2016/SVG/main" r:embed="rId4"/>
-              </a:ext>
-            </a:extLst>
-          </a:blip>
-          <a:stretch>
-            <a:fillRect/>
-          </a:stretch>
-        </p:blipFill>
-        <p:spPr>
-          <a:xfrm>
-            <a:off x="1914084" y="2316480"/>
-            <a:ext cx="6564086" cy="4084320"/>
-          </a:xfrm>
-          <a:prstGeom prst="rect">
-            <a:avLst/>
-          </a:prstGeom>
-        </p:spPr>
-      </p:pic>
-    </p:spTree>
-    <p:extLst>
-      <p:ext uri="{BB962C8B-B14F-4D97-AF65-F5344CB8AC3E}">
-        <p14:creationId xmlns:p14="http://schemas.microsoft.com/office/powerpoint/2010/main" val="793985233"/>
-      </p:ext>
-    </p:extLst>
-  </p:cSld>
-  <p:clrMapOvr>
-    <a:masterClrMapping/>
-  </p:clrMapOvr>
-</p:sld>
-</file>
-
-<file path=ppt/slides/slide18.xml><?xml version="1.0" encoding="utf-8"?>
-<p:sld xmlns:a="http://schemas.openxmlformats.org/drawingml/2006/main" xmlns:r="http://schemas.openxmlformats.org/officeDocument/2006/relationships" xmlns:p="http://schemas.openxmlformats.org/presentationml/2006/main">
-  <p:cSld>
-    <p:spTree>
-      <p:nvGrpSpPr>
-        <p:cNvPr id="1" name="">
-          <a:extLst>
-            <a:ext uri="{FF2B5EF4-FFF2-40B4-BE49-F238E27FC236}">
-              <a16:creationId xmlns:a16="http://schemas.microsoft.com/office/drawing/2014/main" id="{96F710E2-787E-03C0-6E19-A8FA39C0CC2A}"/>
-            </a:ext>
-          </a:extLst>
-        </p:cNvPr>
-        <p:cNvGrpSpPr/>
-        <p:nvPr/>
-      </p:nvGrpSpPr>
-      <p:grpSpPr>
-        <a:xfrm>
-          <a:off x="0" y="0"/>
-          <a:ext cx="0" cy="0"/>
-          <a:chOff x="0" y="0"/>
-          <a:chExt cx="0" cy="0"/>
-        </a:xfrm>
-      </p:grpSpPr>
-      <p:sp>
-        <p:nvSpPr>
-          <p:cNvPr id="8" name="직사각형 7">
-            <a:extLst>
-              <a:ext uri="{FF2B5EF4-FFF2-40B4-BE49-F238E27FC236}">
-                <a16:creationId xmlns:a16="http://schemas.microsoft.com/office/drawing/2014/main" id="{806C2482-E37E-4435-7CBE-2F006E71C350}"/>
-              </a:ext>
-            </a:extLst>
-          </p:cNvPr>
-          <p:cNvSpPr/>
-          <p:nvPr/>
-        </p:nvSpPr>
-        <p:spPr>
-          <a:xfrm>
-            <a:off x="1127448" y="3429501"/>
-            <a:ext cx="4749534" cy="584622"/>
-          </a:xfrm>
-          <a:prstGeom prst="rect">
-            <a:avLst/>
-          </a:prstGeom>
-          <a:solidFill>
-            <a:schemeClr val="bg1">
-              <a:lumMod val="85000"/>
-            </a:schemeClr>
-          </a:solidFill>
-          <a:ln>
-            <a:noFill/>
-          </a:ln>
-        </p:spPr>
-        <p:style>
-          <a:lnRef idx="2">
-            <a:schemeClr val="accent1">
-              <a:shade val="15000"/>
-            </a:schemeClr>
-          </a:lnRef>
-          <a:fillRef idx="1">
-            <a:schemeClr val="accent1"/>
-          </a:fillRef>
-          <a:effectRef idx="0">
-            <a:schemeClr val="accent1"/>
-          </a:effectRef>
-          <a:fontRef idx="minor">
-            <a:schemeClr val="lt1"/>
-          </a:fontRef>
-        </p:style>
-        <p:txBody>
-          <a:bodyPr rtlCol="0" anchor="ctr"/>
-          <a:lstStyle/>
-          <a:p>
-            <a:pPr algn="ctr"/>
-            <a:endParaRPr lang="ko-KR" altLang="en-US" sz="1799" dirty="0"/>
-          </a:p>
-        </p:txBody>
-      </p:sp>
-      <p:sp>
-        <p:nvSpPr>
-          <p:cNvPr id="13" name="TextBox 12">
-            <a:extLst>
-              <a:ext uri="{FF2B5EF4-FFF2-40B4-BE49-F238E27FC236}">
-                <a16:creationId xmlns:a16="http://schemas.microsoft.com/office/drawing/2014/main" id="{32C4D0AD-05E8-89C2-6D70-AB9EBB424D7E}"/>
-              </a:ext>
-            </a:extLst>
-          </p:cNvPr>
-          <p:cNvSpPr txBox="1"/>
-          <p:nvPr/>
-        </p:nvSpPr>
-        <p:spPr>
-          <a:xfrm>
-            <a:off x="1337468" y="1428986"/>
-            <a:ext cx="8435182" cy="3606757"/>
-          </a:xfrm>
-          <a:prstGeom prst="rect">
-            <a:avLst/>
-          </a:prstGeom>
-          <a:noFill/>
-        </p:spPr>
-        <p:txBody>
-          <a:bodyPr wrap="square" rtlCol="0">
-            <a:spAutoFit/>
-          </a:bodyPr>
-          <a:lstStyle/>
-          <a:p>
-            <a:pPr marL="514196" indent="-514196">
-              <a:lnSpc>
-                <a:spcPct val="150000"/>
-              </a:lnSpc>
-              <a:buAutoNum type="arabicPeriod"/>
-            </a:pPr>
-            <a:r>
-              <a:rPr lang="en-US" altLang="ko-KR" sz="2400" dirty="0">
-                <a:latin typeface="MS PGothic" panose="020B0600070205080204" pitchFamily="34" charset="-128"/>
-                <a:ea typeface="MS PGothic" panose="020B0600070205080204" pitchFamily="34" charset="-128"/>
-                <a:cs typeface="Times New Roman" panose="02020603050405020304" pitchFamily="18" charset="0"/>
-              </a:rPr>
-              <a:t>Modeling</a:t>
-            </a:r>
-          </a:p>
-          <a:p>
-            <a:pPr marL="971396" lvl="1" indent="-514196">
-              <a:lnSpc>
-                <a:spcPct val="150000"/>
-              </a:lnSpc>
-              <a:buAutoNum type="arabicPeriod"/>
-            </a:pPr>
-            <a:r>
-              <a:rPr lang="en-US" altLang="ko-KR" sz="2000" dirty="0">
-                <a:latin typeface="MS PGothic" panose="020B0600070205080204" pitchFamily="34" charset="-128"/>
-                <a:ea typeface="MS PGothic" panose="020B0600070205080204" pitchFamily="34" charset="-128"/>
-                <a:cs typeface="Times New Roman" panose="02020603050405020304" pitchFamily="18" charset="0"/>
-              </a:rPr>
-              <a:t>derivative function</a:t>
-            </a:r>
-          </a:p>
-          <a:p>
-            <a:pPr marL="971396" lvl="1" indent="-514196">
-              <a:lnSpc>
-                <a:spcPct val="150000"/>
-              </a:lnSpc>
-              <a:buAutoNum type="arabicPeriod"/>
-            </a:pPr>
-            <a:r>
-              <a:rPr lang="en-US" altLang="ko-KR" sz="2000" dirty="0">
-                <a:latin typeface="MS PGothic" panose="020B0600070205080204" pitchFamily="34" charset="-128"/>
-                <a:ea typeface="MS PGothic" panose="020B0600070205080204" pitchFamily="34" charset="-128"/>
-                <a:cs typeface="Times New Roman" panose="02020603050405020304" pitchFamily="18" charset="0"/>
-              </a:rPr>
-              <a:t>mathematical modeling</a:t>
-            </a:r>
-          </a:p>
-          <a:p>
-            <a:pPr marL="971396" lvl="1" indent="-514196">
-              <a:lnSpc>
-                <a:spcPct val="150000"/>
-              </a:lnSpc>
-              <a:buAutoNum type="arabicPeriod"/>
-            </a:pPr>
-            <a:r>
-              <a:rPr lang="en-US" altLang="ko-KR" sz="2000" dirty="0">
-                <a:latin typeface="MS PGothic" panose="020B0600070205080204" pitchFamily="34" charset="-128"/>
-                <a:ea typeface="MS PGothic" panose="020B0600070205080204" pitchFamily="34" charset="-128"/>
-                <a:cs typeface="Times New Roman" panose="02020603050405020304" pitchFamily="18" charset="0"/>
-              </a:rPr>
-              <a:t>interest compound</a:t>
-            </a:r>
-          </a:p>
-          <a:p>
-            <a:pPr marL="514196" indent="-514196">
-              <a:lnSpc>
-                <a:spcPct val="150000"/>
-              </a:lnSpc>
-              <a:buAutoNum type="arabicPeriod"/>
-            </a:pPr>
-            <a:r>
-              <a:rPr lang="en-US" altLang="ko-KR" sz="2400" dirty="0">
-                <a:latin typeface="MS PGothic" panose="020B0600070205080204" pitchFamily="34" charset="-128"/>
-                <a:ea typeface="MS PGothic" panose="020B0600070205080204" pitchFamily="34" charset="-128"/>
-                <a:cs typeface="Times New Roman" panose="02020603050405020304" pitchFamily="18" charset="0"/>
-              </a:rPr>
-              <a:t>Montecarlo Simulation</a:t>
-            </a:r>
-          </a:p>
-          <a:p>
-            <a:pPr marL="514196" indent="-514196">
-              <a:lnSpc>
-                <a:spcPct val="150000"/>
-              </a:lnSpc>
-              <a:buAutoNum type="arabicPeriod"/>
-            </a:pPr>
-            <a:r>
-              <a:rPr lang="en-US" altLang="ko-KR" sz="2400" dirty="0">
-                <a:latin typeface="MS PGothic" panose="020B0600070205080204" pitchFamily="34" charset="-128"/>
-                <a:ea typeface="MS PGothic" panose="020B0600070205080204" pitchFamily="34" charset="-128"/>
-                <a:cs typeface="Times New Roman" panose="02020603050405020304" pitchFamily="18" charset="0"/>
-              </a:rPr>
-              <a:t>Linear Programing</a:t>
-            </a:r>
-          </a:p>
-          <a:p>
-            <a:pPr marL="514196" indent="-514196">
-              <a:lnSpc>
-                <a:spcPct val="150000"/>
-              </a:lnSpc>
-              <a:buAutoNum type="arabicPeriod"/>
-            </a:pPr>
-            <a:r>
-              <a:rPr lang="en-US" altLang="ko-KR" sz="2400" dirty="0">
-                <a:latin typeface="MS PGothic" panose="020B0600070205080204" pitchFamily="34" charset="-128"/>
-                <a:ea typeface="MS PGothic" panose="020B0600070205080204" pitchFamily="34" charset="-128"/>
-                <a:cs typeface="Times New Roman" panose="02020603050405020304" pitchFamily="18" charset="0"/>
-              </a:rPr>
-              <a:t>Genetic algorithm</a:t>
-            </a:r>
-          </a:p>
-        </p:txBody>
-      </p:sp>
-      <p:sp>
-        <p:nvSpPr>
-          <p:cNvPr id="3" name="TextBox 2">
-            <a:extLst>
-              <a:ext uri="{FF2B5EF4-FFF2-40B4-BE49-F238E27FC236}">
-                <a16:creationId xmlns:a16="http://schemas.microsoft.com/office/drawing/2014/main" id="{85BA2290-6C75-39F8-656D-D7C62838E1EE}"/>
-              </a:ext>
-            </a:extLst>
-          </p:cNvPr>
-          <p:cNvSpPr txBox="1"/>
-          <p:nvPr/>
-        </p:nvSpPr>
-        <p:spPr>
-          <a:xfrm>
-            <a:off x="1337470" y="710574"/>
-            <a:ext cx="2603977" cy="584623"/>
-          </a:xfrm>
-          <a:prstGeom prst="rect">
-            <a:avLst/>
-          </a:prstGeom>
-          <a:noFill/>
-        </p:spPr>
-        <p:txBody>
-          <a:bodyPr wrap="square">
-            <a:spAutoFit/>
-          </a:bodyPr>
-          <a:lstStyle/>
-          <a:p>
-            <a:r>
-              <a:rPr lang="ko-KR" altLang="en-US" sz="3199" b="1" dirty="0">
-                <a:latin typeface="한컴 말랑말랑 Bold" panose="020F0803000000000000" pitchFamily="50" charset="-127"/>
-                <a:ea typeface="한컴 말랑말랑 Bold" panose="020F0803000000000000" pitchFamily="50" charset="-127"/>
-              </a:rPr>
-              <a:t>목차</a:t>
-            </a:r>
-            <a:endParaRPr lang="ko-KR" altLang="en-US" sz="3199" dirty="0"/>
-          </a:p>
-        </p:txBody>
-      </p:sp>
-    </p:spTree>
-    <p:extLst>
-      <p:ext uri="{BB962C8B-B14F-4D97-AF65-F5344CB8AC3E}">
-        <p14:creationId xmlns:p14="http://schemas.microsoft.com/office/powerpoint/2010/main" val="1223421080"/>
-      </p:ext>
-    </p:extLst>
-  </p:cSld>
-  <p:clrMapOvr>
-    <a:masterClrMapping/>
-  </p:clrMapOvr>
-</p:sld>
-</file>
-
-<file path=ppt/slides/slide19.xml><?xml version="1.0" encoding="utf-8"?>
-<p:sld xmlns:a="http://schemas.openxmlformats.org/drawingml/2006/main" xmlns:r="http://schemas.openxmlformats.org/officeDocument/2006/relationships" xmlns:p="http://schemas.openxmlformats.org/presentationml/2006/main">
-  <p:cSld>
-    <p:spTree>
-      <p:nvGrpSpPr>
-        <p:cNvPr id="1" name=""/>
-        <p:cNvGrpSpPr/>
-        <p:nvPr/>
-      </p:nvGrpSpPr>
-      <p:grpSpPr>
-        <a:xfrm>
-          <a:off x="0" y="0"/>
-          <a:ext cx="0" cy="0"/>
-          <a:chOff x="0" y="0"/>
-          <a:chExt cx="0" cy="0"/>
-        </a:xfrm>
-      </p:grpSpPr>
-      <p:sp>
-        <p:nvSpPr>
-          <p:cNvPr id="3" name="슬라이드 번호 개체 틀 3">
-            <a:extLst>
-              <a:ext uri="{FF2B5EF4-FFF2-40B4-BE49-F238E27FC236}">
-                <a16:creationId xmlns:a16="http://schemas.microsoft.com/office/drawing/2014/main" id="{04A28AC8-4F29-6A5C-3946-6F8E280A0619}"/>
-              </a:ext>
-            </a:extLst>
-          </p:cNvPr>
-          <p:cNvSpPr txBox="1">
-            <a:spLocks/>
-          </p:cNvSpPr>
-          <p:nvPr/>
-        </p:nvSpPr>
-        <p:spPr>
-          <a:xfrm>
-            <a:off x="10512862" y="6035582"/>
-            <a:ext cx="753349" cy="365030"/>
-          </a:xfrm>
-          <a:prstGeom prst="rect">
-            <a:avLst/>
-          </a:prstGeom>
-        </p:spPr>
-        <p:txBody>
-          <a:bodyPr/>
-          <a:lstStyle>
-            <a:defPPr>
-              <a:defRPr lang="en-US"/>
-            </a:defPPr>
-            <a:lvl1pPr marL="0" algn="l" defTabSz="457200" rtl="0" eaLnBrk="1" latinLnBrk="0" hangingPunct="1">
-              <a:defRPr sz="1800" kern="1200">
-                <a:solidFill>
-                  <a:schemeClr val="tx1"/>
-                </a:solidFill>
-                <a:latin typeface="+mn-lt"/>
-                <a:ea typeface="+mn-ea"/>
-                <a:cs typeface="+mn-cs"/>
-              </a:defRPr>
-            </a:lvl1pPr>
-            <a:lvl2pPr marL="457200" algn="l" defTabSz="457200" rtl="0" eaLnBrk="1" latinLnBrk="0" hangingPunct="1">
-              <a:defRPr sz="1800" kern="1200">
-                <a:solidFill>
-                  <a:schemeClr val="tx1"/>
-                </a:solidFill>
-                <a:latin typeface="+mn-lt"/>
-                <a:ea typeface="+mn-ea"/>
-                <a:cs typeface="+mn-cs"/>
-              </a:defRPr>
-            </a:lvl2pPr>
-            <a:lvl3pPr marL="914400" algn="l" defTabSz="457200" rtl="0" eaLnBrk="1" latinLnBrk="0" hangingPunct="1">
-              <a:defRPr sz="1800" kern="1200">
-                <a:solidFill>
-                  <a:schemeClr val="tx1"/>
-                </a:solidFill>
-                <a:latin typeface="+mn-lt"/>
-                <a:ea typeface="+mn-ea"/>
-                <a:cs typeface="+mn-cs"/>
-              </a:defRPr>
-            </a:lvl3pPr>
-            <a:lvl4pPr marL="1371600" algn="l" defTabSz="457200" rtl="0" eaLnBrk="1" latinLnBrk="0" hangingPunct="1">
-              <a:defRPr sz="1800" kern="1200">
-                <a:solidFill>
-                  <a:schemeClr val="tx1"/>
-                </a:solidFill>
-                <a:latin typeface="+mn-lt"/>
-                <a:ea typeface="+mn-ea"/>
-                <a:cs typeface="+mn-cs"/>
-              </a:defRPr>
-            </a:lvl4pPr>
-            <a:lvl5pPr marL="1828800" algn="l" defTabSz="457200" rtl="0" eaLnBrk="1" latinLnBrk="0" hangingPunct="1">
-              <a:defRPr sz="1800" kern="1200">
-                <a:solidFill>
-                  <a:schemeClr val="tx1"/>
-                </a:solidFill>
-                <a:latin typeface="+mn-lt"/>
-                <a:ea typeface="+mn-ea"/>
-                <a:cs typeface="+mn-cs"/>
-              </a:defRPr>
-            </a:lvl5pPr>
-            <a:lvl6pPr marL="2286000" algn="l" defTabSz="457200" rtl="0" eaLnBrk="1" latinLnBrk="0" hangingPunct="1">
-              <a:defRPr sz="1800" kern="1200">
-                <a:solidFill>
-                  <a:schemeClr val="tx1"/>
-                </a:solidFill>
-                <a:latin typeface="+mn-lt"/>
-                <a:ea typeface="+mn-ea"/>
-                <a:cs typeface="+mn-cs"/>
-              </a:defRPr>
-            </a:lvl6pPr>
-            <a:lvl7pPr marL="2743200" algn="l" defTabSz="457200" rtl="0" eaLnBrk="1" latinLnBrk="0" hangingPunct="1">
-              <a:defRPr sz="1800" kern="1200">
-                <a:solidFill>
-                  <a:schemeClr val="tx1"/>
-                </a:solidFill>
-                <a:latin typeface="+mn-lt"/>
-                <a:ea typeface="+mn-ea"/>
-                <a:cs typeface="+mn-cs"/>
-              </a:defRPr>
-            </a:lvl7pPr>
-            <a:lvl8pPr marL="3200400" algn="l" defTabSz="457200" rtl="0" eaLnBrk="1" latinLnBrk="0" hangingPunct="1">
-              <a:defRPr sz="1800" kern="1200">
-                <a:solidFill>
-                  <a:schemeClr val="tx1"/>
-                </a:solidFill>
-                <a:latin typeface="+mn-lt"/>
-                <a:ea typeface="+mn-ea"/>
-                <a:cs typeface="+mn-cs"/>
-              </a:defRPr>
-            </a:lvl8pPr>
-            <a:lvl9pPr marL="3657600" algn="l" defTabSz="457200" rtl="0" eaLnBrk="1" latinLnBrk="0" hangingPunct="1">
-              <a:defRPr sz="1800" kern="1200">
-                <a:solidFill>
-                  <a:schemeClr val="tx1"/>
-                </a:solidFill>
-                <a:latin typeface="+mn-lt"/>
-                <a:ea typeface="+mn-ea"/>
-                <a:cs typeface="+mn-cs"/>
-              </a:defRPr>
-            </a:lvl9pPr>
-          </a:lstStyle>
-          <a:p>
-            <a:fld id="{D57F1E4F-1CFF-5643-939E-217C01CDF565}" type="slidenum">
-              <a:rPr lang="en-US" smtClean="0"/>
-              <a:pPr/>
-              <a:t>19</a:t>
-            </a:fld>
-            <a:endParaRPr lang="en-US" dirty="0"/>
-          </a:p>
-        </p:txBody>
-      </p:sp>
-      <p:sp>
-        <p:nvSpPr>
-          <p:cNvPr id="5" name="내용 개체 틀 2">
-            <a:extLst>
-              <a:ext uri="{FF2B5EF4-FFF2-40B4-BE49-F238E27FC236}">
-                <a16:creationId xmlns:a16="http://schemas.microsoft.com/office/drawing/2014/main" id="{061ABC30-95E8-41E4-F62C-84E574B58489}"/>
-              </a:ext>
-            </a:extLst>
-          </p:cNvPr>
-          <p:cNvSpPr>
-            <a:spLocks noGrp="1"/>
-          </p:cNvSpPr>
-          <p:nvPr>
-            <p:ph idx="1"/>
-          </p:nvPr>
-        </p:nvSpPr>
-        <p:spPr>
-          <a:xfrm>
-            <a:off x="657717" y="1661628"/>
-            <a:ext cx="10876566" cy="3936532"/>
-          </a:xfrm>
-        </p:spPr>
-        <p:txBody>
-          <a:bodyPr>
-            <a:normAutofit lnSpcReduction="10000"/>
-          </a:bodyPr>
-          <a:lstStyle/>
-          <a:p>
-            <a:pPr marL="285750" indent="-285750">
-              <a:lnSpc>
-                <a:spcPct val="150000"/>
-              </a:lnSpc>
-              <a:buFont typeface="Wingdings" panose="05000000000000000000" pitchFamily="2" charset="2"/>
-              <a:buChar char="v"/>
-            </a:pPr>
-            <a:r>
-              <a:rPr lang="ko-KR" altLang="en-US" dirty="0">
-                <a:latin typeface="맑은 고딕 Semilight" panose="020B0502040204020203" pitchFamily="50" charset="-127"/>
-                <a:ea typeface="맑은 고딕 Semilight" panose="020B0502040204020203" pitchFamily="50" charset="-127"/>
-                <a:cs typeface="맑은 고딕 Semilight" panose="020B0502040204020203" pitchFamily="50" charset="-127"/>
-              </a:rPr>
-              <a:t>불확실한 결과를 예측하기 위해 반복적인 무작위 추출을 사용하는 통계적 기법</a:t>
-            </a:r>
-            <a:endParaRPr lang="en-US" altLang="ko-KR" dirty="0">
-              <a:latin typeface="맑은 고딕 Semilight" panose="020B0502040204020203" pitchFamily="50" charset="-127"/>
-              <a:ea typeface="맑은 고딕 Semilight" panose="020B0502040204020203" pitchFamily="50" charset="-127"/>
-              <a:cs typeface="맑은 고딕 Semilight" panose="020B0502040204020203" pitchFamily="50" charset="-127"/>
-            </a:endParaRPr>
-          </a:p>
-          <a:p>
-            <a:pPr marL="285750" indent="-285750">
-              <a:lnSpc>
-                <a:spcPct val="150000"/>
-              </a:lnSpc>
-              <a:buFont typeface="Wingdings" panose="05000000000000000000" pitchFamily="2" charset="2"/>
-              <a:buChar char="v"/>
-            </a:pPr>
-            <a:r>
-              <a:rPr lang="ko-KR" altLang="en-US" dirty="0">
-                <a:latin typeface="맑은 고딕 Semilight" panose="020B0502040204020203" pitchFamily="50" charset="-127"/>
-                <a:ea typeface="맑은 고딕 Semilight" panose="020B0502040204020203" pitchFamily="50" charset="-127"/>
-                <a:cs typeface="맑은 고딕 Semilight" panose="020B0502040204020203" pitchFamily="50" charset="-127"/>
-              </a:rPr>
-              <a:t>결과가 확률에 의존하는 도박처럼</a:t>
-            </a:r>
-            <a:r>
-              <a:rPr lang="en-US" altLang="ko-KR" dirty="0">
-                <a:latin typeface="맑은 고딕 Semilight" panose="020B0502040204020203" pitchFamily="50" charset="-127"/>
-                <a:ea typeface="맑은 고딕 Semilight" panose="020B0502040204020203" pitchFamily="50" charset="-127"/>
-                <a:cs typeface="맑은 고딕 Semilight" panose="020B0502040204020203" pitchFamily="50" charset="-127"/>
-              </a:rPr>
-              <a:t>, </a:t>
-            </a:r>
-            <a:r>
-              <a:rPr lang="ko-KR" altLang="en-US" dirty="0">
-                <a:latin typeface="맑은 고딕 Semilight" panose="020B0502040204020203" pitchFamily="50" charset="-127"/>
-                <a:ea typeface="맑은 고딕 Semilight" panose="020B0502040204020203" pitchFamily="50" charset="-127"/>
-                <a:cs typeface="맑은 고딕 Semilight" panose="020B0502040204020203" pitchFamily="50" charset="-127"/>
-              </a:rPr>
-              <a:t>수학적으로 계산하기 너무 복잡한 문제들을 수만 번의 가상 실험을 통해 그 근삿값을 찾아내는 방식</a:t>
-            </a:r>
-            <a:endParaRPr lang="en-US" altLang="ko-KR" dirty="0">
-              <a:latin typeface="맑은 고딕 Semilight" panose="020B0502040204020203" pitchFamily="50" charset="-127"/>
-              <a:ea typeface="맑은 고딕 Semilight" panose="020B0502040204020203" pitchFamily="50" charset="-127"/>
-              <a:cs typeface="맑은 고딕 Semilight" panose="020B0502040204020203" pitchFamily="50" charset="-127"/>
-            </a:endParaRPr>
-          </a:p>
-          <a:p>
-            <a:pPr marL="285750" indent="-285750">
-              <a:lnSpc>
-                <a:spcPct val="150000"/>
-              </a:lnSpc>
-              <a:buFont typeface="Wingdings" panose="05000000000000000000" pitchFamily="2" charset="2"/>
-              <a:buChar char="v"/>
-            </a:pPr>
-            <a:r>
-              <a:rPr lang="ko-KR" altLang="en-US" b="1" dirty="0" err="1">
-                <a:latin typeface="맑은 고딕 Semilight" panose="020B0502040204020203" pitchFamily="50" charset="-127"/>
-                <a:ea typeface="맑은 고딕 Semilight" panose="020B0502040204020203" pitchFamily="50" charset="-127"/>
-                <a:cs typeface="맑은 고딕 Semilight" panose="020B0502040204020203" pitchFamily="50" charset="-127"/>
-              </a:rPr>
-              <a:t>몬테카를로의</a:t>
-            </a:r>
-            <a:r>
-              <a:rPr lang="ko-KR" altLang="en-US" b="1" dirty="0">
-                <a:latin typeface="맑은 고딕 Semilight" panose="020B0502040204020203" pitchFamily="50" charset="-127"/>
-                <a:ea typeface="맑은 고딕 Semilight" panose="020B0502040204020203" pitchFamily="50" charset="-127"/>
-                <a:cs typeface="맑은 고딕 Semilight" panose="020B0502040204020203" pitchFamily="50" charset="-127"/>
-              </a:rPr>
-              <a:t> 작동 원리</a:t>
-            </a:r>
-          </a:p>
-          <a:p>
-            <a:pPr marL="742950" lvl="1" indent="-285750">
-              <a:lnSpc>
-                <a:spcPct val="150000"/>
-              </a:lnSpc>
-              <a:buFont typeface="Wingdings" panose="05000000000000000000" pitchFamily="2" charset="2"/>
-              <a:buChar char="v"/>
-            </a:pPr>
-            <a:r>
-              <a:rPr lang="ko-KR" altLang="en-US" b="1" dirty="0">
-                <a:latin typeface="맑은 고딕 Semilight" panose="020B0502040204020203" pitchFamily="50" charset="-127"/>
-                <a:ea typeface="맑은 고딕 Semilight" panose="020B0502040204020203" pitchFamily="50" charset="-127"/>
-                <a:cs typeface="맑은 고딕 Semilight" panose="020B0502040204020203" pitchFamily="50" charset="-127"/>
-              </a:rPr>
-              <a:t>변수 정의</a:t>
-            </a:r>
-            <a:r>
-              <a:rPr lang="en-US" altLang="ko-KR" b="1" dirty="0">
-                <a:latin typeface="맑은 고딕 Semilight" panose="020B0502040204020203" pitchFamily="50" charset="-127"/>
-                <a:ea typeface="맑은 고딕 Semilight" panose="020B0502040204020203" pitchFamily="50" charset="-127"/>
-                <a:cs typeface="맑은 고딕 Semilight" panose="020B0502040204020203" pitchFamily="50" charset="-127"/>
-              </a:rPr>
-              <a:t>:</a:t>
-            </a:r>
-            <a:r>
-              <a:rPr lang="ko-KR" altLang="en-US" dirty="0">
-                <a:latin typeface="맑은 고딕 Semilight" panose="020B0502040204020203" pitchFamily="50" charset="-127"/>
-                <a:ea typeface="맑은 고딕 Semilight" panose="020B0502040204020203" pitchFamily="50" charset="-127"/>
-                <a:cs typeface="맑은 고딕 Semilight" panose="020B0502040204020203" pitchFamily="50" charset="-127"/>
-              </a:rPr>
-              <a:t> 결과에 영향을 주는 불확실한 요소들을 정의</a:t>
-            </a:r>
-            <a:endParaRPr lang="en-US" altLang="ko-KR" dirty="0">
-              <a:latin typeface="맑은 고딕 Semilight" panose="020B0502040204020203" pitchFamily="50" charset="-127"/>
-              <a:ea typeface="맑은 고딕 Semilight" panose="020B0502040204020203" pitchFamily="50" charset="-127"/>
-              <a:cs typeface="맑은 고딕 Semilight" panose="020B0502040204020203" pitchFamily="50" charset="-127"/>
-            </a:endParaRPr>
-          </a:p>
-          <a:p>
-            <a:pPr marL="742950" lvl="1" indent="-285750">
-              <a:lnSpc>
-                <a:spcPct val="150000"/>
-              </a:lnSpc>
-              <a:buFont typeface="Wingdings" panose="05000000000000000000" pitchFamily="2" charset="2"/>
-              <a:buChar char="v"/>
-            </a:pPr>
-            <a:r>
-              <a:rPr lang="ko-KR" altLang="en-US" b="1" dirty="0">
-                <a:latin typeface="맑은 고딕 Semilight" panose="020B0502040204020203" pitchFamily="50" charset="-127"/>
-                <a:ea typeface="맑은 고딕 Semilight" panose="020B0502040204020203" pitchFamily="50" charset="-127"/>
-                <a:cs typeface="맑은 고딕 Semilight" panose="020B0502040204020203" pitchFamily="50" charset="-127"/>
-              </a:rPr>
-              <a:t>확률 분포 할당</a:t>
-            </a:r>
-            <a:r>
-              <a:rPr lang="en-US" altLang="ko-KR" b="1" dirty="0">
-                <a:latin typeface="맑은 고딕 Semilight" panose="020B0502040204020203" pitchFamily="50" charset="-127"/>
-                <a:ea typeface="맑은 고딕 Semilight" panose="020B0502040204020203" pitchFamily="50" charset="-127"/>
-                <a:cs typeface="맑은 고딕 Semilight" panose="020B0502040204020203" pitchFamily="50" charset="-127"/>
-              </a:rPr>
-              <a:t>:</a:t>
-            </a:r>
-            <a:r>
-              <a:rPr lang="ko-KR" altLang="en-US" dirty="0">
-                <a:latin typeface="맑은 고딕 Semilight" panose="020B0502040204020203" pitchFamily="50" charset="-127"/>
-                <a:ea typeface="맑은 고딕 Semilight" panose="020B0502040204020203" pitchFamily="50" charset="-127"/>
-                <a:cs typeface="맑은 고딕 Semilight" panose="020B0502040204020203" pitchFamily="50" charset="-127"/>
-              </a:rPr>
-              <a:t> 각 변수가 가질 수 있는 값의 범위와 확률</a:t>
-            </a:r>
-            <a:r>
-              <a:rPr lang="en-US" altLang="ko-KR" dirty="0">
-                <a:latin typeface="맑은 고딕 Semilight" panose="020B0502040204020203" pitchFamily="50" charset="-127"/>
-                <a:ea typeface="맑은 고딕 Semilight" panose="020B0502040204020203" pitchFamily="50" charset="-127"/>
-                <a:cs typeface="맑은 고딕 Semilight" panose="020B0502040204020203" pitchFamily="50" charset="-127"/>
-              </a:rPr>
-              <a:t>(</a:t>
-            </a:r>
-            <a:r>
-              <a:rPr lang="ko-KR" altLang="en-US" dirty="0">
-                <a:latin typeface="맑은 고딕 Semilight" panose="020B0502040204020203" pitchFamily="50" charset="-127"/>
-                <a:ea typeface="맑은 고딕 Semilight" panose="020B0502040204020203" pitchFamily="50" charset="-127"/>
-                <a:cs typeface="맑은 고딕 Semilight" panose="020B0502040204020203" pitchFamily="50" charset="-127"/>
-              </a:rPr>
-              <a:t>정규분포 등</a:t>
-            </a:r>
-            <a:r>
-              <a:rPr lang="en-US" altLang="ko-KR" dirty="0">
-                <a:latin typeface="맑은 고딕 Semilight" panose="020B0502040204020203" pitchFamily="50" charset="-127"/>
-                <a:ea typeface="맑은 고딕 Semilight" panose="020B0502040204020203" pitchFamily="50" charset="-127"/>
-                <a:cs typeface="맑은 고딕 Semilight" panose="020B0502040204020203" pitchFamily="50" charset="-127"/>
-              </a:rPr>
-              <a:t>)</a:t>
-            </a:r>
-            <a:r>
-              <a:rPr lang="ko-KR" altLang="en-US" dirty="0">
-                <a:latin typeface="맑은 고딕 Semilight" panose="020B0502040204020203" pitchFamily="50" charset="-127"/>
-                <a:ea typeface="맑은 고딕 Semilight" panose="020B0502040204020203" pitchFamily="50" charset="-127"/>
-                <a:cs typeface="맑은 고딕 Semilight" panose="020B0502040204020203" pitchFamily="50" charset="-127"/>
-              </a:rPr>
-              <a:t>을 설정</a:t>
-            </a:r>
-            <a:endParaRPr lang="en-US" altLang="ko-KR" dirty="0">
-              <a:latin typeface="맑은 고딕 Semilight" panose="020B0502040204020203" pitchFamily="50" charset="-127"/>
-              <a:ea typeface="맑은 고딕 Semilight" panose="020B0502040204020203" pitchFamily="50" charset="-127"/>
-              <a:cs typeface="맑은 고딕 Semilight" panose="020B0502040204020203" pitchFamily="50" charset="-127"/>
-            </a:endParaRPr>
-          </a:p>
-          <a:p>
-            <a:pPr marL="742950" lvl="1" indent="-285750">
-              <a:lnSpc>
-                <a:spcPct val="150000"/>
-              </a:lnSpc>
-              <a:buFont typeface="Wingdings" panose="05000000000000000000" pitchFamily="2" charset="2"/>
-              <a:buChar char="v"/>
-            </a:pPr>
-            <a:r>
-              <a:rPr lang="ko-KR" altLang="en-US" b="1" dirty="0">
-                <a:latin typeface="맑은 고딕 Semilight" panose="020B0502040204020203" pitchFamily="50" charset="-127"/>
-                <a:ea typeface="맑은 고딕 Semilight" panose="020B0502040204020203" pitchFamily="50" charset="-127"/>
-                <a:cs typeface="맑은 고딕 Semilight" panose="020B0502040204020203" pitchFamily="50" charset="-127"/>
-              </a:rPr>
-              <a:t>반복 실험</a:t>
-            </a:r>
-            <a:r>
-              <a:rPr lang="en-US" altLang="ko-KR" b="1" dirty="0">
-                <a:latin typeface="맑은 고딕 Semilight" panose="020B0502040204020203" pitchFamily="50" charset="-127"/>
-                <a:ea typeface="맑은 고딕 Semilight" panose="020B0502040204020203" pitchFamily="50" charset="-127"/>
-                <a:cs typeface="맑은 고딕 Semilight" panose="020B0502040204020203" pitchFamily="50" charset="-127"/>
-              </a:rPr>
-              <a:t>:</a:t>
-            </a:r>
-            <a:r>
-              <a:rPr lang="ko-KR" altLang="en-US" dirty="0">
-                <a:latin typeface="맑은 고딕 Semilight" panose="020B0502040204020203" pitchFamily="50" charset="-127"/>
-                <a:ea typeface="맑은 고딕 Semilight" panose="020B0502040204020203" pitchFamily="50" charset="-127"/>
-                <a:cs typeface="맑은 고딕 Semilight" panose="020B0502040204020203" pitchFamily="50" charset="-127"/>
-              </a:rPr>
-              <a:t> 컴퓨터를 이용해 무작위 값을 입력하며 수천</a:t>
-            </a:r>
-            <a:r>
-              <a:rPr lang="en-US" altLang="ko-KR" dirty="0">
-                <a:latin typeface="맑은 고딕 Semilight" panose="020B0502040204020203" pitchFamily="50" charset="-127"/>
-                <a:ea typeface="맑은 고딕 Semilight" panose="020B0502040204020203" pitchFamily="50" charset="-127"/>
-                <a:cs typeface="맑은 고딕 Semilight" panose="020B0502040204020203" pitchFamily="50" charset="-127"/>
-              </a:rPr>
-              <a:t>, </a:t>
-            </a:r>
-            <a:r>
-              <a:rPr lang="ko-KR" altLang="en-US" dirty="0">
-                <a:latin typeface="맑은 고딕 Semilight" panose="020B0502040204020203" pitchFamily="50" charset="-127"/>
-                <a:ea typeface="맑은 고딕 Semilight" panose="020B0502040204020203" pitchFamily="50" charset="-127"/>
-                <a:cs typeface="맑은 고딕 Semilight" panose="020B0502040204020203" pitchFamily="50" charset="-127"/>
-              </a:rPr>
-              <a:t>수만 번의 시뮬레이션을 실행</a:t>
-            </a:r>
-            <a:endParaRPr lang="en-US" altLang="ko-KR" dirty="0">
-              <a:latin typeface="맑은 고딕 Semilight" panose="020B0502040204020203" pitchFamily="50" charset="-127"/>
-              <a:ea typeface="맑은 고딕 Semilight" panose="020B0502040204020203" pitchFamily="50" charset="-127"/>
-              <a:cs typeface="맑은 고딕 Semilight" panose="020B0502040204020203" pitchFamily="50" charset="-127"/>
-            </a:endParaRPr>
-          </a:p>
-          <a:p>
-            <a:pPr marL="742950" lvl="1" indent="-285750">
-              <a:lnSpc>
-                <a:spcPct val="150000"/>
-              </a:lnSpc>
-              <a:buFont typeface="Wingdings" panose="05000000000000000000" pitchFamily="2" charset="2"/>
-              <a:buChar char="v"/>
-            </a:pPr>
-            <a:r>
-              <a:rPr lang="ko-KR" altLang="en-US" b="1" dirty="0">
-                <a:latin typeface="맑은 고딕 Semilight" panose="020B0502040204020203" pitchFamily="50" charset="-127"/>
-                <a:ea typeface="맑은 고딕 Semilight" panose="020B0502040204020203" pitchFamily="50" charset="-127"/>
-                <a:cs typeface="맑은 고딕 Semilight" panose="020B0502040204020203" pitchFamily="50" charset="-127"/>
-              </a:rPr>
-              <a:t>결과 분석</a:t>
-            </a:r>
-            <a:r>
-              <a:rPr lang="en-US" altLang="ko-KR" b="1" dirty="0">
-                <a:latin typeface="맑은 고딕 Semilight" panose="020B0502040204020203" pitchFamily="50" charset="-127"/>
-                <a:ea typeface="맑은 고딕 Semilight" panose="020B0502040204020203" pitchFamily="50" charset="-127"/>
-                <a:cs typeface="맑은 고딕 Semilight" panose="020B0502040204020203" pitchFamily="50" charset="-127"/>
-              </a:rPr>
-              <a:t>:</a:t>
-            </a:r>
-            <a:r>
-              <a:rPr lang="ko-KR" altLang="en-US" dirty="0">
-                <a:latin typeface="맑은 고딕 Semilight" panose="020B0502040204020203" pitchFamily="50" charset="-127"/>
-                <a:ea typeface="맑은 고딕 Semilight" panose="020B0502040204020203" pitchFamily="50" charset="-127"/>
-                <a:cs typeface="맑은 고딕 Semilight" panose="020B0502040204020203" pitchFamily="50" charset="-127"/>
-              </a:rPr>
-              <a:t> 도출된 수많은 결과값의 평균이나 분포를 통해 최종 결과를 예측</a:t>
-            </a:r>
-            <a:endParaRPr lang="en-US" altLang="ko-KR" dirty="0">
-              <a:latin typeface="맑은 고딕 Semilight" panose="020B0502040204020203" pitchFamily="50" charset="-127"/>
-              <a:ea typeface="맑은 고딕 Semilight" panose="020B0502040204020203" pitchFamily="50" charset="-127"/>
-              <a:cs typeface="맑은 고딕 Semilight" panose="020B0502040204020203" pitchFamily="50" charset="-127"/>
-            </a:endParaRPr>
-          </a:p>
-        </p:txBody>
-      </p:sp>
-      <p:sp>
-        <p:nvSpPr>
-          <p:cNvPr id="6" name="제목 1">
-            <a:extLst>
-              <a:ext uri="{FF2B5EF4-FFF2-40B4-BE49-F238E27FC236}">
-                <a16:creationId xmlns:a16="http://schemas.microsoft.com/office/drawing/2014/main" id="{F1BE72C5-38C4-1EFB-EF33-005F74E51523}"/>
-              </a:ext>
-            </a:extLst>
-          </p:cNvPr>
-          <p:cNvSpPr>
-            <a:spLocks noGrp="1"/>
-          </p:cNvSpPr>
-          <p:nvPr>
-            <p:ph type="title"/>
-          </p:nvPr>
-        </p:nvSpPr>
-        <p:spPr>
-          <a:xfrm>
-            <a:off x="915383" y="139084"/>
-            <a:ext cx="10353762" cy="766439"/>
-          </a:xfrm>
-        </p:spPr>
-        <p:txBody>
-          <a:bodyPr>
-            <a:normAutofit/>
-          </a:bodyPr>
-          <a:lstStyle/>
-          <a:p>
-            <a:r>
-              <a:rPr lang="en-US" altLang="ko-KR" b="1" cap="none" dirty="0">
-                <a:latin typeface="Times New Roman" panose="02020603050405020304" pitchFamily="18" charset="0"/>
-                <a:ea typeface="ADLaM Display" panose="02010000000000000000" pitchFamily="2" charset="0"/>
-                <a:cs typeface="Times New Roman" panose="02020603050405020304" pitchFamily="18" charset="0"/>
-              </a:rPr>
-              <a:t>Montecarlo Simulation</a:t>
-            </a:r>
-            <a:endParaRPr lang="ko-KR" altLang="en-US" b="1" cap="none" dirty="0">
-              <a:latin typeface="Times New Roman" panose="02020603050405020304" pitchFamily="18" charset="0"/>
-              <a:cs typeface="Times New Roman" panose="02020603050405020304" pitchFamily="18" charset="0"/>
-            </a:endParaRPr>
-          </a:p>
-        </p:txBody>
-      </p:sp>
-    </p:spTree>
-    <p:extLst>
-      <p:ext uri="{BB962C8B-B14F-4D97-AF65-F5344CB8AC3E}">
-        <p14:creationId xmlns:p14="http://schemas.microsoft.com/office/powerpoint/2010/main" val="1126723429"/>
-      </p:ext>
-    </p:extLst>
-  </p:cSld>
-  <p:clrMapOvr>
-    <a:masterClrMapping/>
-  </p:clrMapOvr>
-  <mc:AlternateContent xmlns:mc="http://schemas.openxmlformats.org/markup-compatibility/2006" xmlns:p14="http://schemas.microsoft.com/office/powerpoint/2010/main">
-    <mc:Choice Requires="p14">
-      <p:transition spd="med" p14:dur="700">
-        <p:fade/>
-      </p:transition>
-    </mc:Choice>
-    <mc:Fallback xmlns="">
-      <p:transition spd="med">
-        <p:fade/>
-      </p:transition>
-    </mc:Fallback>
-  </mc:AlternateContent>
-</p:sld>
-</file>
-
 <file path=ppt/slides/slide2.xml><?xml version="1.0" encoding="utf-8"?>
 <p:sld xmlns:a="http://schemas.openxmlformats.org/drawingml/2006/main" xmlns:r="http://schemas.openxmlformats.org/officeDocument/2006/relationships" xmlns:p="http://schemas.openxmlformats.org/presentationml/2006/main">
   <p:cSld>
@@ -15721,5220 +13485,6 @@
   <p:clrMapOvr>
     <a:masterClrMapping/>
   </p:clrMapOvr>
-</p:sld>
-</file>
-
-<file path=ppt/slides/slide20.xml><?xml version="1.0" encoding="utf-8"?>
-<p:sld xmlns:a="http://schemas.openxmlformats.org/drawingml/2006/main" xmlns:r="http://schemas.openxmlformats.org/officeDocument/2006/relationships" xmlns:p="http://schemas.openxmlformats.org/presentationml/2006/main">
-  <p:cSld>
-    <p:spTree>
-      <p:nvGrpSpPr>
-        <p:cNvPr id="1" name="">
-          <a:extLst>
-            <a:ext uri="{FF2B5EF4-FFF2-40B4-BE49-F238E27FC236}">
-              <a16:creationId xmlns:a16="http://schemas.microsoft.com/office/drawing/2014/main" id="{4F32D5AF-0F51-91DE-64BD-5E17CEF9AA79}"/>
-            </a:ext>
-          </a:extLst>
-        </p:cNvPr>
-        <p:cNvGrpSpPr/>
-        <p:nvPr/>
-      </p:nvGrpSpPr>
-      <p:grpSpPr>
-        <a:xfrm>
-          <a:off x="0" y="0"/>
-          <a:ext cx="0" cy="0"/>
-          <a:chOff x="0" y="0"/>
-          <a:chExt cx="0" cy="0"/>
-        </a:xfrm>
-      </p:grpSpPr>
-      <p:sp>
-        <p:nvSpPr>
-          <p:cNvPr id="4" name="TextBox 3">
-            <a:extLst>
-              <a:ext uri="{FF2B5EF4-FFF2-40B4-BE49-F238E27FC236}">
-                <a16:creationId xmlns:a16="http://schemas.microsoft.com/office/drawing/2014/main" id="{E724D8FB-4BA4-B532-2690-FF91AAEE20BE}"/>
-              </a:ext>
-            </a:extLst>
-          </p:cNvPr>
-          <p:cNvSpPr txBox="1"/>
-          <p:nvPr/>
-        </p:nvSpPr>
-        <p:spPr>
-          <a:xfrm>
-            <a:off x="767408" y="1196753"/>
-            <a:ext cx="3062912" cy="970843"/>
-          </a:xfrm>
-          <a:prstGeom prst="rect">
-            <a:avLst/>
-          </a:prstGeom>
-          <a:solidFill>
-            <a:schemeClr val="bg1">
-              <a:lumMod val="95000"/>
-            </a:schemeClr>
-          </a:solidFill>
-        </p:spPr>
-        <p:txBody>
-          <a:bodyPr wrap="square" rtlCol="0">
-            <a:spAutoFit/>
-          </a:bodyPr>
-          <a:lstStyle/>
-          <a:p>
-            <a:pPr marL="285750" indent="-285750">
-              <a:lnSpc>
-                <a:spcPct val="150000"/>
-              </a:lnSpc>
-              <a:buFont typeface="Wingdings" panose="05000000000000000000" pitchFamily="2" charset="2"/>
-              <a:buChar char="v"/>
-            </a:pPr>
-            <a:r>
-              <a:rPr lang="ko-KR" altLang="en-US" sz="2000" dirty="0">
-                <a:latin typeface="맑은 고딕 Semilight" panose="020B0502040204020203" pitchFamily="50" charset="-127"/>
-                <a:ea typeface="맑은 고딕 Semilight" panose="020B0502040204020203" pitchFamily="50" charset="-127"/>
-                <a:cs typeface="맑은 고딕 Semilight" panose="020B0502040204020203" pitchFamily="50" charset="-127"/>
-              </a:rPr>
-              <a:t>원주율 구하라 </a:t>
-            </a:r>
-            <a:endParaRPr lang="en-US" altLang="ko-KR" sz="2000" dirty="0">
-              <a:latin typeface="맑은 고딕 Semilight" panose="020B0502040204020203" pitchFamily="50" charset="-127"/>
-              <a:ea typeface="맑은 고딕 Semilight" panose="020B0502040204020203" pitchFamily="50" charset="-127"/>
-              <a:cs typeface="맑은 고딕 Semilight" panose="020B0502040204020203" pitchFamily="50" charset="-127"/>
-            </a:endParaRPr>
-          </a:p>
-          <a:p>
-            <a:pPr marL="285750" indent="-285750">
-              <a:lnSpc>
-                <a:spcPct val="150000"/>
-              </a:lnSpc>
-              <a:buFont typeface="Wingdings" panose="05000000000000000000" pitchFamily="2" charset="2"/>
-              <a:buChar char="v"/>
-            </a:pPr>
-            <a:r>
-              <a:rPr lang="ko-KR" altLang="en-US" sz="2000" dirty="0">
-                <a:latin typeface="맑은 고딕 Semilight" panose="020B0502040204020203" pitchFamily="50" charset="-127"/>
-                <a:ea typeface="맑은 고딕 Semilight" panose="020B0502040204020203" pitchFamily="50" charset="-127"/>
-                <a:cs typeface="맑은 고딕 Semilight" panose="020B0502040204020203" pitchFamily="50" charset="-127"/>
-              </a:rPr>
-              <a:t>원의 면접 구하기</a:t>
-            </a:r>
-            <a:endParaRPr lang="en-US" altLang="ko-KR" sz="2000" dirty="0">
-              <a:latin typeface="맑은 고딕 Semilight" panose="020B0502040204020203" pitchFamily="50" charset="-127"/>
-              <a:ea typeface="맑은 고딕 Semilight" panose="020B0502040204020203" pitchFamily="50" charset="-127"/>
-              <a:cs typeface="맑은 고딕 Semilight" panose="020B0502040204020203" pitchFamily="50" charset="-127"/>
-            </a:endParaRPr>
-          </a:p>
-        </p:txBody>
-      </p:sp>
-      <p:sp>
-        <p:nvSpPr>
-          <p:cNvPr id="9" name="TextBox 8">
-            <a:extLst>
-              <a:ext uri="{FF2B5EF4-FFF2-40B4-BE49-F238E27FC236}">
-                <a16:creationId xmlns:a16="http://schemas.microsoft.com/office/drawing/2014/main" id="{92CE8694-F9D5-0985-6634-DA4CC7CB87C6}"/>
-              </a:ext>
-            </a:extLst>
-          </p:cNvPr>
-          <p:cNvSpPr txBox="1"/>
-          <p:nvPr/>
-        </p:nvSpPr>
-        <p:spPr>
-          <a:xfrm>
-            <a:off x="119336" y="260649"/>
-            <a:ext cx="2592288" cy="584775"/>
-          </a:xfrm>
-          <a:prstGeom prst="rect">
-            <a:avLst/>
-          </a:prstGeom>
-          <a:noFill/>
-        </p:spPr>
-        <p:txBody>
-          <a:bodyPr wrap="square" rtlCol="0">
-            <a:spAutoFit/>
-          </a:bodyPr>
-          <a:lstStyle/>
-          <a:p>
-            <a:r>
-              <a:rPr lang="ko-KR" altLang="en-US" sz="3200" b="1"/>
-              <a:t>문제 풀이</a:t>
-            </a:r>
-          </a:p>
-        </p:txBody>
-      </p:sp>
-      <p:sp>
-        <p:nvSpPr>
-          <p:cNvPr id="3" name="슬라이드 번호 개체 틀 3">
-            <a:extLst>
-              <a:ext uri="{FF2B5EF4-FFF2-40B4-BE49-F238E27FC236}">
-                <a16:creationId xmlns:a16="http://schemas.microsoft.com/office/drawing/2014/main" id="{27E2EF4B-E5C3-7839-EEF5-9C1CFD5C2BFE}"/>
-              </a:ext>
-            </a:extLst>
-          </p:cNvPr>
-          <p:cNvSpPr>
-            <a:spLocks noGrp="1"/>
-          </p:cNvSpPr>
-          <p:nvPr>
-            <p:ph type="sldNum" sz="quarter" idx="12"/>
-          </p:nvPr>
-        </p:nvSpPr>
-        <p:spPr>
-          <a:xfrm>
-            <a:off x="10512862" y="6035582"/>
-            <a:ext cx="753349" cy="365030"/>
-          </a:xfrm>
-        </p:spPr>
-        <p:txBody>
-          <a:bodyPr/>
-          <a:lstStyle/>
-          <a:p>
-            <a:fld id="{D57F1E4F-1CFF-5643-939E-217C01CDF565}" type="slidenum">
-              <a:rPr lang="en-US" smtClean="0"/>
-              <a:pPr/>
-              <a:t>20</a:t>
-            </a:fld>
-            <a:endParaRPr lang="en-US" dirty="0"/>
-          </a:p>
-        </p:txBody>
-      </p:sp>
-      <p:pic>
-        <p:nvPicPr>
-          <p:cNvPr id="7170" name="Picture 2">
-            <a:extLst>
-              <a:ext uri="{FF2B5EF4-FFF2-40B4-BE49-F238E27FC236}">
-                <a16:creationId xmlns:a16="http://schemas.microsoft.com/office/drawing/2014/main" id="{B8BD9749-90DE-98B4-BB97-053D46BCBA9E}"/>
-              </a:ext>
-            </a:extLst>
-          </p:cNvPr>
-          <p:cNvPicPr>
-            <a:picLocks noChangeAspect="1" noChangeArrowheads="1"/>
-          </p:cNvPicPr>
-          <p:nvPr/>
-        </p:nvPicPr>
-        <p:blipFill>
-          <a:blip r:embed="rId3">
-            <a:extLst>
-              <a:ext uri="{28A0092B-C50C-407E-A947-70E740481C1C}">
-                <a14:useLocalDpi xmlns:a14="http://schemas.microsoft.com/office/drawing/2010/main" val="0"/>
-              </a:ext>
-            </a:extLst>
-          </a:blip>
-          <a:srcRect/>
-          <a:stretch>
-            <a:fillRect/>
-          </a:stretch>
-        </p:blipFill>
-        <p:spPr bwMode="auto">
-          <a:xfrm>
-            <a:off x="2329353" y="2387412"/>
-            <a:ext cx="4081607" cy="4013200"/>
-          </a:xfrm>
-          <a:prstGeom prst="rect">
-            <a:avLst/>
-          </a:prstGeom>
-          <a:noFill/>
-          <a:extLst>
-            <a:ext uri="{909E8E84-426E-40DD-AFC4-6F175D3DCCD1}">
-              <a14:hiddenFill xmlns:a14="http://schemas.microsoft.com/office/drawing/2010/main">
-                <a:solidFill>
-                  <a:srgbClr val="FFFFFF"/>
-                </a:solidFill>
-              </a14:hiddenFill>
-            </a:ext>
-          </a:extLst>
-        </p:spPr>
-      </p:pic>
-      <p:pic>
-        <p:nvPicPr>
-          <p:cNvPr id="2" name="Picture 2" descr="한 여자가 노트북 컴퓨터에 타이핑을 하고 있다">
-            <a:extLst>
-              <a:ext uri="{FF2B5EF4-FFF2-40B4-BE49-F238E27FC236}">
-                <a16:creationId xmlns:a16="http://schemas.microsoft.com/office/drawing/2014/main" id="{3D039467-9D9F-1A4F-9F2B-2F0043A27625}"/>
-              </a:ext>
-            </a:extLst>
-          </p:cNvPr>
-          <p:cNvPicPr>
-            <a:picLocks noChangeAspect="1" noChangeArrowheads="1"/>
-          </p:cNvPicPr>
-          <p:nvPr/>
-        </p:nvPicPr>
-        <p:blipFill>
-          <a:blip r:embed="rId4" cstate="print">
-            <a:extLst>
-              <a:ext uri="{28A0092B-C50C-407E-A947-70E740481C1C}">
-                <a14:useLocalDpi xmlns:a14="http://schemas.microsoft.com/office/drawing/2010/main" val="0"/>
-              </a:ext>
-            </a:extLst>
-          </a:blip>
-          <a:srcRect/>
-          <a:stretch>
-            <a:fillRect/>
-          </a:stretch>
-        </p:blipFill>
-        <p:spPr bwMode="auto">
-          <a:xfrm>
-            <a:off x="9869489" y="66676"/>
-            <a:ext cx="2152650" cy="1424329"/>
-          </a:xfrm>
-          <a:prstGeom prst="rect">
-            <a:avLst/>
-          </a:prstGeom>
-          <a:noFill/>
-          <a:extLst>
-            <a:ext uri="{909E8E84-426E-40DD-AFC4-6F175D3DCCD1}">
-              <a14:hiddenFill xmlns:a14="http://schemas.microsoft.com/office/drawing/2010/main">
-                <a:solidFill>
-                  <a:srgbClr val="FFFFFF"/>
-                </a:solidFill>
-              </a14:hiddenFill>
-            </a:ext>
-          </a:extLst>
-        </p:spPr>
-      </p:pic>
-    </p:spTree>
-    <p:extLst>
-      <p:ext uri="{BB962C8B-B14F-4D97-AF65-F5344CB8AC3E}">
-        <p14:creationId xmlns:p14="http://schemas.microsoft.com/office/powerpoint/2010/main" val="2336897357"/>
-      </p:ext>
-    </p:extLst>
-  </p:cSld>
-  <p:clrMapOvr>
-    <a:masterClrMapping/>
-  </p:clrMapOvr>
-  <mc:AlternateContent xmlns:mc="http://schemas.openxmlformats.org/markup-compatibility/2006" xmlns:p14="http://schemas.microsoft.com/office/powerpoint/2010/main">
-    <mc:Choice Requires="p14">
-      <p:transition spd="med" p14:dur="700">
-        <p:fade/>
-      </p:transition>
-    </mc:Choice>
-    <mc:Fallback xmlns="">
-      <p:transition spd="med">
-        <p:fade/>
-      </p:transition>
-    </mc:Fallback>
-  </mc:AlternateContent>
-</p:sld>
-</file>
-
-<file path=ppt/slides/slide21.xml><?xml version="1.0" encoding="utf-8"?>
-<p:sld xmlns:a="http://schemas.openxmlformats.org/drawingml/2006/main" xmlns:r="http://schemas.openxmlformats.org/officeDocument/2006/relationships" xmlns:p="http://schemas.openxmlformats.org/presentationml/2006/main">
-  <p:cSld>
-    <p:spTree>
-      <p:nvGrpSpPr>
-        <p:cNvPr id="1" name="">
-          <a:extLst>
-            <a:ext uri="{FF2B5EF4-FFF2-40B4-BE49-F238E27FC236}">
-              <a16:creationId xmlns:a16="http://schemas.microsoft.com/office/drawing/2014/main" id="{6F3EE1BF-0896-A11C-A3DB-B8AEE4D009AA}"/>
-            </a:ext>
-          </a:extLst>
-        </p:cNvPr>
-        <p:cNvGrpSpPr/>
-        <p:nvPr/>
-      </p:nvGrpSpPr>
-      <p:grpSpPr>
-        <a:xfrm>
-          <a:off x="0" y="0"/>
-          <a:ext cx="0" cy="0"/>
-          <a:chOff x="0" y="0"/>
-          <a:chExt cx="0" cy="0"/>
-        </a:xfrm>
-      </p:grpSpPr>
-      <p:sp>
-        <p:nvSpPr>
-          <p:cNvPr id="4" name="TextBox 3">
-            <a:extLst>
-              <a:ext uri="{FF2B5EF4-FFF2-40B4-BE49-F238E27FC236}">
-                <a16:creationId xmlns:a16="http://schemas.microsoft.com/office/drawing/2014/main" id="{548D7453-40F7-A835-34E6-E534D818D73D}"/>
-              </a:ext>
-            </a:extLst>
-          </p:cNvPr>
-          <p:cNvSpPr txBox="1"/>
-          <p:nvPr/>
-        </p:nvSpPr>
-        <p:spPr>
-          <a:xfrm>
-            <a:off x="767408" y="1196753"/>
-            <a:ext cx="11028352" cy="3778278"/>
-          </a:xfrm>
-          <a:prstGeom prst="rect">
-            <a:avLst/>
-          </a:prstGeom>
-          <a:solidFill>
-            <a:schemeClr val="bg1">
-              <a:lumMod val="95000"/>
-            </a:schemeClr>
-          </a:solidFill>
-        </p:spPr>
-        <p:txBody>
-          <a:bodyPr wrap="square" rtlCol="0">
-            <a:spAutoFit/>
-          </a:bodyPr>
-          <a:lstStyle>
-            <a:defPPr>
-              <a:defRPr lang="en-US"/>
-            </a:defPPr>
-            <a:lvl1pPr marL="342900" indent="-342900">
-              <a:lnSpc>
-                <a:spcPct val="150000"/>
-              </a:lnSpc>
-              <a:buFont typeface="Wingdings" panose="05000000000000000000" pitchFamily="2" charset="2"/>
-              <a:buChar char="§"/>
-              <a:defRPr sz="2000">
-                <a:latin typeface="맑은 고딕 Semilight" panose="020B0502040204020203" pitchFamily="50" charset="-127"/>
-                <a:ea typeface="맑은 고딕 Semilight" panose="020B0502040204020203" pitchFamily="50" charset="-127"/>
-                <a:cs typeface="맑은 고딕 Semilight" panose="020B0502040204020203" pitchFamily="50" charset="-127"/>
-              </a:defRPr>
-            </a:lvl1pPr>
-          </a:lstStyle>
-          <a:p>
-            <a:r>
-              <a:rPr lang="en-US" altLang="ko-KR" sz="1800" dirty="0" err="1">
-                <a:hlinkClick r:id="rId3">
-                  <a:extLst>
-                    <a:ext uri="{A12FA001-AC4F-418D-AE19-62706E023703}">
-                      <ahyp:hlinkClr xmlns:ahyp="http://schemas.microsoft.com/office/drawing/2018/hyperlinkcolor" val="tx"/>
-                    </a:ext>
-                  </a:extLst>
-                </a:hlinkClick>
-              </a:rPr>
-              <a:t>Random_walk</a:t>
-            </a:r>
-            <a:r>
-              <a:rPr lang="en-US" altLang="ko-KR" sz="1800" dirty="0"/>
-              <a:t> </a:t>
-            </a:r>
-            <a:r>
-              <a:rPr lang="ko-KR" altLang="en-US" sz="1800" dirty="0"/>
-              <a:t>는 수학 및 통계학에서 어떤 대상이 매 순간 방향이나 크기를 무작위로 결정하며 이동하는 경로를 의미하며</a:t>
-            </a:r>
-            <a:r>
-              <a:rPr lang="en-US" altLang="ko-KR" sz="1800" dirty="0"/>
-              <a:t>, </a:t>
-            </a:r>
-            <a:r>
-              <a:rPr lang="ko-KR" altLang="en-US" sz="1800" dirty="0"/>
-              <a:t>가장 쉽게 이해하자면 </a:t>
-            </a:r>
-            <a:r>
-              <a:rPr lang="en-US" altLang="ko-KR" sz="1800" dirty="0"/>
-              <a:t>'</a:t>
-            </a:r>
-            <a:r>
-              <a:rPr lang="ko-KR" altLang="en-US" sz="1800" dirty="0"/>
-              <a:t>술 취한 사람의 걸음걸이</a:t>
-            </a:r>
-            <a:r>
-              <a:rPr lang="en-US" altLang="ko-KR" sz="1800" dirty="0"/>
-              <a:t>'</a:t>
-            </a:r>
-            <a:r>
-              <a:rPr lang="ko-KR" altLang="en-US" sz="1800" dirty="0"/>
-              <a:t>를 수학적으로 모델링한 것</a:t>
-            </a:r>
-            <a:endParaRPr lang="en-US" altLang="ko-KR" sz="1800" dirty="0"/>
-          </a:p>
-          <a:p>
-            <a:endParaRPr lang="en-US" altLang="ko-KR" sz="1800" dirty="0"/>
-          </a:p>
-          <a:p>
-            <a:r>
-              <a:rPr lang="ko-KR" altLang="en-US" sz="1800" dirty="0"/>
-              <a:t>어떤 물체</a:t>
-            </a:r>
-            <a:r>
-              <a:rPr lang="en-US" altLang="ko-KR" sz="1800" dirty="0"/>
-              <a:t>(</a:t>
-            </a:r>
-            <a:r>
-              <a:rPr lang="ko-KR" altLang="en-US" sz="1800" dirty="0"/>
-              <a:t>입자</a:t>
-            </a:r>
-            <a:r>
-              <a:rPr lang="en-US" altLang="ko-KR" sz="1800" dirty="0"/>
-              <a:t>)</a:t>
-            </a:r>
-            <a:r>
-              <a:rPr lang="ko-KR" altLang="en-US" sz="1800" dirty="0"/>
-              <a:t>가 원점에서 출발하여 매 단계마다 특정 규칙에 따라 다음 위치를 결정</a:t>
-            </a:r>
-            <a:endParaRPr lang="en-US" altLang="ko-KR" sz="1800" dirty="0"/>
-          </a:p>
-          <a:p>
-            <a:endParaRPr lang="en-US" altLang="ko-KR" sz="1800" dirty="0"/>
-          </a:p>
-          <a:p>
-            <a:r>
-              <a:rPr lang="en-US" altLang="ko-KR" sz="1800" dirty="0"/>
-              <a:t>"</a:t>
-            </a:r>
-            <a:r>
-              <a:rPr lang="ko-KR" altLang="en-US" sz="1800" dirty="0"/>
-              <a:t>다음 위치가 오직 현재 위치에 의해서만 결정되고</a:t>
-            </a:r>
-            <a:r>
-              <a:rPr lang="en-US" altLang="ko-KR" sz="1800" dirty="0"/>
-              <a:t>, </a:t>
-            </a:r>
-            <a:r>
-              <a:rPr lang="ko-KR" altLang="en-US" sz="1800" dirty="0"/>
-              <a:t>이전 경로와는 상관없다</a:t>
-            </a:r>
-            <a:r>
-              <a:rPr lang="en-US" altLang="ko-KR" sz="1800" dirty="0"/>
-              <a:t>"</a:t>
-            </a:r>
-            <a:r>
-              <a:rPr lang="ko-KR" altLang="en-US" sz="1800" dirty="0"/>
-              <a:t>는 것으로</a:t>
-            </a:r>
-            <a:r>
-              <a:rPr lang="en-US" altLang="ko-KR" sz="1800" dirty="0"/>
-              <a:t> </a:t>
-            </a:r>
-            <a:r>
-              <a:rPr lang="ko-KR" altLang="en-US" sz="1800" dirty="0"/>
-              <a:t>이를 확률론에서는 </a:t>
-            </a:r>
-            <a:r>
-              <a:rPr lang="ko-KR" altLang="en-US" sz="1800" dirty="0" err="1"/>
-              <a:t>마르코프</a:t>
-            </a:r>
-            <a:r>
-              <a:rPr lang="ko-KR" altLang="en-US" sz="1800" dirty="0"/>
-              <a:t> 성질</a:t>
-            </a:r>
-            <a:r>
-              <a:rPr lang="en-US" altLang="ko-KR" sz="1800" dirty="0"/>
-              <a:t>(Markov property)</a:t>
-            </a:r>
-            <a:r>
-              <a:rPr lang="ko-KR" altLang="en-US" sz="1800" dirty="0"/>
-              <a:t>을 갖고 있다고 함</a:t>
-            </a:r>
-            <a:endParaRPr lang="en-US" altLang="ko-KR" sz="1800" dirty="0"/>
-          </a:p>
-          <a:p>
-            <a:endParaRPr lang="en-US" altLang="ko-KR" sz="1800" dirty="0"/>
-          </a:p>
-          <a:p>
-            <a:r>
-              <a:rPr lang="ko-KR" altLang="en-US" sz="1800" dirty="0"/>
-              <a:t>지금 위치에서 개구리가 다음에는 어디로 점프할지 모른다</a:t>
-            </a:r>
-            <a:endParaRPr lang="en-US" altLang="ko-KR" sz="1800" dirty="0"/>
-          </a:p>
-        </p:txBody>
-      </p:sp>
-      <p:sp>
-        <p:nvSpPr>
-          <p:cNvPr id="3" name="슬라이드 번호 개체 틀 3">
-            <a:extLst>
-              <a:ext uri="{FF2B5EF4-FFF2-40B4-BE49-F238E27FC236}">
-                <a16:creationId xmlns:a16="http://schemas.microsoft.com/office/drawing/2014/main" id="{2F63A357-A461-C687-AA66-0FA94DA30251}"/>
-              </a:ext>
-            </a:extLst>
-          </p:cNvPr>
-          <p:cNvSpPr>
-            <a:spLocks noGrp="1"/>
-          </p:cNvSpPr>
-          <p:nvPr>
-            <p:ph type="sldNum" sz="quarter" idx="12"/>
-          </p:nvPr>
-        </p:nvSpPr>
-        <p:spPr>
-          <a:xfrm>
-            <a:off x="10512862" y="6035582"/>
-            <a:ext cx="753349" cy="365030"/>
-          </a:xfrm>
-        </p:spPr>
-        <p:txBody>
-          <a:bodyPr/>
-          <a:lstStyle/>
-          <a:p>
-            <a:fld id="{D57F1E4F-1CFF-5643-939E-217C01CDF565}" type="slidenum">
-              <a:rPr lang="en-US" smtClean="0"/>
-              <a:pPr/>
-              <a:t>21</a:t>
-            </a:fld>
-            <a:endParaRPr lang="en-US" dirty="0"/>
-          </a:p>
-        </p:txBody>
-      </p:sp>
-      <p:sp>
-        <p:nvSpPr>
-          <p:cNvPr id="5" name="제목 1">
-            <a:extLst>
-              <a:ext uri="{FF2B5EF4-FFF2-40B4-BE49-F238E27FC236}">
-                <a16:creationId xmlns:a16="http://schemas.microsoft.com/office/drawing/2014/main" id="{8620574C-EA28-4558-65D4-FE1E85ADF258}"/>
-              </a:ext>
-            </a:extLst>
-          </p:cNvPr>
-          <p:cNvSpPr>
-            <a:spLocks noGrp="1"/>
-          </p:cNvSpPr>
-          <p:nvPr>
-            <p:ph type="title"/>
-          </p:nvPr>
-        </p:nvSpPr>
-        <p:spPr>
-          <a:xfrm>
-            <a:off x="915383" y="139084"/>
-            <a:ext cx="10353762" cy="766439"/>
-          </a:xfrm>
-        </p:spPr>
-        <p:txBody>
-          <a:bodyPr>
-            <a:normAutofit/>
-          </a:bodyPr>
-          <a:lstStyle/>
-          <a:p>
-            <a:r>
-              <a:rPr lang="en-US" altLang="ko-KR" b="1" cap="none" dirty="0">
-                <a:latin typeface="Times New Roman" panose="02020603050405020304" pitchFamily="18" charset="0"/>
-                <a:ea typeface="ADLaM Display" panose="02010000000000000000" pitchFamily="2" charset="0"/>
-                <a:cs typeface="Times New Roman" panose="02020603050405020304" pitchFamily="18" charset="0"/>
-              </a:rPr>
-              <a:t>Random</a:t>
-            </a:r>
-            <a:r>
-              <a:rPr lang="ko-KR" altLang="en-US" b="1" cap="none" dirty="0">
-                <a:latin typeface="Times New Roman" panose="02020603050405020304" pitchFamily="18" charset="0"/>
-                <a:ea typeface="ADLaM Display" panose="02010000000000000000" pitchFamily="2" charset="0"/>
-                <a:cs typeface="Times New Roman" panose="02020603050405020304" pitchFamily="18" charset="0"/>
-              </a:rPr>
-              <a:t> </a:t>
-            </a:r>
-            <a:r>
-              <a:rPr lang="en-US" altLang="ko-KR" b="1" cap="none" dirty="0">
-                <a:latin typeface="Times New Roman" panose="02020603050405020304" pitchFamily="18" charset="0"/>
-                <a:ea typeface="ADLaM Display" panose="02010000000000000000" pitchFamily="2" charset="0"/>
-                <a:cs typeface="Times New Roman" panose="02020603050405020304" pitchFamily="18" charset="0"/>
-              </a:rPr>
-              <a:t>walk</a:t>
-            </a:r>
-            <a:endParaRPr lang="ko-KR" altLang="en-US" b="1" cap="none" dirty="0">
-              <a:latin typeface="Times New Roman" panose="02020603050405020304" pitchFamily="18" charset="0"/>
-              <a:cs typeface="Times New Roman" panose="02020603050405020304" pitchFamily="18" charset="0"/>
-            </a:endParaRPr>
-          </a:p>
-        </p:txBody>
-      </p:sp>
-      <p:pic>
-        <p:nvPicPr>
-          <p:cNvPr id="8194" name="Picture 2" descr="undefined">
-            <a:extLst>
-              <a:ext uri="{FF2B5EF4-FFF2-40B4-BE49-F238E27FC236}">
-                <a16:creationId xmlns:a16="http://schemas.microsoft.com/office/drawing/2014/main" id="{42D4BD67-D791-2351-6AC5-8DDB9C25E172}"/>
-              </a:ext>
-            </a:extLst>
-          </p:cNvPr>
-          <p:cNvPicPr>
-            <a:picLocks noChangeAspect="1" noChangeArrowheads="1"/>
-          </p:cNvPicPr>
-          <p:nvPr/>
-        </p:nvPicPr>
-        <p:blipFill>
-          <a:blip r:embed="rId4">
-            <a:extLst>
-              <a:ext uri="{28A0092B-C50C-407E-A947-70E740481C1C}">
-                <a14:useLocalDpi xmlns:a14="http://schemas.microsoft.com/office/drawing/2010/main" val="0"/>
-              </a:ext>
-            </a:extLst>
-          </a:blip>
-          <a:srcRect/>
-          <a:stretch>
-            <a:fillRect/>
-          </a:stretch>
-        </p:blipFill>
-        <p:spPr bwMode="auto">
-          <a:xfrm>
-            <a:off x="7679090" y="3870772"/>
-            <a:ext cx="2833772" cy="2529840"/>
-          </a:xfrm>
-          <a:prstGeom prst="rect">
-            <a:avLst/>
-          </a:prstGeom>
-          <a:noFill/>
-          <a:extLst>
-            <a:ext uri="{909E8E84-426E-40DD-AFC4-6F175D3DCCD1}">
-              <a14:hiddenFill xmlns:a14="http://schemas.microsoft.com/office/drawing/2010/main">
-                <a:solidFill>
-                  <a:srgbClr val="FFFFFF"/>
-                </a:solidFill>
-              </a14:hiddenFill>
-            </a:ext>
-          </a:extLst>
-        </p:spPr>
-      </p:pic>
-    </p:spTree>
-    <p:extLst>
-      <p:ext uri="{BB962C8B-B14F-4D97-AF65-F5344CB8AC3E}">
-        <p14:creationId xmlns:p14="http://schemas.microsoft.com/office/powerpoint/2010/main" val="2353017032"/>
-      </p:ext>
-    </p:extLst>
-  </p:cSld>
-  <p:clrMapOvr>
-    <a:masterClrMapping/>
-  </p:clrMapOvr>
-  <mc:AlternateContent xmlns:mc="http://schemas.openxmlformats.org/markup-compatibility/2006" xmlns:p14="http://schemas.microsoft.com/office/powerpoint/2010/main">
-    <mc:Choice Requires="p14">
-      <p:transition spd="med" p14:dur="700">
-        <p:fade/>
-      </p:transition>
-    </mc:Choice>
-    <mc:Fallback xmlns="">
-      <p:transition spd="med">
-        <p:fade/>
-      </p:transition>
-    </mc:Fallback>
-  </mc:AlternateContent>
-</p:sld>
-</file>
-
-<file path=ppt/slides/slide22.xml><?xml version="1.0" encoding="utf-8"?>
-<p:sld xmlns:a="http://schemas.openxmlformats.org/drawingml/2006/main" xmlns:r="http://schemas.openxmlformats.org/officeDocument/2006/relationships" xmlns:p="http://schemas.openxmlformats.org/presentationml/2006/main">
-  <p:cSld>
-    <p:spTree>
-      <p:nvGrpSpPr>
-        <p:cNvPr id="1" name="">
-          <a:extLst>
-            <a:ext uri="{FF2B5EF4-FFF2-40B4-BE49-F238E27FC236}">
-              <a16:creationId xmlns:a16="http://schemas.microsoft.com/office/drawing/2014/main" id="{4CCDA73D-87E6-4BC7-A2FC-EDFB04155FBD}"/>
-            </a:ext>
-          </a:extLst>
-        </p:cNvPr>
-        <p:cNvGrpSpPr/>
-        <p:nvPr/>
-      </p:nvGrpSpPr>
-      <p:grpSpPr>
-        <a:xfrm>
-          <a:off x="0" y="0"/>
-          <a:ext cx="0" cy="0"/>
-          <a:chOff x="0" y="0"/>
-          <a:chExt cx="0" cy="0"/>
-        </a:xfrm>
-      </p:grpSpPr>
-      <p:sp>
-        <p:nvSpPr>
-          <p:cNvPr id="9" name="제목 1">
-            <a:extLst>
-              <a:ext uri="{FF2B5EF4-FFF2-40B4-BE49-F238E27FC236}">
-                <a16:creationId xmlns:a16="http://schemas.microsoft.com/office/drawing/2014/main" id="{B5D10770-4118-4B52-B1AF-170FDDB915F5}"/>
-              </a:ext>
-            </a:extLst>
-          </p:cNvPr>
-          <p:cNvSpPr>
-            <a:spLocks noGrp="1"/>
-          </p:cNvSpPr>
-          <p:nvPr>
-            <p:ph type="title"/>
-          </p:nvPr>
-        </p:nvSpPr>
-        <p:spPr>
-          <a:xfrm>
-            <a:off x="915383" y="139084"/>
-            <a:ext cx="10353762" cy="766439"/>
-          </a:xfrm>
-        </p:spPr>
-        <p:txBody>
-          <a:bodyPr/>
-          <a:lstStyle/>
-          <a:p>
-            <a:pPr algn="l"/>
-            <a:r>
-              <a:rPr lang="en-US" altLang="ko-KR" cap="none" dirty="0">
-                <a:latin typeface="ADLaM Display" panose="02010000000000000000" pitchFamily="2" charset="0"/>
-                <a:ea typeface="ADLaM Display" panose="02010000000000000000" pitchFamily="2" charset="0"/>
-                <a:cs typeface="ADLaM Display" panose="02010000000000000000" pitchFamily="2" charset="0"/>
-              </a:rPr>
-              <a:t>Hands-on </a:t>
-            </a:r>
-            <a:r>
-              <a:rPr lang="en-US" altLang="ko-KR" cap="none" dirty="0" err="1">
-                <a:latin typeface="ADLaM Display" panose="02010000000000000000" pitchFamily="2" charset="0"/>
-                <a:ea typeface="ADLaM Display" panose="02010000000000000000" pitchFamily="2" charset="0"/>
-                <a:cs typeface="ADLaM Display" panose="02010000000000000000" pitchFamily="2" charset="0"/>
-                <a:hlinkClick r:id="rId2">
-                  <a:extLst>
-                    <a:ext uri="{A12FA001-AC4F-418D-AE19-62706E023703}">
-                      <ahyp:hlinkClr xmlns:ahyp="http://schemas.microsoft.com/office/drawing/2018/hyperlinkcolor" val="tx"/>
-                    </a:ext>
-                  </a:extLst>
-                </a:hlinkClick>
-              </a:rPr>
-              <a:t>Random_Walk_Simulation</a:t>
-            </a:r>
-            <a:endParaRPr lang="ko-KR" altLang="en-US" cap="none" dirty="0">
-              <a:latin typeface="ADLaM Display" panose="02010000000000000000" pitchFamily="2" charset="0"/>
-              <a:cs typeface="ADLaM Display" panose="02010000000000000000" pitchFamily="2" charset="0"/>
-            </a:endParaRPr>
-          </a:p>
-        </p:txBody>
-      </p:sp>
-      <p:sp>
-        <p:nvSpPr>
-          <p:cNvPr id="10" name="내용 개체 틀 2">
-            <a:extLst>
-              <a:ext uri="{FF2B5EF4-FFF2-40B4-BE49-F238E27FC236}">
-                <a16:creationId xmlns:a16="http://schemas.microsoft.com/office/drawing/2014/main" id="{778830F8-C368-2AEB-15EE-D3591AD2E269}"/>
-              </a:ext>
-            </a:extLst>
-          </p:cNvPr>
-          <p:cNvSpPr>
-            <a:spLocks noGrp="1"/>
-          </p:cNvSpPr>
-          <p:nvPr>
-            <p:ph idx="1"/>
-          </p:nvPr>
-        </p:nvSpPr>
-        <p:spPr>
-          <a:xfrm>
-            <a:off x="915383" y="1150966"/>
-            <a:ext cx="10758457" cy="1944876"/>
-          </a:xfrm>
-        </p:spPr>
-        <p:txBody>
-          <a:bodyPr>
-            <a:normAutofit fontScale="77500" lnSpcReduction="20000"/>
-          </a:bodyPr>
-          <a:lstStyle/>
-          <a:p>
-            <a:pPr>
-              <a:lnSpc>
-                <a:spcPct val="150000"/>
-              </a:lnSpc>
-              <a:buFont typeface="Wingdings" panose="05000000000000000000" pitchFamily="2" charset="2"/>
-              <a:buChar char="§"/>
-            </a:pPr>
-            <a:r>
-              <a:rPr lang="en-US" altLang="ko-KR" sz="2100" cap="none" dirty="0">
-                <a:latin typeface="맑은 고딕 Semilight" panose="020B0502040204020203" pitchFamily="50" charset="-127"/>
-                <a:ea typeface="맑은 고딕 Semilight" panose="020B0502040204020203" pitchFamily="50" charset="-127"/>
-                <a:cs typeface="맑은 고딕 Semilight" panose="020B0502040204020203" pitchFamily="50" charset="-127"/>
-              </a:rPr>
-              <a:t>1</a:t>
-            </a:r>
-            <a:r>
-              <a:rPr lang="ko-KR" altLang="en-US" sz="2100" cap="none" dirty="0">
-                <a:latin typeface="맑은 고딕 Semilight" panose="020B0502040204020203" pitchFamily="50" charset="-127"/>
-                <a:ea typeface="맑은 고딕 Semilight" panose="020B0502040204020203" pitchFamily="50" charset="-127"/>
-                <a:cs typeface="맑은 고딕 Semilight" panose="020B0502040204020203" pitchFamily="50" charset="-127"/>
-              </a:rPr>
-              <a:t>차원 단순 랜덤 워크 </a:t>
-            </a:r>
-            <a:r>
-              <a:rPr lang="en-US" altLang="ko-KR" sz="2100" cap="none" dirty="0">
-                <a:latin typeface="맑은 고딕 Semilight" panose="020B0502040204020203" pitchFamily="50" charset="-127"/>
-                <a:ea typeface="맑은 고딕 Semilight" panose="020B0502040204020203" pitchFamily="50" charset="-127"/>
-                <a:cs typeface="맑은 고딕 Semilight" panose="020B0502040204020203" pitchFamily="50" charset="-127"/>
-              </a:rPr>
-              <a:t>(1D Simple Random Walk) - </a:t>
-            </a:r>
-            <a:r>
-              <a:rPr lang="en-US" altLang="ko-KR" sz="2100" cap="none" dirty="0">
-                <a:latin typeface="맑은 고딕 Semilight" panose="020B0502040204020203" pitchFamily="50" charset="-127"/>
-                <a:ea typeface="맑은 고딕 Semilight" panose="020B0502040204020203" pitchFamily="50" charset="-127"/>
-                <a:cs typeface="맑은 고딕 Semilight" panose="020B0502040204020203" pitchFamily="50" charset="-127"/>
-                <a:hlinkClick r:id="rId2">
-                  <a:extLst>
-                    <a:ext uri="{A12FA001-AC4F-418D-AE19-62706E023703}">
-                      <ahyp:hlinkClr xmlns:ahyp="http://schemas.microsoft.com/office/drawing/2018/hyperlinkcolor" val="tx"/>
-                    </a:ext>
-                  </a:extLst>
-                </a:hlinkClick>
-              </a:rPr>
-              <a:t>snippet</a:t>
-            </a:r>
-            <a:endParaRPr lang="en-US" altLang="ko-KR" sz="2100" cap="none" dirty="0">
-              <a:latin typeface="맑은 고딕 Semilight" panose="020B0502040204020203" pitchFamily="50" charset="-127"/>
-              <a:ea typeface="맑은 고딕 Semilight" panose="020B0502040204020203" pitchFamily="50" charset="-127"/>
-              <a:cs typeface="맑은 고딕 Semilight" panose="020B0502040204020203" pitchFamily="50" charset="-127"/>
-            </a:endParaRPr>
-          </a:p>
-          <a:p>
-            <a:pPr>
-              <a:lnSpc>
-                <a:spcPct val="150000"/>
-              </a:lnSpc>
-              <a:buFont typeface="Wingdings" panose="05000000000000000000" pitchFamily="2" charset="2"/>
-              <a:buChar char="§"/>
-            </a:pPr>
-            <a:r>
-              <a:rPr lang="ko-KR" altLang="en-US" sz="2100" cap="none" dirty="0">
-                <a:latin typeface="맑은 고딕 Semilight" panose="020B0502040204020203" pitchFamily="50" charset="-127"/>
-                <a:ea typeface="맑은 고딕 Semilight" panose="020B0502040204020203" pitchFamily="50" charset="-127"/>
-                <a:cs typeface="맑은 고딕 Semilight" panose="020B0502040204020203" pitchFamily="50" charset="-127"/>
-              </a:rPr>
-              <a:t>동전 던지기처럼 앞</a:t>
-            </a:r>
-            <a:r>
-              <a:rPr lang="en-US" altLang="ko-KR" sz="2100" cap="none" dirty="0">
-                <a:latin typeface="맑은 고딕 Semilight" panose="020B0502040204020203" pitchFamily="50" charset="-127"/>
-                <a:ea typeface="맑은 고딕 Semilight" panose="020B0502040204020203" pitchFamily="50" charset="-127"/>
-                <a:cs typeface="맑은 고딕 Semilight" panose="020B0502040204020203" pitchFamily="50" charset="-127"/>
-              </a:rPr>
-              <a:t>(+1) </a:t>
-            </a:r>
-            <a:r>
-              <a:rPr lang="ko-KR" altLang="en-US" sz="2100" cap="none" dirty="0">
-                <a:latin typeface="맑은 고딕 Semilight" panose="020B0502040204020203" pitchFamily="50" charset="-127"/>
-                <a:ea typeface="맑은 고딕 Semilight" panose="020B0502040204020203" pitchFamily="50" charset="-127"/>
-                <a:cs typeface="맑은 고딕 Semilight" panose="020B0502040204020203" pitchFamily="50" charset="-127"/>
-              </a:rPr>
-              <a:t>또는 뒤</a:t>
-            </a:r>
-            <a:r>
-              <a:rPr lang="en-US" altLang="ko-KR" sz="2100" cap="none" dirty="0">
-                <a:latin typeface="맑은 고딕 Semilight" panose="020B0502040204020203" pitchFamily="50" charset="-127"/>
-                <a:ea typeface="맑은 고딕 Semilight" panose="020B0502040204020203" pitchFamily="50" charset="-127"/>
-                <a:cs typeface="맑은 고딕 Semilight" panose="020B0502040204020203" pitchFamily="50" charset="-127"/>
-              </a:rPr>
-              <a:t>(-1)</a:t>
-            </a:r>
-            <a:r>
-              <a:rPr lang="ko-KR" altLang="en-US" sz="2100" cap="none" dirty="0">
-                <a:latin typeface="맑은 고딕 Semilight" panose="020B0502040204020203" pitchFamily="50" charset="-127"/>
-                <a:ea typeface="맑은 고딕 Semilight" panose="020B0502040204020203" pitchFamily="50" charset="-127"/>
-                <a:cs typeface="맑은 고딕 Semilight" panose="020B0502040204020203" pitchFamily="50" charset="-127"/>
-              </a:rPr>
-              <a:t>로만 움직이는 가장 기본인 형태</a:t>
-            </a:r>
-            <a:endParaRPr lang="en-US" altLang="ko-KR" sz="2100" cap="none" dirty="0">
-              <a:latin typeface="맑은 고딕 Semilight" panose="020B0502040204020203" pitchFamily="50" charset="-127"/>
-              <a:ea typeface="맑은 고딕 Semilight" panose="020B0502040204020203" pitchFamily="50" charset="-127"/>
-              <a:cs typeface="맑은 고딕 Semilight" panose="020B0502040204020203" pitchFamily="50" charset="-127"/>
-            </a:endParaRPr>
-          </a:p>
-          <a:p>
-            <a:pPr lvl="1">
-              <a:lnSpc>
-                <a:spcPct val="150000"/>
-              </a:lnSpc>
-              <a:buFont typeface="Wingdings" panose="05000000000000000000" pitchFamily="2" charset="2"/>
-              <a:buChar char="§"/>
-            </a:pPr>
-            <a:r>
-              <a:rPr lang="ko-KR" altLang="en-US" sz="1900" cap="none" dirty="0">
-                <a:latin typeface="맑은 고딕 Semilight" panose="020B0502040204020203" pitchFamily="50" charset="-127"/>
-                <a:ea typeface="맑은 고딕 Semilight" panose="020B0502040204020203" pitchFamily="50" charset="-127"/>
-                <a:cs typeface="맑은 고딕 Semilight" panose="020B0502040204020203" pitchFamily="50" charset="-127"/>
-              </a:rPr>
-              <a:t>이산적 이동으로 매 스텝마다 이동 거리가 항상 </a:t>
-            </a:r>
-            <a:r>
-              <a:rPr lang="en-US" altLang="ko-KR" sz="1900" cap="none" dirty="0">
-                <a:latin typeface="맑은 고딕 Semilight" panose="020B0502040204020203" pitchFamily="50" charset="-127"/>
-                <a:ea typeface="맑은 고딕 Semilight" panose="020B0502040204020203" pitchFamily="50" charset="-127"/>
-                <a:cs typeface="맑은 고딕 Semilight" panose="020B0502040204020203" pitchFamily="50" charset="-127"/>
-              </a:rPr>
-              <a:t>±1</a:t>
-            </a:r>
-          </a:p>
-          <a:p>
-            <a:pPr lvl="1">
-              <a:lnSpc>
-                <a:spcPct val="150000"/>
-              </a:lnSpc>
-              <a:buFont typeface="Wingdings" panose="05000000000000000000" pitchFamily="2" charset="2"/>
-              <a:buChar char="§"/>
-            </a:pPr>
-            <a:r>
-              <a:rPr lang="ko-KR" altLang="en-US" sz="1900" cap="none" dirty="0">
-                <a:latin typeface="맑은 고딕 Semilight" panose="020B0502040204020203" pitchFamily="50" charset="-127"/>
-                <a:ea typeface="맑은 고딕 Semilight" panose="020B0502040204020203" pitchFamily="50" charset="-127"/>
-                <a:cs typeface="맑은 고딕 Semilight" panose="020B0502040204020203" pitchFamily="50" charset="-127"/>
-              </a:rPr>
-              <a:t>움직임이 고정된 크기로 제한됨</a:t>
-            </a:r>
-          </a:p>
-          <a:p>
-            <a:pPr lvl="1">
-              <a:lnSpc>
-                <a:spcPct val="150000"/>
-              </a:lnSpc>
-              <a:buFont typeface="Wingdings" panose="05000000000000000000" pitchFamily="2" charset="2"/>
-              <a:buChar char="§"/>
-            </a:pPr>
-            <a:r>
-              <a:rPr lang="ko-KR" altLang="en-US" sz="1900" cap="none" dirty="0">
-                <a:latin typeface="맑은 고딕 Semilight" panose="020B0502040204020203" pitchFamily="50" charset="-127"/>
-                <a:ea typeface="맑은 고딕 Semilight" panose="020B0502040204020203" pitchFamily="50" charset="-127"/>
-                <a:cs typeface="맑은 고딕 Semilight" panose="020B0502040204020203" pitchFamily="50" charset="-127"/>
-              </a:rPr>
-              <a:t>격자 위를 한 칸씩 움직이는 형태</a:t>
-            </a:r>
-            <a:endParaRPr lang="en-US" altLang="ko-KR" sz="2100" cap="none" dirty="0">
-              <a:latin typeface="맑은 고딕 Semilight" panose="020B0502040204020203" pitchFamily="50" charset="-127"/>
-              <a:ea typeface="맑은 고딕 Semilight" panose="020B0502040204020203" pitchFamily="50" charset="-127"/>
-              <a:cs typeface="맑은 고딕 Semilight" panose="020B0502040204020203" pitchFamily="50" charset="-127"/>
-            </a:endParaRPr>
-          </a:p>
-          <a:p>
-            <a:pPr>
-              <a:lnSpc>
-                <a:spcPct val="150000"/>
-              </a:lnSpc>
-              <a:buFont typeface="Wingdings" panose="05000000000000000000" pitchFamily="2" charset="2"/>
-              <a:buChar char="§"/>
-            </a:pPr>
-            <a:endParaRPr lang="ko-KR" altLang="en-US" cap="none" dirty="0">
-              <a:latin typeface="맑은 고딕 Semilight" panose="020B0502040204020203" pitchFamily="50" charset="-127"/>
-              <a:ea typeface="맑은 고딕 Semilight" panose="020B0502040204020203" pitchFamily="50" charset="-127"/>
-              <a:cs typeface="맑은 고딕 Semilight" panose="020B0502040204020203" pitchFamily="50" charset="-127"/>
-            </a:endParaRPr>
-          </a:p>
-        </p:txBody>
-      </p:sp>
-      <p:sp>
-        <p:nvSpPr>
-          <p:cNvPr id="2" name="슬라이드 번호 개체 틀 3">
-            <a:extLst>
-              <a:ext uri="{FF2B5EF4-FFF2-40B4-BE49-F238E27FC236}">
-                <a16:creationId xmlns:a16="http://schemas.microsoft.com/office/drawing/2014/main" id="{359709FA-185F-DB29-6C38-BC65761D2ACD}"/>
-              </a:ext>
-            </a:extLst>
-          </p:cNvPr>
-          <p:cNvSpPr>
-            <a:spLocks noGrp="1"/>
-          </p:cNvSpPr>
-          <p:nvPr>
-            <p:ph type="sldNum" sz="quarter" idx="12"/>
-          </p:nvPr>
-        </p:nvSpPr>
-        <p:spPr>
-          <a:xfrm>
-            <a:off x="10512862" y="6035582"/>
-            <a:ext cx="753349" cy="365030"/>
-          </a:xfrm>
-        </p:spPr>
-        <p:txBody>
-          <a:bodyPr/>
-          <a:lstStyle/>
-          <a:p>
-            <a:fld id="{D57F1E4F-1CFF-5643-939E-217C01CDF565}" type="slidenum">
-              <a:rPr lang="en-US" smtClean="0"/>
-              <a:pPr/>
-              <a:t>22</a:t>
-            </a:fld>
-            <a:endParaRPr lang="en-US" dirty="0"/>
-          </a:p>
-        </p:txBody>
-      </p:sp>
-      <p:pic>
-        <p:nvPicPr>
-          <p:cNvPr id="9218" name="Picture 2">
-            <a:extLst>
-              <a:ext uri="{FF2B5EF4-FFF2-40B4-BE49-F238E27FC236}">
-                <a16:creationId xmlns:a16="http://schemas.microsoft.com/office/drawing/2014/main" id="{F3A30C30-C05F-6BC7-35EE-85ED5C229FE3}"/>
-              </a:ext>
-            </a:extLst>
-          </p:cNvPr>
-          <p:cNvPicPr>
-            <a:picLocks noChangeAspect="1" noChangeArrowheads="1"/>
-          </p:cNvPicPr>
-          <p:nvPr/>
-        </p:nvPicPr>
-        <p:blipFill>
-          <a:blip r:embed="rId3">
-            <a:extLst>
-              <a:ext uri="{28A0092B-C50C-407E-A947-70E740481C1C}">
-                <a14:useLocalDpi xmlns:a14="http://schemas.microsoft.com/office/drawing/2010/main" val="0"/>
-              </a:ext>
-            </a:extLst>
-          </a:blip>
-          <a:srcRect/>
-          <a:stretch>
-            <a:fillRect/>
-          </a:stretch>
-        </p:blipFill>
-        <p:spPr bwMode="auto">
-          <a:xfrm>
-            <a:off x="1016880" y="3268608"/>
-            <a:ext cx="4973727" cy="2711130"/>
-          </a:xfrm>
-          <a:prstGeom prst="rect">
-            <a:avLst/>
-          </a:prstGeom>
-          <a:noFill/>
-          <a:extLst>
-            <a:ext uri="{909E8E84-426E-40DD-AFC4-6F175D3DCCD1}">
-              <a14:hiddenFill xmlns:a14="http://schemas.microsoft.com/office/drawing/2010/main">
-                <a:solidFill>
-                  <a:srgbClr val="FFFFFF"/>
-                </a:solidFill>
-              </a14:hiddenFill>
-            </a:ext>
-          </a:extLst>
-        </p:spPr>
-      </p:pic>
-      <p:pic>
-        <p:nvPicPr>
-          <p:cNvPr id="9220" name="Picture 4">
-            <a:extLst>
-              <a:ext uri="{FF2B5EF4-FFF2-40B4-BE49-F238E27FC236}">
-                <a16:creationId xmlns:a16="http://schemas.microsoft.com/office/drawing/2014/main" id="{6DC762DC-D1CB-BD44-DAC9-58E9387F2F91}"/>
-              </a:ext>
-            </a:extLst>
-          </p:cNvPr>
-          <p:cNvPicPr>
-            <a:picLocks noChangeAspect="1" noChangeArrowheads="1"/>
-          </p:cNvPicPr>
-          <p:nvPr/>
-        </p:nvPicPr>
-        <p:blipFill>
-          <a:blip r:embed="rId4">
-            <a:extLst>
-              <a:ext uri="{28A0092B-C50C-407E-A947-70E740481C1C}">
-                <a14:useLocalDpi xmlns:a14="http://schemas.microsoft.com/office/drawing/2010/main" val="0"/>
-              </a:ext>
-            </a:extLst>
-          </a:blip>
-          <a:srcRect/>
-          <a:stretch>
-            <a:fillRect/>
-          </a:stretch>
-        </p:blipFill>
-        <p:spPr bwMode="auto">
-          <a:xfrm>
-            <a:off x="6528243" y="2966720"/>
-            <a:ext cx="5537739" cy="3013018"/>
-          </a:xfrm>
-          <a:prstGeom prst="rect">
-            <a:avLst/>
-          </a:prstGeom>
-          <a:noFill/>
-          <a:extLst>
-            <a:ext uri="{909E8E84-426E-40DD-AFC4-6F175D3DCCD1}">
-              <a14:hiddenFill xmlns:a14="http://schemas.microsoft.com/office/drawing/2010/main">
-                <a:solidFill>
-                  <a:srgbClr val="FFFFFF"/>
-                </a:solidFill>
-              </a14:hiddenFill>
-            </a:ext>
-          </a:extLst>
-        </p:spPr>
-      </p:pic>
-      <p:pic>
-        <p:nvPicPr>
-          <p:cNvPr id="3" name="Picture 2" descr="한 여자가 노트북 컴퓨터에 타이핑을 하고 있다">
-            <a:extLst>
-              <a:ext uri="{FF2B5EF4-FFF2-40B4-BE49-F238E27FC236}">
-                <a16:creationId xmlns:a16="http://schemas.microsoft.com/office/drawing/2014/main" id="{3D86F955-DC60-CC44-2659-E1F50A4F8706}"/>
-              </a:ext>
-            </a:extLst>
-          </p:cNvPr>
-          <p:cNvPicPr>
-            <a:picLocks noChangeAspect="1" noChangeArrowheads="1"/>
-          </p:cNvPicPr>
-          <p:nvPr/>
-        </p:nvPicPr>
-        <p:blipFill>
-          <a:blip r:embed="rId5" cstate="print">
-            <a:extLst>
-              <a:ext uri="{28A0092B-C50C-407E-A947-70E740481C1C}">
-                <a14:useLocalDpi xmlns:a14="http://schemas.microsoft.com/office/drawing/2010/main" val="0"/>
-              </a:ext>
-            </a:extLst>
-          </a:blip>
-          <a:srcRect/>
-          <a:stretch>
-            <a:fillRect/>
-          </a:stretch>
-        </p:blipFill>
-        <p:spPr bwMode="auto">
-          <a:xfrm>
-            <a:off x="9869489" y="66676"/>
-            <a:ext cx="2152650" cy="1424329"/>
-          </a:xfrm>
-          <a:prstGeom prst="rect">
-            <a:avLst/>
-          </a:prstGeom>
-          <a:noFill/>
-          <a:extLst>
-            <a:ext uri="{909E8E84-426E-40DD-AFC4-6F175D3DCCD1}">
-              <a14:hiddenFill xmlns:a14="http://schemas.microsoft.com/office/drawing/2010/main">
-                <a:solidFill>
-                  <a:srgbClr val="FFFFFF"/>
-                </a:solidFill>
-              </a14:hiddenFill>
-            </a:ext>
-          </a:extLst>
-        </p:spPr>
-      </p:pic>
-    </p:spTree>
-    <p:extLst>
-      <p:ext uri="{BB962C8B-B14F-4D97-AF65-F5344CB8AC3E}">
-        <p14:creationId xmlns:p14="http://schemas.microsoft.com/office/powerpoint/2010/main" val="2263103306"/>
-      </p:ext>
-    </p:extLst>
-  </p:cSld>
-  <p:clrMapOvr>
-    <a:masterClrMapping/>
-  </p:clrMapOvr>
-</p:sld>
-</file>
-
-<file path=ppt/slides/slide23.xml><?xml version="1.0" encoding="utf-8"?>
-<p:sld xmlns:a="http://schemas.openxmlformats.org/drawingml/2006/main" xmlns:r="http://schemas.openxmlformats.org/officeDocument/2006/relationships" xmlns:p="http://schemas.openxmlformats.org/presentationml/2006/main">
-  <p:cSld>
-    <p:spTree>
-      <p:nvGrpSpPr>
-        <p:cNvPr id="1" name="">
-          <a:extLst>
-            <a:ext uri="{FF2B5EF4-FFF2-40B4-BE49-F238E27FC236}">
-              <a16:creationId xmlns:a16="http://schemas.microsoft.com/office/drawing/2014/main" id="{118EF672-8248-82C7-642A-A1D72654E44B}"/>
-            </a:ext>
-          </a:extLst>
-        </p:cNvPr>
-        <p:cNvGrpSpPr/>
-        <p:nvPr/>
-      </p:nvGrpSpPr>
-      <p:grpSpPr>
-        <a:xfrm>
-          <a:off x="0" y="0"/>
-          <a:ext cx="0" cy="0"/>
-          <a:chOff x="0" y="0"/>
-          <a:chExt cx="0" cy="0"/>
-        </a:xfrm>
-      </p:grpSpPr>
-      <p:sp>
-        <p:nvSpPr>
-          <p:cNvPr id="9" name="제목 1">
-            <a:extLst>
-              <a:ext uri="{FF2B5EF4-FFF2-40B4-BE49-F238E27FC236}">
-                <a16:creationId xmlns:a16="http://schemas.microsoft.com/office/drawing/2014/main" id="{44E6679B-C856-67CB-A498-66743A507019}"/>
-              </a:ext>
-            </a:extLst>
-          </p:cNvPr>
-          <p:cNvSpPr>
-            <a:spLocks noGrp="1"/>
-          </p:cNvSpPr>
-          <p:nvPr>
-            <p:ph type="title"/>
-          </p:nvPr>
-        </p:nvSpPr>
-        <p:spPr>
-          <a:xfrm>
-            <a:off x="915383" y="139084"/>
-            <a:ext cx="10353762" cy="766439"/>
-          </a:xfrm>
-        </p:spPr>
-        <p:txBody>
-          <a:bodyPr/>
-          <a:lstStyle/>
-          <a:p>
-            <a:pPr algn="l"/>
-            <a:r>
-              <a:rPr lang="en-US" altLang="ko-KR" cap="none" dirty="0">
-                <a:latin typeface="ADLaM Display" panose="02010000000000000000" pitchFamily="2" charset="0"/>
-                <a:ea typeface="ADLaM Display" panose="02010000000000000000" pitchFamily="2" charset="0"/>
-                <a:cs typeface="ADLaM Display" panose="02010000000000000000" pitchFamily="2" charset="0"/>
-              </a:rPr>
-              <a:t>Hands-on </a:t>
-            </a:r>
-            <a:r>
-              <a:rPr lang="en-US" altLang="ko-KR" cap="none" dirty="0" err="1">
-                <a:latin typeface="ADLaM Display" panose="02010000000000000000" pitchFamily="2" charset="0"/>
-                <a:ea typeface="ADLaM Display" panose="02010000000000000000" pitchFamily="2" charset="0"/>
-                <a:cs typeface="ADLaM Display" panose="02010000000000000000" pitchFamily="2" charset="0"/>
-                <a:hlinkClick r:id="rId2">
-                  <a:extLst>
-                    <a:ext uri="{A12FA001-AC4F-418D-AE19-62706E023703}">
-                      <ahyp:hlinkClr xmlns:ahyp="http://schemas.microsoft.com/office/drawing/2018/hyperlinkcolor" val="tx"/>
-                    </a:ext>
-                  </a:extLst>
-                </a:hlinkClick>
-              </a:rPr>
-              <a:t>Random_Walk_Simulation</a:t>
-            </a:r>
-            <a:endParaRPr lang="ko-KR" altLang="en-US" cap="none" dirty="0">
-              <a:latin typeface="ADLaM Display" panose="02010000000000000000" pitchFamily="2" charset="0"/>
-              <a:cs typeface="ADLaM Display" panose="02010000000000000000" pitchFamily="2" charset="0"/>
-            </a:endParaRPr>
-          </a:p>
-        </p:txBody>
-      </p:sp>
-      <p:sp>
-        <p:nvSpPr>
-          <p:cNvPr id="10" name="내용 개체 틀 2">
-            <a:extLst>
-              <a:ext uri="{FF2B5EF4-FFF2-40B4-BE49-F238E27FC236}">
-                <a16:creationId xmlns:a16="http://schemas.microsoft.com/office/drawing/2014/main" id="{82EFBD4D-9D50-6C9B-D999-13A9C55F0C6F}"/>
-              </a:ext>
-            </a:extLst>
-          </p:cNvPr>
-          <p:cNvSpPr>
-            <a:spLocks noGrp="1"/>
-          </p:cNvSpPr>
-          <p:nvPr>
-            <p:ph idx="1"/>
-          </p:nvPr>
-        </p:nvSpPr>
-        <p:spPr>
-          <a:xfrm>
-            <a:off x="915383" y="1150965"/>
-            <a:ext cx="10758457" cy="1127163"/>
-          </a:xfrm>
-        </p:spPr>
-        <p:txBody>
-          <a:bodyPr>
-            <a:normAutofit/>
-          </a:bodyPr>
-          <a:lstStyle/>
-          <a:p>
-            <a:pPr>
-              <a:lnSpc>
-                <a:spcPct val="150000"/>
-              </a:lnSpc>
-              <a:buFont typeface="Wingdings" panose="05000000000000000000" pitchFamily="2" charset="2"/>
-              <a:buChar char="§"/>
-            </a:pPr>
-            <a:r>
-              <a:rPr lang="ko-KR" altLang="en-US" sz="2100" cap="none" dirty="0">
-                <a:latin typeface="맑은 고딕 Semilight" panose="020B0502040204020203" pitchFamily="50" charset="-127"/>
-                <a:ea typeface="맑은 고딕 Semilight" panose="020B0502040204020203" pitchFamily="50" charset="-127"/>
-                <a:cs typeface="맑은 고딕 Semilight" panose="020B0502040204020203" pitchFamily="50" charset="-127"/>
-              </a:rPr>
-              <a:t>아래</a:t>
-            </a:r>
-            <a:r>
-              <a:rPr lang="en-US" altLang="ko-KR" sz="2100" cap="none" dirty="0">
-                <a:latin typeface="맑은 고딕 Semilight" panose="020B0502040204020203" pitchFamily="50" charset="-127"/>
-                <a:ea typeface="맑은 고딕 Semilight" panose="020B0502040204020203" pitchFamily="50" charset="-127"/>
-                <a:cs typeface="맑은 고딕 Semilight" panose="020B0502040204020203" pitchFamily="50" charset="-127"/>
-              </a:rPr>
-              <a:t> </a:t>
-            </a:r>
-            <a:r>
-              <a:rPr lang="ko-KR" altLang="en-US" sz="2100" cap="none" dirty="0">
-                <a:latin typeface="맑은 고딕 Semilight" panose="020B0502040204020203" pitchFamily="50" charset="-127"/>
-                <a:ea typeface="맑은 고딕 Semilight" panose="020B0502040204020203" pitchFamily="50" charset="-127"/>
-                <a:cs typeface="맑은 고딕 Semilight" panose="020B0502040204020203" pitchFamily="50" charset="-127"/>
-              </a:rPr>
-              <a:t>모의실험을 베르누이</a:t>
-            </a:r>
-            <a:r>
-              <a:rPr lang="en-US" altLang="ko-KR" sz="2100" cap="none" dirty="0">
-                <a:latin typeface="맑은 고딕 Semilight" panose="020B0502040204020203" pitchFamily="50" charset="-127"/>
-                <a:ea typeface="맑은 고딕 Semilight" panose="020B0502040204020203" pitchFamily="50" charset="-127"/>
-                <a:cs typeface="맑은 고딕 Semilight" panose="020B0502040204020203" pitchFamily="50" charset="-127"/>
-              </a:rPr>
-              <a:t>, </a:t>
-            </a:r>
-            <a:r>
-              <a:rPr lang="ko-KR" altLang="en-US" sz="2100" cap="none" dirty="0">
-                <a:latin typeface="맑은 고딕 Semilight" panose="020B0502040204020203" pitchFamily="50" charset="-127"/>
-                <a:ea typeface="맑은 고딕 Semilight" panose="020B0502040204020203" pitchFamily="50" charset="-127"/>
-                <a:cs typeface="맑은 고딕 Semilight" panose="020B0502040204020203" pitchFamily="50" charset="-127"/>
-              </a:rPr>
-              <a:t>이항분포</a:t>
-            </a:r>
-            <a:r>
-              <a:rPr lang="en-US" altLang="ko-KR" sz="2100" cap="none" dirty="0">
-                <a:latin typeface="맑은 고딕 Semilight" panose="020B0502040204020203" pitchFamily="50" charset="-127"/>
-                <a:ea typeface="맑은 고딕 Semilight" panose="020B0502040204020203" pitchFamily="50" charset="-127"/>
-                <a:cs typeface="맑은 고딕 Semilight" panose="020B0502040204020203" pitchFamily="50" charset="-127"/>
-              </a:rPr>
-              <a:t>, Galton</a:t>
-            </a:r>
-            <a:r>
-              <a:rPr lang="ko-KR" altLang="en-US" sz="2100" cap="none" dirty="0">
-                <a:latin typeface="맑은 고딕 Semilight" panose="020B0502040204020203" pitchFamily="50" charset="-127"/>
-                <a:ea typeface="맑은 고딕 Semilight" panose="020B0502040204020203" pitchFamily="50" charset="-127"/>
-                <a:cs typeface="맑은 고딕 Semilight" panose="020B0502040204020203" pitchFamily="50" charset="-127"/>
-              </a:rPr>
-              <a:t> </a:t>
-            </a:r>
-            <a:r>
-              <a:rPr lang="en-US" altLang="ko-KR" sz="2100" cap="none" dirty="0">
-                <a:latin typeface="맑은 고딕 Semilight" panose="020B0502040204020203" pitchFamily="50" charset="-127"/>
-                <a:ea typeface="맑은 고딕 Semilight" panose="020B0502040204020203" pitchFamily="50" charset="-127"/>
-                <a:cs typeface="맑은 고딕 Semilight" panose="020B0502040204020203" pitchFamily="50" charset="-127"/>
-              </a:rPr>
-              <a:t>Board</a:t>
-            </a:r>
-            <a:r>
-              <a:rPr lang="ko-KR" altLang="en-US" sz="2100" cap="none" dirty="0">
-                <a:latin typeface="맑은 고딕 Semilight" panose="020B0502040204020203" pitchFamily="50" charset="-127"/>
-                <a:ea typeface="맑은 고딕 Semilight" panose="020B0502040204020203" pitchFamily="50" charset="-127"/>
-                <a:cs typeface="맑은 고딕 Semilight" panose="020B0502040204020203" pitchFamily="50" charset="-127"/>
-              </a:rPr>
-              <a:t>와 비교하여 이해하자</a:t>
-            </a:r>
-            <a:endParaRPr lang="en-US" altLang="ko-KR" sz="2100" cap="none" dirty="0">
-              <a:latin typeface="맑은 고딕 Semilight" panose="020B0502040204020203" pitchFamily="50" charset="-127"/>
-              <a:ea typeface="맑은 고딕 Semilight" panose="020B0502040204020203" pitchFamily="50" charset="-127"/>
-              <a:cs typeface="맑은 고딕 Semilight" panose="020B0502040204020203" pitchFamily="50" charset="-127"/>
-            </a:endParaRPr>
-          </a:p>
-          <a:p>
-            <a:pPr lvl="1">
-              <a:lnSpc>
-                <a:spcPct val="150000"/>
-              </a:lnSpc>
-              <a:buFont typeface="Wingdings" panose="05000000000000000000" pitchFamily="2" charset="2"/>
-              <a:buChar char="§"/>
-            </a:pPr>
-            <a:r>
-              <a:rPr lang="en-US" altLang="ko-KR" cap="none" dirty="0">
-                <a:latin typeface="맑은 고딕 Semilight" panose="020B0502040204020203" pitchFamily="50" charset="-127"/>
-                <a:ea typeface="맑은 고딕 Semilight" panose="020B0502040204020203" pitchFamily="50" charset="-127"/>
-                <a:cs typeface="맑은 고딕 Semilight" panose="020B0502040204020203" pitchFamily="50" charset="-127"/>
-              </a:rPr>
-              <a:t> </a:t>
-            </a:r>
-            <a:r>
-              <a:rPr lang="ko-KR" altLang="en-US" cap="none" dirty="0">
-                <a:latin typeface="맑은 고딕 Semilight" panose="020B0502040204020203" pitchFamily="50" charset="-127"/>
-                <a:ea typeface="맑은 고딕 Semilight" panose="020B0502040204020203" pitchFamily="50" charset="-127"/>
-                <a:cs typeface="맑은 고딕 Semilight" panose="020B0502040204020203" pitchFamily="50" charset="-127"/>
-              </a:rPr>
-              <a:t>구슬 </a:t>
-            </a:r>
-            <a:r>
-              <a:rPr lang="en-US" altLang="ko-KR" cap="none" dirty="0">
-                <a:latin typeface="맑은 고딕 Semilight" panose="020B0502040204020203" pitchFamily="50" charset="-127"/>
-                <a:ea typeface="맑은 고딕 Semilight" panose="020B0502040204020203" pitchFamily="50" charset="-127"/>
-                <a:cs typeface="맑은 고딕 Semilight" panose="020B0502040204020203" pitchFamily="50" charset="-127"/>
-              </a:rPr>
-              <a:t>?, single</a:t>
-            </a:r>
-            <a:r>
-              <a:rPr lang="ko-KR" altLang="en-US" cap="none" dirty="0">
-                <a:latin typeface="맑은 고딕 Semilight" panose="020B0502040204020203" pitchFamily="50" charset="-127"/>
-                <a:ea typeface="맑은 고딕 Semilight" panose="020B0502040204020203" pitchFamily="50" charset="-127"/>
-                <a:cs typeface="맑은 고딕 Semilight" panose="020B0502040204020203" pitchFamily="50" charset="-127"/>
-              </a:rPr>
-              <a:t> </a:t>
-            </a:r>
-            <a:r>
-              <a:rPr lang="en-US" altLang="ko-KR" cap="none" dirty="0">
-                <a:latin typeface="맑은 고딕 Semilight" panose="020B0502040204020203" pitchFamily="50" charset="-127"/>
-                <a:ea typeface="맑은 고딕 Semilight" panose="020B0502040204020203" pitchFamily="50" charset="-127"/>
-                <a:cs typeface="맑은 고딕 Semilight" panose="020B0502040204020203" pitchFamily="50" charset="-127"/>
-              </a:rPr>
-              <a:t>random walk ?, </a:t>
-            </a:r>
-            <a:r>
-              <a:rPr lang="ko-KR" altLang="en-US" cap="none" dirty="0">
-                <a:latin typeface="맑은 고딕 Semilight" panose="020B0502040204020203" pitchFamily="50" charset="-127"/>
-                <a:ea typeface="맑은 고딕 Semilight" panose="020B0502040204020203" pitchFamily="50" charset="-127"/>
-                <a:cs typeface="맑은 고딕 Semilight" panose="020B0502040204020203" pitchFamily="50" charset="-127"/>
-              </a:rPr>
-              <a:t>여러 명이 술이 취해 걸으면 최종 어디에 많이 모일까</a:t>
-            </a:r>
-            <a:r>
-              <a:rPr lang="en-US" altLang="ko-KR" cap="none" dirty="0">
-                <a:latin typeface="맑은 고딕 Semilight" panose="020B0502040204020203" pitchFamily="50" charset="-127"/>
-                <a:ea typeface="맑은 고딕 Semilight" panose="020B0502040204020203" pitchFamily="50" charset="-127"/>
-                <a:cs typeface="맑은 고딕 Semilight" panose="020B0502040204020203" pitchFamily="50" charset="-127"/>
-              </a:rPr>
-              <a:t>?</a:t>
-            </a:r>
-          </a:p>
-          <a:p>
-            <a:pPr>
-              <a:lnSpc>
-                <a:spcPct val="150000"/>
-              </a:lnSpc>
-              <a:buFont typeface="Wingdings" panose="05000000000000000000" pitchFamily="2" charset="2"/>
-              <a:buChar char="§"/>
-            </a:pPr>
-            <a:endParaRPr lang="ko-KR" altLang="en-US" cap="none" dirty="0">
-              <a:latin typeface="맑은 고딕 Semilight" panose="020B0502040204020203" pitchFamily="50" charset="-127"/>
-              <a:ea typeface="맑은 고딕 Semilight" panose="020B0502040204020203" pitchFamily="50" charset="-127"/>
-              <a:cs typeface="맑은 고딕 Semilight" panose="020B0502040204020203" pitchFamily="50" charset="-127"/>
-            </a:endParaRPr>
-          </a:p>
-        </p:txBody>
-      </p:sp>
-      <p:sp>
-        <p:nvSpPr>
-          <p:cNvPr id="2" name="슬라이드 번호 개체 틀 3">
-            <a:extLst>
-              <a:ext uri="{FF2B5EF4-FFF2-40B4-BE49-F238E27FC236}">
-                <a16:creationId xmlns:a16="http://schemas.microsoft.com/office/drawing/2014/main" id="{740FA9E5-9DC7-F236-DD83-8D1361045A43}"/>
-              </a:ext>
-            </a:extLst>
-          </p:cNvPr>
-          <p:cNvSpPr>
-            <a:spLocks noGrp="1"/>
-          </p:cNvSpPr>
-          <p:nvPr>
-            <p:ph type="sldNum" sz="quarter" idx="12"/>
-          </p:nvPr>
-        </p:nvSpPr>
-        <p:spPr>
-          <a:xfrm>
-            <a:off x="10512862" y="6035582"/>
-            <a:ext cx="753349" cy="365030"/>
-          </a:xfrm>
-        </p:spPr>
-        <p:txBody>
-          <a:bodyPr/>
-          <a:lstStyle/>
-          <a:p>
-            <a:fld id="{D57F1E4F-1CFF-5643-939E-217C01CDF565}" type="slidenum">
-              <a:rPr lang="en-US" smtClean="0"/>
-              <a:pPr/>
-              <a:t>23</a:t>
-            </a:fld>
-            <a:endParaRPr lang="en-US" dirty="0"/>
-          </a:p>
-        </p:txBody>
-      </p:sp>
-      <p:pic>
-        <p:nvPicPr>
-          <p:cNvPr id="9220" name="Picture 4">
-            <a:extLst>
-              <a:ext uri="{FF2B5EF4-FFF2-40B4-BE49-F238E27FC236}">
-                <a16:creationId xmlns:a16="http://schemas.microsoft.com/office/drawing/2014/main" id="{5503C7CB-F857-9A19-23EF-90925D633EC2}"/>
-              </a:ext>
-            </a:extLst>
-          </p:cNvPr>
-          <p:cNvPicPr>
-            <a:picLocks noChangeAspect="1" noChangeArrowheads="1"/>
-          </p:cNvPicPr>
-          <p:nvPr/>
-        </p:nvPicPr>
-        <p:blipFill>
-          <a:blip r:embed="rId3">
-            <a:extLst>
-              <a:ext uri="{28A0092B-C50C-407E-A947-70E740481C1C}">
-                <a14:useLocalDpi xmlns:a14="http://schemas.microsoft.com/office/drawing/2010/main" val="0"/>
-              </a:ext>
-            </a:extLst>
-          </a:blip>
-          <a:srcRect/>
-          <a:stretch>
-            <a:fillRect/>
-          </a:stretch>
-        </p:blipFill>
-        <p:spPr bwMode="auto">
-          <a:xfrm rot="5400000">
-            <a:off x="2057744" y="2688750"/>
-            <a:ext cx="3591005" cy="3260646"/>
-          </a:xfrm>
-          <a:prstGeom prst="rect">
-            <a:avLst/>
-          </a:prstGeom>
-          <a:noFill/>
-          <a:extLst>
-            <a:ext uri="{909E8E84-426E-40DD-AFC4-6F175D3DCCD1}">
-              <a14:hiddenFill xmlns:a14="http://schemas.microsoft.com/office/drawing/2010/main">
-                <a:solidFill>
-                  <a:srgbClr val="FFFFFF"/>
-                </a:solidFill>
-              </a14:hiddenFill>
-            </a:ext>
-          </a:extLst>
-        </p:spPr>
-      </p:pic>
-      <p:pic>
-        <p:nvPicPr>
-          <p:cNvPr id="3" name="Picture 2" descr="한 여자가 노트북 컴퓨터에 타이핑을 하고 있다">
-            <a:extLst>
-              <a:ext uri="{FF2B5EF4-FFF2-40B4-BE49-F238E27FC236}">
-                <a16:creationId xmlns:a16="http://schemas.microsoft.com/office/drawing/2014/main" id="{EE0FF5CD-1F36-1F02-9B8C-3FF66776338B}"/>
-              </a:ext>
-            </a:extLst>
-          </p:cNvPr>
-          <p:cNvPicPr>
-            <a:picLocks noChangeAspect="1" noChangeArrowheads="1"/>
-          </p:cNvPicPr>
-          <p:nvPr/>
-        </p:nvPicPr>
-        <p:blipFill>
-          <a:blip r:embed="rId4" cstate="print">
-            <a:extLst>
-              <a:ext uri="{28A0092B-C50C-407E-A947-70E740481C1C}">
-                <a14:useLocalDpi xmlns:a14="http://schemas.microsoft.com/office/drawing/2010/main" val="0"/>
-              </a:ext>
-            </a:extLst>
-          </a:blip>
-          <a:srcRect/>
-          <a:stretch>
-            <a:fillRect/>
-          </a:stretch>
-        </p:blipFill>
-        <p:spPr bwMode="auto">
-          <a:xfrm>
-            <a:off x="9869489" y="66676"/>
-            <a:ext cx="2152650" cy="1424329"/>
-          </a:xfrm>
-          <a:prstGeom prst="rect">
-            <a:avLst/>
-          </a:prstGeom>
-          <a:noFill/>
-          <a:extLst>
-            <a:ext uri="{909E8E84-426E-40DD-AFC4-6F175D3DCCD1}">
-              <a14:hiddenFill xmlns:a14="http://schemas.microsoft.com/office/drawing/2010/main">
-                <a:solidFill>
-                  <a:srgbClr val="FFFFFF"/>
-                </a:solidFill>
-              </a14:hiddenFill>
-            </a:ext>
-          </a:extLst>
-        </p:spPr>
-      </p:pic>
-      <p:pic>
-        <p:nvPicPr>
-          <p:cNvPr id="6" name="그림 5">
-            <a:extLst>
-              <a:ext uri="{FF2B5EF4-FFF2-40B4-BE49-F238E27FC236}">
-                <a16:creationId xmlns:a16="http://schemas.microsoft.com/office/drawing/2014/main" id="{D2404FA2-1A94-2E89-9A50-3FF05B24E7C8}"/>
-              </a:ext>
-            </a:extLst>
-          </p:cNvPr>
-          <p:cNvPicPr>
-            <a:picLocks noChangeAspect="1"/>
-          </p:cNvPicPr>
-          <p:nvPr/>
-        </p:nvPicPr>
-        <p:blipFill>
-          <a:blip r:embed="rId5"/>
-          <a:stretch>
-            <a:fillRect/>
-          </a:stretch>
-        </p:blipFill>
-        <p:spPr>
-          <a:xfrm>
-            <a:off x="6894051" y="2523570"/>
-            <a:ext cx="2671321" cy="3537335"/>
-          </a:xfrm>
-          <a:prstGeom prst="rect">
-            <a:avLst/>
-          </a:prstGeom>
-        </p:spPr>
-      </p:pic>
-      <mc:AlternateContent xmlns:mc="http://schemas.openxmlformats.org/markup-compatibility/2006">
-        <mc:Choice xmlns:a14="http://schemas.microsoft.com/office/drawing/2010/main" Requires="a14">
-          <p:sp>
-            <p:nvSpPr>
-              <p:cNvPr id="7" name="TextBox 6">
-                <a:extLst>
-                  <a:ext uri="{FF2B5EF4-FFF2-40B4-BE49-F238E27FC236}">
-                    <a16:creationId xmlns:a16="http://schemas.microsoft.com/office/drawing/2014/main" id="{074672EE-47B9-9ED0-D846-5A191A83C7B6}"/>
-                  </a:ext>
-                </a:extLst>
-              </p:cNvPr>
-              <p:cNvSpPr txBox="1"/>
-              <p:nvPr/>
-            </p:nvSpPr>
-            <p:spPr>
-              <a:xfrm>
-                <a:off x="5765892" y="3754120"/>
-                <a:ext cx="652743" cy="646331"/>
-              </a:xfrm>
-              <a:prstGeom prst="rect">
-                <a:avLst/>
-              </a:prstGeom>
-              <a:noFill/>
-            </p:spPr>
-            <p:txBody>
-              <a:bodyPr wrap="none" rtlCol="0">
-                <a:spAutoFit/>
-              </a:bodyPr>
-              <a:lstStyle/>
-              <a:p>
-                <a14:m>
-                  <m:oMathPara xmlns:m="http://schemas.openxmlformats.org/officeDocument/2006/math">
-                    <m:oMathParaPr>
-                      <m:jc m:val="centerGroup"/>
-                    </m:oMathParaPr>
-                    <m:oMath xmlns:m="http://schemas.openxmlformats.org/officeDocument/2006/math">
-                      <m:r>
-                        <a:rPr lang="en-US" altLang="ko-KR" sz="3600" b="1" i="1" smtClean="0">
-                          <a:latin typeface="Cambria Math" panose="02040503050406030204" pitchFamily="18" charset="0"/>
-                          <a:ea typeface="Cambria Math" panose="02040503050406030204" pitchFamily="18" charset="0"/>
-                        </a:rPr>
-                        <m:t>=</m:t>
-                      </m:r>
-                    </m:oMath>
-                  </m:oMathPara>
-                </a14:m>
-                <a:endParaRPr lang="ko-KR" altLang="en-US" sz="3600" b="1" dirty="0"/>
-              </a:p>
-            </p:txBody>
-          </p:sp>
-        </mc:Choice>
-        <mc:Fallback>
-          <p:sp>
-            <p:nvSpPr>
-              <p:cNvPr id="7" name="TextBox 6">
-                <a:extLst>
-                  <a:ext uri="{FF2B5EF4-FFF2-40B4-BE49-F238E27FC236}">
-                    <a16:creationId xmlns:a16="http://schemas.microsoft.com/office/drawing/2014/main" id="{074672EE-47B9-9ED0-D846-5A191A83C7B6}"/>
-                  </a:ext>
-                </a:extLst>
-              </p:cNvPr>
-              <p:cNvSpPr txBox="1">
-                <a:spLocks noRot="1" noChangeAspect="1" noMove="1" noResize="1" noEditPoints="1" noAdjustHandles="1" noChangeArrowheads="1" noChangeShapeType="1" noTextEdit="1"/>
-              </p:cNvSpPr>
-              <p:nvPr/>
-            </p:nvSpPr>
-            <p:spPr>
-              <a:xfrm>
-                <a:off x="5765892" y="3754120"/>
-                <a:ext cx="652743" cy="646331"/>
-              </a:xfrm>
-              <a:prstGeom prst="rect">
-                <a:avLst/>
-              </a:prstGeom>
-              <a:blipFill>
-                <a:blip r:embed="rId6"/>
-                <a:stretch>
-                  <a:fillRect/>
-                </a:stretch>
-              </a:blipFill>
-            </p:spPr>
-            <p:txBody>
-              <a:bodyPr/>
-              <a:lstStyle/>
-              <a:p>
-                <a:r>
-                  <a:rPr lang="ko-KR" altLang="en-US">
-                    <a:noFill/>
-                  </a:rPr>
-                  <a:t> </a:t>
-                </a:r>
-              </a:p>
-            </p:txBody>
-          </p:sp>
-        </mc:Fallback>
-      </mc:AlternateContent>
-    </p:spTree>
-    <p:extLst>
-      <p:ext uri="{BB962C8B-B14F-4D97-AF65-F5344CB8AC3E}">
-        <p14:creationId xmlns:p14="http://schemas.microsoft.com/office/powerpoint/2010/main" val="1710521469"/>
-      </p:ext>
-    </p:extLst>
-  </p:cSld>
-  <p:clrMapOvr>
-    <a:masterClrMapping/>
-  </p:clrMapOvr>
-</p:sld>
-</file>
-
-<file path=ppt/slides/slide24.xml><?xml version="1.0" encoding="utf-8"?>
-<p:sld xmlns:a="http://schemas.openxmlformats.org/drawingml/2006/main" xmlns:r="http://schemas.openxmlformats.org/officeDocument/2006/relationships" xmlns:p="http://schemas.openxmlformats.org/presentationml/2006/main">
-  <p:cSld>
-    <p:spTree>
-      <p:nvGrpSpPr>
-        <p:cNvPr id="1" name="">
-          <a:extLst>
-            <a:ext uri="{FF2B5EF4-FFF2-40B4-BE49-F238E27FC236}">
-              <a16:creationId xmlns:a16="http://schemas.microsoft.com/office/drawing/2014/main" id="{4EBCC241-55B4-65D1-A85B-3FADCF3E9723}"/>
-            </a:ext>
-          </a:extLst>
-        </p:cNvPr>
-        <p:cNvGrpSpPr/>
-        <p:nvPr/>
-      </p:nvGrpSpPr>
-      <p:grpSpPr>
-        <a:xfrm>
-          <a:off x="0" y="0"/>
-          <a:ext cx="0" cy="0"/>
-          <a:chOff x="0" y="0"/>
-          <a:chExt cx="0" cy="0"/>
-        </a:xfrm>
-      </p:grpSpPr>
-      <p:sp>
-        <p:nvSpPr>
-          <p:cNvPr id="9" name="제목 1">
-            <a:extLst>
-              <a:ext uri="{FF2B5EF4-FFF2-40B4-BE49-F238E27FC236}">
-                <a16:creationId xmlns:a16="http://schemas.microsoft.com/office/drawing/2014/main" id="{F6E57CEB-CF8E-85B4-E669-8E3467B8A022}"/>
-              </a:ext>
-            </a:extLst>
-          </p:cNvPr>
-          <p:cNvSpPr>
-            <a:spLocks noGrp="1"/>
-          </p:cNvSpPr>
-          <p:nvPr>
-            <p:ph type="title"/>
-          </p:nvPr>
-        </p:nvSpPr>
-        <p:spPr>
-          <a:xfrm>
-            <a:off x="915383" y="139084"/>
-            <a:ext cx="10353762" cy="766439"/>
-          </a:xfrm>
-        </p:spPr>
-        <p:txBody>
-          <a:bodyPr/>
-          <a:lstStyle/>
-          <a:p>
-            <a:pPr algn="l"/>
-            <a:r>
-              <a:rPr lang="en-US" altLang="ko-KR" cap="none" dirty="0">
-                <a:latin typeface="ADLaM Display" panose="02010000000000000000" pitchFamily="2" charset="0"/>
-                <a:ea typeface="ADLaM Display" panose="02010000000000000000" pitchFamily="2" charset="0"/>
-                <a:cs typeface="ADLaM Display" panose="02010000000000000000" pitchFamily="2" charset="0"/>
-              </a:rPr>
-              <a:t>Hands-on </a:t>
-            </a:r>
-            <a:r>
-              <a:rPr lang="en-US" altLang="ko-KR" cap="none" dirty="0" err="1">
-                <a:latin typeface="ADLaM Display" panose="02010000000000000000" pitchFamily="2" charset="0"/>
-                <a:ea typeface="ADLaM Display" panose="02010000000000000000" pitchFamily="2" charset="0"/>
-                <a:cs typeface="ADLaM Display" panose="02010000000000000000" pitchFamily="2" charset="0"/>
-                <a:hlinkClick r:id="rId2">
-                  <a:extLst>
-                    <a:ext uri="{A12FA001-AC4F-418D-AE19-62706E023703}">
-                      <ahyp:hlinkClr xmlns:ahyp="http://schemas.microsoft.com/office/drawing/2018/hyperlinkcolor" val="tx"/>
-                    </a:ext>
-                  </a:extLst>
-                </a:hlinkClick>
-              </a:rPr>
-              <a:t>Random_Walk_Simulation</a:t>
-            </a:r>
-            <a:endParaRPr lang="ko-KR" altLang="en-US" cap="none" dirty="0">
-              <a:latin typeface="ADLaM Display" panose="02010000000000000000" pitchFamily="2" charset="0"/>
-              <a:cs typeface="ADLaM Display" panose="02010000000000000000" pitchFamily="2" charset="0"/>
-            </a:endParaRPr>
-          </a:p>
-        </p:txBody>
-      </p:sp>
-      <p:sp>
-        <p:nvSpPr>
-          <p:cNvPr id="10" name="내용 개체 틀 2">
-            <a:extLst>
-              <a:ext uri="{FF2B5EF4-FFF2-40B4-BE49-F238E27FC236}">
-                <a16:creationId xmlns:a16="http://schemas.microsoft.com/office/drawing/2014/main" id="{ECFBC279-3653-3D05-7BBC-0AEC90FC9945}"/>
-              </a:ext>
-            </a:extLst>
-          </p:cNvPr>
-          <p:cNvSpPr>
-            <a:spLocks noGrp="1"/>
-          </p:cNvSpPr>
-          <p:nvPr>
-            <p:ph idx="1"/>
-          </p:nvPr>
-        </p:nvSpPr>
-        <p:spPr>
-          <a:xfrm>
-            <a:off x="915383" y="1150966"/>
-            <a:ext cx="10758457" cy="2278034"/>
-          </a:xfrm>
-        </p:spPr>
-        <p:txBody>
-          <a:bodyPr>
-            <a:normAutofit fontScale="77500" lnSpcReduction="20000"/>
-          </a:bodyPr>
-          <a:lstStyle/>
-          <a:p>
-            <a:pPr>
-              <a:lnSpc>
-                <a:spcPct val="150000"/>
-              </a:lnSpc>
-              <a:buFont typeface="Wingdings" panose="05000000000000000000" pitchFamily="2" charset="2"/>
-              <a:buChar char="§"/>
-            </a:pPr>
-            <a:r>
-              <a:rPr lang="en-US" altLang="ko-KR" sz="2100" cap="none" dirty="0">
-                <a:latin typeface="맑은 고딕 Semilight" panose="020B0502040204020203" pitchFamily="50" charset="-127"/>
-                <a:ea typeface="맑은 고딕 Semilight" panose="020B0502040204020203" pitchFamily="50" charset="-127"/>
-                <a:cs typeface="맑은 고딕 Semilight" panose="020B0502040204020203" pitchFamily="50" charset="-127"/>
-              </a:rPr>
-              <a:t>2</a:t>
-            </a:r>
-            <a:r>
-              <a:rPr lang="ko-KR" altLang="en-US" sz="2100" cap="none" dirty="0">
-                <a:latin typeface="맑은 고딕 Semilight" panose="020B0502040204020203" pitchFamily="50" charset="-127"/>
-                <a:ea typeface="맑은 고딕 Semilight" panose="020B0502040204020203" pitchFamily="50" charset="-127"/>
-                <a:cs typeface="맑은 고딕 Semilight" panose="020B0502040204020203" pitchFamily="50" charset="-127"/>
-              </a:rPr>
-              <a:t>차원 </a:t>
-            </a:r>
-            <a:r>
-              <a:rPr lang="en-US" altLang="ko-KR" sz="2100" cap="none" dirty="0" err="1">
-                <a:latin typeface="맑은 고딕 Semilight" panose="020B0502040204020203" pitchFamily="50" charset="-127"/>
-                <a:ea typeface="맑은 고딕 Semilight" panose="020B0502040204020203" pitchFamily="50" charset="-127"/>
-                <a:cs typeface="맑은 고딕 Semilight" panose="020B0502040204020203" pitchFamily="50" charset="-127"/>
-              </a:rPr>
-              <a:t>Guassian</a:t>
-            </a:r>
-            <a:r>
-              <a:rPr lang="ko-KR" altLang="en-US" sz="2100" cap="none" dirty="0">
-                <a:latin typeface="맑은 고딕 Semilight" panose="020B0502040204020203" pitchFamily="50" charset="-127"/>
-                <a:ea typeface="맑은 고딕 Semilight" panose="020B0502040204020203" pitchFamily="50" charset="-127"/>
-                <a:cs typeface="맑은 고딕 Semilight" panose="020B0502040204020203" pitchFamily="50" charset="-127"/>
-              </a:rPr>
-              <a:t> 랜덤 워크  </a:t>
-            </a:r>
-            <a:r>
-              <a:rPr lang="en-US" altLang="ko-KR" sz="2100" cap="none" dirty="0">
-                <a:latin typeface="맑은 고딕 Semilight" panose="020B0502040204020203" pitchFamily="50" charset="-127"/>
-                <a:ea typeface="맑은 고딕 Semilight" panose="020B0502040204020203" pitchFamily="50" charset="-127"/>
-                <a:cs typeface="맑은 고딕 Semilight" panose="020B0502040204020203" pitchFamily="50" charset="-127"/>
-              </a:rPr>
-              <a:t>: </a:t>
-            </a:r>
-            <a:r>
-              <a:rPr lang="ko-KR" altLang="en-US" sz="2100" cap="none" dirty="0">
-                <a:latin typeface="맑은 고딕 Semilight" panose="020B0502040204020203" pitchFamily="50" charset="-127"/>
-                <a:ea typeface="맑은 고딕 Semilight" panose="020B0502040204020203" pitchFamily="50" charset="-127"/>
-                <a:cs typeface="맑은 고딕 Semilight" panose="020B0502040204020203" pitchFamily="50" charset="-127"/>
-              </a:rPr>
-              <a:t>정규분포</a:t>
-            </a:r>
-            <a:r>
-              <a:rPr lang="en-US" altLang="ko-KR" sz="2100" cap="none" dirty="0">
-                <a:latin typeface="맑은 고딕 Semilight" panose="020B0502040204020203" pitchFamily="50" charset="-127"/>
-                <a:ea typeface="맑은 고딕 Semilight" panose="020B0502040204020203" pitchFamily="50" charset="-127"/>
-                <a:cs typeface="맑은 고딕 Semilight" panose="020B0502040204020203" pitchFamily="50" charset="-127"/>
-              </a:rPr>
-              <a:t>(Normal Distribution)</a:t>
-            </a:r>
-            <a:r>
-              <a:rPr lang="ko-KR" altLang="en-US" sz="2100" cap="none" dirty="0">
-                <a:latin typeface="맑은 고딕 Semilight" panose="020B0502040204020203" pitchFamily="50" charset="-127"/>
-                <a:ea typeface="맑은 고딕 Semilight" panose="020B0502040204020203" pitchFamily="50" charset="-127"/>
-                <a:cs typeface="맑은 고딕 Semilight" panose="020B0502040204020203" pitchFamily="50" charset="-127"/>
-              </a:rPr>
-              <a:t>를 이용한 랜덤 워크는 </a:t>
-            </a:r>
-            <a:r>
-              <a:rPr lang="ko-KR" altLang="en-US" sz="2100" cap="none" dirty="0" err="1">
-                <a:latin typeface="맑은 고딕 Semilight" panose="020B0502040204020203" pitchFamily="50" charset="-127"/>
-                <a:ea typeface="맑은 고딕 Semilight" panose="020B0502040204020203" pitchFamily="50" charset="-127"/>
-                <a:cs typeface="맑은 고딕 Semilight" panose="020B0502040204020203" pitchFamily="50" charset="-127"/>
-              </a:rPr>
-              <a:t>가우시안</a:t>
-            </a:r>
-            <a:r>
-              <a:rPr lang="ko-KR" altLang="en-US" sz="2100" cap="none" dirty="0">
-                <a:latin typeface="맑은 고딕 Semilight" panose="020B0502040204020203" pitchFamily="50" charset="-127"/>
-                <a:ea typeface="맑은 고딕 Semilight" panose="020B0502040204020203" pitchFamily="50" charset="-127"/>
-                <a:cs typeface="맑은 고딕 Semilight" panose="020B0502040204020203" pitchFamily="50" charset="-127"/>
-              </a:rPr>
-              <a:t> 랜덤 워크</a:t>
-            </a:r>
-            <a:r>
-              <a:rPr lang="en-US" altLang="ko-KR" sz="2100" cap="none" dirty="0">
-                <a:latin typeface="맑은 고딕 Semilight" panose="020B0502040204020203" pitchFamily="50" charset="-127"/>
-                <a:ea typeface="맑은 고딕 Semilight" panose="020B0502040204020203" pitchFamily="50" charset="-127"/>
-                <a:cs typeface="맑은 고딕 Semilight" panose="020B0502040204020203" pitchFamily="50" charset="-127"/>
-              </a:rPr>
-              <a:t>(Gaussian Random Walk)</a:t>
-            </a:r>
-            <a:r>
-              <a:rPr lang="ko-KR" altLang="en-US" sz="2100" cap="none" dirty="0">
-                <a:latin typeface="맑은 고딕 Semilight" panose="020B0502040204020203" pitchFamily="50" charset="-127"/>
-                <a:ea typeface="맑은 고딕 Semilight" panose="020B0502040204020203" pitchFamily="50" charset="-127"/>
-                <a:cs typeface="맑은 고딕 Semilight" panose="020B0502040204020203" pitchFamily="50" charset="-127"/>
-              </a:rPr>
-              <a:t>라고 하며</a:t>
-            </a:r>
-            <a:r>
-              <a:rPr lang="en-US" altLang="ko-KR" sz="2100" cap="none" dirty="0">
-                <a:latin typeface="맑은 고딕 Semilight" panose="020B0502040204020203" pitchFamily="50" charset="-127"/>
-                <a:ea typeface="맑은 고딕 Semilight" panose="020B0502040204020203" pitchFamily="50" charset="-127"/>
-                <a:cs typeface="맑은 고딕 Semilight" panose="020B0502040204020203" pitchFamily="50" charset="-127"/>
-              </a:rPr>
-              <a:t>, </a:t>
-            </a:r>
-            <a:r>
-              <a:rPr lang="ko-KR" altLang="en-US" sz="2100" cap="none" dirty="0">
-                <a:latin typeface="맑은 고딕 Semilight" panose="020B0502040204020203" pitchFamily="50" charset="-127"/>
-                <a:ea typeface="맑은 고딕 Semilight" panose="020B0502040204020203" pitchFamily="50" charset="-127"/>
-                <a:cs typeface="맑은 고딕 Semilight" panose="020B0502040204020203" pitchFamily="50" charset="-127"/>
-              </a:rPr>
-              <a:t>수학적으로는 브라운 운동</a:t>
-            </a:r>
-            <a:r>
-              <a:rPr lang="en-US" altLang="ko-KR" sz="2100" cap="none" dirty="0">
-                <a:latin typeface="맑은 고딕 Semilight" panose="020B0502040204020203" pitchFamily="50" charset="-127"/>
-                <a:ea typeface="맑은 고딕 Semilight" panose="020B0502040204020203" pitchFamily="50" charset="-127"/>
-                <a:cs typeface="맑은 고딕 Semilight" panose="020B0502040204020203" pitchFamily="50" charset="-127"/>
-              </a:rPr>
-              <a:t>(Brownian Motion)</a:t>
-            </a:r>
-            <a:r>
-              <a:rPr lang="ko-KR" altLang="en-US" sz="2100" cap="none" dirty="0">
-                <a:latin typeface="맑은 고딕 Semilight" panose="020B0502040204020203" pitchFamily="50" charset="-127"/>
-                <a:ea typeface="맑은 고딕 Semilight" panose="020B0502040204020203" pitchFamily="50" charset="-127"/>
-                <a:cs typeface="맑은 고딕 Semilight" panose="020B0502040204020203" pitchFamily="50" charset="-127"/>
-              </a:rPr>
-              <a:t>의 기초가 되는 모델</a:t>
-            </a:r>
-            <a:endParaRPr lang="en-US" altLang="ko-KR" sz="2100" cap="none" dirty="0">
-              <a:latin typeface="맑은 고딕 Semilight" panose="020B0502040204020203" pitchFamily="50" charset="-127"/>
-              <a:ea typeface="맑은 고딕 Semilight" panose="020B0502040204020203" pitchFamily="50" charset="-127"/>
-              <a:cs typeface="맑은 고딕 Semilight" panose="020B0502040204020203" pitchFamily="50" charset="-127"/>
-            </a:endParaRPr>
-          </a:p>
-          <a:p>
-            <a:pPr lvl="1">
-              <a:lnSpc>
-                <a:spcPct val="150000"/>
-              </a:lnSpc>
-              <a:buFont typeface="Wingdings" panose="05000000000000000000" pitchFamily="2" charset="2"/>
-              <a:buChar char="§"/>
-            </a:pPr>
-            <a:r>
-              <a:rPr lang="ko-KR" altLang="en-US" sz="1900" cap="none" dirty="0">
-                <a:latin typeface="맑은 고딕 Semilight" panose="020B0502040204020203" pitchFamily="50" charset="-127"/>
-                <a:ea typeface="맑은 고딕 Semilight" panose="020B0502040204020203" pitchFamily="50" charset="-127"/>
-                <a:cs typeface="맑은 고딕 Semilight" panose="020B0502040204020203" pitchFamily="50" charset="-127"/>
-              </a:rPr>
-              <a:t>연속적 이동</a:t>
-            </a:r>
-            <a:r>
-              <a:rPr lang="en-US" altLang="ko-KR" sz="1900" cap="none" dirty="0">
-                <a:latin typeface="맑은 고딕 Semilight" panose="020B0502040204020203" pitchFamily="50" charset="-127"/>
-                <a:ea typeface="맑은 고딕 Semilight" panose="020B0502040204020203" pitchFamily="50" charset="-127"/>
-                <a:cs typeface="맑은 고딕 Semilight" panose="020B0502040204020203" pitchFamily="50" charset="-127"/>
-              </a:rPr>
-              <a:t>(</a:t>
-            </a:r>
-            <a:r>
-              <a:rPr lang="ko-KR" altLang="en-US" sz="1900" cap="none" dirty="0">
-                <a:latin typeface="맑은 고딕 Semilight" panose="020B0502040204020203" pitchFamily="50" charset="-127"/>
-                <a:ea typeface="맑은 고딕 Semilight" panose="020B0502040204020203" pitchFamily="50" charset="-127"/>
-                <a:cs typeface="맑은 고딕 Semilight" panose="020B0502040204020203" pitchFamily="50" charset="-127"/>
-              </a:rPr>
-              <a:t>정규분포 기반</a:t>
-            </a:r>
-            <a:r>
-              <a:rPr lang="en-US" altLang="ko-KR" sz="1900" cap="none" dirty="0">
-                <a:latin typeface="맑은 고딕 Semilight" panose="020B0502040204020203" pitchFamily="50" charset="-127"/>
-                <a:ea typeface="맑은 고딕 Semilight" panose="020B0502040204020203" pitchFamily="50" charset="-127"/>
-                <a:cs typeface="맑은 고딕 Semilight" panose="020B0502040204020203" pitchFamily="50" charset="-127"/>
-              </a:rPr>
-              <a:t>)</a:t>
-            </a:r>
-          </a:p>
-          <a:p>
-            <a:pPr lvl="1">
-              <a:lnSpc>
-                <a:spcPct val="150000"/>
-              </a:lnSpc>
-              <a:buFont typeface="Wingdings" panose="05000000000000000000" pitchFamily="2" charset="2"/>
-              <a:buChar char="§"/>
-            </a:pPr>
-            <a:r>
-              <a:rPr lang="ko-KR" altLang="en-US" sz="1900" cap="none" dirty="0">
-                <a:latin typeface="맑은 고딕 Semilight" panose="020B0502040204020203" pitchFamily="50" charset="-127"/>
-                <a:ea typeface="맑은 고딕 Semilight" panose="020B0502040204020203" pitchFamily="50" charset="-127"/>
-                <a:cs typeface="맑은 고딕 Semilight" panose="020B0502040204020203" pitchFamily="50" charset="-127"/>
-              </a:rPr>
-              <a:t>이동 거리가 정규분포</a:t>
-            </a:r>
-            <a:r>
-              <a:rPr lang="en-US" altLang="ko-KR" sz="1900" cap="none" dirty="0">
-                <a:latin typeface="맑은 고딕 Semilight" panose="020B0502040204020203" pitchFamily="50" charset="-127"/>
-                <a:ea typeface="맑은 고딕 Semilight" panose="020B0502040204020203" pitchFamily="50" charset="-127"/>
-                <a:cs typeface="맑은 고딕 Semilight" panose="020B0502040204020203" pitchFamily="50" charset="-127"/>
-              </a:rPr>
-              <a:t>(</a:t>
-            </a:r>
-            <a:r>
-              <a:rPr lang="ko-KR" altLang="en-US" sz="1900" cap="none" dirty="0">
-                <a:latin typeface="맑은 고딕 Semilight" panose="020B0502040204020203" pitchFamily="50" charset="-127"/>
-                <a:ea typeface="맑은 고딕 Semilight" panose="020B0502040204020203" pitchFamily="50" charset="-127"/>
-                <a:cs typeface="맑은 고딕 Semilight" panose="020B0502040204020203" pitchFamily="50" charset="-127"/>
-              </a:rPr>
-              <a:t>종 모양</a:t>
-            </a:r>
-            <a:r>
-              <a:rPr lang="en-US" altLang="ko-KR" sz="1900" cap="none" dirty="0">
-                <a:latin typeface="맑은 고딕 Semilight" panose="020B0502040204020203" pitchFamily="50" charset="-127"/>
-                <a:ea typeface="맑은 고딕 Semilight" panose="020B0502040204020203" pitchFamily="50" charset="-127"/>
-                <a:cs typeface="맑은 고딕 Semilight" panose="020B0502040204020203" pitchFamily="50" charset="-127"/>
-              </a:rPr>
-              <a:t>)</a:t>
-            </a:r>
-            <a:r>
-              <a:rPr lang="ko-KR" altLang="en-US" sz="1900" cap="none" dirty="0">
-                <a:latin typeface="맑은 고딕 Semilight" panose="020B0502040204020203" pitchFamily="50" charset="-127"/>
-                <a:ea typeface="맑은 고딕 Semilight" panose="020B0502040204020203" pitchFamily="50" charset="-127"/>
-                <a:cs typeface="맑은 고딕 Semilight" panose="020B0502040204020203" pitchFamily="50" charset="-127"/>
-              </a:rPr>
-              <a:t>를 따름</a:t>
-            </a:r>
-          </a:p>
-          <a:p>
-            <a:pPr lvl="1">
-              <a:lnSpc>
-                <a:spcPct val="150000"/>
-              </a:lnSpc>
-              <a:buFont typeface="Wingdings" panose="05000000000000000000" pitchFamily="2" charset="2"/>
-              <a:buChar char="§"/>
-            </a:pPr>
-            <a:r>
-              <a:rPr lang="ko-KR" altLang="en-US" sz="1900" cap="none" dirty="0">
-                <a:latin typeface="맑은 고딕 Semilight" panose="020B0502040204020203" pitchFamily="50" charset="-127"/>
-                <a:ea typeface="맑은 고딕 Semilight" panose="020B0502040204020203" pitchFamily="50" charset="-127"/>
-                <a:cs typeface="맑은 고딕 Semilight" panose="020B0502040204020203" pitchFamily="50" charset="-127"/>
-              </a:rPr>
-              <a:t>대부분은 작게 움직이고</a:t>
-            </a:r>
-            <a:r>
-              <a:rPr lang="en-US" altLang="ko-KR" sz="1900" cap="none" dirty="0">
-                <a:latin typeface="맑은 고딕 Semilight" panose="020B0502040204020203" pitchFamily="50" charset="-127"/>
-                <a:ea typeface="맑은 고딕 Semilight" panose="020B0502040204020203" pitchFamily="50" charset="-127"/>
-                <a:cs typeface="맑은 고딕 Semilight" panose="020B0502040204020203" pitchFamily="50" charset="-127"/>
-              </a:rPr>
-              <a:t>, </a:t>
-            </a:r>
-            <a:r>
-              <a:rPr lang="ko-KR" altLang="en-US" sz="1900" cap="none" dirty="0">
-                <a:latin typeface="맑은 고딕 Semilight" panose="020B0502040204020203" pitchFamily="50" charset="-127"/>
-                <a:ea typeface="맑은 고딕 Semilight" panose="020B0502040204020203" pitchFamily="50" charset="-127"/>
-                <a:cs typeface="맑은 고딕 Semilight" panose="020B0502040204020203" pitchFamily="50" charset="-127"/>
-              </a:rPr>
-              <a:t>가끔 크게 이동하는 경우도 발생</a:t>
-            </a:r>
-          </a:p>
-          <a:p>
-            <a:pPr lvl="1">
-              <a:lnSpc>
-                <a:spcPct val="150000"/>
-              </a:lnSpc>
-              <a:buFont typeface="Wingdings" panose="05000000000000000000" pitchFamily="2" charset="2"/>
-              <a:buChar char="§"/>
-            </a:pPr>
-            <a:r>
-              <a:rPr lang="ko-KR" altLang="en-US" sz="1900" cap="none" dirty="0">
-                <a:latin typeface="맑은 고딕 Semilight" panose="020B0502040204020203" pitchFamily="50" charset="-127"/>
-                <a:ea typeface="맑은 고딕 Semilight" panose="020B0502040204020203" pitchFamily="50" charset="-127"/>
-                <a:cs typeface="맑은 고딕 Semilight" panose="020B0502040204020203" pitchFamily="50" charset="-127"/>
-              </a:rPr>
-              <a:t>실제 세계 물리현상과 유사</a:t>
-            </a:r>
-            <a:endParaRPr lang="en-US" altLang="ko-KR" sz="1900" cap="none" dirty="0">
-              <a:latin typeface="맑은 고딕 Semilight" panose="020B0502040204020203" pitchFamily="50" charset="-127"/>
-              <a:ea typeface="맑은 고딕 Semilight" panose="020B0502040204020203" pitchFamily="50" charset="-127"/>
-              <a:cs typeface="맑은 고딕 Semilight" panose="020B0502040204020203" pitchFamily="50" charset="-127"/>
-            </a:endParaRPr>
-          </a:p>
-        </p:txBody>
-      </p:sp>
-      <p:sp>
-        <p:nvSpPr>
-          <p:cNvPr id="2" name="슬라이드 번호 개체 틀 3">
-            <a:extLst>
-              <a:ext uri="{FF2B5EF4-FFF2-40B4-BE49-F238E27FC236}">
-                <a16:creationId xmlns:a16="http://schemas.microsoft.com/office/drawing/2014/main" id="{E367DF55-DC58-13BA-A039-B02E197A5260}"/>
-              </a:ext>
-            </a:extLst>
-          </p:cNvPr>
-          <p:cNvSpPr>
-            <a:spLocks noGrp="1"/>
-          </p:cNvSpPr>
-          <p:nvPr>
-            <p:ph type="sldNum" sz="quarter" idx="12"/>
-          </p:nvPr>
-        </p:nvSpPr>
-        <p:spPr>
-          <a:xfrm>
-            <a:off x="10512862" y="6035582"/>
-            <a:ext cx="753349" cy="365030"/>
-          </a:xfrm>
-        </p:spPr>
-        <p:txBody>
-          <a:bodyPr/>
-          <a:lstStyle/>
-          <a:p>
-            <a:fld id="{D57F1E4F-1CFF-5643-939E-217C01CDF565}" type="slidenum">
-              <a:rPr lang="en-US" smtClean="0"/>
-              <a:pPr/>
-              <a:t>24</a:t>
-            </a:fld>
-            <a:endParaRPr lang="en-US" dirty="0"/>
-          </a:p>
-        </p:txBody>
-      </p:sp>
-      <p:pic>
-        <p:nvPicPr>
-          <p:cNvPr id="3" name="Picture 2" descr="한 여자가 노트북 컴퓨터에 타이핑을 하고 있다">
-            <a:extLst>
-              <a:ext uri="{FF2B5EF4-FFF2-40B4-BE49-F238E27FC236}">
-                <a16:creationId xmlns:a16="http://schemas.microsoft.com/office/drawing/2014/main" id="{F2EA324D-2C1D-95DB-4C29-29428B521A88}"/>
-              </a:ext>
-            </a:extLst>
-          </p:cNvPr>
-          <p:cNvPicPr>
-            <a:picLocks noChangeAspect="1" noChangeArrowheads="1"/>
-          </p:cNvPicPr>
-          <p:nvPr/>
-        </p:nvPicPr>
-        <p:blipFill>
-          <a:blip r:embed="rId3" cstate="print">
-            <a:extLst>
-              <a:ext uri="{28A0092B-C50C-407E-A947-70E740481C1C}">
-                <a14:useLocalDpi xmlns:a14="http://schemas.microsoft.com/office/drawing/2010/main" val="0"/>
-              </a:ext>
-            </a:extLst>
-          </a:blip>
-          <a:srcRect/>
-          <a:stretch>
-            <a:fillRect/>
-          </a:stretch>
-        </p:blipFill>
-        <p:spPr bwMode="auto">
-          <a:xfrm>
-            <a:off x="10512861" y="66676"/>
-            <a:ext cx="1509277" cy="998633"/>
-          </a:xfrm>
-          <a:prstGeom prst="rect">
-            <a:avLst/>
-          </a:prstGeom>
-          <a:noFill/>
-          <a:extLst>
-            <a:ext uri="{909E8E84-426E-40DD-AFC4-6F175D3DCCD1}">
-              <a14:hiddenFill xmlns:a14="http://schemas.microsoft.com/office/drawing/2010/main">
-                <a:solidFill>
-                  <a:srgbClr val="FFFFFF"/>
-                </a:solidFill>
-              </a14:hiddenFill>
-            </a:ext>
-          </a:extLst>
-        </p:spPr>
-      </p:pic>
-      <p:pic>
-        <p:nvPicPr>
-          <p:cNvPr id="11266" name="Picture 2">
-            <a:extLst>
-              <a:ext uri="{FF2B5EF4-FFF2-40B4-BE49-F238E27FC236}">
-                <a16:creationId xmlns:a16="http://schemas.microsoft.com/office/drawing/2014/main" id="{7AEA76DE-5798-4404-0084-FFA6B99D376E}"/>
-              </a:ext>
-            </a:extLst>
-          </p:cNvPr>
-          <p:cNvPicPr>
-            <a:picLocks noChangeAspect="1" noChangeArrowheads="1"/>
-          </p:cNvPicPr>
-          <p:nvPr/>
-        </p:nvPicPr>
-        <p:blipFill>
-          <a:blip r:embed="rId4">
-            <a:extLst>
-              <a:ext uri="{28A0092B-C50C-407E-A947-70E740481C1C}">
-                <a14:useLocalDpi xmlns:a14="http://schemas.microsoft.com/office/drawing/2010/main" val="0"/>
-              </a:ext>
-            </a:extLst>
-          </a:blip>
-          <a:srcRect/>
-          <a:stretch>
-            <a:fillRect/>
-          </a:stretch>
-        </p:blipFill>
-        <p:spPr bwMode="auto">
-          <a:xfrm>
-            <a:off x="1013262" y="3429000"/>
-            <a:ext cx="7409378" cy="3147056"/>
-          </a:xfrm>
-          <a:prstGeom prst="rect">
-            <a:avLst/>
-          </a:prstGeom>
-          <a:noFill/>
-          <a:extLst>
-            <a:ext uri="{909E8E84-426E-40DD-AFC4-6F175D3DCCD1}">
-              <a14:hiddenFill xmlns:a14="http://schemas.microsoft.com/office/drawing/2010/main">
-                <a:solidFill>
-                  <a:srgbClr val="FFFFFF"/>
-                </a:solidFill>
-              </a14:hiddenFill>
-            </a:ext>
-          </a:extLst>
-        </p:spPr>
-      </p:pic>
-      <p:sp>
-        <p:nvSpPr>
-          <p:cNvPr id="5" name="TextBox 4">
-            <a:extLst>
-              <a:ext uri="{FF2B5EF4-FFF2-40B4-BE49-F238E27FC236}">
-                <a16:creationId xmlns:a16="http://schemas.microsoft.com/office/drawing/2014/main" id="{3835EC74-1F6D-CE1F-85AE-12A42A886505}"/>
-              </a:ext>
-            </a:extLst>
-          </p:cNvPr>
-          <p:cNvSpPr txBox="1"/>
-          <p:nvPr/>
-        </p:nvSpPr>
-        <p:spPr>
-          <a:xfrm>
-            <a:off x="8659178" y="3512105"/>
-            <a:ext cx="3362960" cy="1020216"/>
-          </a:xfrm>
-          <a:prstGeom prst="rect">
-            <a:avLst/>
-          </a:prstGeom>
-          <a:noFill/>
-        </p:spPr>
-        <p:txBody>
-          <a:bodyPr wrap="square">
-            <a:spAutoFit/>
-          </a:bodyPr>
-          <a:lstStyle/>
-          <a:p>
-            <a:pPr marL="285750" indent="-285750" algn="l">
-              <a:lnSpc>
-                <a:spcPct val="150000"/>
-              </a:lnSpc>
-              <a:buFont typeface="Wingdings" panose="05000000000000000000" pitchFamily="2" charset="2"/>
-              <a:buChar char="ü"/>
-            </a:pPr>
-            <a:r>
-              <a:rPr lang="ko-KR" altLang="en-US" sz="1400" i="0" dirty="0">
-                <a:effectLst/>
-                <a:latin typeface="맑은 고딕 Semilight" panose="020B0502040204020203" pitchFamily="50" charset="-127"/>
-                <a:ea typeface="맑은 고딕 Semilight" panose="020B0502040204020203" pitchFamily="50" charset="-127"/>
-                <a:cs typeface="맑은 고딕 Semilight" panose="020B0502040204020203" pitchFamily="50" charset="-127"/>
-              </a:rPr>
-              <a:t>미세 입자의 확산</a:t>
-            </a:r>
-            <a:r>
-              <a:rPr lang="en-US" altLang="ko-KR" sz="1400" i="0" dirty="0">
-                <a:effectLst/>
-                <a:latin typeface="맑은 고딕 Semilight" panose="020B0502040204020203" pitchFamily="50" charset="-127"/>
-                <a:ea typeface="맑은 고딕 Semilight" panose="020B0502040204020203" pitchFamily="50" charset="-127"/>
-                <a:cs typeface="맑은 고딕 Semilight" panose="020B0502040204020203" pitchFamily="50" charset="-127"/>
-              </a:rPr>
-              <a:t>(</a:t>
-            </a:r>
-            <a:r>
-              <a:rPr lang="ko-KR" altLang="en-US" sz="1400" i="0" dirty="0">
-                <a:effectLst/>
-                <a:latin typeface="맑은 고딕 Semilight" panose="020B0502040204020203" pitchFamily="50" charset="-127"/>
-                <a:ea typeface="맑은 고딕 Semilight" panose="020B0502040204020203" pitchFamily="50" charset="-127"/>
-                <a:cs typeface="맑은 고딕 Semilight" panose="020B0502040204020203" pitchFamily="50" charset="-127"/>
-              </a:rPr>
-              <a:t>브라운 운동</a:t>
-            </a:r>
-            <a:r>
-              <a:rPr lang="en-US" altLang="ko-KR" sz="1400" i="0" dirty="0">
-                <a:effectLst/>
-                <a:latin typeface="맑은 고딕 Semilight" panose="020B0502040204020203" pitchFamily="50" charset="-127"/>
-                <a:ea typeface="맑은 고딕 Semilight" panose="020B0502040204020203" pitchFamily="50" charset="-127"/>
-                <a:cs typeface="맑은 고딕 Semilight" panose="020B0502040204020203" pitchFamily="50" charset="-127"/>
-              </a:rPr>
-              <a:t>)</a:t>
-            </a:r>
-            <a:endParaRPr lang="ko-KR" altLang="en-US" sz="1400" i="0" dirty="0">
-              <a:effectLst/>
-              <a:latin typeface="맑은 고딕 Semilight" panose="020B0502040204020203" pitchFamily="50" charset="-127"/>
-              <a:ea typeface="맑은 고딕 Semilight" panose="020B0502040204020203" pitchFamily="50" charset="-127"/>
-              <a:cs typeface="맑은 고딕 Semilight" panose="020B0502040204020203" pitchFamily="50" charset="-127"/>
-            </a:endParaRPr>
-          </a:p>
-          <a:p>
-            <a:pPr marL="285750" indent="-285750" algn="l">
-              <a:lnSpc>
-                <a:spcPct val="150000"/>
-              </a:lnSpc>
-              <a:buFont typeface="Wingdings" panose="05000000000000000000" pitchFamily="2" charset="2"/>
-              <a:buChar char="ü"/>
-            </a:pPr>
-            <a:r>
-              <a:rPr lang="ko-KR" altLang="en-US" sz="1400" i="0" dirty="0">
-                <a:effectLst/>
-                <a:latin typeface="맑은 고딕 Semilight" panose="020B0502040204020203" pitchFamily="50" charset="-127"/>
-                <a:ea typeface="맑은 고딕 Semilight" panose="020B0502040204020203" pitchFamily="50" charset="-127"/>
-                <a:cs typeface="맑은 고딕 Semilight" panose="020B0502040204020203" pitchFamily="50" charset="-127"/>
-              </a:rPr>
-              <a:t>주식 가격 변동</a:t>
-            </a:r>
-          </a:p>
-          <a:p>
-            <a:pPr marL="285750" indent="-285750" algn="l">
-              <a:lnSpc>
-                <a:spcPct val="150000"/>
-              </a:lnSpc>
-              <a:buFont typeface="Wingdings" panose="05000000000000000000" pitchFamily="2" charset="2"/>
-              <a:buChar char="ü"/>
-            </a:pPr>
-            <a:r>
-              <a:rPr lang="ko-KR" altLang="en-US" sz="1400" i="0" dirty="0">
-                <a:effectLst/>
-                <a:latin typeface="맑은 고딕 Semilight" panose="020B0502040204020203" pitchFamily="50" charset="-127"/>
-                <a:ea typeface="맑은 고딕 Semilight" panose="020B0502040204020203" pitchFamily="50" charset="-127"/>
-                <a:cs typeface="맑은 고딕 Semilight" panose="020B0502040204020203" pitchFamily="50" charset="-127"/>
-              </a:rPr>
-              <a:t>열 운동</a:t>
-            </a:r>
-            <a:r>
-              <a:rPr lang="en-US" altLang="ko-KR" sz="1400" i="0" dirty="0">
-                <a:effectLst/>
-                <a:latin typeface="맑은 고딕 Semilight" panose="020B0502040204020203" pitchFamily="50" charset="-127"/>
-                <a:ea typeface="맑은 고딕 Semilight" panose="020B0502040204020203" pitchFamily="50" charset="-127"/>
-                <a:cs typeface="맑은 고딕 Semilight" panose="020B0502040204020203" pitchFamily="50" charset="-127"/>
-              </a:rPr>
-              <a:t>, </a:t>
-            </a:r>
-            <a:r>
-              <a:rPr lang="ko-KR" altLang="en-US" sz="1400" i="0" dirty="0">
-                <a:effectLst/>
-                <a:latin typeface="맑은 고딕 Semilight" panose="020B0502040204020203" pitchFamily="50" charset="-127"/>
-                <a:ea typeface="맑은 고딕 Semilight" panose="020B0502040204020203" pitchFamily="50" charset="-127"/>
-                <a:cs typeface="맑은 고딕 Semilight" panose="020B0502040204020203" pitchFamily="50" charset="-127"/>
-              </a:rPr>
-              <a:t>분자 운동의 시뮬레이션</a:t>
-            </a:r>
-          </a:p>
-        </p:txBody>
-      </p:sp>
-    </p:spTree>
-    <p:extLst>
-      <p:ext uri="{BB962C8B-B14F-4D97-AF65-F5344CB8AC3E}">
-        <p14:creationId xmlns:p14="http://schemas.microsoft.com/office/powerpoint/2010/main" val="2696288982"/>
-      </p:ext>
-    </p:extLst>
-  </p:cSld>
-  <p:clrMapOvr>
-    <a:masterClrMapping/>
-  </p:clrMapOvr>
-</p:sld>
-</file>
-
-<file path=ppt/slides/slide25.xml><?xml version="1.0" encoding="utf-8"?>
-<p:sld xmlns:a="http://schemas.openxmlformats.org/drawingml/2006/main" xmlns:r="http://schemas.openxmlformats.org/officeDocument/2006/relationships" xmlns:p="http://schemas.openxmlformats.org/presentationml/2006/main">
-  <p:cSld>
-    <p:spTree>
-      <p:nvGrpSpPr>
-        <p:cNvPr id="1" name="">
-          <a:extLst>
-            <a:ext uri="{FF2B5EF4-FFF2-40B4-BE49-F238E27FC236}">
-              <a16:creationId xmlns:a16="http://schemas.microsoft.com/office/drawing/2014/main" id="{9F3A03C4-9F32-8658-57A1-8179E087BD2F}"/>
-            </a:ext>
-          </a:extLst>
-        </p:cNvPr>
-        <p:cNvGrpSpPr/>
-        <p:nvPr/>
-      </p:nvGrpSpPr>
-      <p:grpSpPr>
-        <a:xfrm>
-          <a:off x="0" y="0"/>
-          <a:ext cx="0" cy="0"/>
-          <a:chOff x="0" y="0"/>
-          <a:chExt cx="0" cy="0"/>
-        </a:xfrm>
-      </p:grpSpPr>
-      <p:sp>
-        <p:nvSpPr>
-          <p:cNvPr id="4" name="TextBox 3">
-            <a:extLst>
-              <a:ext uri="{FF2B5EF4-FFF2-40B4-BE49-F238E27FC236}">
-                <a16:creationId xmlns:a16="http://schemas.microsoft.com/office/drawing/2014/main" id="{4C1CC16D-7C9C-2F71-E9C9-02A41D849637}"/>
-              </a:ext>
-            </a:extLst>
-          </p:cNvPr>
-          <p:cNvSpPr txBox="1"/>
-          <p:nvPr/>
-        </p:nvSpPr>
-        <p:spPr>
-          <a:xfrm>
-            <a:off x="767408" y="1196753"/>
-            <a:ext cx="9250352" cy="970843"/>
-          </a:xfrm>
-          <a:prstGeom prst="rect">
-            <a:avLst/>
-          </a:prstGeom>
-          <a:solidFill>
-            <a:schemeClr val="bg1">
-              <a:lumMod val="95000"/>
-            </a:schemeClr>
-          </a:solidFill>
-        </p:spPr>
-        <p:txBody>
-          <a:bodyPr wrap="square" rtlCol="0">
-            <a:spAutoFit/>
-          </a:bodyPr>
-          <a:lstStyle/>
-          <a:p>
-            <a:pPr marL="285750" indent="-285750">
-              <a:lnSpc>
-                <a:spcPct val="150000"/>
-              </a:lnSpc>
-              <a:buFont typeface="Wingdings" panose="05000000000000000000" pitchFamily="2" charset="2"/>
-              <a:buChar char="v"/>
-            </a:pPr>
-            <a:r>
-              <a:rPr lang="ko-KR" altLang="en-US" sz="2000" dirty="0">
-                <a:latin typeface="맑은 고딕 Semilight" panose="020B0502040204020203" pitchFamily="50" charset="-127"/>
-                <a:ea typeface="맑은 고딕 Semilight" panose="020B0502040204020203" pitchFamily="50" charset="-127"/>
-                <a:cs typeface="맑은 고딕 Semilight" panose="020B0502040204020203" pitchFamily="50" charset="-127"/>
-              </a:rPr>
-              <a:t>표본 </a:t>
-            </a:r>
-            <a:r>
-              <a:rPr lang="en-US" altLang="ko-KR" sz="2000" dirty="0">
-                <a:latin typeface="맑은 고딕 Semilight" panose="020B0502040204020203" pitchFamily="50" charset="-127"/>
-                <a:ea typeface="맑은 고딕 Semilight" panose="020B0502040204020203" pitchFamily="50" charset="-127"/>
-                <a:cs typeface="맑은 고딕 Semilight" panose="020B0502040204020203" pitchFamily="50" charset="-127"/>
-              </a:rPr>
-              <a:t>1000</a:t>
-            </a:r>
-            <a:r>
-              <a:rPr lang="ko-KR" altLang="en-US" sz="2000" dirty="0">
-                <a:latin typeface="맑은 고딕 Semilight" panose="020B0502040204020203" pitchFamily="50" charset="-127"/>
-                <a:ea typeface="맑은 고딕 Semilight" panose="020B0502040204020203" pitchFamily="50" charset="-127"/>
-                <a:cs typeface="맑은 고딕 Semilight" panose="020B0502040204020203" pitchFamily="50" charset="-127"/>
-              </a:rPr>
-              <a:t>개에서 </a:t>
-            </a:r>
-            <a:r>
-              <a:rPr lang="ko-KR" altLang="en-US" sz="2000" dirty="0" err="1">
-                <a:latin typeface="맑은 고딕 Semilight" panose="020B0502040204020203" pitchFamily="50" charset="-127"/>
-                <a:ea typeface="맑은 고딕 Semilight" panose="020B0502040204020203" pitchFamily="50" charset="-127"/>
-                <a:cs typeface="맑은 고딕 Semilight" panose="020B0502040204020203" pitchFamily="50" charset="-127"/>
-              </a:rPr>
-              <a:t>재표본추출을</a:t>
-            </a:r>
-            <a:r>
-              <a:rPr lang="ko-KR" altLang="en-US" sz="2000" dirty="0">
-                <a:latin typeface="맑은 고딕 Semilight" panose="020B0502040204020203" pitchFamily="50" charset="-127"/>
-                <a:ea typeface="맑은 고딕 Semilight" panose="020B0502040204020203" pitchFamily="50" charset="-127"/>
-                <a:cs typeface="맑은 고딕 Semilight" panose="020B0502040204020203" pitchFamily="50" charset="-127"/>
-              </a:rPr>
-              <a:t> 복원추출</a:t>
-            </a:r>
-            <a:r>
-              <a:rPr lang="en-US" altLang="ko-KR" sz="2000" dirty="0">
-                <a:latin typeface="맑은 고딕 Semilight" panose="020B0502040204020203" pitchFamily="50" charset="-127"/>
-                <a:ea typeface="맑은 고딕 Semilight" panose="020B0502040204020203" pitchFamily="50" charset="-127"/>
-                <a:cs typeface="맑은 고딕 Semilight" panose="020B0502040204020203" pitchFamily="50" charset="-127"/>
-              </a:rPr>
-              <a:t>(replace=True)</a:t>
-            </a:r>
-            <a:r>
-              <a:rPr lang="ko-KR" altLang="en-US" sz="2000" dirty="0">
-                <a:latin typeface="맑은 고딕 Semilight" panose="020B0502040204020203" pitchFamily="50" charset="-127"/>
-                <a:ea typeface="맑은 고딕 Semilight" panose="020B0502040204020203" pitchFamily="50" charset="-127"/>
-                <a:cs typeface="맑은 고딕 Semilight" panose="020B0502040204020203" pitchFamily="50" charset="-127"/>
-              </a:rPr>
-              <a:t>방식으로</a:t>
-            </a:r>
-            <a:r>
-              <a:rPr lang="en-US" altLang="ko-KR" sz="2000" dirty="0">
-                <a:latin typeface="맑은 고딕 Semilight" panose="020B0502040204020203" pitchFamily="50" charset="-127"/>
-                <a:ea typeface="맑은 고딕 Semilight" panose="020B0502040204020203" pitchFamily="50" charset="-127"/>
-                <a:cs typeface="맑은 고딕 Semilight" panose="020B0502040204020203" pitchFamily="50" charset="-127"/>
-              </a:rPr>
-              <a:t> 100</a:t>
-            </a:r>
-            <a:r>
-              <a:rPr lang="ko-KR" altLang="en-US" sz="2000" dirty="0">
-                <a:latin typeface="맑은 고딕 Semilight" panose="020B0502040204020203" pitchFamily="50" charset="-127"/>
-                <a:ea typeface="맑은 고딕 Semilight" panose="020B0502040204020203" pitchFamily="50" charset="-127"/>
-                <a:cs typeface="맑은 고딕 Semilight" panose="020B0502040204020203" pitchFamily="50" charset="-127"/>
-              </a:rPr>
-              <a:t>개를 무한히 </a:t>
-            </a:r>
-            <a:r>
-              <a:rPr lang="ko-KR" altLang="en-US" sz="2000" dirty="0" err="1">
-                <a:latin typeface="맑은 고딕 Semilight" panose="020B0502040204020203" pitchFamily="50" charset="-127"/>
-                <a:ea typeface="맑은 고딕 Semilight" panose="020B0502040204020203" pitchFamily="50" charset="-127"/>
-                <a:cs typeface="맑은 고딕 Semilight" panose="020B0502040204020203" pitchFamily="50" charset="-127"/>
-              </a:rPr>
-              <a:t>재표본</a:t>
-            </a:r>
-            <a:r>
-              <a:rPr lang="ko-KR" altLang="en-US" sz="2000" dirty="0">
-                <a:latin typeface="맑은 고딕 Semilight" panose="020B0502040204020203" pitchFamily="50" charset="-127"/>
-                <a:ea typeface="맑은 고딕 Semilight" panose="020B0502040204020203" pitchFamily="50" charset="-127"/>
-                <a:cs typeface="맑은 고딕 Semilight" panose="020B0502040204020203" pitchFamily="50" charset="-127"/>
-              </a:rPr>
-              <a:t> 추출하여 평균과 분산에 대해 토론하라 </a:t>
-            </a:r>
-            <a:endParaRPr lang="en-US" altLang="ko-KR" sz="2000" dirty="0">
-              <a:latin typeface="맑은 고딕 Semilight" panose="020B0502040204020203" pitchFamily="50" charset="-127"/>
-              <a:ea typeface="맑은 고딕 Semilight" panose="020B0502040204020203" pitchFamily="50" charset="-127"/>
-              <a:cs typeface="맑은 고딕 Semilight" panose="020B0502040204020203" pitchFamily="50" charset="-127"/>
-            </a:endParaRPr>
-          </a:p>
-        </p:txBody>
-      </p:sp>
-      <p:sp>
-        <p:nvSpPr>
-          <p:cNvPr id="9" name="TextBox 8">
-            <a:extLst>
-              <a:ext uri="{FF2B5EF4-FFF2-40B4-BE49-F238E27FC236}">
-                <a16:creationId xmlns:a16="http://schemas.microsoft.com/office/drawing/2014/main" id="{5419691D-5BF7-99F5-D054-700096553189}"/>
-              </a:ext>
-            </a:extLst>
-          </p:cNvPr>
-          <p:cNvSpPr txBox="1"/>
-          <p:nvPr/>
-        </p:nvSpPr>
-        <p:spPr>
-          <a:xfrm>
-            <a:off x="119336" y="260649"/>
-            <a:ext cx="2592288" cy="584775"/>
-          </a:xfrm>
-          <a:prstGeom prst="rect">
-            <a:avLst/>
-          </a:prstGeom>
-          <a:noFill/>
-        </p:spPr>
-        <p:txBody>
-          <a:bodyPr wrap="square" rtlCol="0">
-            <a:spAutoFit/>
-          </a:bodyPr>
-          <a:lstStyle/>
-          <a:p>
-            <a:r>
-              <a:rPr lang="ko-KR" altLang="en-US" sz="3200" b="1" dirty="0">
-                <a:latin typeface="맑은 고딕 Semilight" panose="020B0502040204020203" pitchFamily="50" charset="-127"/>
-                <a:ea typeface="맑은 고딕 Semilight" panose="020B0502040204020203" pitchFamily="50" charset="-127"/>
-                <a:cs typeface="맑은 고딕 Semilight" panose="020B0502040204020203" pitchFamily="50" charset="-127"/>
-              </a:rPr>
-              <a:t>문제 풀이</a:t>
-            </a:r>
-          </a:p>
-        </p:txBody>
-      </p:sp>
-      <p:pic>
-        <p:nvPicPr>
-          <p:cNvPr id="5" name="그림 4">
-            <a:extLst>
-              <a:ext uri="{FF2B5EF4-FFF2-40B4-BE49-F238E27FC236}">
-                <a16:creationId xmlns:a16="http://schemas.microsoft.com/office/drawing/2014/main" id="{153D10DE-54F1-5E83-B617-EB567D2F7BCF}"/>
-              </a:ext>
-            </a:extLst>
-          </p:cNvPr>
-          <p:cNvPicPr>
-            <a:picLocks noChangeAspect="1"/>
-          </p:cNvPicPr>
-          <p:nvPr/>
-        </p:nvPicPr>
-        <p:blipFill>
-          <a:blip r:embed="rId3"/>
-          <a:stretch>
-            <a:fillRect/>
-          </a:stretch>
-        </p:blipFill>
-        <p:spPr>
-          <a:xfrm>
-            <a:off x="767408" y="2625024"/>
-            <a:ext cx="7170609" cy="3410558"/>
-          </a:xfrm>
-          <a:prstGeom prst="rect">
-            <a:avLst/>
-          </a:prstGeom>
-        </p:spPr>
-      </p:pic>
-      <p:sp>
-        <p:nvSpPr>
-          <p:cNvPr id="3" name="슬라이드 번호 개체 틀 3">
-            <a:extLst>
-              <a:ext uri="{FF2B5EF4-FFF2-40B4-BE49-F238E27FC236}">
-                <a16:creationId xmlns:a16="http://schemas.microsoft.com/office/drawing/2014/main" id="{3B660879-678E-3CEF-7952-761CB7497980}"/>
-              </a:ext>
-            </a:extLst>
-          </p:cNvPr>
-          <p:cNvSpPr>
-            <a:spLocks noGrp="1"/>
-          </p:cNvSpPr>
-          <p:nvPr>
-            <p:ph type="sldNum" sz="quarter" idx="12"/>
-          </p:nvPr>
-        </p:nvSpPr>
-        <p:spPr>
-          <a:xfrm>
-            <a:off x="10512862" y="6035582"/>
-            <a:ext cx="753349" cy="365030"/>
-          </a:xfrm>
-        </p:spPr>
-        <p:txBody>
-          <a:bodyPr/>
-          <a:lstStyle/>
-          <a:p>
-            <a:fld id="{D57F1E4F-1CFF-5643-939E-217C01CDF565}" type="slidenum">
-              <a:rPr lang="en-US" smtClean="0"/>
-              <a:pPr/>
-              <a:t>25</a:t>
-            </a:fld>
-            <a:endParaRPr lang="en-US" dirty="0"/>
-          </a:p>
-        </p:txBody>
-      </p:sp>
-      <p:pic>
-        <p:nvPicPr>
-          <p:cNvPr id="2" name="Picture 2" descr="한 여자가 노트북 컴퓨터에 타이핑을 하고 있다">
-            <a:extLst>
-              <a:ext uri="{FF2B5EF4-FFF2-40B4-BE49-F238E27FC236}">
-                <a16:creationId xmlns:a16="http://schemas.microsoft.com/office/drawing/2014/main" id="{36F7D249-76A0-1D42-5C27-04C837C11258}"/>
-              </a:ext>
-            </a:extLst>
-          </p:cNvPr>
-          <p:cNvPicPr>
-            <a:picLocks noChangeAspect="1" noChangeArrowheads="1"/>
-          </p:cNvPicPr>
-          <p:nvPr/>
-        </p:nvPicPr>
-        <p:blipFill>
-          <a:blip r:embed="rId4" cstate="print">
-            <a:extLst>
-              <a:ext uri="{28A0092B-C50C-407E-A947-70E740481C1C}">
-                <a14:useLocalDpi xmlns:a14="http://schemas.microsoft.com/office/drawing/2010/main" val="0"/>
-              </a:ext>
-            </a:extLst>
-          </a:blip>
-          <a:srcRect/>
-          <a:stretch>
-            <a:fillRect/>
-          </a:stretch>
-        </p:blipFill>
-        <p:spPr bwMode="auto">
-          <a:xfrm>
-            <a:off x="9869489" y="66676"/>
-            <a:ext cx="2152650" cy="1424329"/>
-          </a:xfrm>
-          <a:prstGeom prst="rect">
-            <a:avLst/>
-          </a:prstGeom>
-          <a:noFill/>
-          <a:extLst>
-            <a:ext uri="{909E8E84-426E-40DD-AFC4-6F175D3DCCD1}">
-              <a14:hiddenFill xmlns:a14="http://schemas.microsoft.com/office/drawing/2010/main">
-                <a:solidFill>
-                  <a:srgbClr val="FFFFFF"/>
-                </a:solidFill>
-              </a14:hiddenFill>
-            </a:ext>
-          </a:extLst>
-        </p:spPr>
-      </p:pic>
-    </p:spTree>
-    <p:extLst>
-      <p:ext uri="{BB962C8B-B14F-4D97-AF65-F5344CB8AC3E}">
-        <p14:creationId xmlns:p14="http://schemas.microsoft.com/office/powerpoint/2010/main" val="3184162328"/>
-      </p:ext>
-    </p:extLst>
-  </p:cSld>
-  <p:clrMapOvr>
-    <a:masterClrMapping/>
-  </p:clrMapOvr>
-  <mc:AlternateContent xmlns:mc="http://schemas.openxmlformats.org/markup-compatibility/2006" xmlns:p14="http://schemas.microsoft.com/office/powerpoint/2010/main">
-    <mc:Choice Requires="p14">
-      <p:transition spd="med" p14:dur="700">
-        <p:fade/>
-      </p:transition>
-    </mc:Choice>
-    <mc:Fallback xmlns="">
-      <p:transition spd="med">
-        <p:fade/>
-      </p:transition>
-    </mc:Fallback>
-  </mc:AlternateContent>
-</p:sld>
-</file>
-
-<file path=ppt/slides/slide26.xml><?xml version="1.0" encoding="utf-8"?>
-<p:sld xmlns:a="http://schemas.openxmlformats.org/drawingml/2006/main" xmlns:r="http://schemas.openxmlformats.org/officeDocument/2006/relationships" xmlns:p="http://schemas.openxmlformats.org/presentationml/2006/main">
-  <p:cSld>
-    <p:spTree>
-      <p:nvGrpSpPr>
-        <p:cNvPr id="1" name="">
-          <a:extLst>
-            <a:ext uri="{FF2B5EF4-FFF2-40B4-BE49-F238E27FC236}">
-              <a16:creationId xmlns:a16="http://schemas.microsoft.com/office/drawing/2014/main" id="{4F32D5AF-0F51-91DE-64BD-5E17CEF9AA79}"/>
-            </a:ext>
-          </a:extLst>
-        </p:cNvPr>
-        <p:cNvGrpSpPr/>
-        <p:nvPr/>
-      </p:nvGrpSpPr>
-      <p:grpSpPr>
-        <a:xfrm>
-          <a:off x="0" y="0"/>
-          <a:ext cx="0" cy="0"/>
-          <a:chOff x="0" y="0"/>
-          <a:chExt cx="0" cy="0"/>
-        </a:xfrm>
-      </p:grpSpPr>
-      <p:sp>
-        <p:nvSpPr>
-          <p:cNvPr id="2" name="슬라이드 번호 개체 틀 1">
-            <a:extLst>
-              <a:ext uri="{FF2B5EF4-FFF2-40B4-BE49-F238E27FC236}">
-                <a16:creationId xmlns:a16="http://schemas.microsoft.com/office/drawing/2014/main" id="{D1B51CDD-C849-F07D-D7BE-8E0C6C436C59}"/>
-              </a:ext>
-            </a:extLst>
-          </p:cNvPr>
-          <p:cNvSpPr>
-            <a:spLocks noGrp="1"/>
-          </p:cNvSpPr>
-          <p:nvPr>
-            <p:ph type="sldNum" sz="quarter" idx="12"/>
-          </p:nvPr>
-        </p:nvSpPr>
-        <p:spPr/>
-        <p:txBody>
-          <a:bodyPr/>
-          <a:lstStyle/>
-          <a:p>
-            <a:pPr rtl="0"/>
-            <a:fld id="{A3F31473-23EB-4724-8B59-FE6D21D89FA4}" type="slidenum">
-              <a:rPr lang="en-US" altLang="ko-KR" noProof="0" smtClean="0"/>
-              <a:t>26</a:t>
-            </a:fld>
-            <a:endParaRPr lang="en-US" altLang="ko-KR" noProof="0" dirty="0"/>
-          </a:p>
-        </p:txBody>
-      </p:sp>
-      <p:sp>
-        <p:nvSpPr>
-          <p:cNvPr id="4" name="TextBox 3">
-            <a:extLst>
-              <a:ext uri="{FF2B5EF4-FFF2-40B4-BE49-F238E27FC236}">
-                <a16:creationId xmlns:a16="http://schemas.microsoft.com/office/drawing/2014/main" id="{E724D8FB-4BA4-B532-2690-FF91AAEE20BE}"/>
-              </a:ext>
-            </a:extLst>
-          </p:cNvPr>
-          <p:cNvSpPr txBox="1"/>
-          <p:nvPr/>
-        </p:nvSpPr>
-        <p:spPr>
-          <a:xfrm>
-            <a:off x="798974" y="1692410"/>
-            <a:ext cx="2930832" cy="509178"/>
-          </a:xfrm>
-          <a:prstGeom prst="rect">
-            <a:avLst/>
-          </a:prstGeom>
-          <a:solidFill>
-            <a:schemeClr val="bg1">
-              <a:lumMod val="95000"/>
-            </a:schemeClr>
-          </a:solidFill>
-        </p:spPr>
-        <p:txBody>
-          <a:bodyPr wrap="square" rtlCol="0">
-            <a:spAutoFit/>
-          </a:bodyPr>
-          <a:lstStyle/>
-          <a:p>
-            <a:pPr marL="285750" indent="-285750">
-              <a:lnSpc>
-                <a:spcPct val="150000"/>
-              </a:lnSpc>
-              <a:buFont typeface="Wingdings" panose="05000000000000000000" pitchFamily="2" charset="2"/>
-              <a:buChar char="v"/>
-            </a:pPr>
-            <a:r>
-              <a:rPr lang="en-US" altLang="ko-KR" sz="2000" dirty="0">
-                <a:latin typeface="맑은 고딕 Semilight" panose="020B0502040204020203" pitchFamily="50" charset="-127"/>
-                <a:ea typeface="맑은 고딕 Semilight" panose="020B0502040204020203" pitchFamily="50" charset="-127"/>
-                <a:cs typeface="맑은 고딕 Semilight" panose="020B0502040204020203" pitchFamily="50" charset="-127"/>
-                <a:hlinkClick r:id="rId3">
-                  <a:extLst>
-                    <a:ext uri="{A12FA001-AC4F-418D-AE19-62706E023703}">
-                      <ahyp:hlinkClr xmlns:ahyp="http://schemas.microsoft.com/office/drawing/2018/hyperlinkcolor" val="tx"/>
-                    </a:ext>
-                  </a:extLst>
-                </a:hlinkClick>
-              </a:rPr>
-              <a:t>Monty Hall Problem</a:t>
-            </a:r>
-            <a:r>
-              <a:rPr lang="en-US" altLang="ko-KR" sz="2000" dirty="0">
-                <a:latin typeface="맑은 고딕 Semilight" panose="020B0502040204020203" pitchFamily="50" charset="-127"/>
-                <a:ea typeface="맑은 고딕 Semilight" panose="020B0502040204020203" pitchFamily="50" charset="-127"/>
-                <a:cs typeface="맑은 고딕 Semilight" panose="020B0502040204020203" pitchFamily="50" charset="-127"/>
-              </a:rPr>
-              <a:t> </a:t>
-            </a:r>
-          </a:p>
-        </p:txBody>
-      </p:sp>
-      <p:sp>
-        <p:nvSpPr>
-          <p:cNvPr id="9" name="TextBox 8">
-            <a:extLst>
-              <a:ext uri="{FF2B5EF4-FFF2-40B4-BE49-F238E27FC236}">
-                <a16:creationId xmlns:a16="http://schemas.microsoft.com/office/drawing/2014/main" id="{92CE8694-F9D5-0985-6634-DA4CC7CB87C6}"/>
-              </a:ext>
-            </a:extLst>
-          </p:cNvPr>
-          <p:cNvSpPr txBox="1"/>
-          <p:nvPr/>
-        </p:nvSpPr>
-        <p:spPr>
-          <a:xfrm>
-            <a:off x="119336" y="260649"/>
-            <a:ext cx="2592288" cy="584775"/>
-          </a:xfrm>
-          <a:prstGeom prst="rect">
-            <a:avLst/>
-          </a:prstGeom>
-          <a:noFill/>
-        </p:spPr>
-        <p:txBody>
-          <a:bodyPr wrap="square" rtlCol="0">
-            <a:spAutoFit/>
-          </a:bodyPr>
-          <a:lstStyle/>
-          <a:p>
-            <a:r>
-              <a:rPr lang="ko-KR" altLang="en-US" sz="3200" b="1" dirty="0">
-                <a:latin typeface="맑은 고딕 Semilight" panose="020B0502040204020203" pitchFamily="50" charset="-127"/>
-                <a:ea typeface="맑은 고딕 Semilight" panose="020B0502040204020203" pitchFamily="50" charset="-127"/>
-                <a:cs typeface="맑은 고딕 Semilight" panose="020B0502040204020203" pitchFamily="50" charset="-127"/>
-              </a:rPr>
-              <a:t>문제 풀이</a:t>
-            </a:r>
-          </a:p>
-        </p:txBody>
-      </p:sp>
-      <p:pic>
-        <p:nvPicPr>
-          <p:cNvPr id="2050" name="Picture 2">
-            <a:extLst>
-              <a:ext uri="{FF2B5EF4-FFF2-40B4-BE49-F238E27FC236}">
-                <a16:creationId xmlns:a16="http://schemas.microsoft.com/office/drawing/2014/main" id="{3AFCC670-9D52-97E0-301E-31793E380890}"/>
-              </a:ext>
-            </a:extLst>
-          </p:cNvPr>
-          <p:cNvPicPr>
-            <a:picLocks noChangeAspect="1" noChangeArrowheads="1"/>
-          </p:cNvPicPr>
-          <p:nvPr/>
-        </p:nvPicPr>
-        <p:blipFill>
-          <a:blip r:embed="rId4">
-            <a:extLst>
-              <a:ext uri="{28A0092B-C50C-407E-A947-70E740481C1C}">
-                <a14:useLocalDpi xmlns:a14="http://schemas.microsoft.com/office/drawing/2010/main" val="0"/>
-              </a:ext>
-            </a:extLst>
-          </a:blip>
-          <a:srcRect/>
-          <a:stretch>
-            <a:fillRect/>
-          </a:stretch>
-        </p:blipFill>
-        <p:spPr bwMode="auto">
-          <a:xfrm>
-            <a:off x="1093614" y="2724107"/>
-            <a:ext cx="3466677" cy="1927473"/>
-          </a:xfrm>
-          <a:prstGeom prst="rect">
-            <a:avLst/>
-          </a:prstGeom>
-          <a:noFill/>
-          <a:extLst>
-            <a:ext uri="{909E8E84-426E-40DD-AFC4-6F175D3DCCD1}">
-              <a14:hiddenFill xmlns:a14="http://schemas.microsoft.com/office/drawing/2010/main">
-                <a:solidFill>
-                  <a:srgbClr val="FFFFFF"/>
-                </a:solidFill>
-              </a14:hiddenFill>
-            </a:ext>
-          </a:extLst>
-        </p:spPr>
-      </p:pic>
-      <p:pic>
-        <p:nvPicPr>
-          <p:cNvPr id="3" name="Picture 2">
-            <a:extLst>
-              <a:ext uri="{FF2B5EF4-FFF2-40B4-BE49-F238E27FC236}">
-                <a16:creationId xmlns:a16="http://schemas.microsoft.com/office/drawing/2014/main" id="{43315C22-DE09-0D77-BE86-D502CE453505}"/>
-              </a:ext>
-            </a:extLst>
-          </p:cNvPr>
-          <p:cNvPicPr>
-            <a:picLocks noChangeAspect="1" noChangeArrowheads="1"/>
-          </p:cNvPicPr>
-          <p:nvPr/>
-        </p:nvPicPr>
-        <p:blipFill>
-          <a:blip r:embed="rId4">
-            <a:extLst>
-              <a:ext uri="{28A0092B-C50C-407E-A947-70E740481C1C}">
-                <a14:useLocalDpi xmlns:a14="http://schemas.microsoft.com/office/drawing/2010/main" val="0"/>
-              </a:ext>
-            </a:extLst>
-          </a:blip>
-          <a:srcRect/>
-          <a:stretch>
-            <a:fillRect/>
-          </a:stretch>
-        </p:blipFill>
-        <p:spPr bwMode="auto">
-          <a:xfrm>
-            <a:off x="6132182" y="2764673"/>
-            <a:ext cx="1619245" cy="900301"/>
-          </a:xfrm>
-          <a:prstGeom prst="rect">
-            <a:avLst/>
-          </a:prstGeom>
-          <a:noFill/>
-          <a:extLst>
-            <a:ext uri="{909E8E84-426E-40DD-AFC4-6F175D3DCCD1}">
-              <a14:hiddenFill xmlns:a14="http://schemas.microsoft.com/office/drawing/2010/main">
-                <a:solidFill>
-                  <a:srgbClr val="FFFFFF"/>
-                </a:solidFill>
-              </a14:hiddenFill>
-            </a:ext>
-          </a:extLst>
-        </p:spPr>
-      </p:pic>
-      <p:pic>
-        <p:nvPicPr>
-          <p:cNvPr id="6" name="그림 5">
-            <a:extLst>
-              <a:ext uri="{FF2B5EF4-FFF2-40B4-BE49-F238E27FC236}">
-                <a16:creationId xmlns:a16="http://schemas.microsoft.com/office/drawing/2014/main" id="{FF37A84F-98D5-AD78-2108-B8AEF24ABB09}"/>
-              </a:ext>
-            </a:extLst>
-          </p:cNvPr>
-          <p:cNvPicPr>
-            <a:picLocks noChangeAspect="1"/>
-          </p:cNvPicPr>
-          <p:nvPr/>
-        </p:nvPicPr>
-        <p:blipFill>
-          <a:blip r:embed="rId5"/>
-          <a:stretch>
-            <a:fillRect/>
-          </a:stretch>
-        </p:blipFill>
-        <p:spPr>
-          <a:xfrm>
-            <a:off x="6051006" y="3900957"/>
-            <a:ext cx="815411" cy="975445"/>
-          </a:xfrm>
-          <a:prstGeom prst="rect">
-            <a:avLst/>
-          </a:prstGeom>
-        </p:spPr>
-      </p:pic>
-      <p:pic>
-        <p:nvPicPr>
-          <p:cNvPr id="8" name="그림 7">
-            <a:extLst>
-              <a:ext uri="{FF2B5EF4-FFF2-40B4-BE49-F238E27FC236}">
-                <a16:creationId xmlns:a16="http://schemas.microsoft.com/office/drawing/2014/main" id="{89B1586C-C92C-EECE-337A-38419DE5AFFA}"/>
-              </a:ext>
-            </a:extLst>
-          </p:cNvPr>
-          <p:cNvPicPr>
-            <a:picLocks noChangeAspect="1"/>
-          </p:cNvPicPr>
-          <p:nvPr/>
-        </p:nvPicPr>
-        <p:blipFill>
-          <a:blip r:embed="rId5"/>
-          <a:stretch>
-            <a:fillRect/>
-          </a:stretch>
-        </p:blipFill>
-        <p:spPr>
-          <a:xfrm>
-            <a:off x="6722623" y="3900957"/>
-            <a:ext cx="815411" cy="975445"/>
-          </a:xfrm>
-          <a:prstGeom prst="rect">
-            <a:avLst/>
-          </a:prstGeom>
-        </p:spPr>
-      </p:pic>
-      <p:pic>
-        <p:nvPicPr>
-          <p:cNvPr id="10" name="그림 9">
-            <a:extLst>
-              <a:ext uri="{FF2B5EF4-FFF2-40B4-BE49-F238E27FC236}">
-                <a16:creationId xmlns:a16="http://schemas.microsoft.com/office/drawing/2014/main" id="{E1E66379-8AED-85AD-941D-2FC2A6DCBFBD}"/>
-              </a:ext>
-            </a:extLst>
-          </p:cNvPr>
-          <p:cNvPicPr>
-            <a:picLocks noChangeAspect="1"/>
-          </p:cNvPicPr>
-          <p:nvPr/>
-        </p:nvPicPr>
-        <p:blipFill>
-          <a:blip r:embed="rId5"/>
-          <a:stretch>
-            <a:fillRect/>
-          </a:stretch>
-        </p:blipFill>
-        <p:spPr>
-          <a:xfrm>
-            <a:off x="7394240" y="3900957"/>
-            <a:ext cx="815411" cy="975445"/>
-          </a:xfrm>
-          <a:prstGeom prst="rect">
-            <a:avLst/>
-          </a:prstGeom>
-        </p:spPr>
-      </p:pic>
-      <p:pic>
-        <p:nvPicPr>
-          <p:cNvPr id="11" name="그림 10">
-            <a:extLst>
-              <a:ext uri="{FF2B5EF4-FFF2-40B4-BE49-F238E27FC236}">
-                <a16:creationId xmlns:a16="http://schemas.microsoft.com/office/drawing/2014/main" id="{9159CE25-5732-0E61-FC70-6FC5DEEA8045}"/>
-              </a:ext>
-            </a:extLst>
-          </p:cNvPr>
-          <p:cNvPicPr>
-            <a:picLocks noChangeAspect="1"/>
-          </p:cNvPicPr>
-          <p:nvPr/>
-        </p:nvPicPr>
-        <p:blipFill>
-          <a:blip r:embed="rId5"/>
-          <a:stretch>
-            <a:fillRect/>
-          </a:stretch>
-        </p:blipFill>
-        <p:spPr>
-          <a:xfrm>
-            <a:off x="8065857" y="3900957"/>
-            <a:ext cx="815411" cy="975445"/>
-          </a:xfrm>
-          <a:prstGeom prst="rect">
-            <a:avLst/>
-          </a:prstGeom>
-        </p:spPr>
-      </p:pic>
-      <p:pic>
-        <p:nvPicPr>
-          <p:cNvPr id="12" name="그림 11">
-            <a:extLst>
-              <a:ext uri="{FF2B5EF4-FFF2-40B4-BE49-F238E27FC236}">
-                <a16:creationId xmlns:a16="http://schemas.microsoft.com/office/drawing/2014/main" id="{84069638-5D65-FDE0-686D-96001F8881ED}"/>
-              </a:ext>
-            </a:extLst>
-          </p:cNvPr>
-          <p:cNvPicPr>
-            <a:picLocks noChangeAspect="1"/>
-          </p:cNvPicPr>
-          <p:nvPr/>
-        </p:nvPicPr>
-        <p:blipFill>
-          <a:blip r:embed="rId5"/>
-          <a:stretch>
-            <a:fillRect/>
-          </a:stretch>
-        </p:blipFill>
-        <p:spPr>
-          <a:xfrm>
-            <a:off x="8737474" y="3900957"/>
-            <a:ext cx="815411" cy="975445"/>
-          </a:xfrm>
-          <a:prstGeom prst="rect">
-            <a:avLst/>
-          </a:prstGeom>
-        </p:spPr>
-      </p:pic>
-      <p:pic>
-        <p:nvPicPr>
-          <p:cNvPr id="13" name="그림 12">
-            <a:extLst>
-              <a:ext uri="{FF2B5EF4-FFF2-40B4-BE49-F238E27FC236}">
-                <a16:creationId xmlns:a16="http://schemas.microsoft.com/office/drawing/2014/main" id="{E575F2FA-ACB7-78F7-B1A7-3E84ABC3B544}"/>
-              </a:ext>
-            </a:extLst>
-          </p:cNvPr>
-          <p:cNvPicPr>
-            <a:picLocks noChangeAspect="1"/>
-          </p:cNvPicPr>
-          <p:nvPr/>
-        </p:nvPicPr>
-        <p:blipFill>
-          <a:blip r:embed="rId5"/>
-          <a:stretch>
-            <a:fillRect/>
-          </a:stretch>
-        </p:blipFill>
-        <p:spPr>
-          <a:xfrm>
-            <a:off x="9409091" y="3900957"/>
-            <a:ext cx="815411" cy="975445"/>
-          </a:xfrm>
-          <a:prstGeom prst="rect">
-            <a:avLst/>
-          </a:prstGeom>
-        </p:spPr>
-      </p:pic>
-      <p:pic>
-        <p:nvPicPr>
-          <p:cNvPr id="14" name="그림 13">
-            <a:extLst>
-              <a:ext uri="{FF2B5EF4-FFF2-40B4-BE49-F238E27FC236}">
-                <a16:creationId xmlns:a16="http://schemas.microsoft.com/office/drawing/2014/main" id="{0FEE5B40-1E21-B3D8-55B6-432E2E592F1A}"/>
-              </a:ext>
-            </a:extLst>
-          </p:cNvPr>
-          <p:cNvPicPr>
-            <a:picLocks noChangeAspect="1"/>
-          </p:cNvPicPr>
-          <p:nvPr/>
-        </p:nvPicPr>
-        <p:blipFill>
-          <a:blip r:embed="rId5"/>
-          <a:stretch>
-            <a:fillRect/>
-          </a:stretch>
-        </p:blipFill>
-        <p:spPr>
-          <a:xfrm>
-            <a:off x="10080707" y="3900957"/>
-            <a:ext cx="815411" cy="975445"/>
-          </a:xfrm>
-          <a:prstGeom prst="rect">
-            <a:avLst/>
-          </a:prstGeom>
-        </p:spPr>
-      </p:pic>
-      <p:pic>
-        <p:nvPicPr>
-          <p:cNvPr id="18" name="그림 17">
-            <a:extLst>
-              <a:ext uri="{FF2B5EF4-FFF2-40B4-BE49-F238E27FC236}">
-                <a16:creationId xmlns:a16="http://schemas.microsoft.com/office/drawing/2014/main" id="{4EAA928D-47DE-DBD9-B4C4-37E1631C5A7C}"/>
-              </a:ext>
-            </a:extLst>
-          </p:cNvPr>
-          <p:cNvPicPr>
-            <a:picLocks noChangeAspect="1"/>
-          </p:cNvPicPr>
-          <p:nvPr/>
-        </p:nvPicPr>
-        <p:blipFill>
-          <a:blip r:embed="rId5"/>
-          <a:stretch>
-            <a:fillRect/>
-          </a:stretch>
-        </p:blipFill>
-        <p:spPr>
-          <a:xfrm>
-            <a:off x="6051006" y="5158257"/>
-            <a:ext cx="815411" cy="975445"/>
-          </a:xfrm>
-          <a:prstGeom prst="rect">
-            <a:avLst/>
-          </a:prstGeom>
-        </p:spPr>
-      </p:pic>
-      <p:pic>
-        <p:nvPicPr>
-          <p:cNvPr id="19" name="그림 18">
-            <a:extLst>
-              <a:ext uri="{FF2B5EF4-FFF2-40B4-BE49-F238E27FC236}">
-                <a16:creationId xmlns:a16="http://schemas.microsoft.com/office/drawing/2014/main" id="{E4AE634F-D801-E332-4B85-5D322DF3AFB3}"/>
-              </a:ext>
-            </a:extLst>
-          </p:cNvPr>
-          <p:cNvPicPr>
-            <a:picLocks noChangeAspect="1"/>
-          </p:cNvPicPr>
-          <p:nvPr/>
-        </p:nvPicPr>
-        <p:blipFill>
-          <a:blip r:embed="rId5"/>
-          <a:stretch>
-            <a:fillRect/>
-          </a:stretch>
-        </p:blipFill>
-        <p:spPr>
-          <a:xfrm>
-            <a:off x="6722623" y="5158257"/>
-            <a:ext cx="815411" cy="975445"/>
-          </a:xfrm>
-          <a:prstGeom prst="rect">
-            <a:avLst/>
-          </a:prstGeom>
-        </p:spPr>
-      </p:pic>
-      <p:pic>
-        <p:nvPicPr>
-          <p:cNvPr id="20" name="그림 19">
-            <a:extLst>
-              <a:ext uri="{FF2B5EF4-FFF2-40B4-BE49-F238E27FC236}">
-                <a16:creationId xmlns:a16="http://schemas.microsoft.com/office/drawing/2014/main" id="{CB32881A-FD31-9325-C6E7-5248E3C6D1F4}"/>
-              </a:ext>
-            </a:extLst>
-          </p:cNvPr>
-          <p:cNvPicPr>
-            <a:picLocks noChangeAspect="1"/>
-          </p:cNvPicPr>
-          <p:nvPr/>
-        </p:nvPicPr>
-        <p:blipFill>
-          <a:blip r:embed="rId5"/>
-          <a:stretch>
-            <a:fillRect/>
-          </a:stretch>
-        </p:blipFill>
-        <p:spPr>
-          <a:xfrm>
-            <a:off x="7394240" y="5158257"/>
-            <a:ext cx="815411" cy="975445"/>
-          </a:xfrm>
-          <a:prstGeom prst="rect">
-            <a:avLst/>
-          </a:prstGeom>
-        </p:spPr>
-      </p:pic>
-      <p:pic>
-        <p:nvPicPr>
-          <p:cNvPr id="21" name="그림 20">
-            <a:extLst>
-              <a:ext uri="{FF2B5EF4-FFF2-40B4-BE49-F238E27FC236}">
-                <a16:creationId xmlns:a16="http://schemas.microsoft.com/office/drawing/2014/main" id="{560C4216-BC6D-8454-4D96-0F01187DCCE7}"/>
-              </a:ext>
-            </a:extLst>
-          </p:cNvPr>
-          <p:cNvPicPr>
-            <a:picLocks noChangeAspect="1"/>
-          </p:cNvPicPr>
-          <p:nvPr/>
-        </p:nvPicPr>
-        <p:blipFill>
-          <a:blip r:embed="rId5"/>
-          <a:stretch>
-            <a:fillRect/>
-          </a:stretch>
-        </p:blipFill>
-        <p:spPr>
-          <a:xfrm>
-            <a:off x="8065857" y="5158257"/>
-            <a:ext cx="815411" cy="975445"/>
-          </a:xfrm>
-          <a:prstGeom prst="rect">
-            <a:avLst/>
-          </a:prstGeom>
-        </p:spPr>
-      </p:pic>
-      <p:pic>
-        <p:nvPicPr>
-          <p:cNvPr id="22" name="그림 21">
-            <a:extLst>
-              <a:ext uri="{FF2B5EF4-FFF2-40B4-BE49-F238E27FC236}">
-                <a16:creationId xmlns:a16="http://schemas.microsoft.com/office/drawing/2014/main" id="{13A4BD92-5A06-85BE-A3AA-232982853B41}"/>
-              </a:ext>
-            </a:extLst>
-          </p:cNvPr>
-          <p:cNvPicPr>
-            <a:picLocks noChangeAspect="1"/>
-          </p:cNvPicPr>
-          <p:nvPr/>
-        </p:nvPicPr>
-        <p:blipFill>
-          <a:blip r:embed="rId5"/>
-          <a:stretch>
-            <a:fillRect/>
-          </a:stretch>
-        </p:blipFill>
-        <p:spPr>
-          <a:xfrm>
-            <a:off x="8737474" y="5158257"/>
-            <a:ext cx="815411" cy="975445"/>
-          </a:xfrm>
-          <a:prstGeom prst="rect">
-            <a:avLst/>
-          </a:prstGeom>
-        </p:spPr>
-      </p:pic>
-      <p:pic>
-        <p:nvPicPr>
-          <p:cNvPr id="23" name="그림 22">
-            <a:extLst>
-              <a:ext uri="{FF2B5EF4-FFF2-40B4-BE49-F238E27FC236}">
-                <a16:creationId xmlns:a16="http://schemas.microsoft.com/office/drawing/2014/main" id="{206C91E5-88B9-0740-BBF7-F4144DD4A4AB}"/>
-              </a:ext>
-            </a:extLst>
-          </p:cNvPr>
-          <p:cNvPicPr>
-            <a:picLocks noChangeAspect="1"/>
-          </p:cNvPicPr>
-          <p:nvPr/>
-        </p:nvPicPr>
-        <p:blipFill>
-          <a:blip r:embed="rId5"/>
-          <a:stretch>
-            <a:fillRect/>
-          </a:stretch>
-        </p:blipFill>
-        <p:spPr>
-          <a:xfrm>
-            <a:off x="9409091" y="5158257"/>
-            <a:ext cx="815411" cy="975445"/>
-          </a:xfrm>
-          <a:prstGeom prst="rect">
-            <a:avLst/>
-          </a:prstGeom>
-        </p:spPr>
-      </p:pic>
-      <p:pic>
-        <p:nvPicPr>
-          <p:cNvPr id="24" name="그림 23">
-            <a:extLst>
-              <a:ext uri="{FF2B5EF4-FFF2-40B4-BE49-F238E27FC236}">
-                <a16:creationId xmlns:a16="http://schemas.microsoft.com/office/drawing/2014/main" id="{6104512E-4C9A-FCD8-2992-BCB7286B8520}"/>
-              </a:ext>
-            </a:extLst>
-          </p:cNvPr>
-          <p:cNvPicPr>
-            <a:picLocks noChangeAspect="1"/>
-          </p:cNvPicPr>
-          <p:nvPr/>
-        </p:nvPicPr>
-        <p:blipFill>
-          <a:blip r:embed="rId5"/>
-          <a:stretch>
-            <a:fillRect/>
-          </a:stretch>
-        </p:blipFill>
-        <p:spPr>
-          <a:xfrm>
-            <a:off x="10080707" y="5158257"/>
-            <a:ext cx="815411" cy="975445"/>
-          </a:xfrm>
-          <a:prstGeom prst="rect">
-            <a:avLst/>
-          </a:prstGeom>
-        </p:spPr>
-      </p:pic>
-      <p:pic>
-        <p:nvPicPr>
-          <p:cNvPr id="25" name="그림 24">
-            <a:extLst>
-              <a:ext uri="{FF2B5EF4-FFF2-40B4-BE49-F238E27FC236}">
-                <a16:creationId xmlns:a16="http://schemas.microsoft.com/office/drawing/2014/main" id="{AE3A43EF-64D5-A843-B2DD-72091B480A5D}"/>
-              </a:ext>
-            </a:extLst>
-          </p:cNvPr>
-          <p:cNvPicPr>
-            <a:picLocks noChangeAspect="1"/>
-          </p:cNvPicPr>
-          <p:nvPr/>
-        </p:nvPicPr>
-        <p:blipFill>
-          <a:blip r:embed="rId5"/>
-          <a:stretch>
-            <a:fillRect/>
-          </a:stretch>
-        </p:blipFill>
-        <p:spPr>
-          <a:xfrm>
-            <a:off x="8065857" y="2724107"/>
-            <a:ext cx="815411" cy="975445"/>
-          </a:xfrm>
-          <a:prstGeom prst="rect">
-            <a:avLst/>
-          </a:prstGeom>
-        </p:spPr>
-      </p:pic>
-      <p:pic>
-        <p:nvPicPr>
-          <p:cNvPr id="26" name="그림 25">
-            <a:extLst>
-              <a:ext uri="{FF2B5EF4-FFF2-40B4-BE49-F238E27FC236}">
-                <a16:creationId xmlns:a16="http://schemas.microsoft.com/office/drawing/2014/main" id="{1B1524A1-71FF-4AA4-1D38-3A81C21A7489}"/>
-              </a:ext>
-            </a:extLst>
-          </p:cNvPr>
-          <p:cNvPicPr>
-            <a:picLocks noChangeAspect="1"/>
-          </p:cNvPicPr>
-          <p:nvPr/>
-        </p:nvPicPr>
-        <p:blipFill>
-          <a:blip r:embed="rId5"/>
-          <a:stretch>
-            <a:fillRect/>
-          </a:stretch>
-        </p:blipFill>
-        <p:spPr>
-          <a:xfrm>
-            <a:off x="8737474" y="2724107"/>
-            <a:ext cx="815411" cy="975445"/>
-          </a:xfrm>
-          <a:prstGeom prst="rect">
-            <a:avLst/>
-          </a:prstGeom>
-        </p:spPr>
-      </p:pic>
-      <p:pic>
-        <p:nvPicPr>
-          <p:cNvPr id="27" name="그림 26">
-            <a:extLst>
-              <a:ext uri="{FF2B5EF4-FFF2-40B4-BE49-F238E27FC236}">
-                <a16:creationId xmlns:a16="http://schemas.microsoft.com/office/drawing/2014/main" id="{7A236CA2-8829-F5DE-B2CE-DCF16BEABA71}"/>
-              </a:ext>
-            </a:extLst>
-          </p:cNvPr>
-          <p:cNvPicPr>
-            <a:picLocks noChangeAspect="1"/>
-          </p:cNvPicPr>
-          <p:nvPr/>
-        </p:nvPicPr>
-        <p:blipFill>
-          <a:blip r:embed="rId5"/>
-          <a:stretch>
-            <a:fillRect/>
-          </a:stretch>
-        </p:blipFill>
-        <p:spPr>
-          <a:xfrm>
-            <a:off x="9409091" y="2724107"/>
-            <a:ext cx="815411" cy="975445"/>
-          </a:xfrm>
-          <a:prstGeom prst="rect">
-            <a:avLst/>
-          </a:prstGeom>
-        </p:spPr>
-      </p:pic>
-      <p:pic>
-        <p:nvPicPr>
-          <p:cNvPr id="28" name="그림 27">
-            <a:extLst>
-              <a:ext uri="{FF2B5EF4-FFF2-40B4-BE49-F238E27FC236}">
-                <a16:creationId xmlns:a16="http://schemas.microsoft.com/office/drawing/2014/main" id="{4F1B1D3F-5406-E68D-69A4-9B8AD695700A}"/>
-              </a:ext>
-            </a:extLst>
-          </p:cNvPr>
-          <p:cNvPicPr>
-            <a:picLocks noChangeAspect="1"/>
-          </p:cNvPicPr>
-          <p:nvPr/>
-        </p:nvPicPr>
-        <p:blipFill>
-          <a:blip r:embed="rId5"/>
-          <a:stretch>
-            <a:fillRect/>
-          </a:stretch>
-        </p:blipFill>
-        <p:spPr>
-          <a:xfrm>
-            <a:off x="10080707" y="2724107"/>
-            <a:ext cx="815411" cy="975445"/>
-          </a:xfrm>
-          <a:prstGeom prst="rect">
-            <a:avLst/>
-          </a:prstGeom>
-        </p:spPr>
-      </p:pic>
-      <p:pic>
-        <p:nvPicPr>
-          <p:cNvPr id="5" name="Picture 2" descr="한 여자가 노트북 컴퓨터에 타이핑을 하고 있다">
-            <a:extLst>
-              <a:ext uri="{FF2B5EF4-FFF2-40B4-BE49-F238E27FC236}">
-                <a16:creationId xmlns:a16="http://schemas.microsoft.com/office/drawing/2014/main" id="{CDB299DD-9795-FDF8-7F4C-6EA8A4B5B234}"/>
-              </a:ext>
-            </a:extLst>
-          </p:cNvPr>
-          <p:cNvPicPr>
-            <a:picLocks noChangeAspect="1" noChangeArrowheads="1"/>
-          </p:cNvPicPr>
-          <p:nvPr/>
-        </p:nvPicPr>
-        <p:blipFill>
-          <a:blip r:embed="rId6" cstate="print">
-            <a:extLst>
-              <a:ext uri="{28A0092B-C50C-407E-A947-70E740481C1C}">
-                <a14:useLocalDpi xmlns:a14="http://schemas.microsoft.com/office/drawing/2010/main" val="0"/>
-              </a:ext>
-            </a:extLst>
-          </a:blip>
-          <a:srcRect/>
-          <a:stretch>
-            <a:fillRect/>
-          </a:stretch>
-        </p:blipFill>
-        <p:spPr bwMode="auto">
-          <a:xfrm>
-            <a:off x="9869489" y="66676"/>
-            <a:ext cx="2152650" cy="1424329"/>
-          </a:xfrm>
-          <a:prstGeom prst="rect">
-            <a:avLst/>
-          </a:prstGeom>
-          <a:noFill/>
-          <a:extLst>
-            <a:ext uri="{909E8E84-426E-40DD-AFC4-6F175D3DCCD1}">
-              <a14:hiddenFill xmlns:a14="http://schemas.microsoft.com/office/drawing/2010/main">
-                <a:solidFill>
-                  <a:srgbClr val="FFFFFF"/>
-                </a:solidFill>
-              </a14:hiddenFill>
-            </a:ext>
-          </a:extLst>
-        </p:spPr>
-      </p:pic>
-      <p:sp>
-        <p:nvSpPr>
-          <p:cNvPr id="7" name="TextBox 6">
-            <a:extLst>
-              <a:ext uri="{FF2B5EF4-FFF2-40B4-BE49-F238E27FC236}">
-                <a16:creationId xmlns:a16="http://schemas.microsoft.com/office/drawing/2014/main" id="{EE3E5455-A30D-EF00-88BD-2B3F157983C4}"/>
-              </a:ext>
-            </a:extLst>
-          </p:cNvPr>
-          <p:cNvSpPr txBox="1"/>
-          <p:nvPr/>
-        </p:nvSpPr>
-        <p:spPr>
-          <a:xfrm>
-            <a:off x="6051006" y="1692410"/>
-            <a:ext cx="5342020" cy="509178"/>
-          </a:xfrm>
-          <a:prstGeom prst="rect">
-            <a:avLst/>
-          </a:prstGeom>
-          <a:solidFill>
-            <a:schemeClr val="bg1">
-              <a:lumMod val="95000"/>
-            </a:schemeClr>
-          </a:solidFill>
-        </p:spPr>
-        <p:txBody>
-          <a:bodyPr wrap="square" rtlCol="0">
-            <a:spAutoFit/>
-          </a:bodyPr>
-          <a:lstStyle/>
-          <a:p>
-            <a:pPr marL="285750" indent="-285750">
-              <a:lnSpc>
-                <a:spcPct val="150000"/>
-              </a:lnSpc>
-              <a:buFont typeface="Wingdings" panose="05000000000000000000" pitchFamily="2" charset="2"/>
-              <a:buChar char="v"/>
-            </a:pPr>
-            <a:r>
-              <a:rPr lang="en-US" altLang="ko-KR" sz="2000" dirty="0">
-                <a:latin typeface="맑은 고딕 Semilight" panose="020B0502040204020203" pitchFamily="50" charset="-127"/>
-                <a:ea typeface="맑은 고딕 Semilight" panose="020B0502040204020203" pitchFamily="50" charset="-127"/>
-                <a:cs typeface="맑은 고딕 Semilight" panose="020B0502040204020203" pitchFamily="50" charset="-127"/>
-                <a:hlinkClick r:id="rId3">
-                  <a:extLst>
-                    <a:ext uri="{A12FA001-AC4F-418D-AE19-62706E023703}">
-                      <ahyp:hlinkClr xmlns:ahyp="http://schemas.microsoft.com/office/drawing/2018/hyperlinkcolor" val="tx"/>
-                    </a:ext>
-                  </a:extLst>
-                </a:hlinkClick>
-              </a:rPr>
-              <a:t>Monty Hall Problem</a:t>
-            </a:r>
-            <a:r>
-              <a:rPr lang="en-US" altLang="ko-KR" sz="2000" dirty="0">
-                <a:latin typeface="맑은 고딕 Semilight" panose="020B0502040204020203" pitchFamily="50" charset="-127"/>
-                <a:ea typeface="맑은 고딕 Semilight" panose="020B0502040204020203" pitchFamily="50" charset="-127"/>
-                <a:cs typeface="맑은 고딕 Semilight" panose="020B0502040204020203" pitchFamily="50" charset="-127"/>
-              </a:rPr>
-              <a:t>, </a:t>
-            </a:r>
-            <a:r>
-              <a:rPr lang="ko-KR" altLang="en-US" sz="2000" dirty="0">
-                <a:latin typeface="맑은 고딕 Semilight" panose="020B0502040204020203" pitchFamily="50" charset="-127"/>
-                <a:ea typeface="맑은 고딕 Semilight" panose="020B0502040204020203" pitchFamily="50" charset="-127"/>
-                <a:cs typeface="맑은 고딕 Semilight" panose="020B0502040204020203" pitchFamily="50" charset="-127"/>
-              </a:rPr>
-              <a:t>문이 </a:t>
-            </a:r>
-            <a:r>
-              <a:rPr lang="en-US" altLang="ko-KR" sz="2000" dirty="0">
-                <a:latin typeface="맑은 고딕 Semilight" panose="020B0502040204020203" pitchFamily="50" charset="-127"/>
-                <a:ea typeface="맑은 고딕 Semilight" panose="020B0502040204020203" pitchFamily="50" charset="-127"/>
-                <a:cs typeface="맑은 고딕 Semilight" panose="020B0502040204020203" pitchFamily="50" charset="-127"/>
-              </a:rPr>
-              <a:t>10,000</a:t>
-            </a:r>
-            <a:r>
-              <a:rPr lang="ko-KR" altLang="en-US" sz="2000" dirty="0">
-                <a:latin typeface="맑은 고딕 Semilight" panose="020B0502040204020203" pitchFamily="50" charset="-127"/>
-                <a:ea typeface="맑은 고딕 Semilight" panose="020B0502040204020203" pitchFamily="50" charset="-127"/>
-                <a:cs typeface="맑은 고딕 Semilight" panose="020B0502040204020203" pitchFamily="50" charset="-127"/>
-              </a:rPr>
-              <a:t>개 라면</a:t>
-            </a:r>
-            <a:r>
-              <a:rPr lang="en-US" altLang="ko-KR" sz="2000" dirty="0">
-                <a:latin typeface="맑은 고딕 Semilight" panose="020B0502040204020203" pitchFamily="50" charset="-127"/>
-                <a:ea typeface="맑은 고딕 Semilight" panose="020B0502040204020203" pitchFamily="50" charset="-127"/>
-                <a:cs typeface="맑은 고딕 Semilight" panose="020B0502040204020203" pitchFamily="50" charset="-127"/>
-              </a:rPr>
-              <a:t>?</a:t>
-            </a:r>
-          </a:p>
-        </p:txBody>
-      </p:sp>
-    </p:spTree>
-    <p:extLst>
-      <p:ext uri="{BB962C8B-B14F-4D97-AF65-F5344CB8AC3E}">
-        <p14:creationId xmlns:p14="http://schemas.microsoft.com/office/powerpoint/2010/main" val="1646032272"/>
-      </p:ext>
-    </p:extLst>
-  </p:cSld>
-  <p:clrMapOvr>
-    <a:masterClrMapping/>
-  </p:clrMapOvr>
-  <mc:AlternateContent xmlns:mc="http://schemas.openxmlformats.org/markup-compatibility/2006" xmlns:p14="http://schemas.microsoft.com/office/powerpoint/2010/main">
-    <mc:Choice Requires="p14">
-      <p:transition spd="med" p14:dur="700">
-        <p:fade/>
-      </p:transition>
-    </mc:Choice>
-    <mc:Fallback xmlns="">
-      <p:transition spd="med">
-        <p:fade/>
-      </p:transition>
-    </mc:Fallback>
-  </mc:AlternateContent>
-</p:sld>
-</file>
-
-<file path=ppt/slides/slide27.xml><?xml version="1.0" encoding="utf-8"?>
-<p:sld xmlns:a="http://schemas.openxmlformats.org/drawingml/2006/main" xmlns:r="http://schemas.openxmlformats.org/officeDocument/2006/relationships" xmlns:p="http://schemas.openxmlformats.org/presentationml/2006/main">
-  <p:cSld>
-    <p:spTree>
-      <p:nvGrpSpPr>
-        <p:cNvPr id="1" name="">
-          <a:extLst>
-            <a:ext uri="{FF2B5EF4-FFF2-40B4-BE49-F238E27FC236}">
-              <a16:creationId xmlns:a16="http://schemas.microsoft.com/office/drawing/2014/main" id="{11EF696F-724F-26BD-9C71-E5EC7071092F}"/>
-            </a:ext>
-          </a:extLst>
-        </p:cNvPr>
-        <p:cNvGrpSpPr/>
-        <p:nvPr/>
-      </p:nvGrpSpPr>
-      <p:grpSpPr>
-        <a:xfrm>
-          <a:off x="0" y="0"/>
-          <a:ext cx="0" cy="0"/>
-          <a:chOff x="0" y="0"/>
-          <a:chExt cx="0" cy="0"/>
-        </a:xfrm>
-      </p:grpSpPr>
-      <p:sp>
-        <p:nvSpPr>
-          <p:cNvPr id="2" name="슬라이드 번호 개체 틀 1">
-            <a:extLst>
-              <a:ext uri="{FF2B5EF4-FFF2-40B4-BE49-F238E27FC236}">
-                <a16:creationId xmlns:a16="http://schemas.microsoft.com/office/drawing/2014/main" id="{B6626646-BEA0-FB3A-7822-5F9972BD64EE}"/>
-              </a:ext>
-            </a:extLst>
-          </p:cNvPr>
-          <p:cNvSpPr>
-            <a:spLocks noGrp="1"/>
-          </p:cNvSpPr>
-          <p:nvPr>
-            <p:ph type="sldNum" sz="quarter" idx="12"/>
-          </p:nvPr>
-        </p:nvSpPr>
-        <p:spPr/>
-        <p:txBody>
-          <a:bodyPr/>
-          <a:lstStyle/>
-          <a:p>
-            <a:pPr rtl="0"/>
-            <a:fld id="{A3F31473-23EB-4724-8B59-FE6D21D89FA4}" type="slidenum">
-              <a:rPr lang="en-US" altLang="ko-KR" noProof="0" smtClean="0"/>
-              <a:t>27</a:t>
-            </a:fld>
-            <a:endParaRPr lang="en-US" altLang="ko-KR" noProof="0" dirty="0"/>
-          </a:p>
-        </p:txBody>
-      </p:sp>
-      <p:sp>
-        <p:nvSpPr>
-          <p:cNvPr id="4" name="TextBox 3">
-            <a:extLst>
-              <a:ext uri="{FF2B5EF4-FFF2-40B4-BE49-F238E27FC236}">
-                <a16:creationId xmlns:a16="http://schemas.microsoft.com/office/drawing/2014/main" id="{B4456C07-5D3C-22AC-8A59-702C8C03FA3F}"/>
-              </a:ext>
-            </a:extLst>
-          </p:cNvPr>
-          <p:cNvSpPr txBox="1"/>
-          <p:nvPr/>
-        </p:nvSpPr>
-        <p:spPr>
-          <a:xfrm>
-            <a:off x="767408" y="1196753"/>
-            <a:ext cx="9102081" cy="2531783"/>
-          </a:xfrm>
-          <a:prstGeom prst="rect">
-            <a:avLst/>
-          </a:prstGeom>
-          <a:solidFill>
-            <a:schemeClr val="bg1">
-              <a:lumMod val="95000"/>
-            </a:schemeClr>
-          </a:solidFill>
-        </p:spPr>
-        <p:txBody>
-          <a:bodyPr wrap="square" rtlCol="0">
-            <a:spAutoFit/>
-          </a:bodyPr>
-          <a:lstStyle/>
-          <a:p>
-            <a:pPr marL="285750" indent="-285750">
-              <a:lnSpc>
-                <a:spcPct val="150000"/>
-              </a:lnSpc>
-              <a:buFont typeface="Wingdings" panose="05000000000000000000" pitchFamily="2" charset="2"/>
-              <a:buChar char="v"/>
-            </a:pPr>
-            <a:r>
-              <a:rPr lang="ko-KR" altLang="en-US" dirty="0">
-                <a:latin typeface="맑은 고딕 Semilight" panose="020B0502040204020203" pitchFamily="50" charset="-127"/>
-                <a:ea typeface="맑은 고딕 Semilight" panose="020B0502040204020203" pitchFamily="50" charset="-127"/>
-                <a:cs typeface="맑은 고딕 Semilight" panose="020B0502040204020203" pitchFamily="50" charset="-127"/>
-              </a:rPr>
-              <a:t>당신은 앞으로 인생에서 총 </a:t>
-            </a:r>
-            <a:r>
-              <a:rPr lang="en-US" altLang="ko-KR" dirty="0">
-                <a:latin typeface="맑은 고딕 Semilight" panose="020B0502040204020203" pitchFamily="50" charset="-127"/>
-                <a:ea typeface="맑은 고딕 Semilight" panose="020B0502040204020203" pitchFamily="50" charset="-127"/>
-                <a:cs typeface="맑은 고딕 Semilight" panose="020B0502040204020203" pitchFamily="50" charset="-127"/>
-              </a:rPr>
-              <a:t>N</a:t>
-            </a:r>
-            <a:r>
-              <a:rPr lang="ko-KR" altLang="en-US" dirty="0">
-                <a:latin typeface="맑은 고딕 Semilight" panose="020B0502040204020203" pitchFamily="50" charset="-127"/>
-                <a:ea typeface="맑은 고딕 Semilight" panose="020B0502040204020203" pitchFamily="50" charset="-127"/>
-                <a:cs typeface="맑은 고딕 Semilight" panose="020B0502040204020203" pitchFamily="50" charset="-127"/>
-              </a:rPr>
-              <a:t>명의 잠재적 파트너를 만날 수 있다고 가정</a:t>
-            </a:r>
-            <a:endParaRPr lang="en-US" altLang="ko-KR" dirty="0">
-              <a:latin typeface="맑은 고딕 Semilight" panose="020B0502040204020203" pitchFamily="50" charset="-127"/>
-              <a:ea typeface="맑은 고딕 Semilight" panose="020B0502040204020203" pitchFamily="50" charset="-127"/>
-              <a:cs typeface="맑은 고딕 Semilight" panose="020B0502040204020203" pitchFamily="50" charset="-127"/>
-            </a:endParaRPr>
-          </a:p>
-          <a:p>
-            <a:pPr marL="285750" indent="-285750">
-              <a:lnSpc>
-                <a:spcPct val="150000"/>
-              </a:lnSpc>
-              <a:buFont typeface="Wingdings" panose="05000000000000000000" pitchFamily="2" charset="2"/>
-              <a:buChar char="v"/>
-            </a:pPr>
-            <a:r>
-              <a:rPr lang="ko-KR" altLang="en-US" dirty="0">
-                <a:latin typeface="맑은 고딕 Semilight" panose="020B0502040204020203" pitchFamily="50" charset="-127"/>
-                <a:ea typeface="맑은 고딕 Semilight" panose="020B0502040204020203" pitchFamily="50" charset="-127"/>
-                <a:cs typeface="맑은 고딕 Semilight" panose="020B0502040204020203" pitchFamily="50" charset="-127"/>
-              </a:rPr>
-              <a:t>당신의 목표는 그중 가장 뛰어난 사람</a:t>
-            </a:r>
-            <a:r>
-              <a:rPr lang="en-US" altLang="ko-KR" dirty="0">
-                <a:latin typeface="맑은 고딕 Semilight" panose="020B0502040204020203" pitchFamily="50" charset="-127"/>
-                <a:ea typeface="맑은 고딕 Semilight" panose="020B0502040204020203" pitchFamily="50" charset="-127"/>
-                <a:cs typeface="맑은 고딕 Semilight" panose="020B0502040204020203" pitchFamily="50" charset="-127"/>
-              </a:rPr>
-              <a:t>(X)</a:t>
-            </a:r>
-            <a:r>
-              <a:rPr lang="ko-KR" altLang="en-US" dirty="0">
-                <a:latin typeface="맑은 고딕 Semilight" panose="020B0502040204020203" pitchFamily="50" charset="-127"/>
-                <a:ea typeface="맑은 고딕 Semilight" panose="020B0502040204020203" pitchFamily="50" charset="-127"/>
-                <a:cs typeface="맑은 고딕 Semilight" panose="020B0502040204020203" pitchFamily="50" charset="-127"/>
-              </a:rPr>
-              <a:t>과 매칭되는 것이며</a:t>
-            </a:r>
-            <a:r>
-              <a:rPr lang="en-US" altLang="ko-KR" dirty="0">
-                <a:latin typeface="맑은 고딕 Semilight" panose="020B0502040204020203" pitchFamily="50" charset="-127"/>
-                <a:ea typeface="맑은 고딕 Semilight" panose="020B0502040204020203" pitchFamily="50" charset="-127"/>
-                <a:cs typeface="맑은 고딕 Semilight" panose="020B0502040204020203" pitchFamily="50" charset="-127"/>
-              </a:rPr>
-              <a:t> </a:t>
-            </a:r>
-            <a:r>
-              <a:rPr lang="ko-KR" altLang="en-US" dirty="0">
-                <a:latin typeface="맑은 고딕 Semilight" panose="020B0502040204020203" pitchFamily="50" charset="-127"/>
-                <a:ea typeface="맑은 고딕 Semilight" panose="020B0502040204020203" pitchFamily="50" charset="-127"/>
-                <a:cs typeface="맑은 고딕 Semilight" panose="020B0502040204020203" pitchFamily="50" charset="-127"/>
-              </a:rPr>
-              <a:t>단</a:t>
-            </a:r>
-            <a:r>
-              <a:rPr lang="en-US" altLang="ko-KR" dirty="0">
-                <a:latin typeface="맑은 고딕 Semilight" panose="020B0502040204020203" pitchFamily="50" charset="-127"/>
-                <a:ea typeface="맑은 고딕 Semilight" panose="020B0502040204020203" pitchFamily="50" charset="-127"/>
-                <a:cs typeface="맑은 고딕 Semilight" panose="020B0502040204020203" pitchFamily="50" charset="-127"/>
-              </a:rPr>
-              <a:t>, </a:t>
-            </a:r>
-            <a:r>
-              <a:rPr lang="ko-KR" altLang="en-US" dirty="0">
-                <a:latin typeface="맑은 고딕 Semilight" panose="020B0502040204020203" pitchFamily="50" charset="-127"/>
-                <a:ea typeface="맑은 고딕 Semilight" panose="020B0502040204020203" pitchFamily="50" charset="-127"/>
-                <a:cs typeface="맑은 고딕 Semilight" panose="020B0502040204020203" pitchFamily="50" charset="-127"/>
-              </a:rPr>
-              <a:t>아래의 조건</a:t>
-            </a:r>
-            <a:endParaRPr lang="en-US" altLang="ko-KR" dirty="0">
-              <a:latin typeface="맑은 고딕 Semilight" panose="020B0502040204020203" pitchFamily="50" charset="-127"/>
-              <a:ea typeface="맑은 고딕 Semilight" panose="020B0502040204020203" pitchFamily="50" charset="-127"/>
-              <a:cs typeface="맑은 고딕 Semilight" panose="020B0502040204020203" pitchFamily="50" charset="-127"/>
-            </a:endParaRPr>
-          </a:p>
-          <a:p>
-            <a:pPr marL="742950" lvl="1" indent="-285750">
-              <a:lnSpc>
-                <a:spcPct val="150000"/>
-              </a:lnSpc>
-              <a:buFont typeface="Wingdings" panose="05000000000000000000" pitchFamily="2" charset="2"/>
-              <a:buChar char="v"/>
-            </a:pPr>
-            <a:r>
-              <a:rPr lang="ko-KR" altLang="en-US" dirty="0">
-                <a:latin typeface="맑은 고딕 Semilight" panose="020B0502040204020203" pitchFamily="50" charset="-127"/>
-                <a:ea typeface="맑은 고딕 Semilight" panose="020B0502040204020203" pitchFamily="50" charset="-127"/>
-                <a:cs typeface="맑은 고딕 Semilight" panose="020B0502040204020203" pitchFamily="50" charset="-127"/>
-              </a:rPr>
-              <a:t>한 번 거절한 사람에게는 다시 돌아갈 수 없음</a:t>
-            </a:r>
-            <a:endParaRPr lang="en-US" altLang="ko-KR" dirty="0">
-              <a:latin typeface="맑은 고딕 Semilight" panose="020B0502040204020203" pitchFamily="50" charset="-127"/>
-              <a:ea typeface="맑은 고딕 Semilight" panose="020B0502040204020203" pitchFamily="50" charset="-127"/>
-              <a:cs typeface="맑은 고딕 Semilight" panose="020B0502040204020203" pitchFamily="50" charset="-127"/>
-            </a:endParaRPr>
-          </a:p>
-          <a:p>
-            <a:pPr marL="742950" lvl="1" indent="-285750">
-              <a:lnSpc>
-                <a:spcPct val="150000"/>
-              </a:lnSpc>
-              <a:buFont typeface="Wingdings" panose="05000000000000000000" pitchFamily="2" charset="2"/>
-              <a:buChar char="v"/>
-            </a:pPr>
-            <a:r>
-              <a:rPr lang="ko-KR" altLang="en-US" dirty="0">
-                <a:latin typeface="맑은 고딕 Semilight" panose="020B0502040204020203" pitchFamily="50" charset="-127"/>
-                <a:ea typeface="맑은 고딕 Semilight" panose="020B0502040204020203" pitchFamily="50" charset="-127"/>
-                <a:cs typeface="맑은 고딕 Semilight" panose="020B0502040204020203" pitchFamily="50" charset="-127"/>
-              </a:rPr>
-              <a:t>만나는 순서는 무작위이며</a:t>
-            </a:r>
-            <a:r>
-              <a:rPr lang="en-US" altLang="ko-KR" dirty="0">
-                <a:latin typeface="맑은 고딕 Semilight" panose="020B0502040204020203" pitchFamily="50" charset="-127"/>
-                <a:ea typeface="맑은 고딕 Semilight" panose="020B0502040204020203" pitchFamily="50" charset="-127"/>
-                <a:cs typeface="맑은 고딕 Semilight" panose="020B0502040204020203" pitchFamily="50" charset="-127"/>
-              </a:rPr>
-              <a:t>, </a:t>
-            </a:r>
-            <a:r>
-              <a:rPr lang="ko-KR" altLang="en-US" dirty="0">
-                <a:latin typeface="맑은 고딕 Semilight" panose="020B0502040204020203" pitchFamily="50" charset="-127"/>
-                <a:ea typeface="맑은 고딕 Semilight" panose="020B0502040204020203" pitchFamily="50" charset="-127"/>
-                <a:cs typeface="맑은 고딕 Semilight" panose="020B0502040204020203" pitchFamily="50" charset="-127"/>
-              </a:rPr>
-              <a:t>당신은 상대를 만날 때마다 점수를 매길 수 있음</a:t>
-            </a:r>
-            <a:endParaRPr lang="en-US" altLang="ko-KR" dirty="0">
-              <a:latin typeface="맑은 고딕 Semilight" panose="020B0502040204020203" pitchFamily="50" charset="-127"/>
-              <a:ea typeface="맑은 고딕 Semilight" panose="020B0502040204020203" pitchFamily="50" charset="-127"/>
-              <a:cs typeface="맑은 고딕 Semilight" panose="020B0502040204020203" pitchFamily="50" charset="-127"/>
-            </a:endParaRPr>
-          </a:p>
-          <a:p>
-            <a:pPr marL="285750" indent="-285750">
-              <a:lnSpc>
-                <a:spcPct val="150000"/>
-              </a:lnSpc>
-              <a:buFont typeface="Wingdings" panose="05000000000000000000" pitchFamily="2" charset="2"/>
-              <a:buChar char="v"/>
-            </a:pPr>
-            <a:r>
-              <a:rPr lang="ko-KR" altLang="en-US" dirty="0">
-                <a:latin typeface="맑은 고딕 Semilight" panose="020B0502040204020203" pitchFamily="50" charset="-127"/>
-                <a:ea typeface="맑은 고딕 Semilight" panose="020B0502040204020203" pitchFamily="50" charset="-127"/>
-                <a:cs typeface="맑은 고딕 Semilight" panose="020B0502040204020203" pitchFamily="50" charset="-127"/>
-              </a:rPr>
-              <a:t>가장 좋은 사람</a:t>
-            </a:r>
-            <a:r>
-              <a:rPr lang="en-US" altLang="ko-KR" dirty="0">
-                <a:latin typeface="맑은 고딕 Semilight" panose="020B0502040204020203" pitchFamily="50" charset="-127"/>
-                <a:ea typeface="맑은 고딕 Semilight" panose="020B0502040204020203" pitchFamily="50" charset="-127"/>
-                <a:cs typeface="맑은 고딕 Semilight" panose="020B0502040204020203" pitchFamily="50" charset="-127"/>
-              </a:rPr>
-              <a:t>(X)</a:t>
-            </a:r>
-            <a:r>
-              <a:rPr lang="ko-KR" altLang="en-US" dirty="0">
-                <a:latin typeface="맑은 고딕 Semilight" panose="020B0502040204020203" pitchFamily="50" charset="-127"/>
-                <a:ea typeface="맑은 고딕 Semilight" panose="020B0502040204020203" pitchFamily="50" charset="-127"/>
-                <a:cs typeface="맑은 고딕 Semilight" panose="020B0502040204020203" pitchFamily="50" charset="-127"/>
-              </a:rPr>
-              <a:t>을 선택할 확률을 최대화하려면</a:t>
-            </a:r>
-            <a:r>
-              <a:rPr lang="en-US" altLang="ko-KR" dirty="0">
-                <a:latin typeface="맑은 고딕 Semilight" panose="020B0502040204020203" pitchFamily="50" charset="-127"/>
-                <a:ea typeface="맑은 고딕 Semilight" panose="020B0502040204020203" pitchFamily="50" charset="-127"/>
-                <a:cs typeface="맑은 고딕 Semilight" panose="020B0502040204020203" pitchFamily="50" charset="-127"/>
-              </a:rPr>
-              <a:t>, </a:t>
-            </a:r>
-            <a:r>
-              <a:rPr lang="ko-KR" altLang="en-US" dirty="0">
-                <a:latin typeface="맑은 고딕 Semilight" panose="020B0502040204020203" pitchFamily="50" charset="-127"/>
-                <a:ea typeface="맑은 고딕 Semilight" panose="020B0502040204020203" pitchFamily="50" charset="-127"/>
-                <a:cs typeface="맑은 고딕 Semilight" panose="020B0502040204020203" pitchFamily="50" charset="-127"/>
-              </a:rPr>
-              <a:t>몇 번째 사람을 선책해야 하나요</a:t>
-            </a:r>
-            <a:r>
-              <a:rPr lang="en-US" altLang="ko-KR" dirty="0">
-                <a:latin typeface="맑은 고딕 Semilight" panose="020B0502040204020203" pitchFamily="50" charset="-127"/>
-                <a:ea typeface="맑은 고딕 Semilight" panose="020B0502040204020203" pitchFamily="50" charset="-127"/>
-                <a:cs typeface="맑은 고딕 Semilight" panose="020B0502040204020203" pitchFamily="50" charset="-127"/>
-              </a:rPr>
-              <a:t>?</a:t>
-            </a:r>
-          </a:p>
-          <a:p>
-            <a:pPr marL="742950" lvl="1" indent="-285750">
-              <a:lnSpc>
-                <a:spcPct val="150000"/>
-              </a:lnSpc>
-              <a:buFont typeface="Wingdings" panose="05000000000000000000" pitchFamily="2" charset="2"/>
-              <a:buChar char="v"/>
-            </a:pPr>
-            <a:r>
-              <a:rPr lang="en-US" altLang="ko-KR" dirty="0">
-                <a:latin typeface="맑은 고딕 Semilight" panose="020B0502040204020203" pitchFamily="50" charset="-127"/>
-                <a:ea typeface="맑은 고딕 Semilight" panose="020B0502040204020203" pitchFamily="50" charset="-127"/>
-                <a:cs typeface="맑은 고딕 Semilight" panose="020B0502040204020203" pitchFamily="50" charset="-127"/>
-                <a:hlinkClick r:id="rId3">
-                  <a:extLst>
-                    <a:ext uri="{A12FA001-AC4F-418D-AE19-62706E023703}">
-                      <ahyp:hlinkClr xmlns:ahyp="http://schemas.microsoft.com/office/drawing/2018/hyperlinkcolor" val="tx"/>
-                    </a:ext>
-                  </a:extLst>
-                </a:hlinkClick>
-              </a:rPr>
-              <a:t>mathematical-dating</a:t>
-            </a:r>
-            <a:endParaRPr lang="en-US" altLang="ko-KR" dirty="0">
-              <a:latin typeface="맑은 고딕 Semilight" panose="020B0502040204020203" pitchFamily="50" charset="-127"/>
-              <a:ea typeface="맑은 고딕 Semilight" panose="020B0502040204020203" pitchFamily="50" charset="-127"/>
-              <a:cs typeface="맑은 고딕 Semilight" panose="020B0502040204020203" pitchFamily="50" charset="-127"/>
-            </a:endParaRPr>
-          </a:p>
-        </p:txBody>
-      </p:sp>
-      <p:sp>
-        <p:nvSpPr>
-          <p:cNvPr id="9" name="TextBox 8">
-            <a:extLst>
-              <a:ext uri="{FF2B5EF4-FFF2-40B4-BE49-F238E27FC236}">
-                <a16:creationId xmlns:a16="http://schemas.microsoft.com/office/drawing/2014/main" id="{185BE9C9-E7C6-D55A-BC46-CD975C33457A}"/>
-              </a:ext>
-            </a:extLst>
-          </p:cNvPr>
-          <p:cNvSpPr txBox="1"/>
-          <p:nvPr/>
-        </p:nvSpPr>
-        <p:spPr>
-          <a:xfrm>
-            <a:off x="119336" y="260649"/>
-            <a:ext cx="2592288" cy="584775"/>
-          </a:xfrm>
-          <a:prstGeom prst="rect">
-            <a:avLst/>
-          </a:prstGeom>
-          <a:noFill/>
-        </p:spPr>
-        <p:txBody>
-          <a:bodyPr wrap="square" rtlCol="0">
-            <a:spAutoFit/>
-          </a:bodyPr>
-          <a:lstStyle/>
-          <a:p>
-            <a:r>
-              <a:rPr lang="ko-KR" altLang="en-US" sz="3200" b="1" dirty="0">
-                <a:latin typeface="맑은 고딕 Semilight" panose="020B0502040204020203" pitchFamily="50" charset="-127"/>
-                <a:ea typeface="맑은 고딕 Semilight" panose="020B0502040204020203" pitchFamily="50" charset="-127"/>
-                <a:cs typeface="맑은 고딕 Semilight" panose="020B0502040204020203" pitchFamily="50" charset="-127"/>
-              </a:rPr>
-              <a:t>문제 풀이</a:t>
-            </a:r>
-          </a:p>
-        </p:txBody>
-      </p:sp>
-      <p:pic>
-        <p:nvPicPr>
-          <p:cNvPr id="6" name="그림 5">
-            <a:extLst>
-              <a:ext uri="{FF2B5EF4-FFF2-40B4-BE49-F238E27FC236}">
-                <a16:creationId xmlns:a16="http://schemas.microsoft.com/office/drawing/2014/main" id="{BE0093E0-2B37-39B8-6DB9-925B18522DF0}"/>
-              </a:ext>
-            </a:extLst>
-          </p:cNvPr>
-          <p:cNvPicPr>
-            <a:picLocks noChangeAspect="1"/>
-          </p:cNvPicPr>
-          <p:nvPr/>
-        </p:nvPicPr>
-        <p:blipFill>
-          <a:blip r:embed="rId4"/>
-          <a:stretch>
-            <a:fillRect/>
-          </a:stretch>
-        </p:blipFill>
-        <p:spPr>
-          <a:xfrm>
-            <a:off x="4033275" y="3861558"/>
-            <a:ext cx="3334215" cy="1994109"/>
-          </a:xfrm>
-          <a:prstGeom prst="rect">
-            <a:avLst/>
-          </a:prstGeom>
-        </p:spPr>
-      </p:pic>
-      <p:pic>
-        <p:nvPicPr>
-          <p:cNvPr id="3" name="Picture 2" descr="한 여자가 노트북 컴퓨터에 타이핑을 하고 있다">
-            <a:extLst>
-              <a:ext uri="{FF2B5EF4-FFF2-40B4-BE49-F238E27FC236}">
-                <a16:creationId xmlns:a16="http://schemas.microsoft.com/office/drawing/2014/main" id="{9D41C8BB-9143-9759-5675-5DDCD0405FE7}"/>
-              </a:ext>
-            </a:extLst>
-          </p:cNvPr>
-          <p:cNvPicPr>
-            <a:picLocks noChangeAspect="1" noChangeArrowheads="1"/>
-          </p:cNvPicPr>
-          <p:nvPr/>
-        </p:nvPicPr>
-        <p:blipFill>
-          <a:blip r:embed="rId5" cstate="print">
-            <a:extLst>
-              <a:ext uri="{28A0092B-C50C-407E-A947-70E740481C1C}">
-                <a14:useLocalDpi xmlns:a14="http://schemas.microsoft.com/office/drawing/2010/main" val="0"/>
-              </a:ext>
-            </a:extLst>
-          </a:blip>
-          <a:srcRect/>
-          <a:stretch>
-            <a:fillRect/>
-          </a:stretch>
-        </p:blipFill>
-        <p:spPr bwMode="auto">
-          <a:xfrm>
-            <a:off x="9869489" y="66676"/>
-            <a:ext cx="2152650" cy="1424329"/>
-          </a:xfrm>
-          <a:prstGeom prst="rect">
-            <a:avLst/>
-          </a:prstGeom>
-          <a:noFill/>
-          <a:extLst>
-            <a:ext uri="{909E8E84-426E-40DD-AFC4-6F175D3DCCD1}">
-              <a14:hiddenFill xmlns:a14="http://schemas.microsoft.com/office/drawing/2010/main">
-                <a:solidFill>
-                  <a:srgbClr val="FFFFFF"/>
-                </a:solidFill>
-              </a14:hiddenFill>
-            </a:ext>
-          </a:extLst>
-        </p:spPr>
-      </p:pic>
-    </p:spTree>
-    <p:extLst>
-      <p:ext uri="{BB962C8B-B14F-4D97-AF65-F5344CB8AC3E}">
-        <p14:creationId xmlns:p14="http://schemas.microsoft.com/office/powerpoint/2010/main" val="2538778517"/>
-      </p:ext>
-    </p:extLst>
-  </p:cSld>
-  <p:clrMapOvr>
-    <a:masterClrMapping/>
-  </p:clrMapOvr>
-  <mc:AlternateContent xmlns:mc="http://schemas.openxmlformats.org/markup-compatibility/2006" xmlns:p14="http://schemas.microsoft.com/office/powerpoint/2010/main">
-    <mc:Choice Requires="p14">
-      <p:transition spd="med" p14:dur="700">
-        <p:fade/>
-      </p:transition>
-    </mc:Choice>
-    <mc:Fallback xmlns="">
-      <p:transition spd="med">
-        <p:fade/>
-      </p:transition>
-    </mc:Fallback>
-  </mc:AlternateContent>
-</p:sld>
-</file>
-
-<file path=ppt/slides/slide28.xml><?xml version="1.0" encoding="utf-8"?>
-<p:sld xmlns:a="http://schemas.openxmlformats.org/drawingml/2006/main" xmlns:r="http://schemas.openxmlformats.org/officeDocument/2006/relationships" xmlns:p="http://schemas.openxmlformats.org/presentationml/2006/main">
-  <p:cSld>
-    <p:spTree>
-      <p:nvGrpSpPr>
-        <p:cNvPr id="1" name="">
-          <a:extLst>
-            <a:ext uri="{FF2B5EF4-FFF2-40B4-BE49-F238E27FC236}">
-              <a16:creationId xmlns:a16="http://schemas.microsoft.com/office/drawing/2014/main" id="{DA1C777C-D922-8895-688C-C5D8CB36E7A9}"/>
-            </a:ext>
-          </a:extLst>
-        </p:cNvPr>
-        <p:cNvGrpSpPr/>
-        <p:nvPr/>
-      </p:nvGrpSpPr>
-      <p:grpSpPr>
-        <a:xfrm>
-          <a:off x="0" y="0"/>
-          <a:ext cx="0" cy="0"/>
-          <a:chOff x="0" y="0"/>
-          <a:chExt cx="0" cy="0"/>
-        </a:xfrm>
-      </p:grpSpPr>
-      <p:sp>
-        <p:nvSpPr>
-          <p:cNvPr id="2" name="슬라이드 번호 개체 틀 1">
-            <a:extLst>
-              <a:ext uri="{FF2B5EF4-FFF2-40B4-BE49-F238E27FC236}">
-                <a16:creationId xmlns:a16="http://schemas.microsoft.com/office/drawing/2014/main" id="{AEB2C61B-EEC0-7491-DD5B-4008A55D9FCA}"/>
-              </a:ext>
-            </a:extLst>
-          </p:cNvPr>
-          <p:cNvSpPr>
-            <a:spLocks noGrp="1"/>
-          </p:cNvSpPr>
-          <p:nvPr>
-            <p:ph type="sldNum" sz="quarter" idx="12"/>
-          </p:nvPr>
-        </p:nvSpPr>
-        <p:spPr/>
-        <p:txBody>
-          <a:bodyPr/>
-          <a:lstStyle/>
-          <a:p>
-            <a:pPr rtl="0"/>
-            <a:fld id="{A3F31473-23EB-4724-8B59-FE6D21D89FA4}" type="slidenum">
-              <a:rPr lang="en-US" altLang="ko-KR" noProof="0" smtClean="0"/>
-              <a:t>28</a:t>
-            </a:fld>
-            <a:endParaRPr lang="en-US" altLang="ko-KR" noProof="0" dirty="0"/>
-          </a:p>
-        </p:txBody>
-      </p:sp>
-      <p:sp>
-        <p:nvSpPr>
-          <p:cNvPr id="4" name="TextBox 3">
-            <a:extLst>
-              <a:ext uri="{FF2B5EF4-FFF2-40B4-BE49-F238E27FC236}">
-                <a16:creationId xmlns:a16="http://schemas.microsoft.com/office/drawing/2014/main" id="{B46F664B-D509-3189-2815-157CC6374EF1}"/>
-              </a:ext>
-            </a:extLst>
-          </p:cNvPr>
-          <p:cNvSpPr txBox="1"/>
-          <p:nvPr/>
-        </p:nvSpPr>
-        <p:spPr>
-          <a:xfrm>
-            <a:off x="767408" y="1196752"/>
-            <a:ext cx="8813472" cy="3072123"/>
-          </a:xfrm>
-          <a:prstGeom prst="rect">
-            <a:avLst/>
-          </a:prstGeom>
-          <a:solidFill>
-            <a:schemeClr val="bg1">
-              <a:lumMod val="95000"/>
-            </a:schemeClr>
-          </a:solidFill>
-        </p:spPr>
-        <p:txBody>
-          <a:bodyPr wrap="square" rtlCol="0">
-            <a:spAutoFit/>
-          </a:bodyPr>
-          <a:lstStyle/>
-          <a:p>
-            <a:pPr marL="285750" indent="-285750">
-              <a:lnSpc>
-                <a:spcPct val="200000"/>
-              </a:lnSpc>
-              <a:buFont typeface="Wingdings" panose="05000000000000000000" pitchFamily="2" charset="2"/>
-              <a:buChar char="v"/>
-            </a:pPr>
-            <a:r>
-              <a:rPr lang="ko-KR" altLang="en-US" sz="2000" dirty="0">
-                <a:latin typeface="맑은 고딕 Semilight" panose="020B0502040204020203" pitchFamily="50" charset="-127"/>
-                <a:ea typeface="맑은 고딕 Semilight" panose="020B0502040204020203" pitchFamily="50" charset="-127"/>
-                <a:cs typeface="맑은 고딕 Semilight" panose="020B0502040204020203" pitchFamily="50" charset="-127"/>
-              </a:rPr>
-              <a:t>한 학급에 </a:t>
-            </a:r>
-            <a:r>
-              <a:rPr lang="ko-KR" altLang="ko-KR" sz="2000" dirty="0">
-                <a:latin typeface="맑은 고딕 Semilight" panose="020B0502040204020203" pitchFamily="50" charset="-127"/>
-                <a:ea typeface="맑은 고딕 Semilight" panose="020B0502040204020203" pitchFamily="50" charset="-127"/>
-                <a:cs typeface="맑은 고딕 Semilight" panose="020B0502040204020203" pitchFamily="50" charset="-127"/>
-              </a:rPr>
-              <a:t>100</a:t>
-            </a:r>
-            <a:r>
-              <a:rPr lang="ko-KR" altLang="en-US" sz="2000" dirty="0">
-                <a:latin typeface="맑은 고딕 Semilight" panose="020B0502040204020203" pitchFamily="50" charset="-127"/>
-                <a:ea typeface="맑은 고딕 Semilight" panose="020B0502040204020203" pitchFamily="50" charset="-127"/>
-                <a:cs typeface="맑은 고딕 Semilight" panose="020B0502040204020203" pitchFamily="50" charset="-127"/>
-              </a:rPr>
-              <a:t>명</a:t>
-            </a:r>
-            <a:r>
-              <a:rPr lang="ko-KR" altLang="ko-KR" sz="2000" dirty="0">
-                <a:latin typeface="맑은 고딕 Semilight" panose="020B0502040204020203" pitchFamily="50" charset="-127"/>
-                <a:ea typeface="맑은 고딕 Semilight" panose="020B0502040204020203" pitchFamily="50" charset="-127"/>
-                <a:cs typeface="맑은 고딕 Semilight" panose="020B0502040204020203" pitchFamily="50" charset="-127"/>
-              </a:rPr>
-              <a:t>(</a:t>
-            </a:r>
-            <a:r>
-              <a:rPr lang="ko-KR" altLang="ko-KR" sz="2000" dirty="0" err="1">
-                <a:latin typeface="맑은 고딕 Semilight" panose="020B0502040204020203" pitchFamily="50" charset="-127"/>
-                <a:ea typeface="맑은 고딕 Semilight" panose="020B0502040204020203" pitchFamily="50" charset="-127"/>
-                <a:cs typeface="맑은 고딕 Semilight" panose="020B0502040204020203" pitchFamily="50" charset="-127"/>
-              </a:rPr>
-              <a:t>N</a:t>
-            </a:r>
-            <a:r>
-              <a:rPr lang="ko-KR" altLang="ko-KR" sz="2000" dirty="0">
-                <a:latin typeface="맑은 고딕 Semilight" panose="020B0502040204020203" pitchFamily="50" charset="-127"/>
-                <a:ea typeface="맑은 고딕 Semilight" panose="020B0502040204020203" pitchFamily="50" charset="-127"/>
-                <a:cs typeface="맑은 고딕 Semilight" panose="020B0502040204020203" pitchFamily="50" charset="-127"/>
-              </a:rPr>
-              <a:t>=100)</a:t>
-            </a:r>
-            <a:r>
-              <a:rPr lang="ko-KR" altLang="en-US" sz="2000" dirty="0">
-                <a:latin typeface="맑은 고딕 Semilight" panose="020B0502040204020203" pitchFamily="50" charset="-127"/>
-                <a:ea typeface="맑은 고딕 Semilight" panose="020B0502040204020203" pitchFamily="50" charset="-127"/>
-                <a:cs typeface="맑은 고딕 Semilight" panose="020B0502040204020203" pitchFamily="50" charset="-127"/>
-              </a:rPr>
-              <a:t>이 있는 반을 </a:t>
-            </a:r>
-            <a:r>
-              <a:rPr lang="ko-KR" altLang="ko-KR" sz="2000" dirty="0">
-                <a:latin typeface="맑은 고딕 Semilight" panose="020B0502040204020203" pitchFamily="50" charset="-127"/>
-                <a:ea typeface="맑은 고딕 Semilight" panose="020B0502040204020203" pitchFamily="50" charset="-127"/>
-                <a:cs typeface="맑은 고딕 Semilight" panose="020B0502040204020203" pitchFamily="50" charset="-127"/>
-              </a:rPr>
-              <a:t>상상해 보세요. </a:t>
-            </a:r>
-            <a:r>
-              <a:rPr lang="ko-KR" altLang="en-US" sz="2000" dirty="0">
-                <a:latin typeface="맑은 고딕 Semilight" panose="020B0502040204020203" pitchFamily="50" charset="-127"/>
-                <a:ea typeface="맑은 고딕 Semilight" panose="020B0502040204020203" pitchFamily="50" charset="-127"/>
-                <a:cs typeface="맑은 고딕 Semilight" panose="020B0502040204020203" pitchFamily="50" charset="-127"/>
-              </a:rPr>
-              <a:t>선생님이 무작위로 </a:t>
-            </a:r>
-            <a:r>
-              <a:rPr lang="en-US" altLang="ko-KR" sz="2000" dirty="0">
-                <a:latin typeface="맑은 고딕 Semilight" panose="020B0502040204020203" pitchFamily="50" charset="-127"/>
-                <a:ea typeface="맑은 고딕 Semilight" panose="020B0502040204020203" pitchFamily="50" charset="-127"/>
-                <a:cs typeface="맑은 고딕 Semilight" panose="020B0502040204020203" pitchFamily="50" charset="-127"/>
-              </a:rPr>
-              <a:t>1 </a:t>
-            </a:r>
-            <a:r>
-              <a:rPr lang="ko-KR" altLang="en-US" sz="2000" dirty="0">
-                <a:latin typeface="맑은 고딕 Semilight" panose="020B0502040204020203" pitchFamily="50" charset="-127"/>
-                <a:ea typeface="맑은 고딕 Semilight" panose="020B0502040204020203" pitchFamily="50" charset="-127"/>
-                <a:cs typeface="맑은 고딕 Semilight" panose="020B0502040204020203" pitchFamily="50" charset="-127"/>
-              </a:rPr>
-              <a:t>명을 </a:t>
-            </a:r>
-            <a:r>
-              <a:rPr lang="ko-KR" altLang="ko-KR" sz="2000" dirty="0">
-                <a:latin typeface="맑은 고딕 Semilight" panose="020B0502040204020203" pitchFamily="50" charset="-127"/>
-                <a:ea typeface="맑은 고딕 Semilight" panose="020B0502040204020203" pitchFamily="50" charset="-127"/>
-                <a:cs typeface="맑은 고딕 Semilight" panose="020B0502040204020203" pitchFamily="50" charset="-127"/>
-              </a:rPr>
-              <a:t>뽑고</a:t>
-            </a:r>
-            <a:r>
-              <a:rPr lang="en-US" altLang="ko-KR" sz="2000" dirty="0">
-                <a:latin typeface="맑은 고딕 Semilight" panose="020B0502040204020203" pitchFamily="50" charset="-127"/>
-                <a:ea typeface="맑은 고딕 Semilight" panose="020B0502040204020203" pitchFamily="50" charset="-127"/>
-                <a:cs typeface="맑은 고딕 Semilight" panose="020B0502040204020203" pitchFamily="50" charset="-127"/>
-              </a:rPr>
-              <a:t> </a:t>
-            </a:r>
-            <a:r>
-              <a:rPr lang="ko-KR" altLang="en-US" sz="2000" dirty="0">
-                <a:latin typeface="맑은 고딕 Semilight" panose="020B0502040204020203" pitchFamily="50" charset="-127"/>
-                <a:ea typeface="맑은 고딕 Semilight" panose="020B0502040204020203" pitchFamily="50" charset="-127"/>
-                <a:cs typeface="맑은 고딕 Semilight" panose="020B0502040204020203" pitchFamily="50" charset="-127"/>
-              </a:rPr>
-              <a:t>선물을 주고</a:t>
-            </a:r>
-            <a:r>
-              <a:rPr lang="ko-KR" altLang="ko-KR" sz="2000" dirty="0">
-                <a:latin typeface="맑은 고딕 Semilight" panose="020B0502040204020203" pitchFamily="50" charset="-127"/>
-                <a:ea typeface="맑은 고딕 Semilight" panose="020B0502040204020203" pitchFamily="50" charset="-127"/>
-                <a:cs typeface="맑은 고딕 Semilight" panose="020B0502040204020203" pitchFamily="50" charset="-127"/>
-              </a:rPr>
-              <a:t>, </a:t>
-            </a:r>
-            <a:r>
-              <a:rPr lang="ko-KR" altLang="en-US" sz="2000" dirty="0">
-                <a:latin typeface="맑은 고딕 Semilight" panose="020B0502040204020203" pitchFamily="50" charset="-127"/>
-                <a:ea typeface="맑은 고딕 Semilight" panose="020B0502040204020203" pitchFamily="50" charset="-127"/>
-                <a:cs typeface="맑은 고딕 Semilight" panose="020B0502040204020203" pitchFamily="50" charset="-127"/>
-              </a:rPr>
-              <a:t>다시 전체 </a:t>
-            </a:r>
-            <a:r>
-              <a:rPr lang="en-US" altLang="ko-KR" sz="2000" dirty="0">
-                <a:latin typeface="맑은 고딕 Semilight" panose="020B0502040204020203" pitchFamily="50" charset="-127"/>
-                <a:ea typeface="맑은 고딕 Semilight" panose="020B0502040204020203" pitchFamily="50" charset="-127"/>
-                <a:cs typeface="맑은 고딕 Semilight" panose="020B0502040204020203" pitchFamily="50" charset="-127"/>
-              </a:rPr>
-              <a:t>100</a:t>
-            </a:r>
-            <a:r>
-              <a:rPr lang="ko-KR" altLang="en-US" sz="2000" dirty="0">
-                <a:latin typeface="맑은 고딕 Semilight" panose="020B0502040204020203" pitchFamily="50" charset="-127"/>
-                <a:ea typeface="맑은 고딕 Semilight" panose="020B0502040204020203" pitchFamily="50" charset="-127"/>
-                <a:cs typeface="맑은 고딕 Semilight" panose="020B0502040204020203" pitchFamily="50" charset="-127"/>
-              </a:rPr>
-              <a:t>명에서 </a:t>
-            </a:r>
-            <a:r>
-              <a:rPr lang="en-US" altLang="ko-KR" sz="2000" dirty="0">
-                <a:latin typeface="맑은 고딕 Semilight" panose="020B0502040204020203" pitchFamily="50" charset="-127"/>
-                <a:ea typeface="맑은 고딕 Semilight" panose="020B0502040204020203" pitchFamily="50" charset="-127"/>
-                <a:cs typeface="맑은 고딕 Semilight" panose="020B0502040204020203" pitchFamily="50" charset="-127"/>
-              </a:rPr>
-              <a:t>1</a:t>
-            </a:r>
-            <a:r>
-              <a:rPr lang="ko-KR" altLang="en-US" sz="2000" dirty="0">
-                <a:latin typeface="맑은 고딕 Semilight" panose="020B0502040204020203" pitchFamily="50" charset="-127"/>
-                <a:ea typeface="맑은 고딕 Semilight" panose="020B0502040204020203" pitchFamily="50" charset="-127"/>
-                <a:cs typeface="맑은 고딕 Semilight" panose="020B0502040204020203" pitchFamily="50" charset="-127"/>
-              </a:rPr>
-              <a:t>명을 뽑습니다</a:t>
-            </a:r>
-            <a:r>
-              <a:rPr lang="en-US" altLang="ko-KR" sz="2000" dirty="0">
-                <a:latin typeface="맑은 고딕 Semilight" panose="020B0502040204020203" pitchFamily="50" charset="-127"/>
-                <a:ea typeface="맑은 고딕 Semilight" panose="020B0502040204020203" pitchFamily="50" charset="-127"/>
-                <a:cs typeface="맑은 고딕 Semilight" panose="020B0502040204020203" pitchFamily="50" charset="-127"/>
-              </a:rPr>
-              <a:t>. </a:t>
-            </a:r>
-            <a:r>
-              <a:rPr lang="ko-KR" altLang="ko-KR" sz="2000" dirty="0">
-                <a:latin typeface="맑은 고딕 Semilight" panose="020B0502040204020203" pitchFamily="50" charset="-127"/>
-                <a:ea typeface="맑은 고딕 Semilight" panose="020B0502040204020203" pitchFamily="50" charset="-127"/>
-                <a:cs typeface="맑은 고딕 Semilight" panose="020B0502040204020203" pitchFamily="50" charset="-127"/>
-              </a:rPr>
-              <a:t>이 짓을 똑같이 100번 반복해서 </a:t>
-            </a:r>
-            <a:r>
-              <a:rPr lang="ko-KR" altLang="en-US" sz="2000" dirty="0">
-                <a:latin typeface="맑은 고딕 Semilight" panose="020B0502040204020203" pitchFamily="50" charset="-127"/>
-                <a:ea typeface="맑은 고딕 Semilight" panose="020B0502040204020203" pitchFamily="50" charset="-127"/>
-                <a:cs typeface="맑은 고딕 Semilight" panose="020B0502040204020203" pitchFamily="50" charset="-127"/>
-              </a:rPr>
-              <a:t>선물을 주게 될 경우 내가 선물을 못박을 확률은</a:t>
-            </a:r>
-            <a:r>
-              <a:rPr lang="en-US" altLang="ko-KR" sz="2000" dirty="0">
-                <a:latin typeface="맑은 고딕 Semilight" panose="020B0502040204020203" pitchFamily="50" charset="-127"/>
-                <a:ea typeface="맑은 고딕 Semilight" panose="020B0502040204020203" pitchFamily="50" charset="-127"/>
-                <a:cs typeface="맑은 고딕 Semilight" panose="020B0502040204020203" pitchFamily="50" charset="-127"/>
-              </a:rPr>
-              <a:t>?</a:t>
-            </a:r>
-          </a:p>
-          <a:p>
-            <a:pPr marL="285750" indent="-285750">
-              <a:lnSpc>
-                <a:spcPct val="200000"/>
-              </a:lnSpc>
-              <a:buFont typeface="Wingdings" panose="05000000000000000000" pitchFamily="2" charset="2"/>
-              <a:buChar char="v"/>
-            </a:pPr>
-            <a:r>
-              <a:rPr lang="en-US" altLang="ko-KR" sz="2000" dirty="0">
-                <a:latin typeface="맑은 고딕 Semilight" panose="020B0502040204020203" pitchFamily="50" charset="-127"/>
-                <a:ea typeface="맑은 고딕 Semilight" panose="020B0502040204020203" pitchFamily="50" charset="-127"/>
-                <a:cs typeface="맑은 고딕 Semilight" panose="020B0502040204020203" pitchFamily="50" charset="-127"/>
-              </a:rPr>
-              <a:t>200</a:t>
-            </a:r>
-            <a:r>
-              <a:rPr lang="ko-KR" altLang="en-US" sz="2000" dirty="0">
-                <a:latin typeface="맑은 고딕 Semilight" panose="020B0502040204020203" pitchFamily="50" charset="-127"/>
-                <a:ea typeface="맑은 고딕 Semilight" panose="020B0502040204020203" pitchFamily="50" charset="-127"/>
-                <a:cs typeface="맑은 고딕 Semilight" panose="020B0502040204020203" pitchFamily="50" charset="-127"/>
-              </a:rPr>
-              <a:t>번을 반복했는데 내가 못 받을 확률은</a:t>
-            </a:r>
-            <a:r>
-              <a:rPr lang="en-US" altLang="ko-KR" sz="2000" dirty="0">
-                <a:latin typeface="맑은 고딕 Semilight" panose="020B0502040204020203" pitchFamily="50" charset="-127"/>
-                <a:ea typeface="맑은 고딕 Semilight" panose="020B0502040204020203" pitchFamily="50" charset="-127"/>
-                <a:cs typeface="맑은 고딕 Semilight" panose="020B0502040204020203" pitchFamily="50" charset="-127"/>
-              </a:rPr>
-              <a:t>?</a:t>
-            </a:r>
-          </a:p>
-          <a:p>
-            <a:pPr marL="285750" indent="-285750">
-              <a:lnSpc>
-                <a:spcPct val="200000"/>
-              </a:lnSpc>
-              <a:buFont typeface="Wingdings" panose="05000000000000000000" pitchFamily="2" charset="2"/>
-              <a:buChar char="v"/>
-            </a:pPr>
-            <a:r>
-              <a:rPr lang="en-US" altLang="ko-KR" sz="2000" dirty="0">
-                <a:latin typeface="맑은 고딕 Semilight" panose="020B0502040204020203" pitchFamily="50" charset="-127"/>
-                <a:ea typeface="맑은 고딕 Semilight" panose="020B0502040204020203" pitchFamily="50" charset="-127"/>
-                <a:cs typeface="맑은 고딕 Semilight" panose="020B0502040204020203" pitchFamily="50" charset="-127"/>
-              </a:rPr>
-              <a:t>300</a:t>
-            </a:r>
-            <a:r>
-              <a:rPr lang="ko-KR" altLang="en-US" sz="2000" dirty="0">
-                <a:latin typeface="맑은 고딕 Semilight" panose="020B0502040204020203" pitchFamily="50" charset="-127"/>
-                <a:ea typeface="맑은 고딕 Semilight" panose="020B0502040204020203" pitchFamily="50" charset="-127"/>
-                <a:cs typeface="맑은 고딕 Semilight" panose="020B0502040204020203" pitchFamily="50" charset="-127"/>
-              </a:rPr>
-              <a:t>번을 반복했는데 내가 못 받을 확률은</a:t>
-            </a:r>
-            <a:r>
-              <a:rPr lang="en-US" altLang="ko-KR" sz="2000" dirty="0">
-                <a:latin typeface="맑은 고딕 Semilight" panose="020B0502040204020203" pitchFamily="50" charset="-127"/>
-                <a:ea typeface="맑은 고딕 Semilight" panose="020B0502040204020203" pitchFamily="50" charset="-127"/>
-                <a:cs typeface="맑은 고딕 Semilight" panose="020B0502040204020203" pitchFamily="50" charset="-127"/>
-              </a:rPr>
-              <a:t>?</a:t>
-            </a:r>
-          </a:p>
-        </p:txBody>
-      </p:sp>
-      <p:sp>
-        <p:nvSpPr>
-          <p:cNvPr id="9" name="TextBox 8">
-            <a:extLst>
-              <a:ext uri="{FF2B5EF4-FFF2-40B4-BE49-F238E27FC236}">
-                <a16:creationId xmlns:a16="http://schemas.microsoft.com/office/drawing/2014/main" id="{1A89527C-5F15-5354-51AE-303E2EF56CBE}"/>
-              </a:ext>
-            </a:extLst>
-          </p:cNvPr>
-          <p:cNvSpPr txBox="1"/>
-          <p:nvPr/>
-        </p:nvSpPr>
-        <p:spPr>
-          <a:xfrm>
-            <a:off x="119336" y="260649"/>
-            <a:ext cx="2592288" cy="584775"/>
-          </a:xfrm>
-          <a:prstGeom prst="rect">
-            <a:avLst/>
-          </a:prstGeom>
-          <a:noFill/>
-        </p:spPr>
-        <p:txBody>
-          <a:bodyPr wrap="square" rtlCol="0">
-            <a:spAutoFit/>
-          </a:bodyPr>
-          <a:lstStyle/>
-          <a:p>
-            <a:r>
-              <a:rPr lang="ko-KR" altLang="en-US" sz="3200" b="1" dirty="0">
-                <a:latin typeface="맑은 고딕 Semilight" panose="020B0502040204020203" pitchFamily="50" charset="-127"/>
-                <a:ea typeface="맑은 고딕 Semilight" panose="020B0502040204020203" pitchFamily="50" charset="-127"/>
-                <a:cs typeface="맑은 고딕 Semilight" panose="020B0502040204020203" pitchFamily="50" charset="-127"/>
-              </a:rPr>
-              <a:t>문제 풀이</a:t>
-            </a:r>
-          </a:p>
-        </p:txBody>
-      </p:sp>
-      <p:pic>
-        <p:nvPicPr>
-          <p:cNvPr id="3" name="Picture 2" descr="한 여자가 노트북 컴퓨터에 타이핑을 하고 있다">
-            <a:extLst>
-              <a:ext uri="{FF2B5EF4-FFF2-40B4-BE49-F238E27FC236}">
-                <a16:creationId xmlns:a16="http://schemas.microsoft.com/office/drawing/2014/main" id="{E2A31D04-E1AA-540F-6088-A42EB03184E0}"/>
-              </a:ext>
-            </a:extLst>
-          </p:cNvPr>
-          <p:cNvPicPr>
-            <a:picLocks noChangeAspect="1" noChangeArrowheads="1"/>
-          </p:cNvPicPr>
-          <p:nvPr/>
-        </p:nvPicPr>
-        <p:blipFill>
-          <a:blip r:embed="rId3" cstate="print">
-            <a:extLst>
-              <a:ext uri="{28A0092B-C50C-407E-A947-70E740481C1C}">
-                <a14:useLocalDpi xmlns:a14="http://schemas.microsoft.com/office/drawing/2010/main" val="0"/>
-              </a:ext>
-            </a:extLst>
-          </a:blip>
-          <a:srcRect/>
-          <a:stretch>
-            <a:fillRect/>
-          </a:stretch>
-        </p:blipFill>
-        <p:spPr bwMode="auto">
-          <a:xfrm>
-            <a:off x="9869489" y="66676"/>
-            <a:ext cx="2152650" cy="1424329"/>
-          </a:xfrm>
-          <a:prstGeom prst="rect">
-            <a:avLst/>
-          </a:prstGeom>
-          <a:noFill/>
-          <a:extLst>
-            <a:ext uri="{909E8E84-426E-40DD-AFC4-6F175D3DCCD1}">
-              <a14:hiddenFill xmlns:a14="http://schemas.microsoft.com/office/drawing/2010/main">
-                <a:solidFill>
-                  <a:srgbClr val="FFFFFF"/>
-                </a:solidFill>
-              </a14:hiddenFill>
-            </a:ext>
-          </a:extLst>
-        </p:spPr>
-      </p:pic>
-    </p:spTree>
-    <p:extLst>
-      <p:ext uri="{BB962C8B-B14F-4D97-AF65-F5344CB8AC3E}">
-        <p14:creationId xmlns:p14="http://schemas.microsoft.com/office/powerpoint/2010/main" val="1127705894"/>
-      </p:ext>
-    </p:extLst>
-  </p:cSld>
-  <p:clrMapOvr>
-    <a:masterClrMapping/>
-  </p:clrMapOvr>
-  <mc:AlternateContent xmlns:mc="http://schemas.openxmlformats.org/markup-compatibility/2006" xmlns:p14="http://schemas.microsoft.com/office/powerpoint/2010/main">
-    <mc:Choice Requires="p14">
-      <p:transition spd="med" p14:dur="700">
-        <p:fade/>
-      </p:transition>
-    </mc:Choice>
-    <mc:Fallback xmlns="">
-      <p:transition spd="med">
-        <p:fade/>
-      </p:transition>
-    </mc:Fallback>
-  </mc:AlternateContent>
-</p:sld>
-</file>
-
-<file path=ppt/slides/slide29.xml><?xml version="1.0" encoding="utf-8"?>
-<p:sld xmlns:a="http://schemas.openxmlformats.org/drawingml/2006/main" xmlns:r="http://schemas.openxmlformats.org/officeDocument/2006/relationships" xmlns:p="http://schemas.openxmlformats.org/presentationml/2006/main">
-  <p:cSld>
-    <p:spTree>
-      <p:nvGrpSpPr>
-        <p:cNvPr id="1" name="">
-          <a:extLst>
-            <a:ext uri="{FF2B5EF4-FFF2-40B4-BE49-F238E27FC236}">
-              <a16:creationId xmlns:a16="http://schemas.microsoft.com/office/drawing/2014/main" id="{D82F35E0-A8BA-9E25-DCE5-002AF8EF7215}"/>
-            </a:ext>
-          </a:extLst>
-        </p:cNvPr>
-        <p:cNvGrpSpPr/>
-        <p:nvPr/>
-      </p:nvGrpSpPr>
-      <p:grpSpPr>
-        <a:xfrm>
-          <a:off x="0" y="0"/>
-          <a:ext cx="0" cy="0"/>
-          <a:chOff x="0" y="0"/>
-          <a:chExt cx="0" cy="0"/>
-        </a:xfrm>
-      </p:grpSpPr>
-      <p:sp>
-        <p:nvSpPr>
-          <p:cNvPr id="2" name="슬라이드 번호 개체 틀 1">
-            <a:extLst>
-              <a:ext uri="{FF2B5EF4-FFF2-40B4-BE49-F238E27FC236}">
-                <a16:creationId xmlns:a16="http://schemas.microsoft.com/office/drawing/2014/main" id="{CA6F4F7E-6F61-4FB4-D872-D19D234DDFD9}"/>
-              </a:ext>
-            </a:extLst>
-          </p:cNvPr>
-          <p:cNvSpPr>
-            <a:spLocks noGrp="1"/>
-          </p:cNvSpPr>
-          <p:nvPr>
-            <p:ph type="sldNum" sz="quarter" idx="12"/>
-          </p:nvPr>
-        </p:nvSpPr>
-        <p:spPr/>
-        <p:txBody>
-          <a:bodyPr/>
-          <a:lstStyle/>
-          <a:p>
-            <a:pPr rtl="0"/>
-            <a:fld id="{A3F31473-23EB-4724-8B59-FE6D21D89FA4}" type="slidenum">
-              <a:rPr lang="en-US" altLang="ko-KR" noProof="0" smtClean="0"/>
-              <a:t>29</a:t>
-            </a:fld>
-            <a:endParaRPr lang="en-US" altLang="ko-KR" noProof="0" dirty="0"/>
-          </a:p>
-        </p:txBody>
-      </p:sp>
-      <p:sp>
-        <p:nvSpPr>
-          <p:cNvPr id="4" name="TextBox 3">
-            <a:extLst>
-              <a:ext uri="{FF2B5EF4-FFF2-40B4-BE49-F238E27FC236}">
-                <a16:creationId xmlns:a16="http://schemas.microsoft.com/office/drawing/2014/main" id="{0FFED543-95FD-70FD-6206-68419637947A}"/>
-              </a:ext>
-            </a:extLst>
-          </p:cNvPr>
-          <p:cNvSpPr txBox="1"/>
-          <p:nvPr/>
-        </p:nvSpPr>
-        <p:spPr>
-          <a:xfrm>
-            <a:off x="767408" y="1196753"/>
-            <a:ext cx="8925232" cy="1285288"/>
-          </a:xfrm>
-          <a:prstGeom prst="rect">
-            <a:avLst/>
-          </a:prstGeom>
-          <a:solidFill>
-            <a:schemeClr val="bg1">
-              <a:lumMod val="95000"/>
-            </a:schemeClr>
-          </a:solidFill>
-        </p:spPr>
-        <p:txBody>
-          <a:bodyPr wrap="square" rtlCol="0">
-            <a:spAutoFit/>
-          </a:bodyPr>
-          <a:lstStyle/>
-          <a:p>
-            <a:pPr marL="285750" indent="-285750">
-              <a:lnSpc>
-                <a:spcPct val="150000"/>
-              </a:lnSpc>
-              <a:buFont typeface="Wingdings" panose="05000000000000000000" pitchFamily="2" charset="2"/>
-              <a:buChar char="v"/>
-            </a:pPr>
-            <a:r>
-              <a:rPr lang="ko-KR" altLang="en-US" dirty="0">
-                <a:latin typeface="맑은 고딕 Semilight" panose="020B0502040204020203" pitchFamily="50" charset="-127"/>
-                <a:ea typeface="맑은 고딕 Semilight" panose="020B0502040204020203" pitchFamily="50" charset="-127"/>
-                <a:cs typeface="맑은 고딕 Semilight" panose="020B0502040204020203" pitchFamily="50" charset="-127"/>
-              </a:rPr>
-              <a:t>모집단의 회귀식의 </a:t>
-            </a:r>
-            <a:r>
-              <a:rPr lang="en-US" altLang="ko-KR" dirty="0">
-                <a:latin typeface="맑은 고딕 Semilight" panose="020B0502040204020203" pitchFamily="50" charset="-127"/>
-                <a:ea typeface="맑은 고딕 Semilight" panose="020B0502040204020203" pitchFamily="50" charset="-127"/>
-                <a:cs typeface="맑은 고딕 Semilight" panose="020B0502040204020203" pitchFamily="50" charset="-127"/>
-              </a:rPr>
-              <a:t>gradient(</a:t>
-            </a:r>
-            <a:r>
-              <a:rPr lang="ko-KR" altLang="en-US" dirty="0">
-                <a:latin typeface="맑은 고딕 Semilight" panose="020B0502040204020203" pitchFamily="50" charset="-127"/>
-                <a:ea typeface="맑은 고딕 Semilight" panose="020B0502040204020203" pitchFamily="50" charset="-127"/>
-                <a:cs typeface="맑은 고딕 Semilight" panose="020B0502040204020203" pitchFamily="50" charset="-127"/>
-              </a:rPr>
-              <a:t>기울기</a:t>
-            </a:r>
-            <a:r>
-              <a:rPr lang="en-US" altLang="ko-KR" dirty="0">
-                <a:latin typeface="맑은 고딕 Semilight" panose="020B0502040204020203" pitchFamily="50" charset="-127"/>
-                <a:ea typeface="맑은 고딕 Semilight" panose="020B0502040204020203" pitchFamily="50" charset="-127"/>
-                <a:cs typeface="맑은 고딕 Semilight" panose="020B0502040204020203" pitchFamily="50" charset="-127"/>
-              </a:rPr>
-              <a:t>)</a:t>
-            </a:r>
-            <a:r>
-              <a:rPr lang="ko-KR" altLang="en-US" dirty="0">
-                <a:latin typeface="맑은 고딕 Semilight" panose="020B0502040204020203" pitchFamily="50" charset="-127"/>
-                <a:ea typeface="맑은 고딕 Semilight" panose="020B0502040204020203" pitchFamily="50" charset="-127"/>
-                <a:cs typeface="맑은 고딕 Semilight" panose="020B0502040204020203" pitchFamily="50" charset="-127"/>
-              </a:rPr>
-              <a:t> </a:t>
-            </a:r>
-            <a:r>
-              <a:rPr lang="en-US" altLang="ko-KR" dirty="0">
-                <a:latin typeface="맑은 고딕 Semilight" panose="020B0502040204020203" pitchFamily="50" charset="-127"/>
-                <a:ea typeface="맑은 고딕 Semilight" panose="020B0502040204020203" pitchFamily="50" charset="-127"/>
-                <a:cs typeface="맑은 고딕 Semilight" panose="020B0502040204020203" pitchFamily="50" charset="-127"/>
-              </a:rPr>
-              <a:t>2</a:t>
-            </a:r>
-            <a:r>
-              <a:rPr lang="ko-KR" altLang="en-US" dirty="0">
-                <a:latin typeface="맑은 고딕 Semilight" panose="020B0502040204020203" pitchFamily="50" charset="-127"/>
-                <a:ea typeface="맑은 고딕 Semilight" panose="020B0502040204020203" pitchFamily="50" charset="-127"/>
-                <a:cs typeface="맑은 고딕 Semilight" panose="020B0502040204020203" pitchFamily="50" charset="-127"/>
-              </a:rPr>
-              <a:t>인 데이터를 생성하고 표본크기를 </a:t>
-            </a:r>
-            <a:r>
-              <a:rPr lang="en-US" altLang="ko-KR" dirty="0">
-                <a:latin typeface="맑은 고딕 Semilight" panose="020B0502040204020203" pitchFamily="50" charset="-127"/>
-                <a:ea typeface="맑은 고딕 Semilight" panose="020B0502040204020203" pitchFamily="50" charset="-127"/>
-                <a:cs typeface="맑은 고딕 Semilight" panose="020B0502040204020203" pitchFamily="50" charset="-127"/>
-              </a:rPr>
-              <a:t>5, 30, 100 </a:t>
-            </a:r>
-            <a:r>
-              <a:rPr lang="ko-KR" altLang="en-US" dirty="0">
-                <a:latin typeface="맑은 고딕 Semilight" panose="020B0502040204020203" pitchFamily="50" charset="-127"/>
-                <a:ea typeface="맑은 고딕 Semilight" panose="020B0502040204020203" pitchFamily="50" charset="-127"/>
-                <a:cs typeface="맑은 고딕 Semilight" panose="020B0502040204020203" pitchFamily="50" charset="-127"/>
-              </a:rPr>
-              <a:t>으로 각각 </a:t>
-            </a:r>
-            <a:r>
-              <a:rPr lang="en-US" altLang="ko-KR" dirty="0">
-                <a:latin typeface="맑은 고딕 Semilight" panose="020B0502040204020203" pitchFamily="50" charset="-127"/>
-                <a:ea typeface="맑은 고딕 Semilight" panose="020B0502040204020203" pitchFamily="50" charset="-127"/>
-                <a:cs typeface="맑은 고딕 Semilight" panose="020B0502040204020203" pitchFamily="50" charset="-127"/>
-              </a:rPr>
-              <a:t>1000</a:t>
-            </a:r>
-            <a:r>
-              <a:rPr lang="ko-KR" altLang="en-US" dirty="0">
-                <a:latin typeface="맑은 고딕 Semilight" panose="020B0502040204020203" pitchFamily="50" charset="-127"/>
-                <a:ea typeface="맑은 고딕 Semilight" panose="020B0502040204020203" pitchFamily="50" charset="-127"/>
-                <a:cs typeface="맑은 고딕 Semilight" panose="020B0502040204020203" pitchFamily="50" charset="-127"/>
-              </a:rPr>
-              <a:t>개 표본의 기울기와 </a:t>
-            </a:r>
-            <a:r>
-              <a:rPr lang="en-US" altLang="ko-KR" dirty="0">
-                <a:latin typeface="맑은 고딕 Semilight" panose="020B0502040204020203" pitchFamily="50" charset="-127"/>
-                <a:ea typeface="맑은 고딕 Semilight" panose="020B0502040204020203" pitchFamily="50" charset="-127"/>
-                <a:cs typeface="맑은 고딕 Semilight" panose="020B0502040204020203" pitchFamily="50" charset="-127"/>
-              </a:rPr>
-              <a:t>MSE(Mean</a:t>
-            </a:r>
-            <a:r>
-              <a:rPr lang="ko-KR" altLang="en-US" dirty="0">
-                <a:latin typeface="맑은 고딕 Semilight" panose="020B0502040204020203" pitchFamily="50" charset="-127"/>
-                <a:ea typeface="맑은 고딕 Semilight" panose="020B0502040204020203" pitchFamily="50" charset="-127"/>
-                <a:cs typeface="맑은 고딕 Semilight" panose="020B0502040204020203" pitchFamily="50" charset="-127"/>
-              </a:rPr>
-              <a:t> </a:t>
-            </a:r>
-            <a:r>
-              <a:rPr lang="en-US" altLang="ko-KR" dirty="0">
-                <a:latin typeface="맑은 고딕 Semilight" panose="020B0502040204020203" pitchFamily="50" charset="-127"/>
-                <a:ea typeface="맑은 고딕 Semilight" panose="020B0502040204020203" pitchFamily="50" charset="-127"/>
-                <a:cs typeface="맑은 고딕 Semilight" panose="020B0502040204020203" pitchFamily="50" charset="-127"/>
-              </a:rPr>
-              <a:t>Squared</a:t>
-            </a:r>
-            <a:r>
-              <a:rPr lang="ko-KR" altLang="en-US" dirty="0">
-                <a:latin typeface="맑은 고딕 Semilight" panose="020B0502040204020203" pitchFamily="50" charset="-127"/>
-                <a:ea typeface="맑은 고딕 Semilight" panose="020B0502040204020203" pitchFamily="50" charset="-127"/>
-                <a:cs typeface="맑은 고딕 Semilight" panose="020B0502040204020203" pitchFamily="50" charset="-127"/>
-              </a:rPr>
-              <a:t> </a:t>
-            </a:r>
-            <a:r>
-              <a:rPr lang="en-US" altLang="ko-KR" dirty="0">
-                <a:latin typeface="맑은 고딕 Semilight" panose="020B0502040204020203" pitchFamily="50" charset="-127"/>
-                <a:ea typeface="맑은 고딕 Semilight" panose="020B0502040204020203" pitchFamily="50" charset="-127"/>
-                <a:cs typeface="맑은 고딕 Semilight" panose="020B0502040204020203" pitchFamily="50" charset="-127"/>
-              </a:rPr>
-              <a:t>Error)</a:t>
-            </a:r>
-            <a:r>
-              <a:rPr lang="ko-KR" altLang="en-US" dirty="0">
-                <a:latin typeface="맑은 고딕 Semilight" panose="020B0502040204020203" pitchFamily="50" charset="-127"/>
-                <a:ea typeface="맑은 고딕 Semilight" panose="020B0502040204020203" pitchFamily="50" charset="-127"/>
-                <a:cs typeface="맑은 고딕 Semilight" panose="020B0502040204020203" pitchFamily="50" charset="-127"/>
-              </a:rPr>
-              <a:t>의 평균과 분산을 </a:t>
-            </a:r>
-            <a:r>
-              <a:rPr lang="ko-KR" altLang="en-US" dirty="0" err="1">
-                <a:latin typeface="맑은 고딕 Semilight" panose="020B0502040204020203" pitchFamily="50" charset="-127"/>
-                <a:ea typeface="맑은 고딕 Semilight" panose="020B0502040204020203" pitchFamily="50" charset="-127"/>
-                <a:cs typeface="맑은 고딕 Semilight" panose="020B0502040204020203" pitchFamily="50" charset="-127"/>
-              </a:rPr>
-              <a:t>시각화하라</a:t>
-            </a:r>
-            <a:r>
-              <a:rPr lang="ko-KR" altLang="en-US" dirty="0">
-                <a:latin typeface="맑은 고딕 Semilight" panose="020B0502040204020203" pitchFamily="50" charset="-127"/>
-                <a:ea typeface="맑은 고딕 Semilight" panose="020B0502040204020203" pitchFamily="50" charset="-127"/>
-                <a:cs typeface="맑은 고딕 Semilight" panose="020B0502040204020203" pitchFamily="50" charset="-127"/>
-              </a:rPr>
-              <a:t>  </a:t>
-            </a:r>
-            <a:endParaRPr lang="en-US" altLang="ko-KR" dirty="0">
-              <a:latin typeface="맑은 고딕 Semilight" panose="020B0502040204020203" pitchFamily="50" charset="-127"/>
-              <a:ea typeface="맑은 고딕 Semilight" panose="020B0502040204020203" pitchFamily="50" charset="-127"/>
-              <a:cs typeface="맑은 고딕 Semilight" panose="020B0502040204020203" pitchFamily="50" charset="-127"/>
-            </a:endParaRPr>
-          </a:p>
-        </p:txBody>
-      </p:sp>
-      <p:sp>
-        <p:nvSpPr>
-          <p:cNvPr id="9" name="TextBox 8">
-            <a:extLst>
-              <a:ext uri="{FF2B5EF4-FFF2-40B4-BE49-F238E27FC236}">
-                <a16:creationId xmlns:a16="http://schemas.microsoft.com/office/drawing/2014/main" id="{F30D0FE0-2695-7F37-8905-B8DE24E7A394}"/>
-              </a:ext>
-            </a:extLst>
-          </p:cNvPr>
-          <p:cNvSpPr txBox="1"/>
-          <p:nvPr/>
-        </p:nvSpPr>
-        <p:spPr>
-          <a:xfrm>
-            <a:off x="119336" y="260649"/>
-            <a:ext cx="2592288" cy="584775"/>
-          </a:xfrm>
-          <a:prstGeom prst="rect">
-            <a:avLst/>
-          </a:prstGeom>
-          <a:noFill/>
-        </p:spPr>
-        <p:txBody>
-          <a:bodyPr wrap="square" rtlCol="0">
-            <a:spAutoFit/>
-          </a:bodyPr>
-          <a:lstStyle/>
-          <a:p>
-            <a:r>
-              <a:rPr lang="ko-KR" altLang="en-US" sz="3200" b="1" dirty="0">
-                <a:latin typeface="맑은 고딕 Semilight" panose="020B0502040204020203" pitchFamily="50" charset="-127"/>
-                <a:ea typeface="맑은 고딕 Semilight" panose="020B0502040204020203" pitchFamily="50" charset="-127"/>
-                <a:cs typeface="맑은 고딕 Semilight" panose="020B0502040204020203" pitchFamily="50" charset="-127"/>
-              </a:rPr>
-              <a:t>문제 풀이</a:t>
-            </a:r>
-          </a:p>
-        </p:txBody>
-      </p:sp>
-      <p:pic>
-        <p:nvPicPr>
-          <p:cNvPr id="1026" name="Picture 2">
-            <a:extLst>
-              <a:ext uri="{FF2B5EF4-FFF2-40B4-BE49-F238E27FC236}">
-                <a16:creationId xmlns:a16="http://schemas.microsoft.com/office/drawing/2014/main" id="{66A96551-6CD7-9DE7-087B-11A115B1C22B}"/>
-              </a:ext>
-            </a:extLst>
-          </p:cNvPr>
-          <p:cNvPicPr>
-            <a:picLocks noChangeAspect="1" noChangeArrowheads="1"/>
-          </p:cNvPicPr>
-          <p:nvPr/>
-        </p:nvPicPr>
-        <p:blipFill>
-          <a:blip r:embed="rId3">
-            <a:extLst>
-              <a:ext uri="{28A0092B-C50C-407E-A947-70E740481C1C}">
-                <a14:useLocalDpi xmlns:a14="http://schemas.microsoft.com/office/drawing/2010/main" val="0"/>
-              </a:ext>
-            </a:extLst>
-          </a:blip>
-          <a:srcRect/>
-          <a:stretch>
-            <a:fillRect/>
-          </a:stretch>
-        </p:blipFill>
-        <p:spPr bwMode="auto">
-          <a:xfrm>
-            <a:off x="802171" y="3634206"/>
-            <a:ext cx="3721378" cy="2899706"/>
-          </a:xfrm>
-          <a:prstGeom prst="rect">
-            <a:avLst/>
-          </a:prstGeom>
-          <a:noFill/>
-          <a:extLst>
-            <a:ext uri="{909E8E84-426E-40DD-AFC4-6F175D3DCCD1}">
-              <a14:hiddenFill xmlns:a14="http://schemas.microsoft.com/office/drawing/2010/main">
-                <a:solidFill>
-                  <a:srgbClr val="FFFFFF"/>
-                </a:solidFill>
-              </a14:hiddenFill>
-            </a:ext>
-          </a:extLst>
-        </p:spPr>
-      </p:pic>
-      <p:sp>
-        <p:nvSpPr>
-          <p:cNvPr id="5" name="TextBox 4">
-            <a:extLst>
-              <a:ext uri="{FF2B5EF4-FFF2-40B4-BE49-F238E27FC236}">
-                <a16:creationId xmlns:a16="http://schemas.microsoft.com/office/drawing/2014/main" id="{92D6731E-3482-342B-4CF9-362C40D676CA}"/>
-              </a:ext>
-            </a:extLst>
-          </p:cNvPr>
-          <p:cNvSpPr txBox="1"/>
-          <p:nvPr/>
-        </p:nvSpPr>
-        <p:spPr>
-          <a:xfrm>
-            <a:off x="730163" y="2894037"/>
-            <a:ext cx="3721378" cy="718145"/>
-          </a:xfrm>
-          <a:prstGeom prst="rect">
-            <a:avLst/>
-          </a:prstGeom>
-          <a:noFill/>
-        </p:spPr>
-        <p:txBody>
-          <a:bodyPr wrap="square">
-            <a:spAutoFit/>
-          </a:bodyPr>
-          <a:lstStyle/>
-          <a:p>
-            <a:pPr>
-              <a:lnSpc>
-                <a:spcPts val="1575"/>
-              </a:lnSpc>
-            </a:pPr>
-            <a:r>
-              <a:rPr lang="en-US" altLang="ko-KR" sz="1400" dirty="0">
-                <a:latin typeface="Arial Narrow" panose="020B0606020202030204" pitchFamily="34" charset="0"/>
-              </a:rPr>
-              <a:t>X = </a:t>
-            </a:r>
-            <a:r>
-              <a:rPr lang="en-US" altLang="ko-KR" sz="1400" dirty="0" err="1">
-                <a:latin typeface="Arial Narrow" panose="020B0606020202030204" pitchFamily="34" charset="0"/>
-              </a:rPr>
-              <a:t>np.random.randn</a:t>
-            </a:r>
-            <a:r>
-              <a:rPr lang="en-US" altLang="ko-KR" sz="1400" dirty="0">
-                <a:latin typeface="Arial Narrow" panose="020B0606020202030204" pitchFamily="34" charset="0"/>
-              </a:rPr>
-              <a:t>(10000, 1)</a:t>
-            </a:r>
-          </a:p>
-          <a:p>
-            <a:pPr>
-              <a:lnSpc>
-                <a:spcPts val="1575"/>
-              </a:lnSpc>
-            </a:pPr>
-            <a:r>
-              <a:rPr lang="en-US" altLang="ko-KR" sz="1400" dirty="0" err="1">
-                <a:latin typeface="Arial Narrow" panose="020B0606020202030204" pitchFamily="34" charset="0"/>
-              </a:rPr>
-              <a:t>true_w</a:t>
-            </a:r>
-            <a:r>
-              <a:rPr lang="en-US" altLang="ko-KR" sz="1400" dirty="0">
-                <a:latin typeface="Arial Narrow" panose="020B0606020202030204" pitchFamily="34" charset="0"/>
-              </a:rPr>
-              <a:t> = 2.0</a:t>
-            </a:r>
-          </a:p>
-          <a:p>
-            <a:pPr>
-              <a:lnSpc>
-                <a:spcPts val="1575"/>
-              </a:lnSpc>
-            </a:pPr>
-            <a:r>
-              <a:rPr lang="en-US" altLang="ko-KR" sz="1400" dirty="0">
-                <a:latin typeface="Arial Narrow" panose="020B0606020202030204" pitchFamily="34" charset="0"/>
-              </a:rPr>
-              <a:t>y = </a:t>
-            </a:r>
-            <a:r>
-              <a:rPr lang="en-US" altLang="ko-KR" sz="1400" dirty="0" err="1">
-                <a:latin typeface="Arial Narrow" panose="020B0606020202030204" pitchFamily="34" charset="0"/>
-              </a:rPr>
-              <a:t>true_w</a:t>
-            </a:r>
-            <a:r>
-              <a:rPr lang="en-US" altLang="ko-KR" sz="1400" dirty="0">
-                <a:latin typeface="Arial Narrow" panose="020B0606020202030204" pitchFamily="34" charset="0"/>
-              </a:rPr>
-              <a:t> * X + </a:t>
-            </a:r>
-            <a:r>
-              <a:rPr lang="en-US" altLang="ko-KR" sz="1400" dirty="0" err="1">
-                <a:latin typeface="Arial Narrow" panose="020B0606020202030204" pitchFamily="34" charset="0"/>
-              </a:rPr>
-              <a:t>np.random.randn</a:t>
-            </a:r>
-            <a:r>
-              <a:rPr lang="en-US" altLang="ko-KR" sz="1400" dirty="0">
-                <a:latin typeface="Arial Narrow" panose="020B0606020202030204" pitchFamily="34" charset="0"/>
-              </a:rPr>
-              <a:t>(10000, 1) * 0.5</a:t>
-            </a:r>
-          </a:p>
-        </p:txBody>
-      </p:sp>
-      <p:pic>
-        <p:nvPicPr>
-          <p:cNvPr id="1030" name="Picture 6">
-            <a:extLst>
-              <a:ext uri="{FF2B5EF4-FFF2-40B4-BE49-F238E27FC236}">
-                <a16:creationId xmlns:a16="http://schemas.microsoft.com/office/drawing/2014/main" id="{604A6947-78A3-C7CA-2B50-5D00DD4F3DDD}"/>
-              </a:ext>
-            </a:extLst>
-          </p:cNvPr>
-          <p:cNvPicPr>
-            <a:picLocks noChangeAspect="1" noChangeArrowheads="1"/>
-          </p:cNvPicPr>
-          <p:nvPr/>
-        </p:nvPicPr>
-        <p:blipFill>
-          <a:blip r:embed="rId4" cstate="print">
-            <a:extLst>
-              <a:ext uri="{28A0092B-C50C-407E-A947-70E740481C1C}">
-                <a14:useLocalDpi xmlns:a14="http://schemas.microsoft.com/office/drawing/2010/main" val="0"/>
-              </a:ext>
-            </a:extLst>
-          </a:blip>
-          <a:srcRect/>
-          <a:stretch>
-            <a:fillRect/>
-          </a:stretch>
-        </p:blipFill>
-        <p:spPr bwMode="auto">
-          <a:xfrm>
-            <a:off x="5309584" y="2469173"/>
-            <a:ext cx="5832647" cy="1919654"/>
-          </a:xfrm>
-          <a:prstGeom prst="rect">
-            <a:avLst/>
-          </a:prstGeom>
-          <a:noFill/>
-          <a:extLst>
-            <a:ext uri="{909E8E84-426E-40DD-AFC4-6F175D3DCCD1}">
-              <a14:hiddenFill xmlns:a14="http://schemas.microsoft.com/office/drawing/2010/main">
-                <a:solidFill>
-                  <a:srgbClr val="FFFFFF"/>
-                </a:solidFill>
-              </a14:hiddenFill>
-            </a:ext>
-          </a:extLst>
-        </p:spPr>
-      </p:pic>
-      <p:pic>
-        <p:nvPicPr>
-          <p:cNvPr id="1032" name="Picture 8">
-            <a:extLst>
-              <a:ext uri="{FF2B5EF4-FFF2-40B4-BE49-F238E27FC236}">
-                <a16:creationId xmlns:a16="http://schemas.microsoft.com/office/drawing/2014/main" id="{0AC33CC4-6C35-C6FD-C03A-DFEEFB9013D3}"/>
-              </a:ext>
-            </a:extLst>
-          </p:cNvPr>
-          <p:cNvPicPr>
-            <a:picLocks noChangeAspect="1" noChangeArrowheads="1"/>
-          </p:cNvPicPr>
-          <p:nvPr/>
-        </p:nvPicPr>
-        <p:blipFill>
-          <a:blip r:embed="rId5" cstate="print">
-            <a:extLst>
-              <a:ext uri="{28A0092B-C50C-407E-A947-70E740481C1C}">
-                <a14:useLocalDpi xmlns:a14="http://schemas.microsoft.com/office/drawing/2010/main" val="0"/>
-              </a:ext>
-            </a:extLst>
-          </a:blip>
-          <a:srcRect/>
-          <a:stretch>
-            <a:fillRect/>
-          </a:stretch>
-        </p:blipFill>
-        <p:spPr bwMode="auto">
-          <a:xfrm>
-            <a:off x="5303913" y="4701422"/>
-            <a:ext cx="5832647" cy="1919653"/>
-          </a:xfrm>
-          <a:prstGeom prst="rect">
-            <a:avLst/>
-          </a:prstGeom>
-          <a:noFill/>
-          <a:extLst>
-            <a:ext uri="{909E8E84-426E-40DD-AFC4-6F175D3DCCD1}">
-              <a14:hiddenFill xmlns:a14="http://schemas.microsoft.com/office/drawing/2010/main">
-                <a:solidFill>
-                  <a:srgbClr val="FFFFFF"/>
-                </a:solidFill>
-              </a14:hiddenFill>
-            </a:ext>
-          </a:extLst>
-        </p:spPr>
-      </p:pic>
-      <p:pic>
-        <p:nvPicPr>
-          <p:cNvPr id="3" name="Picture 2" descr="한 여자가 노트북 컴퓨터에 타이핑을 하고 있다">
-            <a:extLst>
-              <a:ext uri="{FF2B5EF4-FFF2-40B4-BE49-F238E27FC236}">
-                <a16:creationId xmlns:a16="http://schemas.microsoft.com/office/drawing/2014/main" id="{1C0F150E-B972-291C-98C5-D1154ED29818}"/>
-              </a:ext>
-            </a:extLst>
-          </p:cNvPr>
-          <p:cNvPicPr>
-            <a:picLocks noChangeAspect="1" noChangeArrowheads="1"/>
-          </p:cNvPicPr>
-          <p:nvPr/>
-        </p:nvPicPr>
-        <p:blipFill>
-          <a:blip r:embed="rId6" cstate="print">
-            <a:extLst>
-              <a:ext uri="{28A0092B-C50C-407E-A947-70E740481C1C}">
-                <a14:useLocalDpi xmlns:a14="http://schemas.microsoft.com/office/drawing/2010/main" val="0"/>
-              </a:ext>
-            </a:extLst>
-          </a:blip>
-          <a:srcRect/>
-          <a:stretch>
-            <a:fillRect/>
-          </a:stretch>
-        </p:blipFill>
-        <p:spPr bwMode="auto">
-          <a:xfrm>
-            <a:off x="9869489" y="66676"/>
-            <a:ext cx="2152650" cy="1424329"/>
-          </a:xfrm>
-          <a:prstGeom prst="rect">
-            <a:avLst/>
-          </a:prstGeom>
-          <a:noFill/>
-          <a:extLst>
-            <a:ext uri="{909E8E84-426E-40DD-AFC4-6F175D3DCCD1}">
-              <a14:hiddenFill xmlns:a14="http://schemas.microsoft.com/office/drawing/2010/main">
-                <a:solidFill>
-                  <a:srgbClr val="FFFFFF"/>
-                </a:solidFill>
-              </a14:hiddenFill>
-            </a:ext>
-          </a:extLst>
-        </p:spPr>
-      </p:pic>
-    </p:spTree>
-    <p:extLst>
-      <p:ext uri="{BB962C8B-B14F-4D97-AF65-F5344CB8AC3E}">
-        <p14:creationId xmlns:p14="http://schemas.microsoft.com/office/powerpoint/2010/main" val="2060882861"/>
-      </p:ext>
-    </p:extLst>
-  </p:cSld>
-  <p:clrMapOvr>
-    <a:masterClrMapping/>
-  </p:clrMapOvr>
-  <mc:AlternateContent xmlns:mc="http://schemas.openxmlformats.org/markup-compatibility/2006" xmlns:p14="http://schemas.microsoft.com/office/powerpoint/2010/main">
-    <mc:Choice Requires="p14">
-      <p:transition spd="med" p14:dur="700">
-        <p:fade/>
-      </p:transition>
-    </mc:Choice>
-    <mc:Fallback xmlns="">
-      <p:transition spd="med">
-        <p:fade/>
-      </p:transition>
-    </mc:Fallback>
-  </mc:AlternateContent>
 </p:sld>
 </file>
 
@@ -21422,2156 +13972,6 @@
     <p:extLst>
       <p:ext uri="{BB962C8B-B14F-4D97-AF65-F5344CB8AC3E}">
         <p14:creationId xmlns:p14="http://schemas.microsoft.com/office/powerpoint/2010/main" val="205430887"/>
-      </p:ext>
-    </p:extLst>
-  </p:cSld>
-  <p:clrMapOvr>
-    <a:masterClrMapping/>
-  </p:clrMapOvr>
-</p:sld>
-</file>
-
-<file path=ppt/slides/slide30.xml><?xml version="1.0" encoding="utf-8"?>
-<p:sld xmlns:a="http://schemas.openxmlformats.org/drawingml/2006/main" xmlns:r="http://schemas.openxmlformats.org/officeDocument/2006/relationships" xmlns:p="http://schemas.openxmlformats.org/presentationml/2006/main">
-  <p:cSld>
-    <p:spTree>
-      <p:nvGrpSpPr>
-        <p:cNvPr id="1" name="">
-          <a:extLst>
-            <a:ext uri="{FF2B5EF4-FFF2-40B4-BE49-F238E27FC236}">
-              <a16:creationId xmlns:a16="http://schemas.microsoft.com/office/drawing/2014/main" id="{014016E6-4DF5-97F6-9486-23E46F5C4A36}"/>
-            </a:ext>
-          </a:extLst>
-        </p:cNvPr>
-        <p:cNvGrpSpPr/>
-        <p:nvPr/>
-      </p:nvGrpSpPr>
-      <p:grpSpPr>
-        <a:xfrm>
-          <a:off x="0" y="0"/>
-          <a:ext cx="0" cy="0"/>
-          <a:chOff x="0" y="0"/>
-          <a:chExt cx="0" cy="0"/>
-        </a:xfrm>
-      </p:grpSpPr>
-      <p:sp>
-        <p:nvSpPr>
-          <p:cNvPr id="2" name="슬라이드 번호 개체 틀 1">
-            <a:extLst>
-              <a:ext uri="{FF2B5EF4-FFF2-40B4-BE49-F238E27FC236}">
-                <a16:creationId xmlns:a16="http://schemas.microsoft.com/office/drawing/2014/main" id="{A39D4B50-D754-79A0-CD51-823002DF348F}"/>
-              </a:ext>
-            </a:extLst>
-          </p:cNvPr>
-          <p:cNvSpPr>
-            <a:spLocks noGrp="1"/>
-          </p:cNvSpPr>
-          <p:nvPr>
-            <p:ph type="sldNum" sz="quarter" idx="12"/>
-          </p:nvPr>
-        </p:nvSpPr>
-        <p:spPr/>
-        <p:txBody>
-          <a:bodyPr/>
-          <a:lstStyle/>
-          <a:p>
-            <a:pPr rtl="0"/>
-            <a:fld id="{A3F31473-23EB-4724-8B59-FE6D21D89FA4}" type="slidenum">
-              <a:rPr lang="en-US" altLang="ko-KR" noProof="0" smtClean="0"/>
-              <a:t>30</a:t>
-            </a:fld>
-            <a:endParaRPr lang="en-US" altLang="ko-KR" noProof="0" dirty="0"/>
-          </a:p>
-        </p:txBody>
-      </p:sp>
-      <p:sp>
-        <p:nvSpPr>
-          <p:cNvPr id="4" name="TextBox 3">
-            <a:extLst>
-              <a:ext uri="{FF2B5EF4-FFF2-40B4-BE49-F238E27FC236}">
-                <a16:creationId xmlns:a16="http://schemas.microsoft.com/office/drawing/2014/main" id="{6843735A-526C-E0D0-66F8-62A3BD4EC82F}"/>
-              </a:ext>
-            </a:extLst>
-          </p:cNvPr>
-          <p:cNvSpPr txBox="1"/>
-          <p:nvPr/>
-        </p:nvSpPr>
-        <p:spPr>
-          <a:xfrm>
-            <a:off x="551384" y="2916953"/>
-            <a:ext cx="11377264" cy="3184013"/>
-          </a:xfrm>
-          <a:prstGeom prst="rect">
-            <a:avLst/>
-          </a:prstGeom>
-          <a:solidFill>
-            <a:schemeClr val="bg1">
-              <a:lumMod val="95000"/>
-            </a:schemeClr>
-          </a:solidFill>
-        </p:spPr>
-        <p:txBody>
-          <a:bodyPr wrap="square" rtlCol="0">
-            <a:spAutoFit/>
-          </a:bodyPr>
-          <a:lstStyle/>
-          <a:p>
-            <a:pPr marL="285750" indent="-285750">
-              <a:lnSpc>
-                <a:spcPct val="150000"/>
-              </a:lnSpc>
-              <a:buFont typeface="Wingdings" panose="05000000000000000000" pitchFamily="2" charset="2"/>
-              <a:buChar char="v"/>
-            </a:pPr>
-            <a:r>
-              <a:rPr lang="ko-KR" altLang="en-US" sz="1600" dirty="0">
-                <a:latin typeface="맑은 고딕 Semilight" panose="020B0502040204020203" pitchFamily="50" charset="-127"/>
-                <a:ea typeface="맑은 고딕 Semilight" panose="020B0502040204020203" pitchFamily="50" charset="-127"/>
-                <a:cs typeface="맑은 고딕 Semilight" panose="020B0502040204020203" pitchFamily="50" charset="-127"/>
-              </a:rPr>
-              <a:t>모델 학습의 안정성 확보”</a:t>
-            </a:r>
-            <a:endParaRPr lang="en-US" altLang="ko-KR" sz="1600" dirty="0">
-              <a:latin typeface="맑은 고딕 Semilight" panose="020B0502040204020203" pitchFamily="50" charset="-127"/>
-              <a:ea typeface="맑은 고딕 Semilight" panose="020B0502040204020203" pitchFamily="50" charset="-127"/>
-              <a:cs typeface="맑은 고딕 Semilight" panose="020B0502040204020203" pitchFamily="50" charset="-127"/>
-            </a:endParaRPr>
-          </a:p>
-          <a:p>
-            <a:pPr marL="742950" lvl="1" indent="-285750">
-              <a:lnSpc>
-                <a:spcPct val="150000"/>
-              </a:lnSpc>
-              <a:buFont typeface="Wingdings" panose="05000000000000000000" pitchFamily="2" charset="2"/>
-              <a:buChar char="v"/>
-            </a:pPr>
-            <a:r>
-              <a:rPr lang="en-US" altLang="ko-KR" sz="1400" dirty="0">
-                <a:latin typeface="맑은 고딕 Semilight" panose="020B0502040204020203" pitchFamily="50" charset="-127"/>
-                <a:ea typeface="맑은 고딕 Semilight" panose="020B0502040204020203" pitchFamily="50" charset="-127"/>
-                <a:cs typeface="맑은 고딕 Semilight" panose="020B0502040204020203" pitchFamily="50" charset="-127"/>
-              </a:rPr>
-              <a:t>MSE , Cross-Entropy, Log-loss </a:t>
-            </a:r>
-            <a:endParaRPr lang="en-US" altLang="ko-KR" sz="1600" dirty="0">
-              <a:latin typeface="맑은 고딕 Semilight" panose="020B0502040204020203" pitchFamily="50" charset="-127"/>
-              <a:ea typeface="맑은 고딕 Semilight" panose="020B0502040204020203" pitchFamily="50" charset="-127"/>
-              <a:cs typeface="맑은 고딕 Semilight" panose="020B0502040204020203" pitchFamily="50" charset="-127"/>
-            </a:endParaRPr>
-          </a:p>
-          <a:p>
-            <a:pPr marL="285750" indent="-285750">
-              <a:lnSpc>
-                <a:spcPct val="150000"/>
-              </a:lnSpc>
-              <a:buFont typeface="Wingdings" panose="05000000000000000000" pitchFamily="2" charset="2"/>
-              <a:buChar char="v"/>
-            </a:pPr>
-            <a:r>
-              <a:rPr lang="en-US" altLang="ko-KR" sz="1600" dirty="0">
-                <a:latin typeface="맑은 고딕 Semilight" panose="020B0502040204020203" pitchFamily="50" charset="-127"/>
-                <a:ea typeface="맑은 고딕 Semilight" panose="020B0502040204020203" pitchFamily="50" charset="-127"/>
-                <a:cs typeface="맑은 고딕 Semilight" panose="020B0502040204020203" pitchFamily="50" charset="-127"/>
-              </a:rPr>
-              <a:t>Mini-batch </a:t>
-            </a:r>
-            <a:r>
-              <a:rPr lang="ko-KR" altLang="en-US" sz="1600" dirty="0">
-                <a:latin typeface="맑은 고딕 Semilight" panose="020B0502040204020203" pitchFamily="50" charset="-127"/>
-                <a:ea typeface="맑은 고딕 Semilight" panose="020B0502040204020203" pitchFamily="50" charset="-127"/>
-                <a:cs typeface="맑은 고딕 Semilight" panose="020B0502040204020203" pitchFamily="50" charset="-127"/>
-              </a:rPr>
-              <a:t>학습이 가능한 이유”</a:t>
-            </a:r>
-            <a:endParaRPr lang="en-US" altLang="ko-KR" sz="1600" dirty="0">
-              <a:latin typeface="맑은 고딕 Semilight" panose="020B0502040204020203" pitchFamily="50" charset="-127"/>
-              <a:ea typeface="맑은 고딕 Semilight" panose="020B0502040204020203" pitchFamily="50" charset="-127"/>
-              <a:cs typeface="맑은 고딕 Semilight" panose="020B0502040204020203" pitchFamily="50" charset="-127"/>
-            </a:endParaRPr>
-          </a:p>
-          <a:p>
-            <a:pPr marL="742950" lvl="1" indent="-285750">
-              <a:lnSpc>
-                <a:spcPct val="150000"/>
-              </a:lnSpc>
-              <a:buFont typeface="Wingdings" panose="05000000000000000000" pitchFamily="2" charset="2"/>
-              <a:buChar char="v"/>
-            </a:pPr>
-            <a:r>
-              <a:rPr lang="en-US" altLang="ko-KR" sz="1400" dirty="0">
-                <a:latin typeface="맑은 고딕 Semilight" panose="020B0502040204020203" pitchFamily="50" charset="-127"/>
-                <a:ea typeface="맑은 고딕 Semilight" panose="020B0502040204020203" pitchFamily="50" charset="-127"/>
-                <a:cs typeface="맑은 고딕 Semilight" panose="020B0502040204020203" pitchFamily="50" charset="-127"/>
-              </a:rPr>
-              <a:t>Mini-batch = </a:t>
-            </a:r>
-            <a:r>
-              <a:rPr lang="ko-KR" altLang="en-US" sz="1400" dirty="0">
-                <a:latin typeface="맑은 고딕 Semilight" panose="020B0502040204020203" pitchFamily="50" charset="-127"/>
-                <a:ea typeface="맑은 고딕 Semilight" panose="020B0502040204020203" pitchFamily="50" charset="-127"/>
-                <a:cs typeface="맑은 고딕 Semilight" panose="020B0502040204020203" pitchFamily="50" charset="-127"/>
-              </a:rPr>
-              <a:t>작은 샘플 평균</a:t>
-            </a:r>
-            <a:r>
-              <a:rPr lang="en-US" altLang="ko-KR" sz="1400" dirty="0">
-                <a:latin typeface="맑은 고딕 Semilight" panose="020B0502040204020203" pitchFamily="50" charset="-127"/>
-                <a:ea typeface="맑은 고딕 Semilight" panose="020B0502040204020203" pitchFamily="50" charset="-127"/>
-                <a:cs typeface="맑은 고딕 Semilight" panose="020B0502040204020203" pitchFamily="50" charset="-127"/>
-              </a:rPr>
-              <a:t>, CLT</a:t>
-            </a:r>
-            <a:r>
-              <a:rPr lang="ko-KR" altLang="en-US" sz="1400" dirty="0">
-                <a:latin typeface="맑은 고딕 Semilight" panose="020B0502040204020203" pitchFamily="50" charset="-127"/>
-                <a:ea typeface="맑은 고딕 Semilight" panose="020B0502040204020203" pitchFamily="50" charset="-127"/>
-                <a:cs typeface="맑은 고딕 Semilight" panose="020B0502040204020203" pitchFamily="50" charset="-127"/>
-              </a:rPr>
-              <a:t>없이는 </a:t>
-            </a:r>
-            <a:r>
-              <a:rPr lang="en-US" altLang="ko-KR" sz="1400" dirty="0">
-                <a:latin typeface="맑은 고딕 Semilight" panose="020B0502040204020203" pitchFamily="50" charset="-127"/>
-                <a:ea typeface="맑은 고딕 Semilight" panose="020B0502040204020203" pitchFamily="50" charset="-127"/>
-                <a:cs typeface="맑은 고딕 Semilight" panose="020B0502040204020203" pitchFamily="50" charset="-127"/>
-              </a:rPr>
-              <a:t>mini</a:t>
-            </a:r>
-            <a:r>
-              <a:rPr lang="ko-KR" altLang="en-US" sz="1400" dirty="0">
-                <a:latin typeface="맑은 고딕 Semilight" panose="020B0502040204020203" pitchFamily="50" charset="-127"/>
-                <a:ea typeface="맑은 고딕 Semilight" panose="020B0502040204020203" pitchFamily="50" charset="-127"/>
-                <a:cs typeface="맑은 고딕 Semilight" panose="020B0502040204020203" pitchFamily="50" charset="-127"/>
-              </a:rPr>
-              <a:t> </a:t>
-            </a:r>
-            <a:r>
-              <a:rPr lang="en-US" altLang="ko-KR" sz="1400" dirty="0">
-                <a:latin typeface="맑은 고딕 Semilight" panose="020B0502040204020203" pitchFamily="50" charset="-127"/>
-                <a:ea typeface="맑은 고딕 Semilight" panose="020B0502040204020203" pitchFamily="50" charset="-127"/>
-                <a:cs typeface="맑은 고딕 Semilight" panose="020B0502040204020203" pitchFamily="50" charset="-127"/>
-              </a:rPr>
-              <a:t>batch </a:t>
-            </a:r>
-            <a:r>
-              <a:rPr lang="ko-KR" altLang="en-US" sz="1400" dirty="0">
-                <a:latin typeface="맑은 고딕 Semilight" panose="020B0502040204020203" pitchFamily="50" charset="-127"/>
-                <a:ea typeface="맑은 고딕 Semilight" panose="020B0502040204020203" pitchFamily="50" charset="-127"/>
-                <a:cs typeface="맑은 고딕 Semilight" panose="020B0502040204020203" pitchFamily="50" charset="-127"/>
-              </a:rPr>
-              <a:t>도 없음</a:t>
-            </a:r>
-            <a:endParaRPr lang="en-US" altLang="ko-KR" sz="1600" dirty="0">
-              <a:latin typeface="맑은 고딕 Semilight" panose="020B0502040204020203" pitchFamily="50" charset="-127"/>
-              <a:ea typeface="맑은 고딕 Semilight" panose="020B0502040204020203" pitchFamily="50" charset="-127"/>
-              <a:cs typeface="맑은 고딕 Semilight" panose="020B0502040204020203" pitchFamily="50" charset="-127"/>
-            </a:endParaRPr>
-          </a:p>
-          <a:p>
-            <a:pPr marL="285750" indent="-285750">
-              <a:lnSpc>
-                <a:spcPct val="150000"/>
-              </a:lnSpc>
-              <a:buFont typeface="Wingdings" panose="05000000000000000000" pitchFamily="2" charset="2"/>
-              <a:buChar char="v"/>
-            </a:pPr>
-            <a:r>
-              <a:rPr lang="ko-KR" altLang="en-US" sz="1600" dirty="0">
-                <a:latin typeface="맑은 고딕 Semilight" panose="020B0502040204020203" pitchFamily="50" charset="-127"/>
-                <a:ea typeface="맑은 고딕 Semilight" panose="020B0502040204020203" pitchFamily="50" charset="-127"/>
-                <a:cs typeface="맑은 고딕 Semilight" panose="020B0502040204020203" pitchFamily="50" charset="-127"/>
-              </a:rPr>
-              <a:t>교차검증을 통한 모델의 평가</a:t>
-            </a:r>
-            <a:endParaRPr lang="en-US" altLang="ko-KR" sz="1600" dirty="0">
-              <a:latin typeface="맑은 고딕 Semilight" panose="020B0502040204020203" pitchFamily="50" charset="-127"/>
-              <a:ea typeface="맑은 고딕 Semilight" panose="020B0502040204020203" pitchFamily="50" charset="-127"/>
-              <a:cs typeface="맑은 고딕 Semilight" panose="020B0502040204020203" pitchFamily="50" charset="-127"/>
-            </a:endParaRPr>
-          </a:p>
-          <a:p>
-            <a:pPr marL="742950" lvl="1" indent="-285750">
-              <a:lnSpc>
-                <a:spcPct val="150000"/>
-              </a:lnSpc>
-              <a:buFont typeface="Wingdings" panose="05000000000000000000" pitchFamily="2" charset="2"/>
-              <a:buChar char="v"/>
-            </a:pPr>
-            <a:r>
-              <a:rPr lang="ko-KR" altLang="en-US" sz="1400" dirty="0">
-                <a:latin typeface="맑은 고딕 Semilight" panose="020B0502040204020203" pitchFamily="50" charset="-127"/>
-                <a:ea typeface="맑은 고딕 Semilight" panose="020B0502040204020203" pitchFamily="50" charset="-127"/>
-                <a:cs typeface="맑은 고딕 Semilight" panose="020B0502040204020203" pitchFamily="50" charset="-127"/>
-              </a:rPr>
-              <a:t>평균 </a:t>
-            </a:r>
-            <a:r>
-              <a:rPr lang="en-US" altLang="ko-KR" sz="1400" dirty="0">
-                <a:latin typeface="맑은 고딕 Semilight" panose="020B0502040204020203" pitchFamily="50" charset="-127"/>
-                <a:ea typeface="맑은 고딕 Semilight" panose="020B0502040204020203" pitchFamily="50" charset="-127"/>
-                <a:cs typeface="맑은 고딕 Semilight" panose="020B0502040204020203" pitchFamily="50" charset="-127"/>
-              </a:rPr>
-              <a:t>accuracy/loss, </a:t>
-            </a:r>
-            <a:r>
-              <a:rPr lang="ko-KR" altLang="en-US" sz="1400" dirty="0">
-                <a:latin typeface="맑은 고딕 Semilight" panose="020B0502040204020203" pitchFamily="50" charset="-127"/>
-                <a:ea typeface="맑은 고딕 Semilight" panose="020B0502040204020203" pitchFamily="50" charset="-127"/>
-                <a:cs typeface="맑은 고딕 Semilight" panose="020B0502040204020203" pitchFamily="50" charset="-127"/>
-              </a:rPr>
-              <a:t>교차검증 평균 등 </a:t>
-            </a:r>
-            <a:r>
-              <a:rPr lang="en-US" altLang="ko-KR" sz="1400" dirty="0">
-                <a:latin typeface="맑은 고딕 Semilight" panose="020B0502040204020203" pitchFamily="50" charset="-127"/>
-                <a:ea typeface="맑은 고딕 Semilight" panose="020B0502040204020203" pitchFamily="50" charset="-127"/>
-                <a:cs typeface="맑은 고딕 Semilight" panose="020B0502040204020203" pitchFamily="50" charset="-127"/>
-              </a:rPr>
-              <a:t>CLT </a:t>
-            </a:r>
-            <a:r>
-              <a:rPr lang="ko-KR" altLang="en-US" sz="1400" dirty="0">
-                <a:latin typeface="맑은 고딕 Semilight" panose="020B0502040204020203" pitchFamily="50" charset="-127"/>
-                <a:ea typeface="맑은 고딕 Semilight" panose="020B0502040204020203" pitchFamily="50" charset="-127"/>
-                <a:cs typeface="맑은 고딕 Semilight" panose="020B0502040204020203" pitchFamily="50" charset="-127"/>
-              </a:rPr>
-              <a:t>적용으로 이  평균들은 → 정규분포 근사</a:t>
-            </a:r>
-            <a:r>
-              <a:rPr lang="en-US" altLang="ko-KR" sz="1400" dirty="0">
-                <a:latin typeface="맑은 고딕 Semilight" panose="020B0502040204020203" pitchFamily="50" charset="-127"/>
-                <a:ea typeface="맑은 고딕 Semilight" panose="020B0502040204020203" pitchFamily="50" charset="-127"/>
-                <a:cs typeface="맑은 고딕 Semilight" panose="020B0502040204020203" pitchFamily="50" charset="-127"/>
-              </a:rPr>
-              <a:t> </a:t>
-            </a:r>
-            <a:r>
-              <a:rPr lang="ko-KR" altLang="en-US" sz="1400" dirty="0">
-                <a:latin typeface="맑은 고딕 Semilight" panose="020B0502040204020203" pitchFamily="50" charset="-127"/>
-                <a:ea typeface="맑은 고딕 Semilight" panose="020B0502040204020203" pitchFamily="50" charset="-127"/>
-                <a:cs typeface="맑은 고딕 Semilight" panose="020B0502040204020203" pitchFamily="50" charset="-127"/>
-              </a:rPr>
-              <a:t>→ 신뢰구간</a:t>
-            </a:r>
-            <a:r>
-              <a:rPr lang="en-US" altLang="ko-KR" sz="1400" dirty="0">
-                <a:latin typeface="맑은 고딕 Semilight" panose="020B0502040204020203" pitchFamily="50" charset="-127"/>
-                <a:ea typeface="맑은 고딕 Semilight" panose="020B0502040204020203" pitchFamily="50" charset="-127"/>
-                <a:cs typeface="맑은 고딕 Semilight" panose="020B0502040204020203" pitchFamily="50" charset="-127"/>
-              </a:rPr>
-              <a:t> </a:t>
-            </a:r>
-            <a:r>
-              <a:rPr lang="ko-KR" altLang="en-US" sz="1400" dirty="0">
-                <a:latin typeface="맑은 고딕 Semilight" panose="020B0502040204020203" pitchFamily="50" charset="-127"/>
-                <a:ea typeface="맑은 고딕 Semilight" panose="020B0502040204020203" pitchFamily="50" charset="-127"/>
-                <a:cs typeface="맑은 고딕 Semilight" panose="020B0502040204020203" pitchFamily="50" charset="-127"/>
-              </a:rPr>
-              <a:t>→</a:t>
-            </a:r>
-            <a:r>
-              <a:rPr lang="en-US" altLang="ko-KR" sz="1400" dirty="0">
-                <a:latin typeface="맑은 고딕 Semilight" panose="020B0502040204020203" pitchFamily="50" charset="-127"/>
-                <a:ea typeface="맑은 고딕 Semilight" panose="020B0502040204020203" pitchFamily="50" charset="-127"/>
-                <a:cs typeface="맑은 고딕 Semilight" panose="020B0502040204020203" pitchFamily="50" charset="-127"/>
-              </a:rPr>
-              <a:t> </a:t>
-            </a:r>
-            <a:r>
-              <a:rPr lang="ko-KR" altLang="en-US" sz="1400" dirty="0">
-                <a:latin typeface="맑은 고딕 Semilight" panose="020B0502040204020203" pitchFamily="50" charset="-127"/>
-                <a:ea typeface="맑은 고딕 Semilight" panose="020B0502040204020203" pitchFamily="50" charset="-127"/>
-                <a:cs typeface="맑은 고딕 Semilight" panose="020B0502040204020203" pitchFamily="50" charset="-127"/>
-              </a:rPr>
-              <a:t>통계적 비교 가능</a:t>
-            </a:r>
-            <a:endParaRPr lang="en-US" altLang="ko-KR" sz="1600" dirty="0">
-              <a:latin typeface="맑은 고딕 Semilight" panose="020B0502040204020203" pitchFamily="50" charset="-127"/>
-              <a:ea typeface="맑은 고딕 Semilight" panose="020B0502040204020203" pitchFamily="50" charset="-127"/>
-              <a:cs typeface="맑은 고딕 Semilight" panose="020B0502040204020203" pitchFamily="50" charset="-127"/>
-            </a:endParaRPr>
-          </a:p>
-          <a:p>
-            <a:pPr marL="285750" indent="-285750">
-              <a:lnSpc>
-                <a:spcPct val="150000"/>
-              </a:lnSpc>
-              <a:buFont typeface="Wingdings" panose="05000000000000000000" pitchFamily="2" charset="2"/>
-              <a:buChar char="v"/>
-            </a:pPr>
-            <a:r>
-              <a:rPr lang="en-US" altLang="ko-KR" sz="1600" dirty="0">
-                <a:latin typeface="맑은 고딕 Semilight" panose="020B0502040204020203" pitchFamily="50" charset="-127"/>
-                <a:ea typeface="맑은 고딕 Semilight" panose="020B0502040204020203" pitchFamily="50" charset="-127"/>
-                <a:cs typeface="맑은 고딕 Semilight" panose="020B0502040204020203" pitchFamily="50" charset="-127"/>
-              </a:rPr>
-              <a:t>A/B </a:t>
-            </a:r>
-            <a:r>
-              <a:rPr lang="ko-KR" altLang="en-US" sz="1600" dirty="0">
-                <a:latin typeface="맑은 고딕 Semilight" panose="020B0502040204020203" pitchFamily="50" charset="-127"/>
-                <a:ea typeface="맑은 고딕 Semilight" panose="020B0502040204020203" pitchFamily="50" charset="-127"/>
-                <a:cs typeface="맑은 고딕 Semilight" panose="020B0502040204020203" pitchFamily="50" charset="-127"/>
-              </a:rPr>
-              <a:t>테스트와 실험 설계의 핵심</a:t>
-            </a:r>
-            <a:endParaRPr lang="en-US" altLang="ko-KR" sz="1600" dirty="0">
-              <a:latin typeface="맑은 고딕 Semilight" panose="020B0502040204020203" pitchFamily="50" charset="-127"/>
-              <a:ea typeface="맑은 고딕 Semilight" panose="020B0502040204020203" pitchFamily="50" charset="-127"/>
-              <a:cs typeface="맑은 고딕 Semilight" panose="020B0502040204020203" pitchFamily="50" charset="-127"/>
-            </a:endParaRPr>
-          </a:p>
-          <a:p>
-            <a:pPr marL="742950" lvl="1" indent="-285750">
-              <a:lnSpc>
-                <a:spcPct val="150000"/>
-              </a:lnSpc>
-              <a:buFont typeface="Wingdings" panose="05000000000000000000" pitchFamily="2" charset="2"/>
-              <a:buChar char="v"/>
-            </a:pPr>
-            <a:r>
-              <a:rPr lang="ko-KR" altLang="en-US" sz="1400" dirty="0">
-                <a:latin typeface="맑은 고딕 Semilight" panose="020B0502040204020203" pitchFamily="50" charset="-127"/>
-                <a:ea typeface="맑은 고딕 Semilight" panose="020B0502040204020203" pitchFamily="50" charset="-127"/>
-                <a:cs typeface="맑은 고딕 Semilight" panose="020B0502040204020203" pitchFamily="50" charset="-127"/>
-              </a:rPr>
-              <a:t>광고 효과 비교</a:t>
-            </a:r>
-            <a:r>
-              <a:rPr lang="en-US" altLang="ko-KR" sz="1400" dirty="0">
-                <a:latin typeface="맑은 고딕 Semilight" panose="020B0502040204020203" pitchFamily="50" charset="-127"/>
-                <a:ea typeface="맑은 고딕 Semilight" panose="020B0502040204020203" pitchFamily="50" charset="-127"/>
-                <a:cs typeface="맑은 고딕 Semilight" panose="020B0502040204020203" pitchFamily="50" charset="-127"/>
-              </a:rPr>
-              <a:t>, </a:t>
-            </a:r>
-            <a:r>
-              <a:rPr lang="ko-KR" altLang="en-US" sz="1400" dirty="0">
-                <a:latin typeface="맑은 고딕 Semilight" panose="020B0502040204020203" pitchFamily="50" charset="-127"/>
-                <a:ea typeface="맑은 고딕 Semilight" panose="020B0502040204020203" pitchFamily="50" charset="-127"/>
-                <a:cs typeface="맑은 고딕 Semilight" panose="020B0502040204020203" pitchFamily="50" charset="-127"/>
-              </a:rPr>
-              <a:t>추천 알고리즘 비교</a:t>
-            </a:r>
-            <a:r>
-              <a:rPr lang="en-US" altLang="ko-KR" sz="1400" dirty="0">
-                <a:latin typeface="맑은 고딕 Semilight" panose="020B0502040204020203" pitchFamily="50" charset="-127"/>
-                <a:ea typeface="맑은 고딕 Semilight" panose="020B0502040204020203" pitchFamily="50" charset="-127"/>
-                <a:cs typeface="맑은 고딕 Semilight" panose="020B0502040204020203" pitchFamily="50" charset="-127"/>
-              </a:rPr>
-              <a:t>, UI </a:t>
-            </a:r>
-            <a:r>
-              <a:rPr lang="ko-KR" altLang="en-US" sz="1400" dirty="0">
-                <a:latin typeface="맑은 고딕 Semilight" panose="020B0502040204020203" pitchFamily="50" charset="-127"/>
-                <a:ea typeface="맑은 고딕 Semilight" panose="020B0502040204020203" pitchFamily="50" charset="-127"/>
-                <a:cs typeface="맑은 고딕 Semilight" panose="020B0502040204020203" pitchFamily="50" charset="-127"/>
-              </a:rPr>
-              <a:t>개선 효과 측정  등 전부 평균 비교 문제로 </a:t>
-            </a:r>
-            <a:r>
-              <a:rPr lang="en-US" altLang="ko-KR" sz="1400" dirty="0">
-                <a:latin typeface="맑은 고딕 Semilight" panose="020B0502040204020203" pitchFamily="50" charset="-127"/>
-                <a:ea typeface="맑은 고딕 Semilight" panose="020B0502040204020203" pitchFamily="50" charset="-127"/>
-                <a:cs typeface="맑은 고딕 Semilight" panose="020B0502040204020203" pitchFamily="50" charset="-127"/>
-              </a:rPr>
-              <a:t>CLT </a:t>
-            </a:r>
-            <a:r>
-              <a:rPr lang="ko-KR" altLang="en-US" sz="1400" dirty="0">
-                <a:latin typeface="맑은 고딕 Semilight" panose="020B0502040204020203" pitchFamily="50" charset="-127"/>
-                <a:ea typeface="맑은 고딕 Semilight" panose="020B0502040204020203" pitchFamily="50" charset="-127"/>
-                <a:cs typeface="맑은 고딕 Semilight" panose="020B0502040204020203" pitchFamily="50" charset="-127"/>
-              </a:rPr>
-              <a:t>덕분에</a:t>
-            </a:r>
-            <a:r>
-              <a:rPr lang="en-US" altLang="ko-KR" sz="1400" dirty="0">
-                <a:latin typeface="맑은 고딕 Semilight" panose="020B0502040204020203" pitchFamily="50" charset="-127"/>
-                <a:ea typeface="맑은 고딕 Semilight" panose="020B0502040204020203" pitchFamily="50" charset="-127"/>
-                <a:cs typeface="맑은 고딕 Semilight" panose="020B0502040204020203" pitchFamily="50" charset="-127"/>
-              </a:rPr>
-              <a:t> </a:t>
-            </a:r>
-            <a:r>
-              <a:rPr lang="ko-KR" altLang="en-US" sz="1400" dirty="0">
-                <a:latin typeface="맑은 고딕 Semilight" panose="020B0502040204020203" pitchFamily="50" charset="-127"/>
-                <a:ea typeface="맑은 고딕 Semilight" panose="020B0502040204020203" pitchFamily="50" charset="-127"/>
-                <a:cs typeface="맑은 고딕 Semilight" panose="020B0502040204020203" pitchFamily="50" charset="-127"/>
-              </a:rPr>
-              <a:t>두 평균 차이 → 정규분포 근사 → </a:t>
-            </a:r>
-            <a:r>
-              <a:rPr lang="en-US" altLang="ko-KR" sz="1400" dirty="0">
-                <a:latin typeface="맑은 고딕 Semilight" panose="020B0502040204020203" pitchFamily="50" charset="-127"/>
-                <a:ea typeface="맑은 고딕 Semilight" panose="020B0502040204020203" pitchFamily="50" charset="-127"/>
-                <a:cs typeface="맑은 고딕 Semilight" panose="020B0502040204020203" pitchFamily="50" charset="-127"/>
-              </a:rPr>
-              <a:t>p-value </a:t>
-            </a:r>
-            <a:r>
-              <a:rPr lang="ko-KR" altLang="en-US" sz="1400" dirty="0">
-                <a:latin typeface="맑은 고딕 Semilight" panose="020B0502040204020203" pitchFamily="50" charset="-127"/>
-                <a:ea typeface="맑은 고딕 Semilight" panose="020B0502040204020203" pitchFamily="50" charset="-127"/>
-                <a:cs typeface="맑은 고딕 Semilight" panose="020B0502040204020203" pitchFamily="50" charset="-127"/>
-              </a:rPr>
-              <a:t>계산 가능</a:t>
-            </a:r>
-            <a:r>
-              <a:rPr lang="ko-KR" altLang="en-US" sz="1600" dirty="0">
-                <a:latin typeface="맑은 고딕 Semilight" panose="020B0502040204020203" pitchFamily="50" charset="-127"/>
-                <a:ea typeface="맑은 고딕 Semilight" panose="020B0502040204020203" pitchFamily="50" charset="-127"/>
-                <a:cs typeface="맑은 고딕 Semilight" panose="020B0502040204020203" pitchFamily="50" charset="-127"/>
-              </a:rPr>
-              <a:t> </a:t>
-            </a:r>
-            <a:endParaRPr lang="en-US" altLang="ko-KR" dirty="0">
-              <a:latin typeface="맑은 고딕 Semilight" panose="020B0502040204020203" pitchFamily="50" charset="-127"/>
-              <a:ea typeface="맑은 고딕 Semilight" panose="020B0502040204020203" pitchFamily="50" charset="-127"/>
-              <a:cs typeface="맑은 고딕 Semilight" panose="020B0502040204020203" pitchFamily="50" charset="-127"/>
-            </a:endParaRPr>
-          </a:p>
-        </p:txBody>
-      </p:sp>
-      <p:sp>
-        <p:nvSpPr>
-          <p:cNvPr id="9" name="TextBox 8">
-            <a:extLst>
-              <a:ext uri="{FF2B5EF4-FFF2-40B4-BE49-F238E27FC236}">
-                <a16:creationId xmlns:a16="http://schemas.microsoft.com/office/drawing/2014/main" id="{185A9784-515E-A3E4-8F67-F24BA80B28DC}"/>
-              </a:ext>
-            </a:extLst>
-          </p:cNvPr>
-          <p:cNvSpPr txBox="1"/>
-          <p:nvPr/>
-        </p:nvSpPr>
-        <p:spPr>
-          <a:xfrm>
-            <a:off x="119336" y="260649"/>
-            <a:ext cx="3650024" cy="584775"/>
-          </a:xfrm>
-          <a:prstGeom prst="rect">
-            <a:avLst/>
-          </a:prstGeom>
-          <a:noFill/>
-        </p:spPr>
-        <p:txBody>
-          <a:bodyPr wrap="square" rtlCol="0">
-            <a:spAutoFit/>
-          </a:bodyPr>
-          <a:lstStyle/>
-          <a:p>
-            <a:r>
-              <a:rPr lang="ko-KR" altLang="en-US" sz="3200" b="1" dirty="0">
-                <a:latin typeface="맑은 고딕 Semilight" panose="020B0502040204020203" pitchFamily="50" charset="-127"/>
-                <a:ea typeface="맑은 고딕 Semilight" panose="020B0502040204020203" pitchFamily="50" charset="-127"/>
-                <a:cs typeface="맑은 고딕 Semilight" panose="020B0502040204020203" pitchFamily="50" charset="-127"/>
-              </a:rPr>
-              <a:t>문제 풀이</a:t>
-            </a:r>
-            <a:r>
-              <a:rPr lang="en-US" altLang="ko-KR" sz="3200" b="1" dirty="0">
-                <a:latin typeface="맑은 고딕 Semilight" panose="020B0502040204020203" pitchFamily="50" charset="-127"/>
-                <a:ea typeface="맑은 고딕 Semilight" panose="020B0502040204020203" pitchFamily="50" charset="-127"/>
-                <a:cs typeface="맑은 고딕 Semilight" panose="020B0502040204020203" pitchFamily="50" charset="-127"/>
-              </a:rPr>
-              <a:t>(</a:t>
-            </a:r>
-            <a:r>
-              <a:rPr lang="ko-KR" altLang="en-US" sz="3200" b="1" dirty="0">
-                <a:latin typeface="맑은 고딕 Semilight" panose="020B0502040204020203" pitchFamily="50" charset="-127"/>
-                <a:ea typeface="맑은 고딕 Semilight" panose="020B0502040204020203" pitchFamily="50" charset="-127"/>
-                <a:cs typeface="맑은 고딕 Semilight" panose="020B0502040204020203" pitchFamily="50" charset="-127"/>
-              </a:rPr>
-              <a:t>고급</a:t>
-            </a:r>
-            <a:r>
-              <a:rPr lang="en-US" altLang="ko-KR" sz="3200" b="1" dirty="0">
-                <a:latin typeface="맑은 고딕 Semilight" panose="020B0502040204020203" pitchFamily="50" charset="-127"/>
-                <a:ea typeface="맑은 고딕 Semilight" panose="020B0502040204020203" pitchFamily="50" charset="-127"/>
-                <a:cs typeface="맑은 고딕 Semilight" panose="020B0502040204020203" pitchFamily="50" charset="-127"/>
-              </a:rPr>
-              <a:t>)</a:t>
-            </a:r>
-            <a:endParaRPr lang="ko-KR" altLang="en-US" sz="3200" b="1" dirty="0">
-              <a:latin typeface="맑은 고딕 Semilight" panose="020B0502040204020203" pitchFamily="50" charset="-127"/>
-              <a:ea typeface="맑은 고딕 Semilight" panose="020B0502040204020203" pitchFamily="50" charset="-127"/>
-              <a:cs typeface="맑은 고딕 Semilight" panose="020B0502040204020203" pitchFamily="50" charset="-127"/>
-            </a:endParaRPr>
-          </a:p>
-        </p:txBody>
-      </p:sp>
-      <p:sp>
-        <p:nvSpPr>
-          <p:cNvPr id="5" name="TextBox 4">
-            <a:extLst>
-              <a:ext uri="{FF2B5EF4-FFF2-40B4-BE49-F238E27FC236}">
-                <a16:creationId xmlns:a16="http://schemas.microsoft.com/office/drawing/2014/main" id="{52039815-B66C-C01C-F725-1707E5711FCB}"/>
-              </a:ext>
-            </a:extLst>
-          </p:cNvPr>
-          <p:cNvSpPr txBox="1"/>
-          <p:nvPr/>
-        </p:nvSpPr>
-        <p:spPr>
-          <a:xfrm>
-            <a:off x="551384" y="1656979"/>
-            <a:ext cx="11377264" cy="869790"/>
-          </a:xfrm>
-          <a:prstGeom prst="rect">
-            <a:avLst/>
-          </a:prstGeom>
-          <a:solidFill>
-            <a:schemeClr val="bg1">
-              <a:lumMod val="95000"/>
-            </a:schemeClr>
-          </a:solidFill>
-        </p:spPr>
-        <p:txBody>
-          <a:bodyPr wrap="square">
-            <a:spAutoFit/>
-          </a:bodyPr>
-          <a:lstStyle/>
-          <a:p>
-            <a:pPr marL="285750" indent="-285750">
-              <a:lnSpc>
-                <a:spcPct val="150000"/>
-              </a:lnSpc>
-              <a:buFont typeface="Wingdings" panose="05000000000000000000" pitchFamily="2" charset="2"/>
-              <a:buChar char="v"/>
-            </a:pPr>
-            <a:r>
-              <a:rPr lang="ko-KR" altLang="en-US" dirty="0">
-                <a:latin typeface="맑은 고딕 Semilight" panose="020B0502040204020203" pitchFamily="50" charset="-127"/>
-                <a:ea typeface="맑은 고딕 Semilight" panose="020B0502040204020203" pitchFamily="50" charset="-127"/>
-                <a:cs typeface="맑은 고딕 Semilight" panose="020B0502040204020203" pitchFamily="50" charset="-127"/>
-              </a:rPr>
-              <a:t>중심극한정리</a:t>
-            </a:r>
-            <a:r>
-              <a:rPr lang="en-US" altLang="ko-KR" dirty="0">
-                <a:latin typeface="맑은 고딕 Semilight" panose="020B0502040204020203" pitchFamily="50" charset="-127"/>
-                <a:ea typeface="맑은 고딕 Semilight" panose="020B0502040204020203" pitchFamily="50" charset="-127"/>
-                <a:cs typeface="맑은 고딕 Semilight" panose="020B0502040204020203" pitchFamily="50" charset="-127"/>
-              </a:rPr>
-              <a:t>(</a:t>
-            </a:r>
-            <a:r>
-              <a:rPr lang="ko-KR" altLang="en-US" dirty="0">
-                <a:latin typeface="맑은 고딕 Semilight" panose="020B0502040204020203" pitchFamily="50" charset="-127"/>
-                <a:ea typeface="맑은 고딕 Semilight" panose="020B0502040204020203" pitchFamily="50" charset="-127"/>
-                <a:cs typeface="맑은 고딕 Semilight" panose="020B0502040204020203" pitchFamily="50" charset="-127"/>
-              </a:rPr>
-              <a:t>데이터는 불규칙하지만</a:t>
-            </a:r>
-            <a:r>
-              <a:rPr lang="en-US" altLang="ko-KR" dirty="0">
-                <a:latin typeface="맑은 고딕 Semilight" panose="020B0502040204020203" pitchFamily="50" charset="-127"/>
-                <a:ea typeface="맑은 고딕 Semilight" panose="020B0502040204020203" pitchFamily="50" charset="-127"/>
-                <a:cs typeface="맑은 고딕 Semilight" panose="020B0502040204020203" pitchFamily="50" charset="-127"/>
-              </a:rPr>
-              <a:t>, </a:t>
-            </a:r>
-            <a:r>
-              <a:rPr lang="ko-KR" altLang="en-US" dirty="0">
-                <a:latin typeface="맑은 고딕 Semilight" panose="020B0502040204020203" pitchFamily="50" charset="-127"/>
-                <a:ea typeface="맑은 고딕 Semilight" panose="020B0502040204020203" pitchFamily="50" charset="-127"/>
-                <a:cs typeface="맑은 고딕 Semilight" panose="020B0502040204020203" pitchFamily="50" charset="-127"/>
-              </a:rPr>
-              <a:t>평균은 예측 가능하다 → 그래서 학습이 가능하다</a:t>
-            </a:r>
-            <a:r>
-              <a:rPr lang="en-US" altLang="ko-KR" dirty="0">
-                <a:latin typeface="맑은 고딕 Semilight" panose="020B0502040204020203" pitchFamily="50" charset="-127"/>
-                <a:ea typeface="맑은 고딕 Semilight" panose="020B0502040204020203" pitchFamily="50" charset="-127"/>
-                <a:cs typeface="맑은 고딕 Semilight" panose="020B0502040204020203" pitchFamily="50" charset="-127"/>
-              </a:rPr>
-              <a:t>)</a:t>
-            </a:r>
-            <a:r>
-              <a:rPr lang="ko-KR" altLang="en-US" dirty="0">
-                <a:latin typeface="맑은 고딕 Semilight" panose="020B0502040204020203" pitchFamily="50" charset="-127"/>
-                <a:ea typeface="맑은 고딕 Semilight" panose="020B0502040204020203" pitchFamily="50" charset="-127"/>
-                <a:cs typeface="맑은 고딕 Semilight" panose="020B0502040204020203" pitchFamily="50" charset="-127"/>
-              </a:rPr>
-              <a:t>가 </a:t>
-            </a:r>
-            <a:r>
-              <a:rPr lang="ko-KR" altLang="en-US" dirty="0" err="1">
-                <a:latin typeface="맑은 고딕 Semilight" panose="020B0502040204020203" pitchFamily="50" charset="-127"/>
-                <a:ea typeface="맑은 고딕 Semilight" panose="020B0502040204020203" pitchFamily="50" charset="-127"/>
-                <a:cs typeface="맑은 고딕 Semilight" panose="020B0502040204020203" pitchFamily="50" charset="-127"/>
-              </a:rPr>
-              <a:t>머신러닝에</a:t>
-            </a:r>
-            <a:r>
-              <a:rPr lang="ko-KR" altLang="en-US" dirty="0">
-                <a:latin typeface="맑은 고딕 Semilight" panose="020B0502040204020203" pitchFamily="50" charset="-127"/>
-                <a:ea typeface="맑은 고딕 Semilight" panose="020B0502040204020203" pitchFamily="50" charset="-127"/>
-                <a:cs typeface="맑은 고딕 Semilight" panose="020B0502040204020203" pitchFamily="50" charset="-127"/>
-              </a:rPr>
-              <a:t> 접목하는 내용을 모의실험으로 파이썬 코드로 제시하라</a:t>
-            </a:r>
-            <a:endParaRPr lang="en-US" altLang="ko-KR" dirty="0">
-              <a:latin typeface="맑은 고딕 Semilight" panose="020B0502040204020203" pitchFamily="50" charset="-127"/>
-              <a:ea typeface="맑은 고딕 Semilight" panose="020B0502040204020203" pitchFamily="50" charset="-127"/>
-              <a:cs typeface="맑은 고딕 Semilight" panose="020B0502040204020203" pitchFamily="50" charset="-127"/>
-            </a:endParaRPr>
-          </a:p>
-        </p:txBody>
-      </p:sp>
-      <p:pic>
-        <p:nvPicPr>
-          <p:cNvPr id="3" name="Picture 2" descr="한 여자가 노트북 컴퓨터에 타이핑을 하고 있다">
-            <a:extLst>
-              <a:ext uri="{FF2B5EF4-FFF2-40B4-BE49-F238E27FC236}">
-                <a16:creationId xmlns:a16="http://schemas.microsoft.com/office/drawing/2014/main" id="{B4F85ED7-5D0C-B6EA-688D-04551BD9D5C9}"/>
-              </a:ext>
-            </a:extLst>
-          </p:cNvPr>
-          <p:cNvPicPr>
-            <a:picLocks noChangeAspect="1" noChangeArrowheads="1"/>
-          </p:cNvPicPr>
-          <p:nvPr/>
-        </p:nvPicPr>
-        <p:blipFill>
-          <a:blip r:embed="rId3" cstate="print">
-            <a:extLst>
-              <a:ext uri="{28A0092B-C50C-407E-A947-70E740481C1C}">
-                <a14:useLocalDpi xmlns:a14="http://schemas.microsoft.com/office/drawing/2010/main" val="0"/>
-              </a:ext>
-            </a:extLst>
-          </a:blip>
-          <a:srcRect/>
-          <a:stretch>
-            <a:fillRect/>
-          </a:stretch>
-        </p:blipFill>
-        <p:spPr bwMode="auto">
-          <a:xfrm>
-            <a:off x="9869489" y="66676"/>
-            <a:ext cx="2152650" cy="1424329"/>
-          </a:xfrm>
-          <a:prstGeom prst="rect">
-            <a:avLst/>
-          </a:prstGeom>
-          <a:noFill/>
-          <a:extLst>
-            <a:ext uri="{909E8E84-426E-40DD-AFC4-6F175D3DCCD1}">
-              <a14:hiddenFill xmlns:a14="http://schemas.microsoft.com/office/drawing/2010/main">
-                <a:solidFill>
-                  <a:srgbClr val="FFFFFF"/>
-                </a:solidFill>
-              </a14:hiddenFill>
-            </a:ext>
-          </a:extLst>
-        </p:spPr>
-      </p:pic>
-    </p:spTree>
-    <p:extLst>
-      <p:ext uri="{BB962C8B-B14F-4D97-AF65-F5344CB8AC3E}">
-        <p14:creationId xmlns:p14="http://schemas.microsoft.com/office/powerpoint/2010/main" val="2559646205"/>
-      </p:ext>
-    </p:extLst>
-  </p:cSld>
-  <p:clrMapOvr>
-    <a:masterClrMapping/>
-  </p:clrMapOvr>
-  <mc:AlternateContent xmlns:mc="http://schemas.openxmlformats.org/markup-compatibility/2006" xmlns:p14="http://schemas.microsoft.com/office/powerpoint/2010/main">
-    <mc:Choice Requires="p14">
-      <p:transition spd="med" p14:dur="700">
-        <p:fade/>
-      </p:transition>
-    </mc:Choice>
-    <mc:Fallback xmlns="">
-      <p:transition spd="med">
-        <p:fade/>
-      </p:transition>
-    </mc:Fallback>
-  </mc:AlternateContent>
-</p:sld>
-</file>
-
-<file path=ppt/slides/slide31.xml><?xml version="1.0" encoding="utf-8"?>
-<p:sld xmlns:a="http://schemas.openxmlformats.org/drawingml/2006/main" xmlns:r="http://schemas.openxmlformats.org/officeDocument/2006/relationships" xmlns:p="http://schemas.openxmlformats.org/presentationml/2006/main">
-  <p:cSld>
-    <p:spTree>
-      <p:nvGrpSpPr>
-        <p:cNvPr id="1" name="">
-          <a:extLst>
-            <a:ext uri="{FF2B5EF4-FFF2-40B4-BE49-F238E27FC236}">
-              <a16:creationId xmlns:a16="http://schemas.microsoft.com/office/drawing/2014/main" id="{9BBFE75F-6515-E02E-0A0F-4F2429757FE5}"/>
-            </a:ext>
-          </a:extLst>
-        </p:cNvPr>
-        <p:cNvGrpSpPr/>
-        <p:nvPr/>
-      </p:nvGrpSpPr>
-      <p:grpSpPr>
-        <a:xfrm>
-          <a:off x="0" y="0"/>
-          <a:ext cx="0" cy="0"/>
-          <a:chOff x="0" y="0"/>
-          <a:chExt cx="0" cy="0"/>
-        </a:xfrm>
-      </p:grpSpPr>
-      <p:sp>
-        <p:nvSpPr>
-          <p:cNvPr id="2" name="슬라이드 번호 개체 틀 1">
-            <a:extLst>
-              <a:ext uri="{FF2B5EF4-FFF2-40B4-BE49-F238E27FC236}">
-                <a16:creationId xmlns:a16="http://schemas.microsoft.com/office/drawing/2014/main" id="{E21E95A9-2DB2-F8F6-CA7C-3363C9348A3E}"/>
-              </a:ext>
-            </a:extLst>
-          </p:cNvPr>
-          <p:cNvSpPr>
-            <a:spLocks noGrp="1"/>
-          </p:cNvSpPr>
-          <p:nvPr>
-            <p:ph type="sldNum" sz="quarter" idx="12"/>
-          </p:nvPr>
-        </p:nvSpPr>
-        <p:spPr/>
-        <p:txBody>
-          <a:bodyPr/>
-          <a:lstStyle/>
-          <a:p>
-            <a:pPr rtl="0"/>
-            <a:fld id="{A3F31473-23EB-4724-8B59-FE6D21D89FA4}" type="slidenum">
-              <a:rPr lang="en-US" altLang="ko-KR" noProof="0" smtClean="0"/>
-              <a:t>31</a:t>
-            </a:fld>
-            <a:endParaRPr lang="en-US" altLang="ko-KR" noProof="0" dirty="0"/>
-          </a:p>
-        </p:txBody>
-      </p:sp>
-      <p:graphicFrame>
-        <p:nvGraphicFramePr>
-          <p:cNvPr id="3" name="표 2">
-            <a:extLst>
-              <a:ext uri="{FF2B5EF4-FFF2-40B4-BE49-F238E27FC236}">
-                <a16:creationId xmlns:a16="http://schemas.microsoft.com/office/drawing/2014/main" id="{FC8FE015-7FE6-7957-1A9B-65A97D8020B8}"/>
-              </a:ext>
-            </a:extLst>
-          </p:cNvPr>
-          <p:cNvGraphicFramePr>
-            <a:graphicFrameLocks noGrp="1"/>
-          </p:cNvGraphicFramePr>
-          <p:nvPr>
-            <p:extLst>
-              <p:ext uri="{D42A27DB-BD31-4B8C-83A1-F6EECF244321}">
-                <p14:modId xmlns:p14="http://schemas.microsoft.com/office/powerpoint/2010/main" val="1021552468"/>
-              </p:ext>
-            </p:extLst>
-          </p:nvPr>
-        </p:nvGraphicFramePr>
-        <p:xfrm>
-          <a:off x="335361" y="1916832"/>
-          <a:ext cx="11449273" cy="3813410"/>
-        </p:xfrm>
-        <a:graphic>
-          <a:graphicData uri="http://schemas.openxmlformats.org/drawingml/2006/table">
-            <a:tbl>
-              <a:tblPr>
-                <a:tableStyleId>{BDBED569-4797-4DF1-A0F4-6AAB3CD982D8}</a:tableStyleId>
-              </a:tblPr>
-              <a:tblGrid>
-                <a:gridCol w="2278453">
-                  <a:extLst>
-                    <a:ext uri="{9D8B030D-6E8A-4147-A177-3AD203B41FA5}">
-                      <a16:colId xmlns:a16="http://schemas.microsoft.com/office/drawing/2014/main" val="2839673302"/>
-                    </a:ext>
-                  </a:extLst>
-                </a:gridCol>
-                <a:gridCol w="3045465">
-                  <a:extLst>
-                    <a:ext uri="{9D8B030D-6E8A-4147-A177-3AD203B41FA5}">
-                      <a16:colId xmlns:a16="http://schemas.microsoft.com/office/drawing/2014/main" val="3265452535"/>
-                    </a:ext>
-                  </a:extLst>
-                </a:gridCol>
-                <a:gridCol w="3263037">
-                  <a:extLst>
-                    <a:ext uri="{9D8B030D-6E8A-4147-A177-3AD203B41FA5}">
-                      <a16:colId xmlns:a16="http://schemas.microsoft.com/office/drawing/2014/main" val="3151376771"/>
-                    </a:ext>
-                  </a:extLst>
-                </a:gridCol>
-                <a:gridCol w="2862318">
-                  <a:extLst>
-                    <a:ext uri="{9D8B030D-6E8A-4147-A177-3AD203B41FA5}">
-                      <a16:colId xmlns:a16="http://schemas.microsoft.com/office/drawing/2014/main" val="2539893238"/>
-                    </a:ext>
-                  </a:extLst>
-                </a:gridCol>
-              </a:tblGrid>
-              <a:tr h="511555">
-                <a:tc>
-                  <a:txBody>
-                    <a:bodyPr/>
-                    <a:lstStyle/>
-                    <a:p>
-                      <a:pPr>
-                        <a:buNone/>
-                      </a:pPr>
-                      <a:r>
-                        <a:rPr lang="ko-KR" altLang="en-US" sz="1600" dirty="0">
-                          <a:latin typeface="맑은 고딕 Semilight" panose="020B0502040204020203" pitchFamily="50" charset="-127"/>
-                          <a:ea typeface="맑은 고딕 Semilight" panose="020B0502040204020203" pitchFamily="50" charset="-127"/>
-                          <a:cs typeface="맑은 고딕 Semilight" panose="020B0502040204020203" pitchFamily="50" charset="-127"/>
-                        </a:rPr>
-                        <a:t>구분</a:t>
-                      </a:r>
-                    </a:p>
-                  </a:txBody>
-                  <a:tcPr anchor="ctr">
-                    <a:solidFill>
-                      <a:srgbClr val="D7E3FF"/>
-                    </a:solidFill>
-                  </a:tcPr>
-                </a:tc>
-                <a:tc>
-                  <a:txBody>
-                    <a:bodyPr/>
-                    <a:lstStyle/>
-                    <a:p>
-                      <a:pPr>
-                        <a:buNone/>
-                      </a:pPr>
-                      <a:r>
-                        <a:rPr lang="ko-KR" altLang="en-US" sz="1600">
-                          <a:latin typeface="맑은 고딕 Semilight" panose="020B0502040204020203" pitchFamily="50" charset="-127"/>
-                          <a:ea typeface="맑은 고딕 Semilight" panose="020B0502040204020203" pitchFamily="50" charset="-127"/>
-                          <a:cs typeface="맑은 고딕 Semilight" panose="020B0502040204020203" pitchFamily="50" charset="-127"/>
-                        </a:rPr>
-                        <a:t>문제 상황</a:t>
-                      </a:r>
-                    </a:p>
-                  </a:txBody>
-                  <a:tcPr anchor="ctr">
-                    <a:solidFill>
-                      <a:srgbClr val="D7E3FF"/>
-                    </a:solidFill>
-                  </a:tcPr>
-                </a:tc>
-                <a:tc>
-                  <a:txBody>
-                    <a:bodyPr/>
-                    <a:lstStyle/>
-                    <a:p>
-                      <a:pPr>
-                        <a:buNone/>
-                      </a:pPr>
-                      <a:r>
-                        <a:rPr lang="en-US" sz="1600" dirty="0">
-                          <a:latin typeface="맑은 고딕 Semilight" panose="020B0502040204020203" pitchFamily="50" charset="-127"/>
-                          <a:ea typeface="맑은 고딕 Semilight" panose="020B0502040204020203" pitchFamily="50" charset="-127"/>
-                          <a:cs typeface="맑은 고딕 Semilight" panose="020B0502040204020203" pitchFamily="50" charset="-127"/>
-                        </a:rPr>
-                        <a:t>CLT(</a:t>
-                      </a:r>
-                      <a:r>
-                        <a:rPr lang="ko-KR" altLang="en-US" sz="1600" dirty="0">
-                          <a:latin typeface="맑은 고딕 Semilight" panose="020B0502040204020203" pitchFamily="50" charset="-127"/>
-                          <a:ea typeface="맑은 고딕 Semilight" panose="020B0502040204020203" pitchFamily="50" charset="-127"/>
-                          <a:cs typeface="맑은 고딕 Semilight" panose="020B0502040204020203" pitchFamily="50" charset="-127"/>
-                        </a:rPr>
-                        <a:t>중심극한정리</a:t>
-                      </a:r>
-                      <a:r>
-                        <a:rPr lang="en-US" altLang="ko-KR" sz="1600" dirty="0">
-                          <a:latin typeface="맑은 고딕 Semilight" panose="020B0502040204020203" pitchFamily="50" charset="-127"/>
-                          <a:ea typeface="맑은 고딕 Semilight" panose="020B0502040204020203" pitchFamily="50" charset="-127"/>
-                          <a:cs typeface="맑은 고딕 Semilight" panose="020B0502040204020203" pitchFamily="50" charset="-127"/>
-                        </a:rPr>
-                        <a:t>)</a:t>
-                      </a:r>
-                      <a:r>
-                        <a:rPr lang="en-US" sz="1600" dirty="0">
-                          <a:latin typeface="맑은 고딕 Semilight" panose="020B0502040204020203" pitchFamily="50" charset="-127"/>
-                          <a:ea typeface="맑은 고딕 Semilight" panose="020B0502040204020203" pitchFamily="50" charset="-127"/>
-                          <a:cs typeface="맑은 고딕 Semilight" panose="020B0502040204020203" pitchFamily="50" charset="-127"/>
-                        </a:rPr>
-                        <a:t> </a:t>
-                      </a:r>
-                      <a:r>
-                        <a:rPr lang="ko-KR" altLang="en-US" sz="1600" dirty="0">
-                          <a:latin typeface="맑은 고딕 Semilight" panose="020B0502040204020203" pitchFamily="50" charset="-127"/>
-                          <a:ea typeface="맑은 고딕 Semilight" panose="020B0502040204020203" pitchFamily="50" charset="-127"/>
-                          <a:cs typeface="맑은 고딕 Semilight" panose="020B0502040204020203" pitchFamily="50" charset="-127"/>
-                        </a:rPr>
-                        <a:t>역할</a:t>
-                      </a:r>
-                    </a:p>
-                  </a:txBody>
-                  <a:tcPr anchor="ctr">
-                    <a:solidFill>
-                      <a:srgbClr val="D7E3FF"/>
-                    </a:solidFill>
-                  </a:tcPr>
-                </a:tc>
-                <a:tc>
-                  <a:txBody>
-                    <a:bodyPr/>
-                    <a:lstStyle/>
-                    <a:p>
-                      <a:pPr>
-                        <a:buNone/>
-                      </a:pPr>
-                      <a:r>
-                        <a:rPr lang="ko-KR" altLang="en-US" sz="1600">
-                          <a:latin typeface="맑은 고딕 Semilight" panose="020B0502040204020203" pitchFamily="50" charset="-127"/>
-                          <a:ea typeface="맑은 고딕 Semilight" panose="020B0502040204020203" pitchFamily="50" charset="-127"/>
-                          <a:cs typeface="맑은 고딕 Semilight" panose="020B0502040204020203" pitchFamily="50" charset="-127"/>
-                        </a:rPr>
-                        <a:t>결과</a:t>
-                      </a:r>
-                    </a:p>
-                  </a:txBody>
-                  <a:tcPr anchor="ctr">
-                    <a:solidFill>
-                      <a:srgbClr val="D7E3FF"/>
-                    </a:solidFill>
-                  </a:tcPr>
-                </a:tc>
-                <a:extLst>
-                  <a:ext uri="{0D108BD9-81ED-4DB2-BD59-A6C34878D82A}">
-                    <a16:rowId xmlns:a16="http://schemas.microsoft.com/office/drawing/2014/main" val="3969735647"/>
-                  </a:ext>
-                </a:extLst>
-              </a:tr>
-              <a:tr h="883595">
-                <a:tc>
-                  <a:txBody>
-                    <a:bodyPr/>
-                    <a:lstStyle/>
-                    <a:p>
-                      <a:pPr>
-                        <a:buNone/>
-                      </a:pPr>
-                      <a:r>
-                        <a:rPr lang="en-US" altLang="ko-KR" sz="1600" dirty="0">
-                          <a:latin typeface="맑은 고딕 Semilight" panose="020B0502040204020203" pitchFamily="50" charset="-127"/>
-                          <a:ea typeface="맑은 고딕 Semilight" panose="020B0502040204020203" pitchFamily="50" charset="-127"/>
-                          <a:cs typeface="맑은 고딕 Semilight" panose="020B0502040204020203" pitchFamily="50" charset="-127"/>
-                        </a:rPr>
-                        <a:t>1. </a:t>
-                      </a:r>
-                      <a:r>
-                        <a:rPr lang="ko-KR" altLang="en-US" sz="1600" dirty="0">
-                          <a:latin typeface="맑은 고딕 Semilight" panose="020B0502040204020203" pitchFamily="50" charset="-127"/>
-                          <a:ea typeface="맑은 고딕 Semilight" panose="020B0502040204020203" pitchFamily="50" charset="-127"/>
-                          <a:cs typeface="맑은 고딕 Semilight" panose="020B0502040204020203" pitchFamily="50" charset="-127"/>
-                        </a:rPr>
-                        <a:t>데이터 분석 기반</a:t>
-                      </a:r>
-                    </a:p>
-                  </a:txBody>
-                  <a:tcPr anchor="ctr">
-                    <a:solidFill>
-                      <a:srgbClr val="D7E3FF"/>
-                    </a:solidFill>
-                  </a:tcPr>
-                </a:tc>
-                <a:tc>
-                  <a:txBody>
-                    <a:bodyPr/>
-                    <a:lstStyle/>
-                    <a:p>
-                      <a:pPr>
-                        <a:buNone/>
-                      </a:pPr>
-                      <a:r>
-                        <a:rPr lang="ko-KR" altLang="en-US" sz="1600" dirty="0">
-                          <a:latin typeface="맑은 고딕 Semilight" panose="020B0502040204020203" pitchFamily="50" charset="-127"/>
-                          <a:ea typeface="맑은 고딕 Semilight" panose="020B0502040204020203" pitchFamily="50" charset="-127"/>
-                          <a:cs typeface="맑은 고딕 Semilight" panose="020B0502040204020203" pitchFamily="50" charset="-127"/>
-                        </a:rPr>
-                        <a:t>분포 모름</a:t>
-                      </a:r>
-                      <a:r>
-                        <a:rPr lang="en-US" altLang="ko-KR" sz="1600" dirty="0">
-                          <a:latin typeface="맑은 고딕 Semilight" panose="020B0502040204020203" pitchFamily="50" charset="-127"/>
-                          <a:ea typeface="맑은 고딕 Semilight" panose="020B0502040204020203" pitchFamily="50" charset="-127"/>
-                          <a:cs typeface="맑은 고딕 Semilight" panose="020B0502040204020203" pitchFamily="50" charset="-127"/>
-                        </a:rPr>
-                        <a:t>, </a:t>
-                      </a:r>
-                      <a:r>
-                        <a:rPr lang="ko-KR" altLang="en-US" sz="1600" dirty="0">
-                          <a:latin typeface="맑은 고딕 Semilight" panose="020B0502040204020203" pitchFamily="50" charset="-127"/>
-                          <a:ea typeface="맑은 고딕 Semilight" panose="020B0502040204020203" pitchFamily="50" charset="-127"/>
-                          <a:cs typeface="맑은 고딕 Semilight" panose="020B0502040204020203" pitchFamily="50" charset="-127"/>
-                        </a:rPr>
-                        <a:t>이상치</a:t>
-                      </a:r>
-                      <a:r>
-                        <a:rPr lang="en-US" altLang="ko-KR" sz="1600" dirty="0">
-                          <a:latin typeface="맑은 고딕 Semilight" panose="020B0502040204020203" pitchFamily="50" charset="-127"/>
-                          <a:ea typeface="맑은 고딕 Semilight" panose="020B0502040204020203" pitchFamily="50" charset="-127"/>
-                          <a:cs typeface="맑은 고딕 Semilight" panose="020B0502040204020203" pitchFamily="50" charset="-127"/>
-                        </a:rPr>
-                        <a:t>, </a:t>
-                      </a:r>
-                      <a:r>
-                        <a:rPr lang="ko-KR" altLang="en-US" sz="1600" dirty="0">
-                          <a:latin typeface="맑은 고딕 Semilight" panose="020B0502040204020203" pitchFamily="50" charset="-127"/>
-                          <a:ea typeface="맑은 고딕 Semilight" panose="020B0502040204020203" pitchFamily="50" charset="-127"/>
-                          <a:cs typeface="맑은 고딕 Semilight" panose="020B0502040204020203" pitchFamily="50" charset="-127"/>
-                        </a:rPr>
-                        <a:t>비정규성</a:t>
-                      </a:r>
-                    </a:p>
-                  </a:txBody>
-                  <a:tcPr anchor="ctr">
-                    <a:solidFill>
-                      <a:srgbClr val="D7E3FF"/>
-                    </a:solidFill>
-                  </a:tcPr>
-                </a:tc>
-                <a:tc>
-                  <a:txBody>
-                    <a:bodyPr/>
-                    <a:lstStyle/>
-                    <a:p>
-                      <a:pPr>
-                        <a:buNone/>
-                      </a:pPr>
-                      <a:r>
-                        <a:rPr lang="ko-KR" altLang="en-US" sz="1600">
-                          <a:latin typeface="맑은 고딕 Semilight" panose="020B0502040204020203" pitchFamily="50" charset="-127"/>
-                          <a:ea typeface="맑은 고딕 Semilight" panose="020B0502040204020203" pitchFamily="50" charset="-127"/>
-                          <a:cs typeface="맑은 고딕 Semilight" panose="020B0502040204020203" pitchFamily="50" charset="-127"/>
-                        </a:rPr>
-                        <a:t>평균 → 정규분포 근사</a:t>
-                      </a:r>
-                    </a:p>
-                  </a:txBody>
-                  <a:tcPr anchor="ctr">
-                    <a:solidFill>
-                      <a:srgbClr val="D7E3FF"/>
-                    </a:solidFill>
-                  </a:tcPr>
-                </a:tc>
-                <a:tc>
-                  <a:txBody>
-                    <a:bodyPr/>
-                    <a:lstStyle/>
-                    <a:p>
-                      <a:pPr>
-                        <a:buNone/>
-                      </a:pPr>
-                      <a:r>
-                        <a:rPr lang="ko-KR" altLang="en-US" sz="1600" dirty="0">
-                          <a:latin typeface="맑은 고딕 Semilight" panose="020B0502040204020203" pitchFamily="50" charset="-127"/>
-                          <a:ea typeface="맑은 고딕 Semilight" panose="020B0502040204020203" pitchFamily="50" charset="-127"/>
-                          <a:cs typeface="맑은 고딕 Semilight" panose="020B0502040204020203" pitchFamily="50" charset="-127"/>
-                        </a:rPr>
-                        <a:t>통계적 추론 가능 </a:t>
-                      </a:r>
-                      <a:endParaRPr lang="en-US" altLang="ko-KR" sz="1600" dirty="0">
-                        <a:latin typeface="맑은 고딕 Semilight" panose="020B0502040204020203" pitchFamily="50" charset="-127"/>
-                        <a:ea typeface="맑은 고딕 Semilight" panose="020B0502040204020203" pitchFamily="50" charset="-127"/>
-                        <a:cs typeface="맑은 고딕 Semilight" panose="020B0502040204020203" pitchFamily="50" charset="-127"/>
-                      </a:endParaRPr>
-                    </a:p>
-                    <a:p>
-                      <a:pPr>
-                        <a:buNone/>
-                      </a:pPr>
-                      <a:r>
-                        <a:rPr lang="en-US" altLang="ko-KR" sz="1600" dirty="0">
-                          <a:latin typeface="맑은 고딕 Semilight" panose="020B0502040204020203" pitchFamily="50" charset="-127"/>
-                          <a:ea typeface="맑은 고딕 Semilight" panose="020B0502040204020203" pitchFamily="50" charset="-127"/>
-                          <a:cs typeface="맑은 고딕 Semilight" panose="020B0502040204020203" pitchFamily="50" charset="-127"/>
-                        </a:rPr>
-                        <a:t>(</a:t>
-                      </a:r>
-                      <a:r>
-                        <a:rPr lang="ko-KR" altLang="en-US" sz="1600" dirty="0">
-                          <a:latin typeface="맑은 고딕 Semilight" panose="020B0502040204020203" pitchFamily="50" charset="-127"/>
-                          <a:ea typeface="맑은 고딕 Semilight" panose="020B0502040204020203" pitchFamily="50" charset="-127"/>
-                          <a:cs typeface="맑은 고딕 Semilight" panose="020B0502040204020203" pitchFamily="50" charset="-127"/>
-                        </a:rPr>
-                        <a:t>확률</a:t>
-                      </a:r>
-                      <a:r>
-                        <a:rPr lang="en-US" altLang="ko-KR" sz="1600" dirty="0">
-                          <a:latin typeface="맑은 고딕 Semilight" panose="020B0502040204020203" pitchFamily="50" charset="-127"/>
-                          <a:ea typeface="맑은 고딕 Semilight" panose="020B0502040204020203" pitchFamily="50" charset="-127"/>
-                          <a:cs typeface="맑은 고딕 Semilight" panose="020B0502040204020203" pitchFamily="50" charset="-127"/>
-                        </a:rPr>
-                        <a:t>, </a:t>
-                      </a:r>
-                      <a:r>
-                        <a:rPr lang="ko-KR" altLang="en-US" sz="1600" dirty="0">
-                          <a:latin typeface="맑은 고딕 Semilight" panose="020B0502040204020203" pitchFamily="50" charset="-127"/>
-                          <a:ea typeface="맑은 고딕 Semilight" panose="020B0502040204020203" pitchFamily="50" charset="-127"/>
-                          <a:cs typeface="맑은 고딕 Semilight" panose="020B0502040204020203" pitchFamily="50" charset="-127"/>
-                        </a:rPr>
-                        <a:t>신뢰구간</a:t>
-                      </a:r>
-                      <a:r>
-                        <a:rPr lang="en-US" altLang="ko-KR" sz="1600" dirty="0">
-                          <a:latin typeface="맑은 고딕 Semilight" panose="020B0502040204020203" pitchFamily="50" charset="-127"/>
-                          <a:ea typeface="맑은 고딕 Semilight" panose="020B0502040204020203" pitchFamily="50" charset="-127"/>
-                          <a:cs typeface="맑은 고딕 Semilight" panose="020B0502040204020203" pitchFamily="50" charset="-127"/>
-                        </a:rPr>
-                        <a:t>, </a:t>
-                      </a:r>
-                      <a:r>
-                        <a:rPr lang="ko-KR" altLang="en-US" sz="1600" dirty="0">
-                          <a:latin typeface="맑은 고딕 Semilight" panose="020B0502040204020203" pitchFamily="50" charset="-127"/>
-                          <a:ea typeface="맑은 고딕 Semilight" panose="020B0502040204020203" pitchFamily="50" charset="-127"/>
-                          <a:cs typeface="맑은 고딕 Semilight" panose="020B0502040204020203" pitchFamily="50" charset="-127"/>
-                        </a:rPr>
-                        <a:t>검정</a:t>
-                      </a:r>
-                      <a:r>
-                        <a:rPr lang="en-US" altLang="ko-KR" sz="1600" dirty="0">
-                          <a:latin typeface="맑은 고딕 Semilight" panose="020B0502040204020203" pitchFamily="50" charset="-127"/>
-                          <a:ea typeface="맑은 고딕 Semilight" panose="020B0502040204020203" pitchFamily="50" charset="-127"/>
-                          <a:cs typeface="맑은 고딕 Semilight" panose="020B0502040204020203" pitchFamily="50" charset="-127"/>
-                        </a:rPr>
-                        <a:t>)</a:t>
-                      </a:r>
-                    </a:p>
-                  </a:txBody>
-                  <a:tcPr anchor="ctr">
-                    <a:solidFill>
-                      <a:srgbClr val="D7E3FF"/>
-                    </a:solidFill>
-                  </a:tcPr>
-                </a:tc>
-                <a:extLst>
-                  <a:ext uri="{0D108BD9-81ED-4DB2-BD59-A6C34878D82A}">
-                    <a16:rowId xmlns:a16="http://schemas.microsoft.com/office/drawing/2014/main" val="3022940290"/>
-                  </a:ext>
-                </a:extLst>
-              </a:tr>
-              <a:tr h="883595">
-                <a:tc>
-                  <a:txBody>
-                    <a:bodyPr/>
-                    <a:lstStyle/>
-                    <a:p>
-                      <a:pPr>
-                        <a:buNone/>
-                      </a:pPr>
-                      <a:r>
-                        <a:rPr lang="en-US" altLang="ko-KR" sz="1600">
-                          <a:latin typeface="맑은 고딕 Semilight" panose="020B0502040204020203" pitchFamily="50" charset="-127"/>
-                          <a:ea typeface="맑은 고딕 Semilight" panose="020B0502040204020203" pitchFamily="50" charset="-127"/>
-                          <a:cs typeface="맑은 고딕 Semilight" panose="020B0502040204020203" pitchFamily="50" charset="-127"/>
-                        </a:rPr>
-                        <a:t>2. </a:t>
-                      </a:r>
-                      <a:r>
-                        <a:rPr lang="ko-KR" altLang="en-US" sz="1600">
-                          <a:latin typeface="맑은 고딕 Semilight" panose="020B0502040204020203" pitchFamily="50" charset="-127"/>
-                          <a:ea typeface="맑은 고딕 Semilight" panose="020B0502040204020203" pitchFamily="50" charset="-127"/>
-                          <a:cs typeface="맑은 고딕 Semilight" panose="020B0502040204020203" pitchFamily="50" charset="-127"/>
-                        </a:rPr>
-                        <a:t>모델 학습 안정성</a:t>
-                      </a:r>
-                    </a:p>
-                  </a:txBody>
-                  <a:tcPr anchor="ctr">
-                    <a:solidFill>
-                      <a:srgbClr val="D7E3FF"/>
-                    </a:solidFill>
-                  </a:tcPr>
-                </a:tc>
-                <a:tc>
-                  <a:txBody>
-                    <a:bodyPr/>
-                    <a:lstStyle/>
-                    <a:p>
-                      <a:pPr>
-                        <a:buNone/>
-                      </a:pPr>
-                      <a:r>
-                        <a:rPr lang="ko-KR" altLang="en-US" sz="1600">
-                          <a:latin typeface="맑은 고딕 Semilight" panose="020B0502040204020203" pitchFamily="50" charset="-127"/>
-                          <a:ea typeface="맑은 고딕 Semilight" panose="020B0502040204020203" pitchFamily="50" charset="-127"/>
-                          <a:cs typeface="맑은 고딕 Semilight" panose="020B0502040204020203" pitchFamily="50" charset="-127"/>
-                        </a:rPr>
-                        <a:t>손실값이 데이터마다 변동</a:t>
-                      </a:r>
-                    </a:p>
-                  </a:txBody>
-                  <a:tcPr anchor="ctr">
-                    <a:solidFill>
-                      <a:srgbClr val="D7E3FF"/>
-                    </a:solidFill>
-                  </a:tcPr>
-                </a:tc>
-                <a:tc>
-                  <a:txBody>
-                    <a:bodyPr/>
-                    <a:lstStyle/>
-                    <a:p>
-                      <a:pPr>
-                        <a:buNone/>
-                      </a:pPr>
-                      <a:r>
-                        <a:rPr lang="ko-KR" altLang="en-US" sz="1600">
-                          <a:latin typeface="맑은 고딕 Semilight" panose="020B0502040204020203" pitchFamily="50" charset="-127"/>
-                          <a:ea typeface="맑은 고딕 Semilight" panose="020B0502040204020203" pitchFamily="50" charset="-127"/>
-                          <a:cs typeface="맑은 고딕 Semilight" panose="020B0502040204020203" pitchFamily="50" charset="-127"/>
-                        </a:rPr>
-                        <a:t>평균 손실이 안정적으로 수렴</a:t>
-                      </a:r>
-                    </a:p>
-                  </a:txBody>
-                  <a:tcPr anchor="ctr">
-                    <a:solidFill>
-                      <a:srgbClr val="D7E3FF"/>
-                    </a:solidFill>
-                  </a:tcPr>
-                </a:tc>
-                <a:tc>
-                  <a:txBody>
-                    <a:bodyPr/>
-                    <a:lstStyle/>
-                    <a:p>
-                      <a:pPr>
-                        <a:buNone/>
-                      </a:pPr>
-                      <a:r>
-                        <a:rPr lang="ko-KR" altLang="en-US" sz="1600" dirty="0">
-                          <a:latin typeface="맑은 고딕 Semilight" panose="020B0502040204020203" pitchFamily="50" charset="-127"/>
-                          <a:ea typeface="맑은 고딕 Semilight" panose="020B0502040204020203" pitchFamily="50" charset="-127"/>
-                          <a:cs typeface="맑은 고딕 Semilight" panose="020B0502040204020203" pitchFamily="50" charset="-127"/>
-                        </a:rPr>
-                        <a:t>학습 안정화</a:t>
-                      </a:r>
-                      <a:r>
-                        <a:rPr lang="en-US" altLang="ko-KR" sz="1600" dirty="0">
-                          <a:latin typeface="맑은 고딕 Semilight" panose="020B0502040204020203" pitchFamily="50" charset="-127"/>
-                          <a:ea typeface="맑은 고딕 Semilight" panose="020B0502040204020203" pitchFamily="50" charset="-127"/>
-                          <a:cs typeface="맑은 고딕 Semilight" panose="020B0502040204020203" pitchFamily="50" charset="-127"/>
-                        </a:rPr>
-                        <a:t>, </a:t>
-                      </a:r>
-                    </a:p>
-                    <a:p>
-                      <a:pPr>
-                        <a:buNone/>
-                      </a:pPr>
-                      <a:r>
-                        <a:rPr lang="en-US" sz="1600" dirty="0">
-                          <a:latin typeface="맑은 고딕 Semilight" panose="020B0502040204020203" pitchFamily="50" charset="-127"/>
-                          <a:ea typeface="맑은 고딕 Semilight" panose="020B0502040204020203" pitchFamily="50" charset="-127"/>
-                          <a:cs typeface="맑은 고딕 Semilight" panose="020B0502040204020203" pitchFamily="50" charset="-127"/>
-                        </a:rPr>
-                        <a:t>gradient descent </a:t>
-                      </a:r>
-                      <a:r>
-                        <a:rPr lang="ko-KR" altLang="en-US" sz="1600" dirty="0">
-                          <a:latin typeface="맑은 고딕 Semilight" panose="020B0502040204020203" pitchFamily="50" charset="-127"/>
-                          <a:ea typeface="맑은 고딕 Semilight" panose="020B0502040204020203" pitchFamily="50" charset="-127"/>
-                          <a:cs typeface="맑은 고딕 Semilight" panose="020B0502040204020203" pitchFamily="50" charset="-127"/>
-                        </a:rPr>
-                        <a:t>수렴</a:t>
-                      </a:r>
-                    </a:p>
-                  </a:txBody>
-                  <a:tcPr anchor="ctr">
-                    <a:solidFill>
-                      <a:srgbClr val="D7E3FF"/>
-                    </a:solidFill>
-                  </a:tcPr>
-                </a:tc>
-                <a:extLst>
-                  <a:ext uri="{0D108BD9-81ED-4DB2-BD59-A6C34878D82A}">
-                    <a16:rowId xmlns:a16="http://schemas.microsoft.com/office/drawing/2014/main" val="836168464"/>
-                  </a:ext>
-                </a:extLst>
-              </a:tr>
-              <a:tr h="511555">
-                <a:tc>
-                  <a:txBody>
-                    <a:bodyPr/>
-                    <a:lstStyle/>
-                    <a:p>
-                      <a:pPr>
-                        <a:buNone/>
-                      </a:pPr>
-                      <a:r>
-                        <a:rPr lang="en-US" sz="1600">
-                          <a:latin typeface="맑은 고딕 Semilight" panose="020B0502040204020203" pitchFamily="50" charset="-127"/>
-                          <a:ea typeface="맑은 고딕 Semilight" panose="020B0502040204020203" pitchFamily="50" charset="-127"/>
-                          <a:cs typeface="맑은 고딕 Semilight" panose="020B0502040204020203" pitchFamily="50" charset="-127"/>
-                        </a:rPr>
-                        <a:t>3. Mini-batch </a:t>
-                      </a:r>
-                      <a:r>
-                        <a:rPr lang="ko-KR" altLang="en-US" sz="1600">
-                          <a:latin typeface="맑은 고딕 Semilight" panose="020B0502040204020203" pitchFamily="50" charset="-127"/>
-                          <a:ea typeface="맑은 고딕 Semilight" panose="020B0502040204020203" pitchFamily="50" charset="-127"/>
-                          <a:cs typeface="맑은 고딕 Semilight" panose="020B0502040204020203" pitchFamily="50" charset="-127"/>
-                        </a:rPr>
-                        <a:t>학습</a:t>
-                      </a:r>
-                    </a:p>
-                  </a:txBody>
-                  <a:tcPr anchor="ctr">
-                    <a:solidFill>
-                      <a:srgbClr val="D7E3FF"/>
-                    </a:solidFill>
-                  </a:tcPr>
-                </a:tc>
-                <a:tc>
-                  <a:txBody>
-                    <a:bodyPr/>
-                    <a:lstStyle/>
-                    <a:p>
-                      <a:pPr>
-                        <a:buNone/>
-                      </a:pPr>
-                      <a:r>
-                        <a:rPr lang="ko-KR" altLang="en-US" sz="1600">
-                          <a:latin typeface="맑은 고딕 Semilight" panose="020B0502040204020203" pitchFamily="50" charset="-127"/>
-                          <a:ea typeface="맑은 고딕 Semilight" panose="020B0502040204020203" pitchFamily="50" charset="-127"/>
-                          <a:cs typeface="맑은 고딕 Semilight" panose="020B0502040204020203" pitchFamily="50" charset="-127"/>
-                        </a:rPr>
-                        <a:t>전체 데이터 사용 어려움</a:t>
-                      </a:r>
-                    </a:p>
-                  </a:txBody>
-                  <a:tcPr anchor="ctr">
-                    <a:solidFill>
-                      <a:srgbClr val="D7E3FF"/>
-                    </a:solidFill>
-                  </a:tcPr>
-                </a:tc>
-                <a:tc>
-                  <a:txBody>
-                    <a:bodyPr/>
-                    <a:lstStyle/>
-                    <a:p>
-                      <a:pPr>
-                        <a:buNone/>
-                      </a:pPr>
-                      <a:r>
-                        <a:rPr lang="ko-KR" altLang="en-US" sz="1600">
-                          <a:latin typeface="맑은 고딕 Semilight" panose="020B0502040204020203" pitchFamily="50" charset="-127"/>
-                          <a:ea typeface="맑은 고딕 Semilight" panose="020B0502040204020203" pitchFamily="50" charset="-127"/>
-                          <a:cs typeface="맑은 고딕 Semilight" panose="020B0502040204020203" pitchFamily="50" charset="-127"/>
-                        </a:rPr>
-                        <a:t>작은 샘플 평균이 전체 근사</a:t>
-                      </a:r>
-                    </a:p>
-                  </a:txBody>
-                  <a:tcPr anchor="ctr">
-                    <a:solidFill>
-                      <a:srgbClr val="D7E3FF"/>
-                    </a:solidFill>
-                  </a:tcPr>
-                </a:tc>
-                <a:tc>
-                  <a:txBody>
-                    <a:bodyPr/>
-                    <a:lstStyle/>
-                    <a:p>
-                      <a:pPr>
-                        <a:buNone/>
-                      </a:pPr>
-                      <a:r>
-                        <a:rPr lang="ko-KR" altLang="en-US" sz="1600" dirty="0">
-                          <a:latin typeface="맑은 고딕 Semilight" panose="020B0502040204020203" pitchFamily="50" charset="-127"/>
-                          <a:ea typeface="맑은 고딕 Semilight" panose="020B0502040204020203" pitchFamily="50" charset="-127"/>
-                          <a:cs typeface="맑은 고딕 Semilight" panose="020B0502040204020203" pitchFamily="50" charset="-127"/>
-                        </a:rPr>
-                        <a:t>계산 효율</a:t>
-                      </a:r>
-                      <a:r>
-                        <a:rPr lang="en-US" altLang="ko-KR" sz="1600" dirty="0">
-                          <a:latin typeface="맑은 고딕 Semilight" panose="020B0502040204020203" pitchFamily="50" charset="-127"/>
-                          <a:ea typeface="맑은 고딕 Semilight" panose="020B0502040204020203" pitchFamily="50" charset="-127"/>
-                          <a:cs typeface="맑은 고딕 Semilight" panose="020B0502040204020203" pitchFamily="50" charset="-127"/>
-                        </a:rPr>
-                        <a:t>, GPU </a:t>
-                      </a:r>
-                      <a:r>
-                        <a:rPr lang="ko-KR" altLang="en-US" sz="1600" dirty="0">
-                          <a:latin typeface="맑은 고딕 Semilight" panose="020B0502040204020203" pitchFamily="50" charset="-127"/>
-                          <a:ea typeface="맑은 고딕 Semilight" panose="020B0502040204020203" pitchFamily="50" charset="-127"/>
-                          <a:cs typeface="맑은 고딕 Semilight" panose="020B0502040204020203" pitchFamily="50" charset="-127"/>
-                        </a:rPr>
-                        <a:t>활용</a:t>
-                      </a:r>
-                      <a:endParaRPr lang="en-US" altLang="ko-KR" sz="1600" dirty="0">
-                        <a:latin typeface="맑은 고딕 Semilight" panose="020B0502040204020203" pitchFamily="50" charset="-127"/>
-                        <a:ea typeface="맑은 고딕 Semilight" panose="020B0502040204020203" pitchFamily="50" charset="-127"/>
-                        <a:cs typeface="맑은 고딕 Semilight" panose="020B0502040204020203" pitchFamily="50" charset="-127"/>
-                      </a:endParaRPr>
-                    </a:p>
-                  </a:txBody>
-                  <a:tcPr anchor="ctr">
-                    <a:solidFill>
-                      <a:srgbClr val="D7E3FF"/>
-                    </a:solidFill>
-                  </a:tcPr>
-                </a:tc>
-                <a:extLst>
-                  <a:ext uri="{0D108BD9-81ED-4DB2-BD59-A6C34878D82A}">
-                    <a16:rowId xmlns:a16="http://schemas.microsoft.com/office/drawing/2014/main" val="1758356760"/>
-                  </a:ext>
-                </a:extLst>
-              </a:tr>
-              <a:tr h="511555">
-                <a:tc>
-                  <a:txBody>
-                    <a:bodyPr/>
-                    <a:lstStyle/>
-                    <a:p>
-                      <a:pPr>
-                        <a:buNone/>
-                      </a:pPr>
-                      <a:r>
-                        <a:rPr lang="en-US" altLang="ko-KR" sz="1600">
-                          <a:latin typeface="맑은 고딕 Semilight" panose="020B0502040204020203" pitchFamily="50" charset="-127"/>
-                          <a:ea typeface="맑은 고딕 Semilight" panose="020B0502040204020203" pitchFamily="50" charset="-127"/>
-                          <a:cs typeface="맑은 고딕 Semilight" panose="020B0502040204020203" pitchFamily="50" charset="-127"/>
-                        </a:rPr>
-                        <a:t>4. </a:t>
-                      </a:r>
-                      <a:r>
-                        <a:rPr lang="ko-KR" altLang="en-US" sz="1600">
-                          <a:latin typeface="맑은 고딕 Semilight" panose="020B0502040204020203" pitchFamily="50" charset="-127"/>
-                          <a:ea typeface="맑은 고딕 Semilight" panose="020B0502040204020203" pitchFamily="50" charset="-127"/>
-                          <a:cs typeface="맑은 고딕 Semilight" panose="020B0502040204020203" pitchFamily="50" charset="-127"/>
-                        </a:rPr>
-                        <a:t>모델 평가</a:t>
-                      </a:r>
-                    </a:p>
-                  </a:txBody>
-                  <a:tcPr anchor="ctr">
-                    <a:solidFill>
-                      <a:srgbClr val="D7E3FF"/>
-                    </a:solidFill>
-                  </a:tcPr>
-                </a:tc>
-                <a:tc>
-                  <a:txBody>
-                    <a:bodyPr/>
-                    <a:lstStyle/>
-                    <a:p>
-                      <a:pPr>
-                        <a:buNone/>
-                      </a:pPr>
-                      <a:r>
-                        <a:rPr lang="ko-KR" altLang="en-US" sz="1600">
-                          <a:latin typeface="맑은 고딕 Semilight" panose="020B0502040204020203" pitchFamily="50" charset="-127"/>
-                          <a:ea typeface="맑은 고딕 Semilight" panose="020B0502040204020203" pitchFamily="50" charset="-127"/>
-                          <a:cs typeface="맑은 고딕 Semilight" panose="020B0502040204020203" pitchFamily="50" charset="-127"/>
-                        </a:rPr>
-                        <a:t>성능 비교 불확실</a:t>
-                      </a:r>
-                    </a:p>
-                  </a:txBody>
-                  <a:tcPr anchor="ctr">
-                    <a:solidFill>
-                      <a:srgbClr val="D7E3FF"/>
-                    </a:solidFill>
-                  </a:tcPr>
-                </a:tc>
-                <a:tc>
-                  <a:txBody>
-                    <a:bodyPr/>
-                    <a:lstStyle/>
-                    <a:p>
-                      <a:pPr>
-                        <a:buNone/>
-                      </a:pPr>
-                      <a:r>
-                        <a:rPr lang="ko-KR" altLang="en-US" sz="1600">
-                          <a:latin typeface="맑은 고딕 Semilight" panose="020B0502040204020203" pitchFamily="50" charset="-127"/>
-                          <a:ea typeface="맑은 고딕 Semilight" panose="020B0502040204020203" pitchFamily="50" charset="-127"/>
-                          <a:cs typeface="맑은 고딕 Semilight" panose="020B0502040204020203" pitchFamily="50" charset="-127"/>
-                        </a:rPr>
-                        <a:t>평균 성능이 정규분포 따름</a:t>
-                      </a:r>
-                    </a:p>
-                  </a:txBody>
-                  <a:tcPr anchor="ctr">
-                    <a:solidFill>
-                      <a:srgbClr val="D7E3FF"/>
-                    </a:solidFill>
-                  </a:tcPr>
-                </a:tc>
-                <a:tc>
-                  <a:txBody>
-                    <a:bodyPr/>
-                    <a:lstStyle/>
-                    <a:p>
-                      <a:pPr>
-                        <a:buNone/>
-                      </a:pPr>
-                      <a:r>
-                        <a:rPr lang="ko-KR" altLang="en-US" sz="1600">
-                          <a:latin typeface="맑은 고딕 Semilight" panose="020B0502040204020203" pitchFamily="50" charset="-127"/>
-                          <a:ea typeface="맑은 고딕 Semilight" panose="020B0502040204020203" pitchFamily="50" charset="-127"/>
-                          <a:cs typeface="맑은 고딕 Semilight" panose="020B0502040204020203" pitchFamily="50" charset="-127"/>
-                        </a:rPr>
-                        <a:t>신뢰구간</a:t>
-                      </a:r>
-                      <a:r>
-                        <a:rPr lang="en-US" altLang="ko-KR" sz="1600">
-                          <a:latin typeface="맑은 고딕 Semilight" panose="020B0502040204020203" pitchFamily="50" charset="-127"/>
-                          <a:ea typeface="맑은 고딕 Semilight" panose="020B0502040204020203" pitchFamily="50" charset="-127"/>
-                          <a:cs typeface="맑은 고딕 Semilight" panose="020B0502040204020203" pitchFamily="50" charset="-127"/>
-                        </a:rPr>
-                        <a:t>, </a:t>
-                      </a:r>
-                      <a:r>
-                        <a:rPr lang="ko-KR" altLang="en-US" sz="1600">
-                          <a:latin typeface="맑은 고딕 Semilight" panose="020B0502040204020203" pitchFamily="50" charset="-127"/>
-                          <a:ea typeface="맑은 고딕 Semilight" panose="020B0502040204020203" pitchFamily="50" charset="-127"/>
-                          <a:cs typeface="맑은 고딕 Semilight" panose="020B0502040204020203" pitchFamily="50" charset="-127"/>
-                        </a:rPr>
-                        <a:t>통계적 비교 가능</a:t>
-                      </a:r>
-                    </a:p>
-                  </a:txBody>
-                  <a:tcPr anchor="ctr">
-                    <a:solidFill>
-                      <a:srgbClr val="D7E3FF"/>
-                    </a:solidFill>
-                  </a:tcPr>
-                </a:tc>
-                <a:extLst>
-                  <a:ext uri="{0D108BD9-81ED-4DB2-BD59-A6C34878D82A}">
-                    <a16:rowId xmlns:a16="http://schemas.microsoft.com/office/drawing/2014/main" val="721531158"/>
-                  </a:ext>
-                </a:extLst>
-              </a:tr>
-              <a:tr h="511555">
-                <a:tc>
-                  <a:txBody>
-                    <a:bodyPr/>
-                    <a:lstStyle/>
-                    <a:p>
-                      <a:pPr>
-                        <a:buNone/>
-                      </a:pPr>
-                      <a:r>
-                        <a:rPr lang="en-US" sz="1600">
-                          <a:latin typeface="맑은 고딕 Semilight" panose="020B0502040204020203" pitchFamily="50" charset="-127"/>
-                          <a:ea typeface="맑은 고딕 Semilight" panose="020B0502040204020203" pitchFamily="50" charset="-127"/>
-                          <a:cs typeface="맑은 고딕 Semilight" panose="020B0502040204020203" pitchFamily="50" charset="-127"/>
-                        </a:rPr>
-                        <a:t>5. A/B </a:t>
-                      </a:r>
-                      <a:r>
-                        <a:rPr lang="ko-KR" altLang="en-US" sz="1600">
-                          <a:latin typeface="맑은 고딕 Semilight" panose="020B0502040204020203" pitchFamily="50" charset="-127"/>
-                          <a:ea typeface="맑은 고딕 Semilight" panose="020B0502040204020203" pitchFamily="50" charset="-127"/>
-                          <a:cs typeface="맑은 고딕 Semilight" panose="020B0502040204020203" pitchFamily="50" charset="-127"/>
-                        </a:rPr>
-                        <a:t>테스트</a:t>
-                      </a:r>
-                    </a:p>
-                  </a:txBody>
-                  <a:tcPr anchor="ctr">
-                    <a:solidFill>
-                      <a:srgbClr val="D7E3FF"/>
-                    </a:solidFill>
-                  </a:tcPr>
-                </a:tc>
-                <a:tc>
-                  <a:txBody>
-                    <a:bodyPr/>
-                    <a:lstStyle/>
-                    <a:p>
-                      <a:pPr>
-                        <a:buNone/>
-                      </a:pPr>
-                      <a:r>
-                        <a:rPr lang="ko-KR" altLang="en-US" sz="1600" dirty="0">
-                          <a:latin typeface="맑은 고딕 Semilight" panose="020B0502040204020203" pitchFamily="50" charset="-127"/>
-                          <a:ea typeface="맑은 고딕 Semilight" panose="020B0502040204020203" pitchFamily="50" charset="-127"/>
-                          <a:cs typeface="맑은 고딕 Semilight" panose="020B0502040204020203" pitchFamily="50" charset="-127"/>
-                        </a:rPr>
-                        <a:t>효과 차이 판단 필요</a:t>
-                      </a:r>
-                    </a:p>
-                  </a:txBody>
-                  <a:tcPr anchor="ctr">
-                    <a:solidFill>
-                      <a:srgbClr val="D7E3FF"/>
-                    </a:solidFill>
-                  </a:tcPr>
-                </a:tc>
-                <a:tc>
-                  <a:txBody>
-                    <a:bodyPr/>
-                    <a:lstStyle/>
-                    <a:p>
-                      <a:pPr>
-                        <a:buNone/>
-                      </a:pPr>
-                      <a:r>
-                        <a:rPr lang="ko-KR" altLang="en-US" sz="1600">
-                          <a:latin typeface="맑은 고딕 Semilight" panose="020B0502040204020203" pitchFamily="50" charset="-127"/>
-                          <a:ea typeface="맑은 고딕 Semilight" panose="020B0502040204020203" pitchFamily="50" charset="-127"/>
-                          <a:cs typeface="맑은 고딕 Semilight" panose="020B0502040204020203" pitchFamily="50" charset="-127"/>
-                        </a:rPr>
-                        <a:t>평균 차이 → 정규분포 근사</a:t>
-                      </a:r>
-                    </a:p>
-                  </a:txBody>
-                  <a:tcPr anchor="ctr">
-                    <a:solidFill>
-                      <a:srgbClr val="D7E3FF"/>
-                    </a:solidFill>
-                  </a:tcPr>
-                </a:tc>
-                <a:tc>
-                  <a:txBody>
-                    <a:bodyPr/>
-                    <a:lstStyle/>
-                    <a:p>
-                      <a:pPr>
-                        <a:buNone/>
-                      </a:pPr>
-                      <a:r>
-                        <a:rPr lang="en-US" altLang="ko-KR" sz="1600" dirty="0">
-                          <a:latin typeface="맑은 고딕 Semilight" panose="020B0502040204020203" pitchFamily="50" charset="-127"/>
-                          <a:ea typeface="맑은 고딕 Semilight" panose="020B0502040204020203" pitchFamily="50" charset="-127"/>
-                          <a:cs typeface="맑은 고딕 Semilight" panose="020B0502040204020203" pitchFamily="50" charset="-127"/>
-                        </a:rPr>
-                        <a:t>p-value </a:t>
-                      </a:r>
-                      <a:r>
-                        <a:rPr lang="ko-KR" altLang="en-US" sz="1600" dirty="0">
-                          <a:latin typeface="맑은 고딕 Semilight" panose="020B0502040204020203" pitchFamily="50" charset="-127"/>
-                          <a:ea typeface="맑은 고딕 Semilight" panose="020B0502040204020203" pitchFamily="50" charset="-127"/>
-                          <a:cs typeface="맑은 고딕 Semilight" panose="020B0502040204020203" pitchFamily="50" charset="-127"/>
-                        </a:rPr>
-                        <a:t>기반 의사결정</a:t>
-                      </a:r>
-                    </a:p>
-                  </a:txBody>
-                  <a:tcPr anchor="ctr">
-                    <a:solidFill>
-                      <a:srgbClr val="D7E3FF"/>
-                    </a:solidFill>
-                  </a:tcPr>
-                </a:tc>
-                <a:extLst>
-                  <a:ext uri="{0D108BD9-81ED-4DB2-BD59-A6C34878D82A}">
-                    <a16:rowId xmlns:a16="http://schemas.microsoft.com/office/drawing/2014/main" val="1788444641"/>
-                  </a:ext>
-                </a:extLst>
-              </a:tr>
-            </a:tbl>
-          </a:graphicData>
-        </a:graphic>
-      </p:graphicFrame>
-      <p:sp>
-        <p:nvSpPr>
-          <p:cNvPr id="4" name="TextBox 3">
-            <a:extLst>
-              <a:ext uri="{FF2B5EF4-FFF2-40B4-BE49-F238E27FC236}">
-                <a16:creationId xmlns:a16="http://schemas.microsoft.com/office/drawing/2014/main" id="{CFF78879-44CC-B0CF-4CFD-7481327951DB}"/>
-              </a:ext>
-            </a:extLst>
-          </p:cNvPr>
-          <p:cNvSpPr txBox="1"/>
-          <p:nvPr/>
-        </p:nvSpPr>
-        <p:spPr>
-          <a:xfrm>
-            <a:off x="119336" y="260649"/>
-            <a:ext cx="3650024" cy="584775"/>
-          </a:xfrm>
-          <a:prstGeom prst="rect">
-            <a:avLst/>
-          </a:prstGeom>
-          <a:noFill/>
-        </p:spPr>
-        <p:txBody>
-          <a:bodyPr wrap="square" rtlCol="0">
-            <a:spAutoFit/>
-          </a:bodyPr>
-          <a:lstStyle/>
-          <a:p>
-            <a:r>
-              <a:rPr lang="ko-KR" altLang="en-US" sz="3200" b="1" dirty="0">
-                <a:latin typeface="맑은 고딕 Semilight" panose="020B0502040204020203" pitchFamily="50" charset="-127"/>
-                <a:ea typeface="맑은 고딕 Semilight" panose="020B0502040204020203" pitchFamily="50" charset="-127"/>
-                <a:cs typeface="맑은 고딕 Semilight" panose="020B0502040204020203" pitchFamily="50" charset="-127"/>
-              </a:rPr>
-              <a:t>문제 풀이</a:t>
-            </a:r>
-            <a:r>
-              <a:rPr lang="en-US" altLang="ko-KR" sz="3200" b="1" dirty="0">
-                <a:latin typeface="맑은 고딕 Semilight" panose="020B0502040204020203" pitchFamily="50" charset="-127"/>
-                <a:ea typeface="맑은 고딕 Semilight" panose="020B0502040204020203" pitchFamily="50" charset="-127"/>
-                <a:cs typeface="맑은 고딕 Semilight" panose="020B0502040204020203" pitchFamily="50" charset="-127"/>
-              </a:rPr>
-              <a:t>(</a:t>
-            </a:r>
-            <a:r>
-              <a:rPr lang="ko-KR" altLang="en-US" sz="3200" b="1" dirty="0">
-                <a:latin typeface="맑은 고딕 Semilight" panose="020B0502040204020203" pitchFamily="50" charset="-127"/>
-                <a:ea typeface="맑은 고딕 Semilight" panose="020B0502040204020203" pitchFamily="50" charset="-127"/>
-                <a:cs typeface="맑은 고딕 Semilight" panose="020B0502040204020203" pitchFamily="50" charset="-127"/>
-              </a:rPr>
-              <a:t>고급</a:t>
-            </a:r>
-            <a:r>
-              <a:rPr lang="en-US" altLang="ko-KR" sz="3200" b="1" dirty="0">
-                <a:latin typeface="맑은 고딕 Semilight" panose="020B0502040204020203" pitchFamily="50" charset="-127"/>
-                <a:ea typeface="맑은 고딕 Semilight" panose="020B0502040204020203" pitchFamily="50" charset="-127"/>
-                <a:cs typeface="맑은 고딕 Semilight" panose="020B0502040204020203" pitchFamily="50" charset="-127"/>
-              </a:rPr>
-              <a:t>)</a:t>
-            </a:r>
-            <a:endParaRPr lang="ko-KR" altLang="en-US" sz="3200" b="1" dirty="0">
-              <a:latin typeface="맑은 고딕 Semilight" panose="020B0502040204020203" pitchFamily="50" charset="-127"/>
-              <a:ea typeface="맑은 고딕 Semilight" panose="020B0502040204020203" pitchFamily="50" charset="-127"/>
-              <a:cs typeface="맑은 고딕 Semilight" panose="020B0502040204020203" pitchFamily="50" charset="-127"/>
-            </a:endParaRPr>
-          </a:p>
-        </p:txBody>
-      </p:sp>
-      <p:pic>
-        <p:nvPicPr>
-          <p:cNvPr id="5" name="Picture 2" descr="한 여자가 노트북 컴퓨터에 타이핑을 하고 있다">
-            <a:extLst>
-              <a:ext uri="{FF2B5EF4-FFF2-40B4-BE49-F238E27FC236}">
-                <a16:creationId xmlns:a16="http://schemas.microsoft.com/office/drawing/2014/main" id="{4B8922AC-7C9F-E372-9876-64EC093694A2}"/>
-              </a:ext>
-            </a:extLst>
-          </p:cNvPr>
-          <p:cNvPicPr>
-            <a:picLocks noChangeAspect="1" noChangeArrowheads="1"/>
-          </p:cNvPicPr>
-          <p:nvPr/>
-        </p:nvPicPr>
-        <p:blipFill>
-          <a:blip r:embed="rId3" cstate="print">
-            <a:extLst>
-              <a:ext uri="{28A0092B-C50C-407E-A947-70E740481C1C}">
-                <a14:useLocalDpi xmlns:a14="http://schemas.microsoft.com/office/drawing/2010/main" val="0"/>
-              </a:ext>
-            </a:extLst>
-          </a:blip>
-          <a:srcRect/>
-          <a:stretch>
-            <a:fillRect/>
-          </a:stretch>
-        </p:blipFill>
-        <p:spPr bwMode="auto">
-          <a:xfrm>
-            <a:off x="9869489" y="66676"/>
-            <a:ext cx="2152650" cy="1424329"/>
-          </a:xfrm>
-          <a:prstGeom prst="rect">
-            <a:avLst/>
-          </a:prstGeom>
-          <a:noFill/>
-          <a:extLst>
-            <a:ext uri="{909E8E84-426E-40DD-AFC4-6F175D3DCCD1}">
-              <a14:hiddenFill xmlns:a14="http://schemas.microsoft.com/office/drawing/2010/main">
-                <a:solidFill>
-                  <a:srgbClr val="FFFFFF"/>
-                </a:solidFill>
-              </a14:hiddenFill>
-            </a:ext>
-          </a:extLst>
-        </p:spPr>
-      </p:pic>
-    </p:spTree>
-    <p:extLst>
-      <p:ext uri="{BB962C8B-B14F-4D97-AF65-F5344CB8AC3E}">
-        <p14:creationId xmlns:p14="http://schemas.microsoft.com/office/powerpoint/2010/main" val="817717"/>
-      </p:ext>
-    </p:extLst>
-  </p:cSld>
-  <p:clrMapOvr>
-    <a:masterClrMapping/>
-  </p:clrMapOvr>
-  <mc:AlternateContent xmlns:mc="http://schemas.openxmlformats.org/markup-compatibility/2006" xmlns:p14="http://schemas.microsoft.com/office/powerpoint/2010/main">
-    <mc:Choice Requires="p14">
-      <p:transition spd="med" p14:dur="700">
-        <p:fade/>
-      </p:transition>
-    </mc:Choice>
-    <mc:Fallback xmlns="">
-      <p:transition spd="med">
-        <p:fade/>
-      </p:transition>
-    </mc:Fallback>
-  </mc:AlternateContent>
-</p:sld>
-</file>
-
-<file path=ppt/slides/slide32.xml><?xml version="1.0" encoding="utf-8"?>
-<p:sld xmlns:a="http://schemas.openxmlformats.org/drawingml/2006/main" xmlns:r="http://schemas.openxmlformats.org/officeDocument/2006/relationships" xmlns:p="http://schemas.openxmlformats.org/presentationml/2006/main">
-  <p:cSld>
-    <p:spTree>
-      <p:nvGrpSpPr>
-        <p:cNvPr id="1" name="">
-          <a:extLst>
-            <a:ext uri="{FF2B5EF4-FFF2-40B4-BE49-F238E27FC236}">
-              <a16:creationId xmlns:a16="http://schemas.microsoft.com/office/drawing/2014/main" id="{426D3382-3F3B-FBCB-16B9-54596A299284}"/>
-            </a:ext>
-          </a:extLst>
-        </p:cNvPr>
-        <p:cNvGrpSpPr/>
-        <p:nvPr/>
-      </p:nvGrpSpPr>
-      <p:grpSpPr>
-        <a:xfrm>
-          <a:off x="0" y="0"/>
-          <a:ext cx="0" cy="0"/>
-          <a:chOff x="0" y="0"/>
-          <a:chExt cx="0" cy="0"/>
-        </a:xfrm>
-      </p:grpSpPr>
-      <p:sp>
-        <p:nvSpPr>
-          <p:cNvPr id="8" name="직사각형 7">
-            <a:extLst>
-              <a:ext uri="{FF2B5EF4-FFF2-40B4-BE49-F238E27FC236}">
-                <a16:creationId xmlns:a16="http://schemas.microsoft.com/office/drawing/2014/main" id="{81978B95-8D74-4C32-41B7-E23FC5CAD023}"/>
-              </a:ext>
-            </a:extLst>
-          </p:cNvPr>
-          <p:cNvSpPr/>
-          <p:nvPr/>
-        </p:nvSpPr>
-        <p:spPr>
-          <a:xfrm>
-            <a:off x="1127448" y="3967981"/>
-            <a:ext cx="4749534" cy="584622"/>
-          </a:xfrm>
-          <a:prstGeom prst="rect">
-            <a:avLst/>
-          </a:prstGeom>
-          <a:solidFill>
-            <a:schemeClr val="bg1">
-              <a:lumMod val="85000"/>
-            </a:schemeClr>
-          </a:solidFill>
-          <a:ln>
-            <a:noFill/>
-          </a:ln>
-        </p:spPr>
-        <p:style>
-          <a:lnRef idx="2">
-            <a:schemeClr val="accent1">
-              <a:shade val="15000"/>
-            </a:schemeClr>
-          </a:lnRef>
-          <a:fillRef idx="1">
-            <a:schemeClr val="accent1"/>
-          </a:fillRef>
-          <a:effectRef idx="0">
-            <a:schemeClr val="accent1"/>
-          </a:effectRef>
-          <a:fontRef idx="minor">
-            <a:schemeClr val="lt1"/>
-          </a:fontRef>
-        </p:style>
-        <p:txBody>
-          <a:bodyPr rtlCol="0" anchor="ctr"/>
-          <a:lstStyle/>
-          <a:p>
-            <a:pPr algn="ctr"/>
-            <a:endParaRPr lang="ko-KR" altLang="en-US" sz="1799" dirty="0"/>
-          </a:p>
-        </p:txBody>
-      </p:sp>
-      <p:sp>
-        <p:nvSpPr>
-          <p:cNvPr id="13" name="TextBox 12">
-            <a:extLst>
-              <a:ext uri="{FF2B5EF4-FFF2-40B4-BE49-F238E27FC236}">
-                <a16:creationId xmlns:a16="http://schemas.microsoft.com/office/drawing/2014/main" id="{F7DE2234-A841-2467-5318-244743AA17A7}"/>
-              </a:ext>
-            </a:extLst>
-          </p:cNvPr>
-          <p:cNvSpPr txBox="1"/>
-          <p:nvPr/>
-        </p:nvSpPr>
-        <p:spPr>
-          <a:xfrm>
-            <a:off x="1337468" y="1428986"/>
-            <a:ext cx="8435182" cy="3606757"/>
-          </a:xfrm>
-          <a:prstGeom prst="rect">
-            <a:avLst/>
-          </a:prstGeom>
-          <a:noFill/>
-        </p:spPr>
-        <p:txBody>
-          <a:bodyPr wrap="square" rtlCol="0">
-            <a:spAutoFit/>
-          </a:bodyPr>
-          <a:lstStyle/>
-          <a:p>
-            <a:pPr marL="514196" indent="-514196">
-              <a:lnSpc>
-                <a:spcPct val="150000"/>
-              </a:lnSpc>
-              <a:buAutoNum type="arabicPeriod"/>
-            </a:pPr>
-            <a:r>
-              <a:rPr lang="en-US" altLang="ko-KR" sz="2400" dirty="0">
-                <a:latin typeface="MS PGothic" panose="020B0600070205080204" pitchFamily="34" charset="-128"/>
-                <a:ea typeface="MS PGothic" panose="020B0600070205080204" pitchFamily="34" charset="-128"/>
-                <a:cs typeface="Times New Roman" panose="02020603050405020304" pitchFamily="18" charset="0"/>
-              </a:rPr>
-              <a:t>Modeling</a:t>
-            </a:r>
-          </a:p>
-          <a:p>
-            <a:pPr marL="971396" lvl="1" indent="-514196">
-              <a:lnSpc>
-                <a:spcPct val="150000"/>
-              </a:lnSpc>
-              <a:buAutoNum type="arabicPeriod"/>
-            </a:pPr>
-            <a:r>
-              <a:rPr lang="en-US" altLang="ko-KR" sz="2000" dirty="0">
-                <a:latin typeface="MS PGothic" panose="020B0600070205080204" pitchFamily="34" charset="-128"/>
-                <a:ea typeface="MS PGothic" panose="020B0600070205080204" pitchFamily="34" charset="-128"/>
-                <a:cs typeface="Times New Roman" panose="02020603050405020304" pitchFamily="18" charset="0"/>
-              </a:rPr>
-              <a:t>derivative function</a:t>
-            </a:r>
-          </a:p>
-          <a:p>
-            <a:pPr marL="971396" lvl="1" indent="-514196">
-              <a:lnSpc>
-                <a:spcPct val="150000"/>
-              </a:lnSpc>
-              <a:buAutoNum type="arabicPeriod"/>
-            </a:pPr>
-            <a:r>
-              <a:rPr lang="en-US" altLang="ko-KR" sz="2000" dirty="0">
-                <a:latin typeface="MS PGothic" panose="020B0600070205080204" pitchFamily="34" charset="-128"/>
-                <a:ea typeface="MS PGothic" panose="020B0600070205080204" pitchFamily="34" charset="-128"/>
-                <a:cs typeface="Times New Roman" panose="02020603050405020304" pitchFamily="18" charset="0"/>
-              </a:rPr>
-              <a:t>mathematical modeling</a:t>
-            </a:r>
-          </a:p>
-          <a:p>
-            <a:pPr marL="971396" lvl="1" indent="-514196">
-              <a:lnSpc>
-                <a:spcPct val="150000"/>
-              </a:lnSpc>
-              <a:buAutoNum type="arabicPeriod"/>
-            </a:pPr>
-            <a:r>
-              <a:rPr lang="en-US" altLang="ko-KR" sz="2000" dirty="0">
-                <a:latin typeface="MS PGothic" panose="020B0600070205080204" pitchFamily="34" charset="-128"/>
-                <a:ea typeface="MS PGothic" panose="020B0600070205080204" pitchFamily="34" charset="-128"/>
-                <a:cs typeface="Times New Roman" panose="02020603050405020304" pitchFamily="18" charset="0"/>
-              </a:rPr>
-              <a:t>interest compound</a:t>
-            </a:r>
-          </a:p>
-          <a:p>
-            <a:pPr marL="514196" indent="-514196">
-              <a:lnSpc>
-                <a:spcPct val="150000"/>
-              </a:lnSpc>
-              <a:buAutoNum type="arabicPeriod"/>
-            </a:pPr>
-            <a:r>
-              <a:rPr lang="en-US" altLang="ko-KR" sz="2400" dirty="0">
-                <a:latin typeface="MS PGothic" panose="020B0600070205080204" pitchFamily="34" charset="-128"/>
-                <a:ea typeface="MS PGothic" panose="020B0600070205080204" pitchFamily="34" charset="-128"/>
-                <a:cs typeface="Times New Roman" panose="02020603050405020304" pitchFamily="18" charset="0"/>
-              </a:rPr>
-              <a:t>Montecarlo Simulation</a:t>
-            </a:r>
-          </a:p>
-          <a:p>
-            <a:pPr marL="514196" indent="-514196">
-              <a:lnSpc>
-                <a:spcPct val="150000"/>
-              </a:lnSpc>
-              <a:buAutoNum type="arabicPeriod"/>
-            </a:pPr>
-            <a:r>
-              <a:rPr lang="en-US" altLang="ko-KR" sz="2400" dirty="0">
-                <a:latin typeface="MS PGothic" panose="020B0600070205080204" pitchFamily="34" charset="-128"/>
-                <a:ea typeface="MS PGothic" panose="020B0600070205080204" pitchFamily="34" charset="-128"/>
-                <a:cs typeface="Times New Roman" panose="02020603050405020304" pitchFamily="18" charset="0"/>
-              </a:rPr>
-              <a:t>Linear Programing</a:t>
-            </a:r>
-          </a:p>
-          <a:p>
-            <a:pPr marL="514196" indent="-514196">
-              <a:lnSpc>
-                <a:spcPct val="150000"/>
-              </a:lnSpc>
-              <a:buAutoNum type="arabicPeriod"/>
-            </a:pPr>
-            <a:r>
-              <a:rPr lang="en-US" altLang="ko-KR" sz="2400" dirty="0">
-                <a:latin typeface="MS PGothic" panose="020B0600070205080204" pitchFamily="34" charset="-128"/>
-                <a:ea typeface="MS PGothic" panose="020B0600070205080204" pitchFamily="34" charset="-128"/>
-                <a:cs typeface="Times New Roman" panose="02020603050405020304" pitchFamily="18" charset="0"/>
-              </a:rPr>
-              <a:t>Genetic algorithm</a:t>
-            </a:r>
-          </a:p>
-        </p:txBody>
-      </p:sp>
-      <p:sp>
-        <p:nvSpPr>
-          <p:cNvPr id="3" name="TextBox 2">
-            <a:extLst>
-              <a:ext uri="{FF2B5EF4-FFF2-40B4-BE49-F238E27FC236}">
-                <a16:creationId xmlns:a16="http://schemas.microsoft.com/office/drawing/2014/main" id="{EA9DD49A-7EEB-6C92-C5D7-5D88A5BA9409}"/>
-              </a:ext>
-            </a:extLst>
-          </p:cNvPr>
-          <p:cNvSpPr txBox="1"/>
-          <p:nvPr/>
-        </p:nvSpPr>
-        <p:spPr>
-          <a:xfrm>
-            <a:off x="1337470" y="710574"/>
-            <a:ext cx="2603977" cy="584623"/>
-          </a:xfrm>
-          <a:prstGeom prst="rect">
-            <a:avLst/>
-          </a:prstGeom>
-          <a:noFill/>
-        </p:spPr>
-        <p:txBody>
-          <a:bodyPr wrap="square">
-            <a:spAutoFit/>
-          </a:bodyPr>
-          <a:lstStyle/>
-          <a:p>
-            <a:r>
-              <a:rPr lang="ko-KR" altLang="en-US" sz="3199" b="1" dirty="0">
-                <a:latin typeface="한컴 말랑말랑 Bold" panose="020F0803000000000000" pitchFamily="50" charset="-127"/>
-                <a:ea typeface="한컴 말랑말랑 Bold" panose="020F0803000000000000" pitchFamily="50" charset="-127"/>
-              </a:rPr>
-              <a:t>목차</a:t>
-            </a:r>
-            <a:endParaRPr lang="ko-KR" altLang="en-US" sz="3199" dirty="0"/>
-          </a:p>
-        </p:txBody>
-      </p:sp>
-    </p:spTree>
-    <p:extLst>
-      <p:ext uri="{BB962C8B-B14F-4D97-AF65-F5344CB8AC3E}">
-        <p14:creationId xmlns:p14="http://schemas.microsoft.com/office/powerpoint/2010/main" val="2869004681"/>
       </p:ext>
     </p:extLst>
   </p:cSld>
